--- a/Section 3/Go streams and DBS.pptx
+++ b/Section 3/Go streams and DBS.pptx
@@ -5,13 +5,16 @@
     <p:sldMasterId id="2147483648" r:id="rId1"/>
   </p:sldMasterIdLst>
   <p:notesMasterIdLst>
-    <p:notesMasterId r:id="rId6"/>
+    <p:notesMasterId r:id="rId9"/>
   </p:notesMasterIdLst>
   <p:sldIdLst>
     <p:sldId id="256" r:id="rId2"/>
     <p:sldId id="350" r:id="rId3"/>
     <p:sldId id="360" r:id="rId4"/>
-    <p:sldId id="361" r:id="rId5"/>
+    <p:sldId id="362" r:id="rId5"/>
+    <p:sldId id="361" r:id="rId6"/>
+    <p:sldId id="363" r:id="rId7"/>
+    <p:sldId id="364" r:id="rId8"/>
   </p:sldIdLst>
   <p:sldSz cx="12192000" cy="6858000"/>
   <p:notesSz cx="6858000" cy="9144000"/>
@@ -118,6 +121,174 @@
 </p:presentation>
 </file>
 
+<file path=ppt/ink/ink1.xml><?xml version="1.0" encoding="utf-8"?>
+<inkml:ink xmlns:inkml="http://www.w3.org/2003/InkML">
+  <inkml:definitions>
+    <inkml:context xml:id="ctx0">
+      <inkml:inkSource xml:id="inkSrc0">
+        <inkml:traceFormat>
+          <inkml:channel name="X" type="integer" min="-2.14748E9" max="2.14748E9" units="cm"/>
+          <inkml:channel name="Y" type="integer" min="-2.14748E9" max="2.14748E9" units="cm"/>
+          <inkml:channel name="F" type="integer" max="32767" units="dev"/>
+        </inkml:traceFormat>
+        <inkml:channelProperties>
+          <inkml:channelProperty channel="X" name="resolution" value="1000" units="1/cm"/>
+          <inkml:channelProperty channel="Y" name="resolution" value="1000" units="1/cm"/>
+          <inkml:channelProperty channel="F" name="resolution" value="0" units="1/dev"/>
+        </inkml:channelProperties>
+      </inkml:inkSource>
+      <inkml:timestamp xml:id="ts0" timeString="2026-03-02T05:41:14.301"/>
+    </inkml:context>
+    <inkml:brush xml:id="br0">
+      <inkml:brushProperty name="width" value="0.10583" units="cm"/>
+      <inkml:brushProperty name="height" value="0.10583" units="cm"/>
+      <inkml:brushProperty name="color" value="#FF0000"/>
+    </inkml:brush>
+  </inkml:definitions>
+  <inkml:trace contextRef="#ctx0" brushRef="#br0">0 0 24575,'9'0'0,"0"0"0,0 1 0,0 0 0,-1 0 0,11 3 0,-15-3 0,0 1 0,0 0 0,-1 0 0,1 0 0,-1 0 0,0 0 0,1 1 0,-1-1 0,0 1 0,0 0 0,-1 0 0,1 0 0,4 6 0,3 9 0,0-1 0,-1 2 0,-1-1 0,10 32 0,15 82 0,-29-118 0,13 69 0,20 78 0,-28-131 0,2 0 0,0 0 0,20 34 0,-12-29 0,11 19 0,38 55 0,-51-90 0,0 0 0,2-2 0,0 0 0,38 27 0,5 3 0,-40-27 0,0-2 0,1 0 0,1-2 0,0-1 0,1 0 0,1-2 0,30 11 0,499 118 0,-410-100 0,-29-6 0,-43-17 0,6 3 0,120 17 0,102-16 0,-240-21 0,97-1 0,-129-3 0,0 0 0,0-2 0,33-9 0,-55 11 0,1-1 0,-1 0 0,0-1 0,-1 0 0,1 0 0,9-7 0,-10 6 0,-1 1 0,1 0 0,1 0 0,-1 1 0,1 0 0,11-5 0,-2 5 0,-1 0 0,1 1 0,0 1 0,0 0 0,0 1 0,0 1 0,-1 0 0,18 5 0,17 5 0,56 21 0,-46-13 0,-22-10 0,1-2 0,-1-1 0,58 0 0,27 4 0,-25 4 0,180 47 0,-252-54 0,0-2 0,0-1 0,1-2 0,-1 0 0,28-2 0,26 1 0,-73 0 15,-1 1-1,1-1 0,-1 1 1,1 0-1,-1 1 1,0-1-1,0 1 0,8 6 1,30 11-1510,-20-14-5331</inkml:trace>
+</inkml:ink>
+</file>
+
+<file path=ppt/ink/ink2.xml><?xml version="1.0" encoding="utf-8"?>
+<inkml:ink xmlns:inkml="http://www.w3.org/2003/InkML">
+  <inkml:definitions>
+    <inkml:context xml:id="ctx0">
+      <inkml:inkSource xml:id="inkSrc0">
+        <inkml:traceFormat>
+          <inkml:channel name="X" type="integer" min="-2.14748E9" max="2.14748E9" units="cm"/>
+          <inkml:channel name="Y" type="integer" min="-2.14748E9" max="2.14748E9" units="cm"/>
+          <inkml:channel name="F" type="integer" max="32767" units="dev"/>
+        </inkml:traceFormat>
+        <inkml:channelProperties>
+          <inkml:channelProperty channel="X" name="resolution" value="1000" units="1/cm"/>
+          <inkml:channelProperty channel="Y" name="resolution" value="1000" units="1/cm"/>
+          <inkml:channelProperty channel="F" name="resolution" value="0" units="1/dev"/>
+        </inkml:channelProperties>
+      </inkml:inkSource>
+      <inkml:timestamp xml:id="ts0" timeString="2026-03-02T05:41:21.192"/>
+    </inkml:context>
+    <inkml:brush xml:id="br0">
+      <inkml:brushProperty name="width" value="0.05" units="cm"/>
+      <inkml:brushProperty name="height" value="0.05" units="cm"/>
+      <inkml:brushProperty name="color" value="#FF0000"/>
+    </inkml:brush>
+  </inkml:definitions>
+  <inkml:trace contextRef="#ctx0" brushRef="#br0">215 0 24575,'6'1'0,"0"0"0,0 0 0,0 1 0,0 0 0,0 0 0,0 0 0,-1 1 0,1 0 0,-1 0 0,0 0 0,0 1 0,0-1 0,0 1 0,0 0 0,-1 1 0,7 7 0,4 6 0,-1 1 0,0 0 0,10 22 0,11 17 0,33 64 0,-66-118 0,0 1 0,0 0 0,0 0 0,-1 0 0,0 0 0,0 0 0,0 0 0,0 0 0,-1 0 0,0 0 0,0 0 0,0 1 0,-1-1 0,0 0 0,0 0 0,0 0 0,-1 0 0,1 0 0,-1-1 0,0 1 0,0 0 0,-6 7 0,4-7 0,-1 0 0,1 0 0,-1-1 0,0 0 0,0 0 0,-1 0 0,1 0 0,-1-1 0,0 0 0,0 0 0,0-1 0,0 1 0,0-1 0,-1-1 0,1 1 0,-1-1 0,-11 1 0,-37 1 0,33-3 0,0 1 0,1 1 0,-1 1 0,1 1 0,0 1 0,-37 13 0,-27 26-1365,51-23-5461</inkml:trace>
+</inkml:ink>
+</file>
+
+<file path=ppt/ink/ink3.xml><?xml version="1.0" encoding="utf-8"?>
+<inkml:ink xmlns:inkml="http://www.w3.org/2003/InkML">
+  <inkml:definitions>
+    <inkml:context xml:id="ctx0">
+      <inkml:inkSource xml:id="inkSrc0">
+        <inkml:traceFormat>
+          <inkml:channel name="X" type="integer" min="-2.14748E9" max="2.14748E9" units="cm"/>
+          <inkml:channel name="Y" type="integer" min="-2.14748E9" max="2.14748E9" units="cm"/>
+          <inkml:channel name="F" type="integer" max="32767" units="dev"/>
+        </inkml:traceFormat>
+        <inkml:channelProperties>
+          <inkml:channelProperty channel="X" name="resolution" value="1000" units="1/cm"/>
+          <inkml:channelProperty channel="Y" name="resolution" value="1000" units="1/cm"/>
+          <inkml:channelProperty channel="F" name="resolution" value="0" units="1/dev"/>
+        </inkml:channelProperties>
+      </inkml:inkSource>
+      <inkml:timestamp xml:id="ts0" timeString="2026-03-02T05:41:32.015"/>
+    </inkml:context>
+    <inkml:brush xml:id="br0">
+      <inkml:brushProperty name="width" value="0.05" units="cm"/>
+      <inkml:brushProperty name="height" value="0.05" units="cm"/>
+      <inkml:brushProperty name="color" value="#E71224"/>
+    </inkml:brush>
+  </inkml:definitions>
+  <inkml:trace contextRef="#ctx0" brushRef="#br0">1 0 24575,'0'5'-8191</inkml:trace>
+</inkml:ink>
+</file>
+
+<file path=ppt/ink/ink4.xml><?xml version="1.0" encoding="utf-8"?>
+<inkml:ink xmlns:inkml="http://www.w3.org/2003/InkML">
+  <inkml:definitions>
+    <inkml:context xml:id="ctx0">
+      <inkml:inkSource xml:id="inkSrc0">
+        <inkml:traceFormat>
+          <inkml:channel name="X" type="integer" min="-2.14748E9" max="2.14748E9" units="cm"/>
+          <inkml:channel name="Y" type="integer" min="-2.14748E9" max="2.14748E9" units="cm"/>
+          <inkml:channel name="F" type="integer" max="32767" units="dev"/>
+        </inkml:traceFormat>
+        <inkml:channelProperties>
+          <inkml:channelProperty channel="X" name="resolution" value="1000" units="1/cm"/>
+          <inkml:channelProperty channel="Y" name="resolution" value="1000" units="1/cm"/>
+          <inkml:channelProperty channel="F" name="resolution" value="0" units="1/dev"/>
+        </inkml:channelProperties>
+      </inkml:inkSource>
+      <inkml:timestamp xml:id="ts0" timeString="2026-03-02T05:49:46.942"/>
+    </inkml:context>
+    <inkml:brush xml:id="br0">
+      <inkml:brushProperty name="width" value="0.05" units="cm"/>
+      <inkml:brushProperty name="height" value="0.05" units="cm"/>
+      <inkml:brushProperty name="color" value="#E71224"/>
+    </inkml:brush>
+  </inkml:definitions>
+  <inkml:trace contextRef="#ctx0" brushRef="#br0">0 1901 24575,'0'0'0,"0"0"0,0 0 0,0 1 0,0-1 0,0 0 0,0 0 0,0 0 0,0 1 0,0-1 0,0 0 0,0 0 0,0 0 0,0 0 0,0 1 0,0-1 0,1 0 0,-1 0 0,0 0 0,0 0 0,0 0 0,0 1 0,0-1 0,0 0 0,0 0 0,1 0 0,-1 0 0,0 0 0,0 0 0,0 1 0,0-1 0,1 0 0,-1 0 0,0 0 0,0 0 0,0 0 0,0 0 0,1 0 0,-1 0 0,0 0 0,0 0 0,0 0 0,0 0 0,1 0 0,-1 0 0,0 0 0,0 0 0,12-6 0,10-12 0,1-7 0,29-41 0,15-17 0,-54 70 0,0 0 0,1 0 0,0 1 0,26-15 0,-30 21 0,1 1 0,-1 0 0,1 0 0,1 2 0,-1-1 0,0 1 0,1 1 0,17-2 0,66-2 0,105-13 0,-161 12 0,119-14 0,-141 20 0,1 1 0,-1 1 0,0 0 0,0 1 0,0 1 0,0 1 0,17 6 0,19 13 0,10 5 0,-20-17 0,-1-1 0,1-2 0,0-2 0,1-2 0,54-2 0,239 11 0,-59 1 0,-44-14 0,340 16 0,-544-13 0,0 0 0,0-2 0,0-2 0,0 0 0,42-9 0,-22 2 0,0 3 0,1 2 0,86 5 0,-41 0 0,1013-2 0,-884 13 0,13 0 0,-222-13 0,0-1 0,-1-1 0,1 0 0,0-2 0,-1 1 0,1-2 0,-1 0 0,0-1 0,-1 0 0,0-2 0,0 1 0,0-2 0,-1 0 0,0 0 0,21-20 0,61-55 0,8-8 0,-89 78 0,-1-1 0,-1 0 0,0-1 0,-1-1 0,9-18 0,38-65 0,8-15 0,114-221 0,-162 305 0,-2 0 0,-1 0 0,-1-2 0,-2 0 0,10-44 0,-19 65 0,0 1 0,1 0 0,0 0 0,1 0 0,0 0 0,0 1 0,1 0 0,1 0 0,0 0 0,0 1 0,1 0 0,0 1 0,0-1 0,19-12 0,7-8 0,0-1 0,32-38 0,24-22 0,-52 54-84,-25 22-99,0 1 0,1 1 0,0 0 0,1 1 0,1 0 0,29-14 0,-20 16-6643</inkml:trace>
+</inkml:ink>
+</file>
+
+<file path=ppt/ink/ink5.xml><?xml version="1.0" encoding="utf-8"?>
+<inkml:ink xmlns:inkml="http://www.w3.org/2003/InkML">
+  <inkml:definitions>
+    <inkml:context xml:id="ctx0">
+      <inkml:inkSource xml:id="inkSrc0">
+        <inkml:traceFormat>
+          <inkml:channel name="X" type="integer" min="-2.14748E9" max="2.14748E9" units="cm"/>
+          <inkml:channel name="Y" type="integer" min="-2.14748E9" max="2.14748E9" units="cm"/>
+          <inkml:channel name="F" type="integer" max="32767" units="dev"/>
+        </inkml:traceFormat>
+        <inkml:channelProperties>
+          <inkml:channelProperty channel="X" name="resolution" value="1000" units="1/cm"/>
+          <inkml:channelProperty channel="Y" name="resolution" value="1000" units="1/cm"/>
+          <inkml:channelProperty channel="F" name="resolution" value="0" units="1/dev"/>
+        </inkml:channelProperties>
+      </inkml:inkSource>
+      <inkml:timestamp xml:id="ts0" timeString="2026-03-02T05:49:49.951"/>
+    </inkml:context>
+    <inkml:brush xml:id="br0">
+      <inkml:brushProperty name="width" value="0.05" units="cm"/>
+      <inkml:brushProperty name="height" value="0.05" units="cm"/>
+      <inkml:brushProperty name="color" value="#E71224"/>
+    </inkml:brush>
+  </inkml:definitions>
+  <inkml:trace contextRef="#ctx0" brushRef="#br0">0 1 24575,'0'1'0,"1"-1"0,-1 1 0,0 0 0,0-1 0,0 1 0,1 0 0,-1 0 0,0-1 0,1 1 0,-1 0 0,1-1 0,-1 1 0,1-1 0,-1 1 0,1-1 0,-1 1 0,1-1 0,-1 1 0,1-1 0,0 1 0,-1-1 0,1 0 0,0 1 0,-1-1 0,1 0 0,1 1 0,22 5 0,-13-4 0,23 10 0,-1 2 0,-1 2 0,0 0 0,-1 3 0,52 39 0,-76-52 0,-1 1 0,0 1 0,0-1 0,0 1 0,-1 0 0,0 0 0,3 9 0,7 9 0,-14-25-9,12 19-185,-1 0 1,0 1-1,-2 1 0,0-1 0,-2 1 1,8 30-1,-9-13-6632</inkml:trace>
+</inkml:ink>
+</file>
+
+<file path=ppt/ink/ink6.xml><?xml version="1.0" encoding="utf-8"?>
+<inkml:ink xmlns:inkml="http://www.w3.org/2003/InkML">
+  <inkml:definitions>
+    <inkml:context xml:id="ctx0">
+      <inkml:inkSource xml:id="inkSrc0">
+        <inkml:traceFormat>
+          <inkml:channel name="X" type="integer" min="-2.14748E9" max="2.14748E9" units="cm"/>
+          <inkml:channel name="Y" type="integer" min="-2.14748E9" max="2.14748E9" units="cm"/>
+          <inkml:channel name="F" type="integer" max="32767" units="dev"/>
+        </inkml:traceFormat>
+        <inkml:channelProperties>
+          <inkml:channelProperty channel="X" name="resolution" value="1000" units="1/cm"/>
+          <inkml:channelProperty channel="Y" name="resolution" value="1000" units="1/cm"/>
+          <inkml:channelProperty channel="F" name="resolution" value="0" units="1/dev"/>
+        </inkml:channelProperties>
+      </inkml:inkSource>
+      <inkml:timestamp xml:id="ts0" timeString="2026-03-02T05:41:32.015"/>
+    </inkml:context>
+    <inkml:brush xml:id="br0">
+      <inkml:brushProperty name="width" value="0.05" units="cm"/>
+      <inkml:brushProperty name="height" value="0.05" units="cm"/>
+      <inkml:brushProperty name="color" value="#E71224"/>
+    </inkml:brush>
+  </inkml:definitions>
+  <inkml:trace contextRef="#ctx0" brushRef="#br0">1 0 24575,'0'5'-8191</inkml:trace>
+</inkml:ink>
+</file>
+
 <file path=ppt/notesMasters/notesMaster1.xml><?xml version="1.0" encoding="utf-8"?>
 <p:notesMaster xmlns:a="http://schemas.openxmlformats.org/drawingml/2006/main" xmlns:r="http://schemas.openxmlformats.org/officeDocument/2006/relationships" xmlns:p="http://schemas.openxmlformats.org/presentationml/2006/main">
   <p:cSld>
@@ -200,7 +371,7 @@
           <a:p>
             <a:fld id="{2FE14760-2987-41FC-B6E1-A6F257AE46F6}" type="datetimeFigureOut">
               <a:rPr lang="en-US" smtClean="0"/>
-              <a:t>3/1/2026</a:t>
+              <a:t>3/2/2026</a:t>
             </a:fld>
             <a:endParaRPr lang="en-US"/>
           </a:p>
@@ -811,7 +982,7 @@
         <p:cNvPr id="1" name="">
           <a:extLst>
             <a:ext uri="{FF2B5EF4-FFF2-40B4-BE49-F238E27FC236}">
-              <a16:creationId xmlns:a16="http://schemas.microsoft.com/office/drawing/2014/main" id="{10A90F3C-256C-0995-82E0-765FEA00BA14}"/>
+              <a16:creationId xmlns:a16="http://schemas.microsoft.com/office/drawing/2014/main" id="{A89F4533-DA82-0491-7F2B-55FEDBE8A6B3}"/>
             </a:ext>
           </a:extLst>
         </p:cNvPr>
@@ -831,7 +1002,7 @@
           <p:cNvPr id="2" name="Slide Image Placeholder 1">
             <a:extLst>
               <a:ext uri="{FF2B5EF4-FFF2-40B4-BE49-F238E27FC236}">
-                <a16:creationId xmlns:a16="http://schemas.microsoft.com/office/drawing/2014/main" id="{B702AF3F-26F9-85E8-4230-F5976E4D2F87}"/>
+                <a16:creationId xmlns:a16="http://schemas.microsoft.com/office/drawing/2014/main" id="{B294E488-E9D9-7E73-E1B9-71CB72466EF3}"/>
               </a:ext>
             </a:extLst>
           </p:cNvPr>
@@ -849,7 +1020,7 @@
           <p:cNvPr id="3" name="Notes Placeholder 2">
             <a:extLst>
               <a:ext uri="{FF2B5EF4-FFF2-40B4-BE49-F238E27FC236}">
-                <a16:creationId xmlns:a16="http://schemas.microsoft.com/office/drawing/2014/main" id="{DD6AC3F2-A8E6-8425-ACB6-B62E0D161649}"/>
+                <a16:creationId xmlns:a16="http://schemas.microsoft.com/office/drawing/2014/main" id="{EE304EE5-D16A-E53B-2B01-1758EBDD60FF}"/>
               </a:ext>
             </a:extLst>
           </p:cNvPr>
@@ -874,7 +1045,7 @@
           <p:cNvPr id="4" name="Slide Number Placeholder 3">
             <a:extLst>
               <a:ext uri="{FF2B5EF4-FFF2-40B4-BE49-F238E27FC236}">
-                <a16:creationId xmlns:a16="http://schemas.microsoft.com/office/drawing/2014/main" id="{29C61E02-79B9-4FD7-15F5-B6E269BC55C6}"/>
+                <a16:creationId xmlns:a16="http://schemas.microsoft.com/office/drawing/2014/main" id="{6862CBD8-455F-3524-F00B-2D88C94ADEC5}"/>
               </a:ext>
             </a:extLst>
           </p:cNvPr>
@@ -961,7 +1132,511 @@
     </p:spTree>
     <p:extLst>
       <p:ext uri="{BB962C8B-B14F-4D97-AF65-F5344CB8AC3E}">
+        <p14:creationId xmlns:p14="http://schemas.microsoft.com/office/powerpoint/2010/main" val="3530833070"/>
+      </p:ext>
+    </p:extLst>
+  </p:cSld>
+  <p:clrMapOvr>
+    <a:masterClrMapping/>
+  </p:clrMapOvr>
+</p:notes>
+</file>
+
+<file path=ppt/notesSlides/notesSlide4.xml><?xml version="1.0" encoding="utf-8"?>
+<p:notes xmlns:a="http://schemas.openxmlformats.org/drawingml/2006/main" xmlns:r="http://schemas.openxmlformats.org/officeDocument/2006/relationships" xmlns:p="http://schemas.openxmlformats.org/presentationml/2006/main">
+  <p:cSld>
+    <p:spTree>
+      <p:nvGrpSpPr>
+        <p:cNvPr id="1" name="">
+          <a:extLst>
+            <a:ext uri="{FF2B5EF4-FFF2-40B4-BE49-F238E27FC236}">
+              <a16:creationId xmlns:a16="http://schemas.microsoft.com/office/drawing/2014/main" id="{10A90F3C-256C-0995-82E0-765FEA00BA14}"/>
+            </a:ext>
+          </a:extLst>
+        </p:cNvPr>
+        <p:cNvGrpSpPr/>
+        <p:nvPr/>
+      </p:nvGrpSpPr>
+      <p:grpSpPr>
+        <a:xfrm>
+          <a:off x="0" y="0"/>
+          <a:ext cx="0" cy="0"/>
+          <a:chOff x="0" y="0"/>
+          <a:chExt cx="0" cy="0"/>
+        </a:xfrm>
+      </p:grpSpPr>
+      <p:sp>
+        <p:nvSpPr>
+          <p:cNvPr id="2" name="Slide Image Placeholder 1">
+            <a:extLst>
+              <a:ext uri="{FF2B5EF4-FFF2-40B4-BE49-F238E27FC236}">
+                <a16:creationId xmlns:a16="http://schemas.microsoft.com/office/drawing/2014/main" id="{B702AF3F-26F9-85E8-4230-F5976E4D2F87}"/>
+              </a:ext>
+            </a:extLst>
+          </p:cNvPr>
+          <p:cNvSpPr>
+            <a:spLocks noGrp="1" noRot="1" noChangeAspect="1"/>
+          </p:cNvSpPr>
+          <p:nvPr>
+            <p:ph type="sldImg"/>
+          </p:nvPr>
+        </p:nvSpPr>
+        <p:spPr/>
+      </p:sp>
+      <p:sp>
+        <p:nvSpPr>
+          <p:cNvPr id="3" name="Notes Placeholder 2">
+            <a:extLst>
+              <a:ext uri="{FF2B5EF4-FFF2-40B4-BE49-F238E27FC236}">
+                <a16:creationId xmlns:a16="http://schemas.microsoft.com/office/drawing/2014/main" id="{DD6AC3F2-A8E6-8425-ACB6-B62E0D161649}"/>
+              </a:ext>
+            </a:extLst>
+          </p:cNvPr>
+          <p:cNvSpPr>
+            <a:spLocks noGrp="1"/>
+          </p:cNvSpPr>
+          <p:nvPr>
+            <p:ph type="body" idx="1"/>
+          </p:nvPr>
+        </p:nvSpPr>
+        <p:spPr/>
+        <p:txBody>
+          <a:bodyPr/>
+          <a:lstStyle/>
+          <a:p>
+            <a:endParaRPr lang="en-US" dirty="0"/>
+          </a:p>
+        </p:txBody>
+      </p:sp>
+      <p:sp>
+        <p:nvSpPr>
+          <p:cNvPr id="4" name="Slide Number Placeholder 3">
+            <a:extLst>
+              <a:ext uri="{FF2B5EF4-FFF2-40B4-BE49-F238E27FC236}">
+                <a16:creationId xmlns:a16="http://schemas.microsoft.com/office/drawing/2014/main" id="{29C61E02-79B9-4FD7-15F5-B6E269BC55C6}"/>
+              </a:ext>
+            </a:extLst>
+          </p:cNvPr>
+          <p:cNvSpPr>
+            <a:spLocks noGrp="1"/>
+          </p:cNvSpPr>
+          <p:nvPr>
+            <p:ph type="sldNum" sz="quarter" idx="5"/>
+          </p:nvPr>
+        </p:nvSpPr>
+        <p:spPr/>
+        <p:txBody>
+          <a:bodyPr/>
+          <a:lstStyle/>
+          <a:p>
+            <a:pPr marL="0" marR="0" lvl="0" indent="0" algn="r" defTabSz="914400" rtl="0" eaLnBrk="1" fontAlgn="auto" latinLnBrk="0" hangingPunct="1">
+              <a:lnSpc>
+                <a:spcPct val="100000"/>
+              </a:lnSpc>
+              <a:spcBef>
+                <a:spcPts val="0"/>
+              </a:spcBef>
+              <a:spcAft>
+                <a:spcPts val="0"/>
+              </a:spcAft>
+              <a:buClrTx/>
+              <a:buSzTx/>
+              <a:buFontTx/>
+              <a:buNone/>
+              <a:tabLst/>
+              <a:defRPr/>
+            </a:pPr>
+            <a:fld id="{092CD1D2-9E42-4E1F-B86C-5AF6F74F6041}" type="slidenum">
+              <a:rPr kumimoji="0" lang="en-US" sz="1200" b="0" i="0" u="none" strike="noStrike" kern="1200" cap="none" spc="0" normalizeH="0" baseline="0" noProof="0" smtClean="0">
+                <a:ln>
+                  <a:noFill/>
+                </a:ln>
+                <a:solidFill>
+                  <a:prstClr val="black"/>
+                </a:solidFill>
+                <a:effectLst/>
+                <a:uLnTx/>
+                <a:uFillTx/>
+                <a:latin typeface="Aptos" panose="02110004020202020204"/>
+                <a:ea typeface="+mn-ea"/>
+                <a:cs typeface="+mn-cs"/>
+              </a:rPr>
+              <a:pPr marL="0" marR="0" lvl="0" indent="0" algn="r" defTabSz="914400" rtl="0" eaLnBrk="1" fontAlgn="auto" latinLnBrk="0" hangingPunct="1">
+                <a:lnSpc>
+                  <a:spcPct val="100000"/>
+                </a:lnSpc>
+                <a:spcBef>
+                  <a:spcPts val="0"/>
+                </a:spcBef>
+                <a:spcAft>
+                  <a:spcPts val="0"/>
+                </a:spcAft>
+                <a:buClrTx/>
+                <a:buSzTx/>
+                <a:buFontTx/>
+                <a:buNone/>
+                <a:tabLst/>
+                <a:defRPr/>
+              </a:pPr>
+              <a:t>5</a:t>
+            </a:fld>
+            <a:endParaRPr kumimoji="0" lang="en-US" sz="1200" b="0" i="0" u="none" strike="noStrike" kern="1200" cap="none" spc="0" normalizeH="0" baseline="0" noProof="0">
+              <a:ln>
+                <a:noFill/>
+              </a:ln>
+              <a:solidFill>
+                <a:prstClr val="black"/>
+              </a:solidFill>
+              <a:effectLst/>
+              <a:uLnTx/>
+              <a:uFillTx/>
+              <a:latin typeface="Aptos" panose="02110004020202020204"/>
+              <a:ea typeface="+mn-ea"/>
+              <a:cs typeface="+mn-cs"/>
+            </a:endParaRPr>
+          </a:p>
+        </p:txBody>
+      </p:sp>
+    </p:spTree>
+    <p:extLst>
+      <p:ext uri="{BB962C8B-B14F-4D97-AF65-F5344CB8AC3E}">
         <p14:creationId xmlns:p14="http://schemas.microsoft.com/office/powerpoint/2010/main" val="2545730930"/>
+      </p:ext>
+    </p:extLst>
+  </p:cSld>
+  <p:clrMapOvr>
+    <a:masterClrMapping/>
+  </p:clrMapOvr>
+</p:notes>
+</file>
+
+<file path=ppt/notesSlides/notesSlide5.xml><?xml version="1.0" encoding="utf-8"?>
+<p:notes xmlns:a="http://schemas.openxmlformats.org/drawingml/2006/main" xmlns:r="http://schemas.openxmlformats.org/officeDocument/2006/relationships" xmlns:p="http://schemas.openxmlformats.org/presentationml/2006/main">
+  <p:cSld>
+    <p:spTree>
+      <p:nvGrpSpPr>
+        <p:cNvPr id="1" name="">
+          <a:extLst>
+            <a:ext uri="{FF2B5EF4-FFF2-40B4-BE49-F238E27FC236}">
+              <a16:creationId xmlns:a16="http://schemas.microsoft.com/office/drawing/2014/main" id="{BF845175-5880-46AB-FD81-96BCE9D2ABFC}"/>
+            </a:ext>
+          </a:extLst>
+        </p:cNvPr>
+        <p:cNvGrpSpPr/>
+        <p:nvPr/>
+      </p:nvGrpSpPr>
+      <p:grpSpPr>
+        <a:xfrm>
+          <a:off x="0" y="0"/>
+          <a:ext cx="0" cy="0"/>
+          <a:chOff x="0" y="0"/>
+          <a:chExt cx="0" cy="0"/>
+        </a:xfrm>
+      </p:grpSpPr>
+      <p:sp>
+        <p:nvSpPr>
+          <p:cNvPr id="2" name="Slide Image Placeholder 1">
+            <a:extLst>
+              <a:ext uri="{FF2B5EF4-FFF2-40B4-BE49-F238E27FC236}">
+                <a16:creationId xmlns:a16="http://schemas.microsoft.com/office/drawing/2014/main" id="{1FAA3C5F-0065-36C5-F864-9FE9D913BA88}"/>
+              </a:ext>
+            </a:extLst>
+          </p:cNvPr>
+          <p:cNvSpPr>
+            <a:spLocks noGrp="1" noRot="1" noChangeAspect="1"/>
+          </p:cNvSpPr>
+          <p:nvPr>
+            <p:ph type="sldImg"/>
+          </p:nvPr>
+        </p:nvSpPr>
+        <p:spPr/>
+      </p:sp>
+      <p:sp>
+        <p:nvSpPr>
+          <p:cNvPr id="3" name="Notes Placeholder 2">
+            <a:extLst>
+              <a:ext uri="{FF2B5EF4-FFF2-40B4-BE49-F238E27FC236}">
+                <a16:creationId xmlns:a16="http://schemas.microsoft.com/office/drawing/2014/main" id="{5F885DE3-5728-BBDB-8299-41BA12F6E62D}"/>
+              </a:ext>
+            </a:extLst>
+          </p:cNvPr>
+          <p:cNvSpPr>
+            <a:spLocks noGrp="1"/>
+          </p:cNvSpPr>
+          <p:nvPr>
+            <p:ph type="body" idx="1"/>
+          </p:nvPr>
+        </p:nvSpPr>
+        <p:spPr/>
+        <p:txBody>
+          <a:bodyPr/>
+          <a:lstStyle/>
+          <a:p>
+            <a:endParaRPr lang="en-US" dirty="0"/>
+          </a:p>
+        </p:txBody>
+      </p:sp>
+      <p:sp>
+        <p:nvSpPr>
+          <p:cNvPr id="4" name="Slide Number Placeholder 3">
+            <a:extLst>
+              <a:ext uri="{FF2B5EF4-FFF2-40B4-BE49-F238E27FC236}">
+                <a16:creationId xmlns:a16="http://schemas.microsoft.com/office/drawing/2014/main" id="{19F94A5E-4863-3DB2-DA5C-2CDC108C0712}"/>
+              </a:ext>
+            </a:extLst>
+          </p:cNvPr>
+          <p:cNvSpPr>
+            <a:spLocks noGrp="1"/>
+          </p:cNvSpPr>
+          <p:nvPr>
+            <p:ph type="sldNum" sz="quarter" idx="5"/>
+          </p:nvPr>
+        </p:nvSpPr>
+        <p:spPr/>
+        <p:txBody>
+          <a:bodyPr/>
+          <a:lstStyle/>
+          <a:p>
+            <a:pPr marL="0" marR="0" lvl="0" indent="0" algn="r" defTabSz="914400" rtl="0" eaLnBrk="1" fontAlgn="auto" latinLnBrk="0" hangingPunct="1">
+              <a:lnSpc>
+                <a:spcPct val="100000"/>
+              </a:lnSpc>
+              <a:spcBef>
+                <a:spcPts val="0"/>
+              </a:spcBef>
+              <a:spcAft>
+                <a:spcPts val="0"/>
+              </a:spcAft>
+              <a:buClrTx/>
+              <a:buSzTx/>
+              <a:buFontTx/>
+              <a:buNone/>
+              <a:tabLst/>
+              <a:defRPr/>
+            </a:pPr>
+            <a:fld id="{092CD1D2-9E42-4E1F-B86C-5AF6F74F6041}" type="slidenum">
+              <a:rPr kumimoji="0" lang="en-US" sz="1200" b="0" i="0" u="none" strike="noStrike" kern="1200" cap="none" spc="0" normalizeH="0" baseline="0" noProof="0" smtClean="0">
+                <a:ln>
+                  <a:noFill/>
+                </a:ln>
+                <a:solidFill>
+                  <a:prstClr val="black"/>
+                </a:solidFill>
+                <a:effectLst/>
+                <a:uLnTx/>
+                <a:uFillTx/>
+                <a:latin typeface="Aptos" panose="02110004020202020204"/>
+                <a:ea typeface="+mn-ea"/>
+                <a:cs typeface="+mn-cs"/>
+              </a:rPr>
+              <a:pPr marL="0" marR="0" lvl="0" indent="0" algn="r" defTabSz="914400" rtl="0" eaLnBrk="1" fontAlgn="auto" latinLnBrk="0" hangingPunct="1">
+                <a:lnSpc>
+                  <a:spcPct val="100000"/>
+                </a:lnSpc>
+                <a:spcBef>
+                  <a:spcPts val="0"/>
+                </a:spcBef>
+                <a:spcAft>
+                  <a:spcPts val="0"/>
+                </a:spcAft>
+                <a:buClrTx/>
+                <a:buSzTx/>
+                <a:buFontTx/>
+                <a:buNone/>
+                <a:tabLst/>
+                <a:defRPr/>
+              </a:pPr>
+              <a:t>6</a:t>
+            </a:fld>
+            <a:endParaRPr kumimoji="0" lang="en-US" sz="1200" b="0" i="0" u="none" strike="noStrike" kern="1200" cap="none" spc="0" normalizeH="0" baseline="0" noProof="0">
+              <a:ln>
+                <a:noFill/>
+              </a:ln>
+              <a:solidFill>
+                <a:prstClr val="black"/>
+              </a:solidFill>
+              <a:effectLst/>
+              <a:uLnTx/>
+              <a:uFillTx/>
+              <a:latin typeface="Aptos" panose="02110004020202020204"/>
+              <a:ea typeface="+mn-ea"/>
+              <a:cs typeface="+mn-cs"/>
+            </a:endParaRPr>
+          </a:p>
+        </p:txBody>
+      </p:sp>
+    </p:spTree>
+    <p:extLst>
+      <p:ext uri="{BB962C8B-B14F-4D97-AF65-F5344CB8AC3E}">
+        <p14:creationId xmlns:p14="http://schemas.microsoft.com/office/powerpoint/2010/main" val="3131811274"/>
+      </p:ext>
+    </p:extLst>
+  </p:cSld>
+  <p:clrMapOvr>
+    <a:masterClrMapping/>
+  </p:clrMapOvr>
+</p:notes>
+</file>
+
+<file path=ppt/notesSlides/notesSlide6.xml><?xml version="1.0" encoding="utf-8"?>
+<p:notes xmlns:a="http://schemas.openxmlformats.org/drawingml/2006/main" xmlns:r="http://schemas.openxmlformats.org/officeDocument/2006/relationships" xmlns:p="http://schemas.openxmlformats.org/presentationml/2006/main">
+  <p:cSld>
+    <p:spTree>
+      <p:nvGrpSpPr>
+        <p:cNvPr id="1" name="">
+          <a:extLst>
+            <a:ext uri="{FF2B5EF4-FFF2-40B4-BE49-F238E27FC236}">
+              <a16:creationId xmlns:a16="http://schemas.microsoft.com/office/drawing/2014/main" id="{C8AE917F-E2DD-0342-E9DC-E5228DFE76AC}"/>
+            </a:ext>
+          </a:extLst>
+        </p:cNvPr>
+        <p:cNvGrpSpPr/>
+        <p:nvPr/>
+      </p:nvGrpSpPr>
+      <p:grpSpPr>
+        <a:xfrm>
+          <a:off x="0" y="0"/>
+          <a:ext cx="0" cy="0"/>
+          <a:chOff x="0" y="0"/>
+          <a:chExt cx="0" cy="0"/>
+        </a:xfrm>
+      </p:grpSpPr>
+      <p:sp>
+        <p:nvSpPr>
+          <p:cNvPr id="2" name="Slide Image Placeholder 1">
+            <a:extLst>
+              <a:ext uri="{FF2B5EF4-FFF2-40B4-BE49-F238E27FC236}">
+                <a16:creationId xmlns:a16="http://schemas.microsoft.com/office/drawing/2014/main" id="{742E592D-09B0-57F3-B234-650F32930F90}"/>
+              </a:ext>
+            </a:extLst>
+          </p:cNvPr>
+          <p:cNvSpPr>
+            <a:spLocks noGrp="1" noRot="1" noChangeAspect="1"/>
+          </p:cNvSpPr>
+          <p:nvPr>
+            <p:ph type="sldImg"/>
+          </p:nvPr>
+        </p:nvSpPr>
+        <p:spPr/>
+      </p:sp>
+      <p:sp>
+        <p:nvSpPr>
+          <p:cNvPr id="3" name="Notes Placeholder 2">
+            <a:extLst>
+              <a:ext uri="{FF2B5EF4-FFF2-40B4-BE49-F238E27FC236}">
+                <a16:creationId xmlns:a16="http://schemas.microsoft.com/office/drawing/2014/main" id="{621EC0C0-DDBA-A0B6-70AC-C7D6D2A46BEC}"/>
+              </a:ext>
+            </a:extLst>
+          </p:cNvPr>
+          <p:cNvSpPr>
+            <a:spLocks noGrp="1"/>
+          </p:cNvSpPr>
+          <p:nvPr>
+            <p:ph type="body" idx="1"/>
+          </p:nvPr>
+        </p:nvSpPr>
+        <p:spPr/>
+        <p:txBody>
+          <a:bodyPr/>
+          <a:lstStyle/>
+          <a:p>
+            <a:endParaRPr lang="en-US" dirty="0"/>
+          </a:p>
+        </p:txBody>
+      </p:sp>
+      <p:sp>
+        <p:nvSpPr>
+          <p:cNvPr id="4" name="Slide Number Placeholder 3">
+            <a:extLst>
+              <a:ext uri="{FF2B5EF4-FFF2-40B4-BE49-F238E27FC236}">
+                <a16:creationId xmlns:a16="http://schemas.microsoft.com/office/drawing/2014/main" id="{6E8299CF-C7A9-62F3-2549-6BAF97305215}"/>
+              </a:ext>
+            </a:extLst>
+          </p:cNvPr>
+          <p:cNvSpPr>
+            <a:spLocks noGrp="1"/>
+          </p:cNvSpPr>
+          <p:nvPr>
+            <p:ph type="sldNum" sz="quarter" idx="5"/>
+          </p:nvPr>
+        </p:nvSpPr>
+        <p:spPr/>
+        <p:txBody>
+          <a:bodyPr/>
+          <a:lstStyle/>
+          <a:p>
+            <a:pPr marL="0" marR="0" lvl="0" indent="0" algn="r" defTabSz="914400" rtl="0" eaLnBrk="1" fontAlgn="auto" latinLnBrk="0" hangingPunct="1">
+              <a:lnSpc>
+                <a:spcPct val="100000"/>
+              </a:lnSpc>
+              <a:spcBef>
+                <a:spcPts val="0"/>
+              </a:spcBef>
+              <a:spcAft>
+                <a:spcPts val="0"/>
+              </a:spcAft>
+              <a:buClrTx/>
+              <a:buSzTx/>
+              <a:buFontTx/>
+              <a:buNone/>
+              <a:tabLst/>
+              <a:defRPr/>
+            </a:pPr>
+            <a:fld id="{092CD1D2-9E42-4E1F-B86C-5AF6F74F6041}" type="slidenum">
+              <a:rPr kumimoji="0" lang="en-US" sz="1200" b="0" i="0" u="none" strike="noStrike" kern="1200" cap="none" spc="0" normalizeH="0" baseline="0" noProof="0" smtClean="0">
+                <a:ln>
+                  <a:noFill/>
+                </a:ln>
+                <a:solidFill>
+                  <a:prstClr val="black"/>
+                </a:solidFill>
+                <a:effectLst/>
+                <a:uLnTx/>
+                <a:uFillTx/>
+                <a:latin typeface="Aptos" panose="02110004020202020204"/>
+                <a:ea typeface="+mn-ea"/>
+                <a:cs typeface="+mn-cs"/>
+              </a:rPr>
+              <a:pPr marL="0" marR="0" lvl="0" indent="0" algn="r" defTabSz="914400" rtl="0" eaLnBrk="1" fontAlgn="auto" latinLnBrk="0" hangingPunct="1">
+                <a:lnSpc>
+                  <a:spcPct val="100000"/>
+                </a:lnSpc>
+                <a:spcBef>
+                  <a:spcPts val="0"/>
+                </a:spcBef>
+                <a:spcAft>
+                  <a:spcPts val="0"/>
+                </a:spcAft>
+                <a:buClrTx/>
+                <a:buSzTx/>
+                <a:buFontTx/>
+                <a:buNone/>
+                <a:tabLst/>
+                <a:defRPr/>
+              </a:pPr>
+              <a:t>7</a:t>
+            </a:fld>
+            <a:endParaRPr kumimoji="0" lang="en-US" sz="1200" b="0" i="0" u="none" strike="noStrike" kern="1200" cap="none" spc="0" normalizeH="0" baseline="0" noProof="0">
+              <a:ln>
+                <a:noFill/>
+              </a:ln>
+              <a:solidFill>
+                <a:prstClr val="black"/>
+              </a:solidFill>
+              <a:effectLst/>
+              <a:uLnTx/>
+              <a:uFillTx/>
+              <a:latin typeface="Aptos" panose="02110004020202020204"/>
+              <a:ea typeface="+mn-ea"/>
+              <a:cs typeface="+mn-cs"/>
+            </a:endParaRPr>
+          </a:p>
+        </p:txBody>
+      </p:sp>
+    </p:spTree>
+    <p:extLst>
+      <p:ext uri="{BB962C8B-B14F-4D97-AF65-F5344CB8AC3E}">
+        <p14:creationId xmlns:p14="http://schemas.microsoft.com/office/powerpoint/2010/main" val="2391724740"/>
       </p:ext>
     </p:extLst>
   </p:cSld>
@@ -1118,7 +1793,7 @@
           <a:p>
             <a:fld id="{B0D925FC-16E2-4760-8BBA-129557D517F1}" type="datetimeFigureOut">
               <a:rPr lang="en-US" smtClean="0"/>
-              <a:t>3/1/2026</a:t>
+              <a:t>3/2/2026</a:t>
             </a:fld>
             <a:endParaRPr lang="en-US"/>
           </a:p>
@@ -1316,7 +1991,7 @@
           <a:p>
             <a:fld id="{B0D925FC-16E2-4760-8BBA-129557D517F1}" type="datetimeFigureOut">
               <a:rPr lang="en-US" smtClean="0"/>
-              <a:t>3/1/2026</a:t>
+              <a:t>3/2/2026</a:t>
             </a:fld>
             <a:endParaRPr lang="en-US"/>
           </a:p>
@@ -1524,7 +2199,7 @@
           <a:p>
             <a:fld id="{B0D925FC-16E2-4760-8BBA-129557D517F1}" type="datetimeFigureOut">
               <a:rPr lang="en-US" smtClean="0"/>
-              <a:t>3/1/2026</a:t>
+              <a:t>3/2/2026</a:t>
             </a:fld>
             <a:endParaRPr lang="en-US"/>
           </a:p>
@@ -1722,7 +2397,7 @@
           <a:p>
             <a:fld id="{B0D925FC-16E2-4760-8BBA-129557D517F1}" type="datetimeFigureOut">
               <a:rPr lang="en-US" smtClean="0"/>
-              <a:t>3/1/2026</a:t>
+              <a:t>3/2/2026</a:t>
             </a:fld>
             <a:endParaRPr lang="en-US"/>
           </a:p>
@@ -1997,7 +2672,7 @@
           <a:p>
             <a:fld id="{B0D925FC-16E2-4760-8BBA-129557D517F1}" type="datetimeFigureOut">
               <a:rPr lang="en-US" smtClean="0"/>
-              <a:t>3/1/2026</a:t>
+              <a:t>3/2/2026</a:t>
             </a:fld>
             <a:endParaRPr lang="en-US"/>
           </a:p>
@@ -2262,7 +2937,7 @@
           <a:p>
             <a:fld id="{B0D925FC-16E2-4760-8BBA-129557D517F1}" type="datetimeFigureOut">
               <a:rPr lang="en-US" smtClean="0"/>
-              <a:t>3/1/2026</a:t>
+              <a:t>3/2/2026</a:t>
             </a:fld>
             <a:endParaRPr lang="en-US"/>
           </a:p>
@@ -2674,7 +3349,7 @@
           <a:p>
             <a:fld id="{B0D925FC-16E2-4760-8BBA-129557D517F1}" type="datetimeFigureOut">
               <a:rPr lang="en-US" smtClean="0"/>
-              <a:t>3/1/2026</a:t>
+              <a:t>3/2/2026</a:t>
             </a:fld>
             <a:endParaRPr lang="en-US"/>
           </a:p>
@@ -2815,7 +3490,7 @@
           <a:p>
             <a:fld id="{B0D925FC-16E2-4760-8BBA-129557D517F1}" type="datetimeFigureOut">
               <a:rPr lang="en-US" smtClean="0"/>
-              <a:t>3/1/2026</a:t>
+              <a:t>3/2/2026</a:t>
             </a:fld>
             <a:endParaRPr lang="en-US"/>
           </a:p>
@@ -2928,7 +3603,7 @@
           <a:p>
             <a:fld id="{B0D925FC-16E2-4760-8BBA-129557D517F1}" type="datetimeFigureOut">
               <a:rPr lang="en-US" smtClean="0"/>
-              <a:t>3/1/2026</a:t>
+              <a:t>3/2/2026</a:t>
             </a:fld>
             <a:endParaRPr lang="en-US"/>
           </a:p>
@@ -3239,7 +3914,7 @@
           <a:p>
             <a:fld id="{B0D925FC-16E2-4760-8BBA-129557D517F1}" type="datetimeFigureOut">
               <a:rPr lang="en-US" smtClean="0"/>
-              <a:t>3/1/2026</a:t>
+              <a:t>3/2/2026</a:t>
             </a:fld>
             <a:endParaRPr lang="en-US"/>
           </a:p>
@@ -3527,7 +4202,7 @@
           <a:p>
             <a:fld id="{B0D925FC-16E2-4760-8BBA-129557D517F1}" type="datetimeFigureOut">
               <a:rPr lang="en-US" smtClean="0"/>
-              <a:t>3/1/2026</a:t>
+              <a:t>3/2/2026</a:t>
             </a:fld>
             <a:endParaRPr lang="en-US"/>
           </a:p>
@@ -3768,7 +4443,7 @@
           <a:p>
             <a:fld id="{B0D925FC-16E2-4760-8BBA-129557D517F1}" type="datetimeFigureOut">
               <a:rPr lang="en-US" smtClean="0"/>
-              <a:t>3/1/2026</a:t>
+              <a:t>3/2/2026</a:t>
             </a:fld>
             <a:endParaRPr lang="en-US"/>
           </a:p>
@@ -5498,6 +6173,155 @@
         <p:cNvPr id="1" name="">
           <a:extLst>
             <a:ext uri="{FF2B5EF4-FFF2-40B4-BE49-F238E27FC236}">
+              <a16:creationId xmlns:a16="http://schemas.microsoft.com/office/drawing/2014/main" id="{AC382350-E3AA-06D5-3852-8DE3790E978F}"/>
+            </a:ext>
+          </a:extLst>
+        </p:cNvPr>
+        <p:cNvGrpSpPr/>
+        <p:nvPr/>
+      </p:nvGrpSpPr>
+      <p:grpSpPr>
+        <a:xfrm>
+          <a:off x="0" y="0"/>
+          <a:ext cx="0" cy="0"/>
+          <a:chOff x="0" y="0"/>
+          <a:chExt cx="0" cy="0"/>
+        </a:xfrm>
+      </p:grpSpPr>
+      <p:sp>
+        <p:nvSpPr>
+          <p:cNvPr id="2" name="Title 1">
+            <a:extLst>
+              <a:ext uri="{FF2B5EF4-FFF2-40B4-BE49-F238E27FC236}">
+                <a16:creationId xmlns:a16="http://schemas.microsoft.com/office/drawing/2014/main" id="{FB3EE3E0-01E3-0ED2-4C79-FBB7BA9EBFE3}"/>
+              </a:ext>
+            </a:extLst>
+          </p:cNvPr>
+          <p:cNvSpPr>
+            <a:spLocks noGrp="1"/>
+          </p:cNvSpPr>
+          <p:nvPr>
+            <p:ph type="title"/>
+          </p:nvPr>
+        </p:nvSpPr>
+        <p:spPr>
+          <a:xfrm>
+            <a:off x="97834" y="0"/>
+            <a:ext cx="11996331" cy="1325563"/>
+          </a:xfrm>
+        </p:spPr>
+        <p:txBody>
+          <a:bodyPr>
+            <a:normAutofit/>
+          </a:bodyPr>
+          <a:lstStyle/>
+          <a:p>
+            <a:r>
+              <a:rPr lang="en-US" b="1" dirty="0">
+                <a:latin typeface="Times New Roman" panose="02020603050405020304" pitchFamily="18" charset="0"/>
+                <a:cs typeface="Times New Roman" panose="02020603050405020304" pitchFamily="18" charset="0"/>
+              </a:rPr>
+              <a:t>The Go Files (Open files and read line by line):</a:t>
+            </a:r>
+            <a:endParaRPr lang="en-US" sz="4200" b="1" dirty="0">
+              <a:latin typeface="Times New Roman" panose="02020603050405020304" pitchFamily="18" charset="0"/>
+              <a:cs typeface="Times New Roman" panose="02020603050405020304" pitchFamily="18" charset="0"/>
+            </a:endParaRPr>
+          </a:p>
+        </p:txBody>
+      </p:sp>
+      <p:pic>
+        <p:nvPicPr>
+          <p:cNvPr id="4" name="Picture 3">
+            <a:extLst>
+              <a:ext uri="{FF2B5EF4-FFF2-40B4-BE49-F238E27FC236}">
+                <a16:creationId xmlns:a16="http://schemas.microsoft.com/office/drawing/2014/main" id="{54FEFC97-80D7-94A0-FE6B-2D78667A58D9}"/>
+              </a:ext>
+            </a:extLst>
+          </p:cNvPr>
+          <p:cNvPicPr>
+            <a:picLocks noChangeAspect="1"/>
+          </p:cNvPicPr>
+          <p:nvPr/>
+        </p:nvPicPr>
+        <p:blipFill>
+          <a:blip r:embed="rId4"/>
+          <a:stretch>
+            <a:fillRect/>
+          </a:stretch>
+        </p:blipFill>
+        <p:spPr>
+          <a:xfrm>
+            <a:off x="1709893" y="1325563"/>
+            <a:ext cx="8772211" cy="5296301"/>
+          </a:xfrm>
+          <a:prstGeom prst="rect">
+            <a:avLst/>
+          </a:prstGeom>
+        </p:spPr>
+      </p:pic>
+    </p:spTree>
+    <p:custDataLst>
+      <p:tags r:id="rId1"/>
+    </p:custDataLst>
+    <p:extLst>
+      <p:ext uri="{BB962C8B-B14F-4D97-AF65-F5344CB8AC3E}">
+        <p14:creationId xmlns:p14="http://schemas.microsoft.com/office/powerpoint/2010/main" val="703790889"/>
+      </p:ext>
+    </p:extLst>
+  </p:cSld>
+  <p:clrMapOvr>
+    <a:masterClrMapping/>
+  </p:clrMapOvr>
+  <mc:AlternateContent xmlns:mc="http://schemas.openxmlformats.org/markup-compatibility/2006">
+    <mc:Choice xmlns:p14="http://schemas.microsoft.com/office/powerpoint/2010/main" Requires="p14">
+      <p:transition spd="slow" p14:dur="2000" advTm="207460"/>
+    </mc:Choice>
+    <mc:Fallback>
+      <p:transition spd="slow" advTm="207460"/>
+    </mc:Fallback>
+  </mc:AlternateContent>
+</p:sld>
+</file>
+
+<file path=ppt/slides/slide5.xml><?xml version="1.0" encoding="utf-8"?>
+<p:sld xmlns:a="http://schemas.openxmlformats.org/drawingml/2006/main" xmlns:r="http://schemas.openxmlformats.org/officeDocument/2006/relationships" xmlns:p="http://schemas.openxmlformats.org/presentationml/2006/main">
+  <p:cSld>
+    <p:bg>
+      <p:bgPr>
+        <a:gradFill>
+          <a:gsLst>
+            <a:gs pos="0">
+              <a:schemeClr val="bg1">
+                <a:lumMod val="95000"/>
+              </a:schemeClr>
+            </a:gs>
+            <a:gs pos="74000">
+              <a:schemeClr val="bg1">
+                <a:lumMod val="85000"/>
+              </a:schemeClr>
+            </a:gs>
+            <a:gs pos="83000">
+              <a:schemeClr val="bg1">
+                <a:lumMod val="75000"/>
+              </a:schemeClr>
+            </a:gs>
+            <a:gs pos="100000">
+              <a:schemeClr val="bg1">
+                <a:lumMod val="50000"/>
+              </a:schemeClr>
+            </a:gs>
+          </a:gsLst>
+          <a:lin ang="5400000" scaled="1"/>
+        </a:gradFill>
+        <a:effectLst/>
+      </p:bgPr>
+    </p:bg>
+    <p:spTree>
+      <p:nvGrpSpPr>
+        <p:cNvPr id="1" name="">
+          <a:extLst>
+            <a:ext uri="{FF2B5EF4-FFF2-40B4-BE49-F238E27FC236}">
               <a16:creationId xmlns:a16="http://schemas.microsoft.com/office/drawing/2014/main" id="{4989E11D-FD71-C6D7-EF34-A385A704C96F}"/>
             </a:ext>
           </a:extLst>
@@ -5598,6 +6422,738 @@
   <p:clrMapOvr>
     <a:masterClrMapping/>
   </p:clrMapOvr>
+  <mc:AlternateContent xmlns:mc="http://schemas.openxmlformats.org/markup-compatibility/2006" xmlns:p14="http://schemas.microsoft.com/office/powerpoint/2010/main">
+    <mc:Choice Requires="p14">
+      <p:transition spd="slow" p14:dur="2000" advTm="207460"/>
+    </mc:Choice>
+    <mc:Fallback xmlns="">
+      <p:transition spd="slow" advTm="207460"/>
+    </mc:Fallback>
+  </mc:AlternateContent>
+</p:sld>
+</file>
+
+<file path=ppt/slides/slide6.xml><?xml version="1.0" encoding="utf-8"?>
+<p:sld xmlns:a="http://schemas.openxmlformats.org/drawingml/2006/main" xmlns:r="http://schemas.openxmlformats.org/officeDocument/2006/relationships" xmlns:p="http://schemas.openxmlformats.org/presentationml/2006/main">
+  <p:cSld>
+    <p:bg>
+      <p:bgPr>
+        <a:gradFill>
+          <a:gsLst>
+            <a:gs pos="0">
+              <a:schemeClr val="bg1">
+                <a:lumMod val="95000"/>
+              </a:schemeClr>
+            </a:gs>
+            <a:gs pos="74000">
+              <a:schemeClr val="bg1">
+                <a:lumMod val="85000"/>
+              </a:schemeClr>
+            </a:gs>
+            <a:gs pos="83000">
+              <a:schemeClr val="bg1">
+                <a:lumMod val="75000"/>
+              </a:schemeClr>
+            </a:gs>
+            <a:gs pos="100000">
+              <a:schemeClr val="bg1">
+                <a:lumMod val="50000"/>
+              </a:schemeClr>
+            </a:gs>
+          </a:gsLst>
+          <a:lin ang="5400000" scaled="1"/>
+        </a:gradFill>
+        <a:effectLst/>
+      </p:bgPr>
+    </p:bg>
+    <p:spTree>
+      <p:nvGrpSpPr>
+        <p:cNvPr id="1" name="">
+          <a:extLst>
+            <a:ext uri="{FF2B5EF4-FFF2-40B4-BE49-F238E27FC236}">
+              <a16:creationId xmlns:a16="http://schemas.microsoft.com/office/drawing/2014/main" id="{B7B1514A-E7D4-7046-48F6-74DED28A8582}"/>
+            </a:ext>
+          </a:extLst>
+        </p:cNvPr>
+        <p:cNvGrpSpPr/>
+        <p:nvPr/>
+      </p:nvGrpSpPr>
+      <p:grpSpPr>
+        <a:xfrm>
+          <a:off x="0" y="0"/>
+          <a:ext cx="0" cy="0"/>
+          <a:chOff x="0" y="0"/>
+          <a:chExt cx="0" cy="0"/>
+        </a:xfrm>
+      </p:grpSpPr>
+      <p:sp>
+        <p:nvSpPr>
+          <p:cNvPr id="2" name="Title 1">
+            <a:extLst>
+              <a:ext uri="{FF2B5EF4-FFF2-40B4-BE49-F238E27FC236}">
+                <a16:creationId xmlns:a16="http://schemas.microsoft.com/office/drawing/2014/main" id="{B9821FF3-5B03-F9EF-E45E-B1F6CA53EB8B}"/>
+              </a:ext>
+            </a:extLst>
+          </p:cNvPr>
+          <p:cNvSpPr>
+            <a:spLocks noGrp="1"/>
+          </p:cNvSpPr>
+          <p:nvPr>
+            <p:ph type="title"/>
+          </p:nvPr>
+        </p:nvSpPr>
+        <p:spPr>
+          <a:xfrm>
+            <a:off x="97834" y="0"/>
+            <a:ext cx="11996331" cy="1325563"/>
+          </a:xfrm>
+        </p:spPr>
+        <p:txBody>
+          <a:bodyPr>
+            <a:normAutofit/>
+          </a:bodyPr>
+          <a:lstStyle/>
+          <a:p>
+            <a:r>
+              <a:rPr lang="en-US" b="1" dirty="0">
+                <a:latin typeface="Times New Roman" panose="02020603050405020304" pitchFamily="18" charset="0"/>
+                <a:cs typeface="Times New Roman" panose="02020603050405020304" pitchFamily="18" charset="0"/>
+              </a:rPr>
+              <a:t>The Go Files (Writing in file):</a:t>
+            </a:r>
+            <a:endParaRPr lang="en-US" sz="4200" b="1" dirty="0">
+              <a:latin typeface="Times New Roman" panose="02020603050405020304" pitchFamily="18" charset="0"/>
+              <a:cs typeface="Times New Roman" panose="02020603050405020304" pitchFamily="18" charset="0"/>
+            </a:endParaRPr>
+          </a:p>
+        </p:txBody>
+      </p:sp>
+      <p:pic>
+        <p:nvPicPr>
+          <p:cNvPr id="5" name="Picture 4">
+            <a:extLst>
+              <a:ext uri="{FF2B5EF4-FFF2-40B4-BE49-F238E27FC236}">
+                <a16:creationId xmlns:a16="http://schemas.microsoft.com/office/drawing/2014/main" id="{B32CB56A-0A2C-2D32-269D-F53B9A6BD3CE}"/>
+              </a:ext>
+            </a:extLst>
+          </p:cNvPr>
+          <p:cNvPicPr>
+            <a:picLocks noChangeAspect="1"/>
+          </p:cNvPicPr>
+          <p:nvPr/>
+        </p:nvPicPr>
+        <p:blipFill>
+          <a:blip r:embed="rId4"/>
+          <a:stretch>
+            <a:fillRect/>
+          </a:stretch>
+        </p:blipFill>
+        <p:spPr>
+          <a:xfrm>
+            <a:off x="97835" y="1064306"/>
+            <a:ext cx="7679590" cy="5793694"/>
+          </a:xfrm>
+          <a:prstGeom prst="rect">
+            <a:avLst/>
+          </a:prstGeom>
+        </p:spPr>
+      </p:pic>
+      <p:pic>
+        <p:nvPicPr>
+          <p:cNvPr id="7" name="Picture 6">
+            <a:extLst>
+              <a:ext uri="{FF2B5EF4-FFF2-40B4-BE49-F238E27FC236}">
+                <a16:creationId xmlns:a16="http://schemas.microsoft.com/office/drawing/2014/main" id="{1A1E0D63-BA7A-269C-9607-D8990EDFA05D}"/>
+              </a:ext>
+            </a:extLst>
+          </p:cNvPr>
+          <p:cNvPicPr>
+            <a:picLocks noChangeAspect="1"/>
+          </p:cNvPicPr>
+          <p:nvPr/>
+        </p:nvPicPr>
+        <p:blipFill>
+          <a:blip r:embed="rId5"/>
+          <a:stretch>
+            <a:fillRect/>
+          </a:stretch>
+        </p:blipFill>
+        <p:spPr>
+          <a:xfrm>
+            <a:off x="5016293" y="1104498"/>
+            <a:ext cx="7077871" cy="1789426"/>
+          </a:xfrm>
+          <a:prstGeom prst="rect">
+            <a:avLst/>
+          </a:prstGeom>
+        </p:spPr>
+      </p:pic>
+      <mc:AlternateContent xmlns:mc="http://schemas.openxmlformats.org/markup-compatibility/2006">
+        <mc:Choice xmlns:p14="http://schemas.microsoft.com/office/powerpoint/2010/main" Requires="p14">
+          <p:contentPart p14:bwMode="auto" r:id="rId6">
+            <p14:nvContentPartPr>
+              <p14:cNvPr id="8" name="Ink 7">
+                <a:extLst>
+                  <a:ext uri="{FF2B5EF4-FFF2-40B4-BE49-F238E27FC236}">
+                    <a16:creationId xmlns:a16="http://schemas.microsoft.com/office/drawing/2014/main" id="{DDD8E86A-6B85-4B18-0C87-B66E471DB348}"/>
+                  </a:ext>
+                </a:extLst>
+              </p14:cNvPr>
+              <p14:cNvContentPartPr/>
+              <p14:nvPr/>
+            </p14:nvContentPartPr>
+            <p14:xfrm>
+              <a:off x="6380925" y="3657651"/>
+              <a:ext cx="1541880" cy="612360"/>
+            </p14:xfrm>
+          </p:contentPart>
+        </mc:Choice>
+        <mc:Fallback>
+          <p:pic>
+            <p:nvPicPr>
+              <p:cNvPr id="8" name="Ink 7">
+                <a:extLst>
+                  <a:ext uri="{FF2B5EF4-FFF2-40B4-BE49-F238E27FC236}">
+                    <a16:creationId xmlns:a16="http://schemas.microsoft.com/office/drawing/2014/main" id="{DDD8E86A-6B85-4B18-0C87-B66E471DB348}"/>
+                  </a:ext>
+                </a:extLst>
+              </p:cNvPr>
+              <p:cNvPicPr/>
+              <p:nvPr/>
+            </p:nvPicPr>
+            <p:blipFill>
+              <a:blip r:embed="rId7"/>
+              <a:stretch>
+                <a:fillRect/>
+              </a:stretch>
+            </p:blipFill>
+            <p:spPr>
+              <a:xfrm>
+                <a:off x="6361845" y="3638571"/>
+                <a:ext cx="1579680" cy="650160"/>
+              </a:xfrm>
+              <a:prstGeom prst="rect">
+                <a:avLst/>
+              </a:prstGeom>
+            </p:spPr>
+          </p:pic>
+        </mc:Fallback>
+      </mc:AlternateContent>
+      <mc:AlternateContent xmlns:mc="http://schemas.openxmlformats.org/markup-compatibility/2006">
+        <mc:Choice xmlns:p14="http://schemas.microsoft.com/office/powerpoint/2010/main" Requires="p14">
+          <p:contentPart p14:bwMode="auto" r:id="rId8">
+            <p14:nvContentPartPr>
+              <p14:cNvPr id="10" name="Ink 9">
+                <a:extLst>
+                  <a:ext uri="{FF2B5EF4-FFF2-40B4-BE49-F238E27FC236}">
+                    <a16:creationId xmlns:a16="http://schemas.microsoft.com/office/drawing/2014/main" id="{C034770E-B1F8-482B-0B8E-2257B954D4F9}"/>
+                  </a:ext>
+                </a:extLst>
+              </p14:cNvPr>
+              <p14:cNvContentPartPr/>
+              <p14:nvPr/>
+            </p14:nvContentPartPr>
+            <p14:xfrm>
+              <a:off x="7810845" y="4129971"/>
+              <a:ext cx="178560" cy="219960"/>
+            </p14:xfrm>
+          </p:contentPart>
+        </mc:Choice>
+        <mc:Fallback>
+          <p:pic>
+            <p:nvPicPr>
+              <p:cNvPr id="10" name="Ink 9">
+                <a:extLst>
+                  <a:ext uri="{FF2B5EF4-FFF2-40B4-BE49-F238E27FC236}">
+                    <a16:creationId xmlns:a16="http://schemas.microsoft.com/office/drawing/2014/main" id="{C034770E-B1F8-482B-0B8E-2257B954D4F9}"/>
+                  </a:ext>
+                </a:extLst>
+              </p:cNvPr>
+              <p:cNvPicPr/>
+              <p:nvPr/>
+            </p:nvPicPr>
+            <p:blipFill>
+              <a:blip r:embed="rId9"/>
+              <a:stretch>
+                <a:fillRect/>
+              </a:stretch>
+            </p:blipFill>
+            <p:spPr>
+              <a:xfrm>
+                <a:off x="7802205" y="4120971"/>
+                <a:ext cx="196200" cy="237600"/>
+              </a:xfrm>
+              <a:prstGeom prst="rect">
+                <a:avLst/>
+              </a:prstGeom>
+            </p:spPr>
+          </p:pic>
+        </mc:Fallback>
+      </mc:AlternateContent>
+      <mc:AlternateContent xmlns:mc="http://schemas.openxmlformats.org/markup-compatibility/2006">
+        <mc:Choice xmlns:p14="http://schemas.microsoft.com/office/powerpoint/2010/main" Requires="p14">
+          <p:contentPart p14:bwMode="auto" r:id="rId10">
+            <p14:nvContentPartPr>
+              <p14:cNvPr id="11" name="Ink 10">
+                <a:extLst>
+                  <a:ext uri="{FF2B5EF4-FFF2-40B4-BE49-F238E27FC236}">
+                    <a16:creationId xmlns:a16="http://schemas.microsoft.com/office/drawing/2014/main" id="{ADE4607C-83E1-CF57-0579-6454201688DD}"/>
+                  </a:ext>
+                </a:extLst>
+              </p14:cNvPr>
+              <p14:cNvContentPartPr/>
+              <p14:nvPr/>
+            </p14:nvContentPartPr>
+            <p14:xfrm>
+              <a:off x="9475485" y="5978571"/>
+              <a:ext cx="360" cy="2160"/>
+            </p14:xfrm>
+          </p:contentPart>
+        </mc:Choice>
+        <mc:Fallback>
+          <p:pic>
+            <p:nvPicPr>
+              <p:cNvPr id="11" name="Ink 10">
+                <a:extLst>
+                  <a:ext uri="{FF2B5EF4-FFF2-40B4-BE49-F238E27FC236}">
+                    <a16:creationId xmlns:a16="http://schemas.microsoft.com/office/drawing/2014/main" id="{ADE4607C-83E1-CF57-0579-6454201688DD}"/>
+                  </a:ext>
+                </a:extLst>
+              </p:cNvPr>
+              <p:cNvPicPr/>
+              <p:nvPr/>
+            </p:nvPicPr>
+            <p:blipFill>
+              <a:blip r:embed="rId11"/>
+              <a:stretch>
+                <a:fillRect/>
+              </a:stretch>
+            </p:blipFill>
+            <p:spPr>
+              <a:xfrm>
+                <a:off x="9466845" y="5969571"/>
+                <a:ext cx="18000" cy="19800"/>
+              </a:xfrm>
+              <a:prstGeom prst="rect">
+                <a:avLst/>
+              </a:prstGeom>
+            </p:spPr>
+          </p:pic>
+        </mc:Fallback>
+      </mc:AlternateContent>
+      <p:sp>
+        <p:nvSpPr>
+          <p:cNvPr id="12" name="Rectangle 11">
+            <a:extLst>
+              <a:ext uri="{FF2B5EF4-FFF2-40B4-BE49-F238E27FC236}">
+                <a16:creationId xmlns:a16="http://schemas.microsoft.com/office/drawing/2014/main" id="{71690352-996E-1D2D-E381-719370D76A13}"/>
+              </a:ext>
+            </a:extLst>
+          </p:cNvPr>
+          <p:cNvSpPr/>
+          <p:nvPr/>
+        </p:nvSpPr>
+        <p:spPr>
+          <a:xfrm>
+            <a:off x="8078875" y="3657651"/>
+            <a:ext cx="4014929" cy="2196218"/>
+          </a:xfrm>
+          <a:prstGeom prst="rect">
+            <a:avLst/>
+          </a:prstGeom>
+          <a:ln>
+            <a:noFill/>
+          </a:ln>
+        </p:spPr>
+        <p:style>
+          <a:lnRef idx="2">
+            <a:schemeClr val="accent1">
+              <a:shade val="15000"/>
+            </a:schemeClr>
+          </a:lnRef>
+          <a:fillRef idx="1">
+            <a:schemeClr val="accent1"/>
+          </a:fillRef>
+          <a:effectRef idx="0">
+            <a:schemeClr val="accent1"/>
+          </a:effectRef>
+          <a:fontRef idx="minor">
+            <a:schemeClr val="lt1"/>
+          </a:fontRef>
+        </p:style>
+        <p:txBody>
+          <a:bodyPr rtlCol="0" anchor="ctr"/>
+          <a:lstStyle/>
+          <a:p>
+            <a:r>
+              <a:rPr lang="en-US" sz="2000" b="1" dirty="0">
+                <a:solidFill>
+                  <a:schemeClr val="bg1"/>
+                </a:solidFill>
+                <a:latin typeface="Arial" panose="020B0604020202020204" pitchFamily="34" charset="0"/>
+                <a:cs typeface="Arial" panose="020B0604020202020204" pitchFamily="34" charset="0"/>
+              </a:rPr>
+              <a:t>When reading the file, permissions are ignored, allowing us to use a value of 0. When writing, we use the standard Unix file permissions of 0666 (even on Windows).</a:t>
+            </a:r>
+          </a:p>
+        </p:txBody>
+      </p:sp>
+      <mc:AlternateContent xmlns:mc="http://schemas.openxmlformats.org/markup-compatibility/2006">
+        <mc:Choice xmlns:p14="http://schemas.microsoft.com/office/powerpoint/2010/main" Requires="p14">
+          <p:contentPart p14:bwMode="auto" r:id="rId12">
+            <p14:nvContentPartPr>
+              <p14:cNvPr id="13" name="Ink 12">
+                <a:extLst>
+                  <a:ext uri="{FF2B5EF4-FFF2-40B4-BE49-F238E27FC236}">
+                    <a16:creationId xmlns:a16="http://schemas.microsoft.com/office/drawing/2014/main" id="{61914EEF-4958-0F33-D731-23104A6FE9D8}"/>
+                  </a:ext>
+                </a:extLst>
+              </p14:cNvPr>
+              <p14:cNvContentPartPr/>
+              <p14:nvPr/>
+            </p14:nvContentPartPr>
+            <p14:xfrm>
+              <a:off x="1678245" y="5827011"/>
+              <a:ext cx="2350800" cy="686160"/>
+            </p14:xfrm>
+          </p:contentPart>
+        </mc:Choice>
+        <mc:Fallback>
+          <p:pic>
+            <p:nvPicPr>
+              <p:cNvPr id="13" name="Ink 12">
+                <a:extLst>
+                  <a:ext uri="{FF2B5EF4-FFF2-40B4-BE49-F238E27FC236}">
+                    <a16:creationId xmlns:a16="http://schemas.microsoft.com/office/drawing/2014/main" id="{61914EEF-4958-0F33-D731-23104A6FE9D8}"/>
+                  </a:ext>
+                </a:extLst>
+              </p:cNvPr>
+              <p:cNvPicPr/>
+              <p:nvPr/>
+            </p:nvPicPr>
+            <p:blipFill>
+              <a:blip r:embed="rId13"/>
+              <a:stretch>
+                <a:fillRect/>
+              </a:stretch>
+            </p:blipFill>
+            <p:spPr>
+              <a:xfrm>
+                <a:off x="1669245" y="5818371"/>
+                <a:ext cx="2368440" cy="703800"/>
+              </a:xfrm>
+              <a:prstGeom prst="rect">
+                <a:avLst/>
+              </a:prstGeom>
+            </p:spPr>
+          </p:pic>
+        </mc:Fallback>
+      </mc:AlternateContent>
+      <mc:AlternateContent xmlns:mc="http://schemas.openxmlformats.org/markup-compatibility/2006">
+        <mc:Choice xmlns:p14="http://schemas.microsoft.com/office/powerpoint/2010/main" Requires="p14">
+          <p:contentPart p14:bwMode="auto" r:id="rId14">
+            <p14:nvContentPartPr>
+              <p14:cNvPr id="14" name="Ink 13">
+                <a:extLst>
+                  <a:ext uri="{FF2B5EF4-FFF2-40B4-BE49-F238E27FC236}">
+                    <a16:creationId xmlns:a16="http://schemas.microsoft.com/office/drawing/2014/main" id="{D09E6E82-319B-30E1-5BDC-6CE0A263A1F2}"/>
+                  </a:ext>
+                </a:extLst>
+              </p14:cNvPr>
+              <p14:cNvContentPartPr/>
+              <p14:nvPr/>
+            </p14:nvContentPartPr>
+            <p14:xfrm>
+              <a:off x="3918885" y="5767611"/>
+              <a:ext cx="160920" cy="169920"/>
+            </p14:xfrm>
+          </p:contentPart>
+        </mc:Choice>
+        <mc:Fallback>
+          <p:pic>
+            <p:nvPicPr>
+              <p:cNvPr id="14" name="Ink 13">
+                <a:extLst>
+                  <a:ext uri="{FF2B5EF4-FFF2-40B4-BE49-F238E27FC236}">
+                    <a16:creationId xmlns:a16="http://schemas.microsoft.com/office/drawing/2014/main" id="{D09E6E82-319B-30E1-5BDC-6CE0A263A1F2}"/>
+                  </a:ext>
+                </a:extLst>
+              </p:cNvPr>
+              <p:cNvPicPr/>
+              <p:nvPr/>
+            </p:nvPicPr>
+            <p:blipFill>
+              <a:blip r:embed="rId15"/>
+              <a:stretch>
+                <a:fillRect/>
+              </a:stretch>
+            </p:blipFill>
+            <p:spPr>
+              <a:xfrm>
+                <a:off x="3909885" y="5758971"/>
+                <a:ext cx="178560" cy="187560"/>
+              </a:xfrm>
+              <a:prstGeom prst="rect">
+                <a:avLst/>
+              </a:prstGeom>
+            </p:spPr>
+          </p:pic>
+        </mc:Fallback>
+      </mc:AlternateContent>
+      <p:sp>
+        <p:nvSpPr>
+          <p:cNvPr id="15" name="TextBox 14">
+            <a:extLst>
+              <a:ext uri="{FF2B5EF4-FFF2-40B4-BE49-F238E27FC236}">
+                <a16:creationId xmlns:a16="http://schemas.microsoft.com/office/drawing/2014/main" id="{9CBF4BCE-456E-70A6-079D-ECCA94B29E8D}"/>
+              </a:ext>
+            </a:extLst>
+          </p:cNvPr>
+          <p:cNvSpPr txBox="1"/>
+          <p:nvPr/>
+        </p:nvSpPr>
+        <p:spPr>
+          <a:xfrm>
+            <a:off x="3587289" y="5367501"/>
+            <a:ext cx="2350800" cy="400110"/>
+          </a:xfrm>
+          <a:prstGeom prst="rect">
+            <a:avLst/>
+          </a:prstGeom>
+          <a:noFill/>
+        </p:spPr>
+        <p:txBody>
+          <a:bodyPr wrap="square" rtlCol="0">
+            <a:spAutoFit/>
+          </a:bodyPr>
+          <a:lstStyle/>
+          <a:p>
+            <a:r>
+              <a:rPr lang="en-US" sz="2000" b="1" dirty="0">
+                <a:solidFill>
+                  <a:schemeClr val="bg1"/>
+                </a:solidFill>
+                <a:latin typeface="Arial" panose="020B0604020202020204" pitchFamily="34" charset="0"/>
+                <a:cs typeface="Arial" panose="020B0604020202020204" pitchFamily="34" charset="0"/>
+              </a:rPr>
+              <a:t>Don’t Forget</a:t>
+            </a:r>
+          </a:p>
+        </p:txBody>
+      </p:sp>
+    </p:spTree>
+    <p:custDataLst>
+      <p:tags r:id="rId1"/>
+    </p:custDataLst>
+    <p:extLst>
+      <p:ext uri="{BB962C8B-B14F-4D97-AF65-F5344CB8AC3E}">
+        <p14:creationId xmlns:p14="http://schemas.microsoft.com/office/powerpoint/2010/main" val="2054225072"/>
+      </p:ext>
+    </p:extLst>
+  </p:cSld>
+  <p:clrMapOvr>
+    <a:masterClrMapping/>
+  </p:clrMapOvr>
+  <mc:AlternateContent xmlns:mc="http://schemas.openxmlformats.org/markup-compatibility/2006">
+    <mc:Choice xmlns:p14="http://schemas.microsoft.com/office/powerpoint/2010/main" Requires="p14">
+      <p:transition spd="slow" p14:dur="2000" advTm="207460"/>
+    </mc:Choice>
+    <mc:Fallback>
+      <p:transition spd="slow" advTm="207460"/>
+    </mc:Fallback>
+  </mc:AlternateContent>
+</p:sld>
+</file>
+
+<file path=ppt/slides/slide7.xml><?xml version="1.0" encoding="utf-8"?>
+<p:sld xmlns:a="http://schemas.openxmlformats.org/drawingml/2006/main" xmlns:r="http://schemas.openxmlformats.org/officeDocument/2006/relationships" xmlns:p="http://schemas.openxmlformats.org/presentationml/2006/main">
+  <p:cSld>
+    <p:bg>
+      <p:bgPr>
+        <a:gradFill>
+          <a:gsLst>
+            <a:gs pos="0">
+              <a:schemeClr val="bg1">
+                <a:lumMod val="95000"/>
+              </a:schemeClr>
+            </a:gs>
+            <a:gs pos="74000">
+              <a:schemeClr val="bg1">
+                <a:lumMod val="85000"/>
+              </a:schemeClr>
+            </a:gs>
+            <a:gs pos="83000">
+              <a:schemeClr val="bg1">
+                <a:lumMod val="75000"/>
+              </a:schemeClr>
+            </a:gs>
+            <a:gs pos="100000">
+              <a:schemeClr val="bg1">
+                <a:lumMod val="50000"/>
+              </a:schemeClr>
+            </a:gs>
+          </a:gsLst>
+          <a:lin ang="5400000" scaled="1"/>
+        </a:gradFill>
+        <a:effectLst/>
+      </p:bgPr>
+    </p:bg>
+    <p:spTree>
+      <p:nvGrpSpPr>
+        <p:cNvPr id="1" name="">
+          <a:extLst>
+            <a:ext uri="{FF2B5EF4-FFF2-40B4-BE49-F238E27FC236}">
+              <a16:creationId xmlns:a16="http://schemas.microsoft.com/office/drawing/2014/main" id="{41C44728-37BF-0B62-821E-43A8F80EDD29}"/>
+            </a:ext>
+          </a:extLst>
+        </p:cNvPr>
+        <p:cNvGrpSpPr/>
+        <p:nvPr/>
+      </p:nvGrpSpPr>
+      <p:grpSpPr>
+        <a:xfrm>
+          <a:off x="0" y="0"/>
+          <a:ext cx="0" cy="0"/>
+          <a:chOff x="0" y="0"/>
+          <a:chExt cx="0" cy="0"/>
+        </a:xfrm>
+      </p:grpSpPr>
+      <p:sp>
+        <p:nvSpPr>
+          <p:cNvPr id="2" name="Title 1">
+            <a:extLst>
+              <a:ext uri="{FF2B5EF4-FFF2-40B4-BE49-F238E27FC236}">
+                <a16:creationId xmlns:a16="http://schemas.microsoft.com/office/drawing/2014/main" id="{3088A468-0EE1-9B9C-B2D5-960E7220FA35}"/>
+              </a:ext>
+            </a:extLst>
+          </p:cNvPr>
+          <p:cNvSpPr>
+            <a:spLocks noGrp="1"/>
+          </p:cNvSpPr>
+          <p:nvPr>
+            <p:ph type="title"/>
+          </p:nvPr>
+        </p:nvSpPr>
+        <p:spPr>
+          <a:xfrm>
+            <a:off x="97834" y="0"/>
+            <a:ext cx="11996331" cy="1325563"/>
+          </a:xfrm>
+        </p:spPr>
+        <p:txBody>
+          <a:bodyPr>
+            <a:normAutofit/>
+          </a:bodyPr>
+          <a:lstStyle/>
+          <a:p>
+            <a:r>
+              <a:rPr lang="en-US" b="1" dirty="0">
+                <a:latin typeface="Times New Roman" panose="02020603050405020304" pitchFamily="18" charset="0"/>
+                <a:cs typeface="Times New Roman" panose="02020603050405020304" pitchFamily="18" charset="0"/>
+              </a:rPr>
+              <a:t>The Go Files (Writing in file):</a:t>
+            </a:r>
+            <a:endParaRPr lang="en-US" sz="4200" b="1" dirty="0">
+              <a:latin typeface="Times New Roman" panose="02020603050405020304" pitchFamily="18" charset="0"/>
+              <a:cs typeface="Times New Roman" panose="02020603050405020304" pitchFamily="18" charset="0"/>
+            </a:endParaRPr>
+          </a:p>
+        </p:txBody>
+      </p:sp>
+      <mc:AlternateContent xmlns:mc="http://schemas.openxmlformats.org/markup-compatibility/2006">
+        <mc:Choice xmlns:p14="http://schemas.microsoft.com/office/powerpoint/2010/main" Requires="p14">
+          <p:contentPart p14:bwMode="auto" r:id="rId4">
+            <p14:nvContentPartPr>
+              <p14:cNvPr id="11" name="Ink 10">
+                <a:extLst>
+                  <a:ext uri="{FF2B5EF4-FFF2-40B4-BE49-F238E27FC236}">
+                    <a16:creationId xmlns:a16="http://schemas.microsoft.com/office/drawing/2014/main" id="{92B78E7C-69FB-09EC-CF12-3C15598E8A32}"/>
+                  </a:ext>
+                </a:extLst>
+              </p14:cNvPr>
+              <p14:cNvContentPartPr/>
+              <p14:nvPr/>
+            </p14:nvContentPartPr>
+            <p14:xfrm>
+              <a:off x="9475485" y="5978571"/>
+              <a:ext cx="360" cy="2160"/>
+            </p14:xfrm>
+          </p:contentPart>
+        </mc:Choice>
+        <mc:Fallback>
+          <p:pic>
+            <p:nvPicPr>
+              <p:cNvPr id="11" name="Ink 10">
+                <a:extLst>
+                  <a:ext uri="{FF2B5EF4-FFF2-40B4-BE49-F238E27FC236}">
+                    <a16:creationId xmlns:a16="http://schemas.microsoft.com/office/drawing/2014/main" id="{92B78E7C-69FB-09EC-CF12-3C15598E8A32}"/>
+                  </a:ext>
+                </a:extLst>
+              </p:cNvPr>
+              <p:cNvPicPr/>
+              <p:nvPr/>
+            </p:nvPicPr>
+            <p:blipFill>
+              <a:blip r:embed="rId5"/>
+              <a:stretch>
+                <a:fillRect/>
+              </a:stretch>
+            </p:blipFill>
+            <p:spPr>
+              <a:xfrm>
+                <a:off x="9466485" y="5969571"/>
+                <a:ext cx="18000" cy="19800"/>
+              </a:xfrm>
+              <a:prstGeom prst="rect">
+                <a:avLst/>
+              </a:prstGeom>
+            </p:spPr>
+          </p:pic>
+        </mc:Fallback>
+      </mc:AlternateContent>
+      <p:pic>
+        <p:nvPicPr>
+          <p:cNvPr id="4" name="Picture 3">
+            <a:extLst>
+              <a:ext uri="{FF2B5EF4-FFF2-40B4-BE49-F238E27FC236}">
+                <a16:creationId xmlns:a16="http://schemas.microsoft.com/office/drawing/2014/main" id="{170F4E2E-8DDD-623A-BC4E-A304BF43CFB9}"/>
+              </a:ext>
+            </a:extLst>
+          </p:cNvPr>
+          <p:cNvPicPr>
+            <a:picLocks noChangeAspect="1"/>
+          </p:cNvPicPr>
+          <p:nvPr/>
+        </p:nvPicPr>
+        <p:blipFill>
+          <a:blip r:embed="rId6"/>
+          <a:stretch>
+            <a:fillRect/>
+          </a:stretch>
+        </p:blipFill>
+        <p:spPr>
+          <a:xfrm>
+            <a:off x="1885739" y="1170181"/>
+            <a:ext cx="8420519" cy="5311005"/>
+          </a:xfrm>
+          <a:prstGeom prst="rect">
+            <a:avLst/>
+          </a:prstGeom>
+        </p:spPr>
+      </p:pic>
+    </p:spTree>
+    <p:custDataLst>
+      <p:tags r:id="rId1"/>
+    </p:custDataLst>
+    <p:extLst>
+      <p:ext uri="{BB962C8B-B14F-4D97-AF65-F5344CB8AC3E}">
+        <p14:creationId xmlns:p14="http://schemas.microsoft.com/office/powerpoint/2010/main" val="2656398737"/>
+      </p:ext>
+    </p:extLst>
+  </p:cSld>
+  <p:clrMapOvr>
+    <a:masterClrMapping/>
+  </p:clrMapOvr>
   <mc:AlternateContent xmlns:mc="http://schemas.openxmlformats.org/markup-compatibility/2006">
     <mc:Choice xmlns:p14="http://schemas.microsoft.com/office/powerpoint/2010/main" Requires="p14">
       <p:transition spd="slow" p14:dur="2000" advTm="207460"/>
@@ -5622,6 +7178,24 @@
 </file>
 
 <file path=ppt/tags/tag3.xml><?xml version="1.0" encoding="utf-8"?>
+<p:tagLst xmlns:a="http://schemas.openxmlformats.org/drawingml/2006/main" xmlns:r="http://schemas.openxmlformats.org/officeDocument/2006/relationships" xmlns:p="http://schemas.openxmlformats.org/presentationml/2006/main">
+  <p:tag name="TIMING" val="|5.6|40.3|25.2|40.6|10.1"/>
+</p:tagLst>
+</file>
+
+<file path=ppt/tags/tag4.xml><?xml version="1.0" encoding="utf-8"?>
+<p:tagLst xmlns:a="http://schemas.openxmlformats.org/drawingml/2006/main" xmlns:r="http://schemas.openxmlformats.org/officeDocument/2006/relationships" xmlns:p="http://schemas.openxmlformats.org/presentationml/2006/main">
+  <p:tag name="TIMING" val="|5.6|40.3|25.2|40.6|10.1"/>
+</p:tagLst>
+</file>
+
+<file path=ppt/tags/tag5.xml><?xml version="1.0" encoding="utf-8"?>
+<p:tagLst xmlns:a="http://schemas.openxmlformats.org/drawingml/2006/main" xmlns:r="http://schemas.openxmlformats.org/officeDocument/2006/relationships" xmlns:p="http://schemas.openxmlformats.org/presentationml/2006/main">
+  <p:tag name="TIMING" val="|5.6|40.3|25.2|40.6|10.1"/>
+</p:tagLst>
+</file>
+
+<file path=ppt/tags/tag6.xml><?xml version="1.0" encoding="utf-8"?>
 <p:tagLst xmlns:a="http://schemas.openxmlformats.org/drawingml/2006/main" xmlns:r="http://schemas.openxmlformats.org/officeDocument/2006/relationships" xmlns:p="http://schemas.openxmlformats.org/presentationml/2006/main">
   <p:tag name="TIMING" val="|5.6|40.3|25.2|40.6|10.1"/>
 </p:tagLst>

--- a/Section 3/Go streams and DBS.pptx
+++ b/Section 3/Go streams and DBS.pptx
@@ -5,7 +5,7 @@
     <p:sldMasterId id="2147483648" r:id="rId1"/>
   </p:sldMasterIdLst>
   <p:notesMasterIdLst>
-    <p:notesMasterId r:id="rId9"/>
+    <p:notesMasterId r:id="rId19"/>
   </p:notesMasterIdLst>
   <p:sldIdLst>
     <p:sldId id="256" r:id="rId2"/>
@@ -15,6 +15,16 @@
     <p:sldId id="361" r:id="rId6"/>
     <p:sldId id="363" r:id="rId7"/>
     <p:sldId id="364" r:id="rId8"/>
+    <p:sldId id="366" r:id="rId9"/>
+    <p:sldId id="365" r:id="rId10"/>
+    <p:sldId id="367" r:id="rId11"/>
+    <p:sldId id="368" r:id="rId12"/>
+    <p:sldId id="369" r:id="rId13"/>
+    <p:sldId id="371" r:id="rId14"/>
+    <p:sldId id="370" r:id="rId15"/>
+    <p:sldId id="372" r:id="rId16"/>
+    <p:sldId id="373" r:id="rId17"/>
+    <p:sldId id="374" r:id="rId18"/>
   </p:sldIdLst>
   <p:sldSz cx="12192000" cy="6858000"/>
   <p:notesSz cx="6858000" cy="9144000"/>
@@ -146,6 +156,118 @@
     </inkml:brush>
   </inkml:definitions>
   <inkml:trace contextRef="#ctx0" brushRef="#br0">0 0 24575,'9'0'0,"0"0"0,0 1 0,0 0 0,-1 0 0,11 3 0,-15-3 0,0 1 0,0 0 0,-1 0 0,1 0 0,-1 0 0,0 0 0,1 1 0,-1-1 0,0 1 0,0 0 0,-1 0 0,1 0 0,4 6 0,3 9 0,0-1 0,-1 2 0,-1-1 0,10 32 0,15 82 0,-29-118 0,13 69 0,20 78 0,-28-131 0,2 0 0,0 0 0,20 34 0,-12-29 0,11 19 0,38 55 0,-51-90 0,0 0 0,2-2 0,0 0 0,38 27 0,5 3 0,-40-27 0,0-2 0,1 0 0,1-2 0,0-1 0,1 0 0,1-2 0,30 11 0,499 118 0,-410-100 0,-29-6 0,-43-17 0,6 3 0,120 17 0,102-16 0,-240-21 0,97-1 0,-129-3 0,0 0 0,0-2 0,33-9 0,-55 11 0,1-1 0,-1 0 0,0-1 0,-1 0 0,1 0 0,9-7 0,-10 6 0,-1 1 0,1 0 0,1 0 0,-1 1 0,1 0 0,11-5 0,-2 5 0,-1 0 0,1 1 0,0 1 0,0 0 0,0 1 0,0 1 0,-1 0 0,18 5 0,17 5 0,56 21 0,-46-13 0,-22-10 0,1-2 0,-1-1 0,58 0 0,27 4 0,-25 4 0,180 47 0,-252-54 0,0-2 0,0-1 0,1-2 0,-1 0 0,28-2 0,26 1 0,-73 0 15,-1 1-1,1-1 0,-1 1 1,1 0-1,-1 1 1,0-1-1,0 1 0,8 6 1,30 11-1510,-20-14-5331</inkml:trace>
+</inkml:ink>
+</file>
+
+<file path=ppt/ink/ink10.xml><?xml version="1.0" encoding="utf-8"?>
+<inkml:ink xmlns:inkml="http://www.w3.org/2003/InkML">
+  <inkml:definitions>
+    <inkml:context xml:id="ctx0">
+      <inkml:inkSource xml:id="inkSrc0">
+        <inkml:traceFormat>
+          <inkml:channel name="X" type="integer" min="-2.14748E9" max="2.14748E9" units="cm"/>
+          <inkml:channel name="Y" type="integer" min="-2.14748E9" max="2.14748E9" units="cm"/>
+          <inkml:channel name="F" type="integer" max="32767" units="dev"/>
+        </inkml:traceFormat>
+        <inkml:channelProperties>
+          <inkml:channelProperty channel="X" name="resolution" value="1000" units="1/cm"/>
+          <inkml:channelProperty channel="Y" name="resolution" value="1000" units="1/cm"/>
+          <inkml:channelProperty channel="F" name="resolution" value="0" units="1/dev"/>
+        </inkml:channelProperties>
+      </inkml:inkSource>
+      <inkml:timestamp xml:id="ts0" timeString="2026-03-06T14:49:10.634"/>
+    </inkml:context>
+    <inkml:brush xml:id="br0">
+      <inkml:brushProperty name="width" value="0.07938" units="cm"/>
+      <inkml:brushProperty name="height" value="0.07938" units="cm"/>
+      <inkml:brushProperty name="color" value="#FF0000"/>
+    </inkml:brush>
+  </inkml:definitions>
+  <inkml:trace contextRef="#ctx0" brushRef="#br0">2 1 24575,'0'25'0,"-1"76"0,2 110 0,0-204 0,0-1 0,0 1 0,1-1 0,0 0 0,0 0 0,0 0 0,1 0 0,0 0 0,0 0 0,1 0 0,-1-1 0,1 0 0,0 0 0,1 0 0,-1 0 0,10 7 0,6 3 0,0-1 0,1-1 0,28 12 0,22 15 0,-63-36 0,1 0 0,0 0 0,0-1 0,0 0 0,1 0 0,-1-1 0,10 1 0,33 8 0,-8 1 0,0-2 0,1-2 0,89 4 0,-132-11 0,42 5 0,-33-4 0,0 0 0,0-1 0,22 1 0,82-16 0,-65 7 0,63-1 0,201 8 0,-310-1 0,-1 0 0,1 0 0,-1 0 0,0-1 0,1 0 0,-1 0 0,0 0 0,0 0 0,3-3 0,5-3 0,7-2-1365,-3 2-5461</inkml:trace>
+</inkml:ink>
+</file>
+
+<file path=ppt/ink/ink11.xml><?xml version="1.0" encoding="utf-8"?>
+<inkml:ink xmlns:inkml="http://www.w3.org/2003/InkML">
+  <inkml:definitions>
+    <inkml:context xml:id="ctx0">
+      <inkml:inkSource xml:id="inkSrc0">
+        <inkml:traceFormat>
+          <inkml:channel name="X" type="integer" min="-2.14748E9" max="2.14748E9" units="cm"/>
+          <inkml:channel name="Y" type="integer" min="-2.14748E9" max="2.14748E9" units="cm"/>
+          <inkml:channel name="F" type="integer" max="32767" units="dev"/>
+        </inkml:traceFormat>
+        <inkml:channelProperties>
+          <inkml:channelProperty channel="X" name="resolution" value="1000" units="1/cm"/>
+          <inkml:channelProperty channel="Y" name="resolution" value="1000" units="1/cm"/>
+          <inkml:channelProperty channel="F" name="resolution" value="0" units="1/dev"/>
+        </inkml:channelProperties>
+      </inkml:inkSource>
+      <inkml:timestamp xml:id="ts0" timeString="2026-03-06T14:49:15.127"/>
+    </inkml:context>
+    <inkml:brush xml:id="br0">
+      <inkml:brushProperty name="width" value="0.07938" units="cm"/>
+      <inkml:brushProperty name="height" value="0.07938" units="cm"/>
+      <inkml:brushProperty name="color" value="#FF0000"/>
+    </inkml:brush>
+  </inkml:definitions>
+  <inkml:trace contextRef="#ctx0" brushRef="#br0">0 0 24575,'0'0'0,"0"0"0,0 0 0,0 0 0,0 0 0,13 1 0,-1 0 0,1 1 0,0 0 0,-1 1 0,0 0 0,0 1 0,0 0 0,17 9 0,10 8 0,40 31 0,25 12 0,-93-59 0,1-1 0,0 0 0,0 0 0,0-1 0,0-1 0,0 0 0,1 0 0,-1-2 0,0 1 0,17-3 0,-27 2 0,-1 0 0,1 0 0,-1 0 0,1 0 0,-1 0 0,1 0 0,-1 0 0,1 0 0,-1 0 0,1 1 0,-1-1 0,1 0 0,-1 1 0,0 0 0,1-1 0,-1 1 0,0 0 0,1-1 0,-1 1 0,0 0 0,0 0 0,0 0 0,2 2 0,-2 0 0,0 0 0,0 0 0,0 0 0,-1 0 0,1 0 0,-1 1 0,0-1 0,0 0 0,0 0 0,-1 5 0,-5 40 0,-2 0 0,-1-1 0,-30 84 0,33-114 0,1-1 0,1 1 0,-3 17 0,5-27 0,0 1 0,0 0 0,-1-1 0,0 0 0,-5 8 0,5-9 0,0 0 0,0 0 0,1 0 0,-1 0 0,2 0 0,-1 1 0,0-1 0,1 1 0,0 8 0</inkml:trace>
+</inkml:ink>
+</file>
+
+<file path=ppt/ink/ink12.xml><?xml version="1.0" encoding="utf-8"?>
+<inkml:ink xmlns:inkml="http://www.w3.org/2003/InkML">
+  <inkml:definitions>
+    <inkml:context xml:id="ctx0">
+      <inkml:inkSource xml:id="inkSrc0">
+        <inkml:traceFormat>
+          <inkml:channel name="X" type="integer" min="-2.14748E9" max="2.14748E9" units="cm"/>
+          <inkml:channel name="Y" type="integer" min="-2.14748E9" max="2.14748E9" units="cm"/>
+          <inkml:channel name="F" type="integer" max="32767" units="dev"/>
+        </inkml:traceFormat>
+        <inkml:channelProperties>
+          <inkml:channelProperty channel="X" name="resolution" value="1000" units="1/cm"/>
+          <inkml:channelProperty channel="Y" name="resolution" value="1000" units="1/cm"/>
+          <inkml:channelProperty channel="F" name="resolution" value="0" units="1/dev"/>
+        </inkml:channelProperties>
+      </inkml:inkSource>
+      <inkml:timestamp xml:id="ts0" timeString="2026-03-06T14:50:23.473"/>
+    </inkml:context>
+    <inkml:brush xml:id="br0">
+      <inkml:brushProperty name="width" value="0.07938" units="cm"/>
+      <inkml:brushProperty name="height" value="0.07938" units="cm"/>
+      <inkml:brushProperty name="color" value="#FF0000"/>
+    </inkml:brush>
+  </inkml:definitions>
+  <inkml:trace contextRef="#ctx0" brushRef="#br0">0 500 24575,'2'-1'0,"0"1"0,0-1 0,0 0 0,-1 0 0,1 0 0,0 0 0,-1 0 0,1 0 0,-1-1 0,3-1 0,4-4 0,25-16 0,257-184 0,-258 185 0,2 2 0,0 1 0,62-25 0,-64 30 0,3 0 0,1 3 0,40-9 0,43-14 0,-106 29 0,16-6 0,1 0 0,0 2 0,32-4 0,-34 11-1365</inkml:trace>
+</inkml:ink>
+</file>
+
+<file path=ppt/ink/ink13.xml><?xml version="1.0" encoding="utf-8"?>
+<inkml:ink xmlns:inkml="http://www.w3.org/2003/InkML">
+  <inkml:definitions>
+    <inkml:context xml:id="ctx0">
+      <inkml:inkSource xml:id="inkSrc0">
+        <inkml:traceFormat>
+          <inkml:channel name="X" type="integer" min="-2.14748E9" max="2.14748E9" units="cm"/>
+          <inkml:channel name="Y" type="integer" min="-2.14748E9" max="2.14748E9" units="cm"/>
+          <inkml:channel name="F" type="integer" max="32767" units="dev"/>
+        </inkml:traceFormat>
+        <inkml:channelProperties>
+          <inkml:channelProperty channel="X" name="resolution" value="1000" units="1/cm"/>
+          <inkml:channelProperty channel="Y" name="resolution" value="1000" units="1/cm"/>
+          <inkml:channelProperty channel="F" name="resolution" value="0" units="1/dev"/>
+        </inkml:channelProperties>
+      </inkml:inkSource>
+      <inkml:timestamp xml:id="ts0" timeString="2026-03-06T14:50:24.993"/>
+    </inkml:context>
+    <inkml:brush xml:id="br0">
+      <inkml:brushProperty name="width" value="0.07938" units="cm"/>
+      <inkml:brushProperty name="height" value="0.07938" units="cm"/>
+      <inkml:brushProperty name="color" value="#FF0000"/>
+    </inkml:brush>
+  </inkml:definitions>
+  <inkml:trace contextRef="#ctx0" brushRef="#br0">0 0 24575,'0'0'0,"0"0"0,0 0 0,0 0 0,0 0 0,0 0 0,0 0 0,0 0 0,0 0 0,0 0 0,24 21 0,-10-12 0,0 0 0,1-1 0,0-1 0,19 7 0,-22-9 0,34 11 0,-45-15 0,0 0 0,0 0 0,0 0 0,0 0 0,0 0 0,-1 0 0,1 0 0,-1 1 0,1-1 0,-1 0 0,1 0 0,-1 1 0,1-1 0,-1 0 0,0 1 0,0-1 0,0 1 0,0-1 0,0 2 0,0 29 0,0-31 0,-2 17 0,-1-1 0,-1 0 0,-1-1 0,0 1 0,-11 24 0,7-19 0,-12 45 0,21-67-28,-1 1 1,1-1-1,0 0 0,0 1 0,0-1 0,-1 0 0,1 1 0,0-1 0,0 0 1,0 1-1,0-1 0,0 1 0,0-1 0,0 0 0,0 1 0,0-1 1,0 1-1,0-1 0,0 0 0,0 1 0,0-1 0,0 0 0,0 1 1,1-1-1,-1 1 0,0-1 0,0 0 0,0 1 0,1-1 0,-1 0 1,0 0-1,0 1 0,1-1 0,-1 0 0,0 1 0,0-1 0,1 0 0,-1 0 1,0 0-1,1 1 0,-1-1 0,0 0 0,1 0 0,-1 0 0,1 0 1,-1 0-1,0 0 0,1 1 0</inkml:trace>
 </inkml:ink>
 </file>
 
@@ -289,6 +411,90 @@
 </inkml:ink>
 </file>
 
+<file path=ppt/ink/ink7.xml><?xml version="1.0" encoding="utf-8"?>
+<inkml:ink xmlns:inkml="http://www.w3.org/2003/InkML">
+  <inkml:definitions>
+    <inkml:context xml:id="ctx0">
+      <inkml:inkSource xml:id="inkSrc0">
+        <inkml:traceFormat>
+          <inkml:channel name="X" type="integer" min="-2.14748E9" max="2.14748E9" units="cm"/>
+          <inkml:channel name="Y" type="integer" min="-2.14748E9" max="2.14748E9" units="cm"/>
+          <inkml:channel name="F" type="integer" max="32767" units="dev"/>
+        </inkml:traceFormat>
+        <inkml:channelProperties>
+          <inkml:channelProperty channel="X" name="resolution" value="1000" units="1/cm"/>
+          <inkml:channelProperty channel="Y" name="resolution" value="1000" units="1/cm"/>
+          <inkml:channelProperty channel="F" name="resolution" value="0" units="1/dev"/>
+        </inkml:channelProperties>
+      </inkml:inkSource>
+      <inkml:timestamp xml:id="ts0" timeString="2026-03-02T05:41:32.015"/>
+    </inkml:context>
+    <inkml:brush xml:id="br0">
+      <inkml:brushProperty name="width" value="0.05" units="cm"/>
+      <inkml:brushProperty name="height" value="0.05" units="cm"/>
+      <inkml:brushProperty name="color" value="#E71224"/>
+    </inkml:brush>
+  </inkml:definitions>
+  <inkml:trace contextRef="#ctx0" brushRef="#br0">1 0 24575,'0'5'-8191</inkml:trace>
+</inkml:ink>
+</file>
+
+<file path=ppt/ink/ink8.xml><?xml version="1.0" encoding="utf-8"?>
+<inkml:ink xmlns:inkml="http://www.w3.org/2003/InkML">
+  <inkml:definitions>
+    <inkml:context xml:id="ctx0">
+      <inkml:inkSource xml:id="inkSrc0">
+        <inkml:traceFormat>
+          <inkml:channel name="X" type="integer" min="-2.14748E9" max="2.14748E9" units="cm"/>
+          <inkml:channel name="Y" type="integer" min="-2.14748E9" max="2.14748E9" units="cm"/>
+          <inkml:channel name="F" type="integer" max="32767" units="dev"/>
+        </inkml:traceFormat>
+        <inkml:channelProperties>
+          <inkml:channelProperty channel="X" name="resolution" value="1000" units="1/cm"/>
+          <inkml:channelProperty channel="Y" name="resolution" value="1000" units="1/cm"/>
+          <inkml:channelProperty channel="F" name="resolution" value="0" units="1/dev"/>
+        </inkml:channelProperties>
+      </inkml:inkSource>
+      <inkml:timestamp xml:id="ts0" timeString="2026-03-02T19:05:24.662"/>
+    </inkml:context>
+    <inkml:brush xml:id="br0">
+      <inkml:brushProperty name="width" value="0.05" units="cm"/>
+      <inkml:brushProperty name="height" value="0.05" units="cm"/>
+      <inkml:brushProperty name="color" value="#FF0000"/>
+    </inkml:brush>
+  </inkml:definitions>
+  <inkml:trace contextRef="#ctx0" brushRef="#br0">0 777 24575,'0'0'0,"0"0"0,0 0 0,0 0 0,0 0 0,0 0 0,0 0 0,0 0 0,0 0 0,0 0 0,0 0 0,0 0 0,0 0 0,0 0 0,0 0 0,0 0 0,0 0 0,0 0 0,14-59 0,-1 24 0,3 0 0,0 0 0,3 2 0,0 0 0,2 1 0,2 1 0,0 2 0,50-49 0,-7 19 0,2 2 0,124-78 0,-160 116 0,2 1 0,0 3 0,1 0 0,0 2 0,1 2 0,1 1 0,-1 2 0,2 2 0,-1 1 0,57 0 0,-38 5 0,1 3 0,-1 2 0,0 2 0,-1 3 0,1 2 0,73 27 0,-74-15 0,-1 1 0,56 38 0,68 32 0,-139-76 0,-1 2 0,51 38 0,42 24 0,112 41 0,-187-94 0,-36-21 0,-1 0 0,-1 2 0,1 0 0,-2 1 0,0 1 0,0 0 0,18 20 0,-34-24-1365</inkml:trace>
+</inkml:ink>
+</file>
+
+<file path=ppt/ink/ink9.xml><?xml version="1.0" encoding="utf-8"?>
+<inkml:ink xmlns:inkml="http://www.w3.org/2003/InkML">
+  <inkml:definitions>
+    <inkml:context xml:id="ctx0">
+      <inkml:inkSource xml:id="inkSrc0">
+        <inkml:traceFormat>
+          <inkml:channel name="X" type="integer" min="-2.14748E9" max="2.14748E9" units="cm"/>
+          <inkml:channel name="Y" type="integer" min="-2.14748E9" max="2.14748E9" units="cm"/>
+          <inkml:channel name="F" type="integer" max="32767" units="dev"/>
+        </inkml:traceFormat>
+        <inkml:channelProperties>
+          <inkml:channelProperty channel="X" name="resolution" value="1000" units="1/cm"/>
+          <inkml:channelProperty channel="Y" name="resolution" value="1000" units="1/cm"/>
+          <inkml:channelProperty channel="F" name="resolution" value="0" units="1/dev"/>
+        </inkml:channelProperties>
+      </inkml:inkSource>
+      <inkml:timestamp xml:id="ts0" timeString="2026-03-02T19:05:26.594"/>
+    </inkml:context>
+    <inkml:brush xml:id="br0">
+      <inkml:brushProperty name="width" value="0.05" units="cm"/>
+      <inkml:brushProperty name="height" value="0.05" units="cm"/>
+      <inkml:brushProperty name="color" value="#FF0000"/>
+    </inkml:brush>
+  </inkml:definitions>
+  <inkml:trace contextRef="#ctx0" brushRef="#br0">453 0 24575,'21'54'0,"-18"-40"0,123 311 0,-128-324 0,1 1 0,0 0 0,-1 0 0,1-1 0,-1 1 0,1-1 0,-1 0 0,0 1 0,0-1 0,0 0 0,0 0 0,0 0 0,0 0 0,0 0 0,0-1 0,0 1 0,0-1 0,0 1 0,-3-1 0,-53 16 0,57-16 0,-64 19 0,39-10 0,0-2 0,-54 8 0,-4 63 0,39-45 0,24-19 0,1 1 0,0 1 0,1 0 0,0 2 0,2 0 0,0 1 0,-17 25 0,32-36-39,2-8 16,0 0 1,0 1-1,0-1 0,0 0 0,0 0 0,0 1 0,0-1 0,0 0 0,0 0 1,0 1-1,0-1 0,0 0 0,0 0 0,0 1 0,0-1 0,0 0 1,0 0-1,-1 1 0,1-1 0,0 0 0,0 0 0,0 1 0,0-1 0,0 0 1,-1 0-1,1 0 0,0 1 0,0-1 0,0 0 0,-1 0 0,1 0 1,0 0-1,0 1 0,0-1 0,-1 0 0,1 0 0,0 0 0,0 0 0,-1 0 1,1 0-1,0 0 0,-1 0 0,1 0 0,0 0 0,0 0 0,-1 0 0,1 0 1,0 0-1,0 0 0,-1 0 0,1 0 0,0 0 0,0 0 0,-1 0 1,1 0-1,0-1 0,-1 1 0</inkml:trace>
+</inkml:ink>
+</file>
+
 <file path=ppt/notesMasters/notesMaster1.xml><?xml version="1.0" encoding="utf-8"?>
 <p:notesMaster xmlns:a="http://schemas.openxmlformats.org/drawingml/2006/main" xmlns:r="http://schemas.openxmlformats.org/officeDocument/2006/relationships" xmlns:p="http://schemas.openxmlformats.org/presentationml/2006/main">
   <p:cSld>
@@ -371,7 +577,7 @@
           <a:p>
             <a:fld id="{2FE14760-2987-41FC-B6E1-A6F257AE46F6}" type="datetimeFigureOut">
               <a:rPr lang="en-US" smtClean="0"/>
-              <a:t>3/2/2026</a:t>
+              <a:t>3/7/2026</a:t>
             </a:fld>
             <a:endParaRPr lang="en-US"/>
           </a:p>
@@ -806,6 +1012,1182 @@
 </p:notes>
 </file>
 
+<file path=ppt/notesSlides/notesSlide10.xml><?xml version="1.0" encoding="utf-8"?>
+<p:notes xmlns:a="http://schemas.openxmlformats.org/drawingml/2006/main" xmlns:r="http://schemas.openxmlformats.org/officeDocument/2006/relationships" xmlns:p="http://schemas.openxmlformats.org/presentationml/2006/main">
+  <p:cSld>
+    <p:spTree>
+      <p:nvGrpSpPr>
+        <p:cNvPr id="1" name="">
+          <a:extLst>
+            <a:ext uri="{FF2B5EF4-FFF2-40B4-BE49-F238E27FC236}">
+              <a16:creationId xmlns:a16="http://schemas.microsoft.com/office/drawing/2014/main" id="{03583349-6DEE-771A-72D8-1D5F09169CC8}"/>
+            </a:ext>
+          </a:extLst>
+        </p:cNvPr>
+        <p:cNvGrpSpPr/>
+        <p:nvPr/>
+      </p:nvGrpSpPr>
+      <p:grpSpPr>
+        <a:xfrm>
+          <a:off x="0" y="0"/>
+          <a:ext cx="0" cy="0"/>
+          <a:chOff x="0" y="0"/>
+          <a:chExt cx="0" cy="0"/>
+        </a:xfrm>
+      </p:grpSpPr>
+      <p:sp>
+        <p:nvSpPr>
+          <p:cNvPr id="2" name="Slide Image Placeholder 1">
+            <a:extLst>
+              <a:ext uri="{FF2B5EF4-FFF2-40B4-BE49-F238E27FC236}">
+                <a16:creationId xmlns:a16="http://schemas.microsoft.com/office/drawing/2014/main" id="{5BC2E0D8-AE83-3387-5581-7E634853A86C}"/>
+              </a:ext>
+            </a:extLst>
+          </p:cNvPr>
+          <p:cNvSpPr>
+            <a:spLocks noGrp="1" noRot="1" noChangeAspect="1"/>
+          </p:cNvSpPr>
+          <p:nvPr>
+            <p:ph type="sldImg"/>
+          </p:nvPr>
+        </p:nvSpPr>
+        <p:spPr/>
+      </p:sp>
+      <p:sp>
+        <p:nvSpPr>
+          <p:cNvPr id="3" name="Notes Placeholder 2">
+            <a:extLst>
+              <a:ext uri="{FF2B5EF4-FFF2-40B4-BE49-F238E27FC236}">
+                <a16:creationId xmlns:a16="http://schemas.microsoft.com/office/drawing/2014/main" id="{7C2777A9-1A27-E6E1-80BF-BC2F14B7F810}"/>
+              </a:ext>
+            </a:extLst>
+          </p:cNvPr>
+          <p:cNvSpPr>
+            <a:spLocks noGrp="1"/>
+          </p:cNvSpPr>
+          <p:nvPr>
+            <p:ph type="body" idx="1"/>
+          </p:nvPr>
+        </p:nvSpPr>
+        <p:spPr/>
+        <p:txBody>
+          <a:bodyPr/>
+          <a:lstStyle/>
+          <a:p>
+            <a:endParaRPr lang="en-US" dirty="0"/>
+          </a:p>
+        </p:txBody>
+      </p:sp>
+      <p:sp>
+        <p:nvSpPr>
+          <p:cNvPr id="4" name="Slide Number Placeholder 3">
+            <a:extLst>
+              <a:ext uri="{FF2B5EF4-FFF2-40B4-BE49-F238E27FC236}">
+                <a16:creationId xmlns:a16="http://schemas.microsoft.com/office/drawing/2014/main" id="{CEF6AFFE-E99C-FFB0-6031-BCE22E27E204}"/>
+              </a:ext>
+            </a:extLst>
+          </p:cNvPr>
+          <p:cNvSpPr>
+            <a:spLocks noGrp="1"/>
+          </p:cNvSpPr>
+          <p:nvPr>
+            <p:ph type="sldNum" sz="quarter" idx="5"/>
+          </p:nvPr>
+        </p:nvSpPr>
+        <p:spPr/>
+        <p:txBody>
+          <a:bodyPr/>
+          <a:lstStyle/>
+          <a:p>
+            <a:pPr marL="0" marR="0" lvl="0" indent="0" algn="r" defTabSz="914400" rtl="0" eaLnBrk="1" fontAlgn="auto" latinLnBrk="0" hangingPunct="1">
+              <a:lnSpc>
+                <a:spcPct val="100000"/>
+              </a:lnSpc>
+              <a:spcBef>
+                <a:spcPts val="0"/>
+              </a:spcBef>
+              <a:spcAft>
+                <a:spcPts val="0"/>
+              </a:spcAft>
+              <a:buClrTx/>
+              <a:buSzTx/>
+              <a:buFontTx/>
+              <a:buNone/>
+              <a:tabLst/>
+              <a:defRPr/>
+            </a:pPr>
+            <a:fld id="{092CD1D2-9E42-4E1F-B86C-5AF6F74F6041}" type="slidenum">
+              <a:rPr kumimoji="0" lang="en-US" sz="1200" b="0" i="0" u="none" strike="noStrike" kern="1200" cap="none" spc="0" normalizeH="0" baseline="0" noProof="0" smtClean="0">
+                <a:ln>
+                  <a:noFill/>
+                </a:ln>
+                <a:solidFill>
+                  <a:prstClr val="black"/>
+                </a:solidFill>
+                <a:effectLst/>
+                <a:uLnTx/>
+                <a:uFillTx/>
+                <a:latin typeface="Aptos" panose="02110004020202020204"/>
+                <a:ea typeface="+mn-ea"/>
+                <a:cs typeface="+mn-cs"/>
+              </a:rPr>
+              <a:pPr marL="0" marR="0" lvl="0" indent="0" algn="r" defTabSz="914400" rtl="0" eaLnBrk="1" fontAlgn="auto" latinLnBrk="0" hangingPunct="1">
+                <a:lnSpc>
+                  <a:spcPct val="100000"/>
+                </a:lnSpc>
+                <a:spcBef>
+                  <a:spcPts val="0"/>
+                </a:spcBef>
+                <a:spcAft>
+                  <a:spcPts val="0"/>
+                </a:spcAft>
+                <a:buClrTx/>
+                <a:buSzTx/>
+                <a:buFontTx/>
+                <a:buNone/>
+                <a:tabLst/>
+                <a:defRPr/>
+              </a:pPr>
+              <a:t>11</a:t>
+            </a:fld>
+            <a:endParaRPr kumimoji="0" lang="en-US" sz="1200" b="0" i="0" u="none" strike="noStrike" kern="1200" cap="none" spc="0" normalizeH="0" baseline="0" noProof="0">
+              <a:ln>
+                <a:noFill/>
+              </a:ln>
+              <a:solidFill>
+                <a:prstClr val="black"/>
+              </a:solidFill>
+              <a:effectLst/>
+              <a:uLnTx/>
+              <a:uFillTx/>
+              <a:latin typeface="Aptos" panose="02110004020202020204"/>
+              <a:ea typeface="+mn-ea"/>
+              <a:cs typeface="+mn-cs"/>
+            </a:endParaRPr>
+          </a:p>
+        </p:txBody>
+      </p:sp>
+    </p:spTree>
+    <p:extLst>
+      <p:ext uri="{BB962C8B-B14F-4D97-AF65-F5344CB8AC3E}">
+        <p14:creationId xmlns:p14="http://schemas.microsoft.com/office/powerpoint/2010/main" val="3571132782"/>
+      </p:ext>
+    </p:extLst>
+  </p:cSld>
+  <p:clrMapOvr>
+    <a:masterClrMapping/>
+  </p:clrMapOvr>
+</p:notes>
+</file>
+
+<file path=ppt/notesSlides/notesSlide11.xml><?xml version="1.0" encoding="utf-8"?>
+<p:notes xmlns:a="http://schemas.openxmlformats.org/drawingml/2006/main" xmlns:r="http://schemas.openxmlformats.org/officeDocument/2006/relationships" xmlns:p="http://schemas.openxmlformats.org/presentationml/2006/main">
+  <p:cSld>
+    <p:spTree>
+      <p:nvGrpSpPr>
+        <p:cNvPr id="1" name="">
+          <a:extLst>
+            <a:ext uri="{FF2B5EF4-FFF2-40B4-BE49-F238E27FC236}">
+              <a16:creationId xmlns:a16="http://schemas.microsoft.com/office/drawing/2014/main" id="{EC3D5CBC-1922-DE29-3882-E198448BBFE3}"/>
+            </a:ext>
+          </a:extLst>
+        </p:cNvPr>
+        <p:cNvGrpSpPr/>
+        <p:nvPr/>
+      </p:nvGrpSpPr>
+      <p:grpSpPr>
+        <a:xfrm>
+          <a:off x="0" y="0"/>
+          <a:ext cx="0" cy="0"/>
+          <a:chOff x="0" y="0"/>
+          <a:chExt cx="0" cy="0"/>
+        </a:xfrm>
+      </p:grpSpPr>
+      <p:sp>
+        <p:nvSpPr>
+          <p:cNvPr id="2" name="Slide Image Placeholder 1">
+            <a:extLst>
+              <a:ext uri="{FF2B5EF4-FFF2-40B4-BE49-F238E27FC236}">
+                <a16:creationId xmlns:a16="http://schemas.microsoft.com/office/drawing/2014/main" id="{0F3096A9-3356-F2ED-526B-FF0F25BE3B1B}"/>
+              </a:ext>
+            </a:extLst>
+          </p:cNvPr>
+          <p:cNvSpPr>
+            <a:spLocks noGrp="1" noRot="1" noChangeAspect="1"/>
+          </p:cNvSpPr>
+          <p:nvPr>
+            <p:ph type="sldImg"/>
+          </p:nvPr>
+        </p:nvSpPr>
+        <p:spPr/>
+      </p:sp>
+      <p:sp>
+        <p:nvSpPr>
+          <p:cNvPr id="3" name="Notes Placeholder 2">
+            <a:extLst>
+              <a:ext uri="{FF2B5EF4-FFF2-40B4-BE49-F238E27FC236}">
+                <a16:creationId xmlns:a16="http://schemas.microsoft.com/office/drawing/2014/main" id="{86F55A2D-938E-94C2-F735-4F630A1E7DB5}"/>
+              </a:ext>
+            </a:extLst>
+          </p:cNvPr>
+          <p:cNvSpPr>
+            <a:spLocks noGrp="1"/>
+          </p:cNvSpPr>
+          <p:nvPr>
+            <p:ph type="body" idx="1"/>
+          </p:nvPr>
+        </p:nvSpPr>
+        <p:spPr/>
+        <p:txBody>
+          <a:bodyPr/>
+          <a:lstStyle/>
+          <a:p>
+            <a:endParaRPr lang="en-US" dirty="0"/>
+          </a:p>
+        </p:txBody>
+      </p:sp>
+      <p:sp>
+        <p:nvSpPr>
+          <p:cNvPr id="4" name="Slide Number Placeholder 3">
+            <a:extLst>
+              <a:ext uri="{FF2B5EF4-FFF2-40B4-BE49-F238E27FC236}">
+                <a16:creationId xmlns:a16="http://schemas.microsoft.com/office/drawing/2014/main" id="{13B0D6C5-934D-368B-640E-BE4732360A8C}"/>
+              </a:ext>
+            </a:extLst>
+          </p:cNvPr>
+          <p:cNvSpPr>
+            <a:spLocks noGrp="1"/>
+          </p:cNvSpPr>
+          <p:nvPr>
+            <p:ph type="sldNum" sz="quarter" idx="5"/>
+          </p:nvPr>
+        </p:nvSpPr>
+        <p:spPr/>
+        <p:txBody>
+          <a:bodyPr/>
+          <a:lstStyle/>
+          <a:p>
+            <a:pPr marL="0" marR="0" lvl="0" indent="0" algn="r" defTabSz="914400" rtl="0" eaLnBrk="1" fontAlgn="auto" latinLnBrk="0" hangingPunct="1">
+              <a:lnSpc>
+                <a:spcPct val="100000"/>
+              </a:lnSpc>
+              <a:spcBef>
+                <a:spcPts val="0"/>
+              </a:spcBef>
+              <a:spcAft>
+                <a:spcPts val="0"/>
+              </a:spcAft>
+              <a:buClrTx/>
+              <a:buSzTx/>
+              <a:buFontTx/>
+              <a:buNone/>
+              <a:tabLst/>
+              <a:defRPr/>
+            </a:pPr>
+            <a:fld id="{092CD1D2-9E42-4E1F-B86C-5AF6F74F6041}" type="slidenum">
+              <a:rPr kumimoji="0" lang="en-US" sz="1200" b="0" i="0" u="none" strike="noStrike" kern="1200" cap="none" spc="0" normalizeH="0" baseline="0" noProof="0" smtClean="0">
+                <a:ln>
+                  <a:noFill/>
+                </a:ln>
+                <a:solidFill>
+                  <a:prstClr val="black"/>
+                </a:solidFill>
+                <a:effectLst/>
+                <a:uLnTx/>
+                <a:uFillTx/>
+                <a:latin typeface="Aptos" panose="02110004020202020204"/>
+                <a:ea typeface="+mn-ea"/>
+                <a:cs typeface="+mn-cs"/>
+              </a:rPr>
+              <a:pPr marL="0" marR="0" lvl="0" indent="0" algn="r" defTabSz="914400" rtl="0" eaLnBrk="1" fontAlgn="auto" latinLnBrk="0" hangingPunct="1">
+                <a:lnSpc>
+                  <a:spcPct val="100000"/>
+                </a:lnSpc>
+                <a:spcBef>
+                  <a:spcPts val="0"/>
+                </a:spcBef>
+                <a:spcAft>
+                  <a:spcPts val="0"/>
+                </a:spcAft>
+                <a:buClrTx/>
+                <a:buSzTx/>
+                <a:buFontTx/>
+                <a:buNone/>
+                <a:tabLst/>
+                <a:defRPr/>
+              </a:pPr>
+              <a:t>12</a:t>
+            </a:fld>
+            <a:endParaRPr kumimoji="0" lang="en-US" sz="1200" b="0" i="0" u="none" strike="noStrike" kern="1200" cap="none" spc="0" normalizeH="0" baseline="0" noProof="0">
+              <a:ln>
+                <a:noFill/>
+              </a:ln>
+              <a:solidFill>
+                <a:prstClr val="black"/>
+              </a:solidFill>
+              <a:effectLst/>
+              <a:uLnTx/>
+              <a:uFillTx/>
+              <a:latin typeface="Aptos" panose="02110004020202020204"/>
+              <a:ea typeface="+mn-ea"/>
+              <a:cs typeface="+mn-cs"/>
+            </a:endParaRPr>
+          </a:p>
+        </p:txBody>
+      </p:sp>
+    </p:spTree>
+    <p:extLst>
+      <p:ext uri="{BB962C8B-B14F-4D97-AF65-F5344CB8AC3E}">
+        <p14:creationId xmlns:p14="http://schemas.microsoft.com/office/powerpoint/2010/main" val="101504218"/>
+      </p:ext>
+    </p:extLst>
+  </p:cSld>
+  <p:clrMapOvr>
+    <a:masterClrMapping/>
+  </p:clrMapOvr>
+</p:notes>
+</file>
+
+<file path=ppt/notesSlides/notesSlide12.xml><?xml version="1.0" encoding="utf-8"?>
+<p:notes xmlns:a="http://schemas.openxmlformats.org/drawingml/2006/main" xmlns:r="http://schemas.openxmlformats.org/officeDocument/2006/relationships" xmlns:p="http://schemas.openxmlformats.org/presentationml/2006/main">
+  <p:cSld>
+    <p:spTree>
+      <p:nvGrpSpPr>
+        <p:cNvPr id="1" name="">
+          <a:extLst>
+            <a:ext uri="{FF2B5EF4-FFF2-40B4-BE49-F238E27FC236}">
+              <a16:creationId xmlns:a16="http://schemas.microsoft.com/office/drawing/2014/main" id="{1978EB9D-8E78-D76D-57A9-E55747C982BC}"/>
+            </a:ext>
+          </a:extLst>
+        </p:cNvPr>
+        <p:cNvGrpSpPr/>
+        <p:nvPr/>
+      </p:nvGrpSpPr>
+      <p:grpSpPr>
+        <a:xfrm>
+          <a:off x="0" y="0"/>
+          <a:ext cx="0" cy="0"/>
+          <a:chOff x="0" y="0"/>
+          <a:chExt cx="0" cy="0"/>
+        </a:xfrm>
+      </p:grpSpPr>
+      <p:sp>
+        <p:nvSpPr>
+          <p:cNvPr id="2" name="Slide Image Placeholder 1">
+            <a:extLst>
+              <a:ext uri="{FF2B5EF4-FFF2-40B4-BE49-F238E27FC236}">
+                <a16:creationId xmlns:a16="http://schemas.microsoft.com/office/drawing/2014/main" id="{5CF786AB-F312-5AD9-0004-549A06C594EE}"/>
+              </a:ext>
+            </a:extLst>
+          </p:cNvPr>
+          <p:cNvSpPr>
+            <a:spLocks noGrp="1" noRot="1" noChangeAspect="1"/>
+          </p:cNvSpPr>
+          <p:nvPr>
+            <p:ph type="sldImg"/>
+          </p:nvPr>
+        </p:nvSpPr>
+        <p:spPr/>
+      </p:sp>
+      <p:sp>
+        <p:nvSpPr>
+          <p:cNvPr id="3" name="Notes Placeholder 2">
+            <a:extLst>
+              <a:ext uri="{FF2B5EF4-FFF2-40B4-BE49-F238E27FC236}">
+                <a16:creationId xmlns:a16="http://schemas.microsoft.com/office/drawing/2014/main" id="{D1CE53E0-E7BD-4A14-83EE-FBFA82C467D9}"/>
+              </a:ext>
+            </a:extLst>
+          </p:cNvPr>
+          <p:cNvSpPr>
+            <a:spLocks noGrp="1"/>
+          </p:cNvSpPr>
+          <p:nvPr>
+            <p:ph type="body" idx="1"/>
+          </p:nvPr>
+        </p:nvSpPr>
+        <p:spPr/>
+        <p:txBody>
+          <a:bodyPr/>
+          <a:lstStyle/>
+          <a:p>
+            <a:endParaRPr lang="en-US" dirty="0"/>
+          </a:p>
+        </p:txBody>
+      </p:sp>
+      <p:sp>
+        <p:nvSpPr>
+          <p:cNvPr id="4" name="Slide Number Placeholder 3">
+            <a:extLst>
+              <a:ext uri="{FF2B5EF4-FFF2-40B4-BE49-F238E27FC236}">
+                <a16:creationId xmlns:a16="http://schemas.microsoft.com/office/drawing/2014/main" id="{E928CC13-94BF-9A0E-B73E-E27DC0EA7372}"/>
+              </a:ext>
+            </a:extLst>
+          </p:cNvPr>
+          <p:cNvSpPr>
+            <a:spLocks noGrp="1"/>
+          </p:cNvSpPr>
+          <p:nvPr>
+            <p:ph type="sldNum" sz="quarter" idx="5"/>
+          </p:nvPr>
+        </p:nvSpPr>
+        <p:spPr/>
+        <p:txBody>
+          <a:bodyPr/>
+          <a:lstStyle/>
+          <a:p>
+            <a:pPr marL="0" marR="0" lvl="0" indent="0" algn="r" defTabSz="914400" rtl="0" eaLnBrk="1" fontAlgn="auto" latinLnBrk="0" hangingPunct="1">
+              <a:lnSpc>
+                <a:spcPct val="100000"/>
+              </a:lnSpc>
+              <a:spcBef>
+                <a:spcPts val="0"/>
+              </a:spcBef>
+              <a:spcAft>
+                <a:spcPts val="0"/>
+              </a:spcAft>
+              <a:buClrTx/>
+              <a:buSzTx/>
+              <a:buFontTx/>
+              <a:buNone/>
+              <a:tabLst/>
+              <a:defRPr/>
+            </a:pPr>
+            <a:fld id="{092CD1D2-9E42-4E1F-B86C-5AF6F74F6041}" type="slidenum">
+              <a:rPr kumimoji="0" lang="en-US" sz="1200" b="0" i="0" u="none" strike="noStrike" kern="1200" cap="none" spc="0" normalizeH="0" baseline="0" noProof="0" smtClean="0">
+                <a:ln>
+                  <a:noFill/>
+                </a:ln>
+                <a:solidFill>
+                  <a:prstClr val="black"/>
+                </a:solidFill>
+                <a:effectLst/>
+                <a:uLnTx/>
+                <a:uFillTx/>
+                <a:latin typeface="Aptos" panose="02110004020202020204"/>
+                <a:ea typeface="+mn-ea"/>
+                <a:cs typeface="+mn-cs"/>
+              </a:rPr>
+              <a:pPr marL="0" marR="0" lvl="0" indent="0" algn="r" defTabSz="914400" rtl="0" eaLnBrk="1" fontAlgn="auto" latinLnBrk="0" hangingPunct="1">
+                <a:lnSpc>
+                  <a:spcPct val="100000"/>
+                </a:lnSpc>
+                <a:spcBef>
+                  <a:spcPts val="0"/>
+                </a:spcBef>
+                <a:spcAft>
+                  <a:spcPts val="0"/>
+                </a:spcAft>
+                <a:buClrTx/>
+                <a:buSzTx/>
+                <a:buFontTx/>
+                <a:buNone/>
+                <a:tabLst/>
+                <a:defRPr/>
+              </a:pPr>
+              <a:t>13</a:t>
+            </a:fld>
+            <a:endParaRPr kumimoji="0" lang="en-US" sz="1200" b="0" i="0" u="none" strike="noStrike" kern="1200" cap="none" spc="0" normalizeH="0" baseline="0" noProof="0">
+              <a:ln>
+                <a:noFill/>
+              </a:ln>
+              <a:solidFill>
+                <a:prstClr val="black"/>
+              </a:solidFill>
+              <a:effectLst/>
+              <a:uLnTx/>
+              <a:uFillTx/>
+              <a:latin typeface="Aptos" panose="02110004020202020204"/>
+              <a:ea typeface="+mn-ea"/>
+              <a:cs typeface="+mn-cs"/>
+            </a:endParaRPr>
+          </a:p>
+        </p:txBody>
+      </p:sp>
+    </p:spTree>
+    <p:extLst>
+      <p:ext uri="{BB962C8B-B14F-4D97-AF65-F5344CB8AC3E}">
+        <p14:creationId xmlns:p14="http://schemas.microsoft.com/office/powerpoint/2010/main" val="3810002525"/>
+      </p:ext>
+    </p:extLst>
+  </p:cSld>
+  <p:clrMapOvr>
+    <a:masterClrMapping/>
+  </p:clrMapOvr>
+</p:notes>
+</file>
+
+<file path=ppt/notesSlides/notesSlide13.xml><?xml version="1.0" encoding="utf-8"?>
+<p:notes xmlns:a="http://schemas.openxmlformats.org/drawingml/2006/main" xmlns:r="http://schemas.openxmlformats.org/officeDocument/2006/relationships" xmlns:p="http://schemas.openxmlformats.org/presentationml/2006/main">
+  <p:cSld>
+    <p:spTree>
+      <p:nvGrpSpPr>
+        <p:cNvPr id="1" name="">
+          <a:extLst>
+            <a:ext uri="{FF2B5EF4-FFF2-40B4-BE49-F238E27FC236}">
+              <a16:creationId xmlns:a16="http://schemas.microsoft.com/office/drawing/2014/main" id="{1208464F-811D-A1D6-B7D8-CBE5C413F010}"/>
+            </a:ext>
+          </a:extLst>
+        </p:cNvPr>
+        <p:cNvGrpSpPr/>
+        <p:nvPr/>
+      </p:nvGrpSpPr>
+      <p:grpSpPr>
+        <a:xfrm>
+          <a:off x="0" y="0"/>
+          <a:ext cx="0" cy="0"/>
+          <a:chOff x="0" y="0"/>
+          <a:chExt cx="0" cy="0"/>
+        </a:xfrm>
+      </p:grpSpPr>
+      <p:sp>
+        <p:nvSpPr>
+          <p:cNvPr id="2" name="Slide Image Placeholder 1">
+            <a:extLst>
+              <a:ext uri="{FF2B5EF4-FFF2-40B4-BE49-F238E27FC236}">
+                <a16:creationId xmlns:a16="http://schemas.microsoft.com/office/drawing/2014/main" id="{50D2CFF3-F226-C93C-D58D-243E0952B6AA}"/>
+              </a:ext>
+            </a:extLst>
+          </p:cNvPr>
+          <p:cNvSpPr>
+            <a:spLocks noGrp="1" noRot="1" noChangeAspect="1"/>
+          </p:cNvSpPr>
+          <p:nvPr>
+            <p:ph type="sldImg"/>
+          </p:nvPr>
+        </p:nvSpPr>
+        <p:spPr/>
+      </p:sp>
+      <p:sp>
+        <p:nvSpPr>
+          <p:cNvPr id="3" name="Notes Placeholder 2">
+            <a:extLst>
+              <a:ext uri="{FF2B5EF4-FFF2-40B4-BE49-F238E27FC236}">
+                <a16:creationId xmlns:a16="http://schemas.microsoft.com/office/drawing/2014/main" id="{A5712811-7B0F-E92F-A3D1-D75D232668F8}"/>
+              </a:ext>
+            </a:extLst>
+          </p:cNvPr>
+          <p:cNvSpPr>
+            <a:spLocks noGrp="1"/>
+          </p:cNvSpPr>
+          <p:nvPr>
+            <p:ph type="body" idx="1"/>
+          </p:nvPr>
+        </p:nvSpPr>
+        <p:spPr/>
+        <p:txBody>
+          <a:bodyPr/>
+          <a:lstStyle/>
+          <a:p>
+            <a:endParaRPr lang="en-US" dirty="0"/>
+          </a:p>
+        </p:txBody>
+      </p:sp>
+      <p:sp>
+        <p:nvSpPr>
+          <p:cNvPr id="4" name="Slide Number Placeholder 3">
+            <a:extLst>
+              <a:ext uri="{FF2B5EF4-FFF2-40B4-BE49-F238E27FC236}">
+                <a16:creationId xmlns:a16="http://schemas.microsoft.com/office/drawing/2014/main" id="{0F23D02C-1D36-5D05-4C4B-195494461F73}"/>
+              </a:ext>
+            </a:extLst>
+          </p:cNvPr>
+          <p:cNvSpPr>
+            <a:spLocks noGrp="1"/>
+          </p:cNvSpPr>
+          <p:nvPr>
+            <p:ph type="sldNum" sz="quarter" idx="5"/>
+          </p:nvPr>
+        </p:nvSpPr>
+        <p:spPr/>
+        <p:txBody>
+          <a:bodyPr/>
+          <a:lstStyle/>
+          <a:p>
+            <a:pPr marL="0" marR="0" lvl="0" indent="0" algn="r" defTabSz="914400" rtl="0" eaLnBrk="1" fontAlgn="auto" latinLnBrk="0" hangingPunct="1">
+              <a:lnSpc>
+                <a:spcPct val="100000"/>
+              </a:lnSpc>
+              <a:spcBef>
+                <a:spcPts val="0"/>
+              </a:spcBef>
+              <a:spcAft>
+                <a:spcPts val="0"/>
+              </a:spcAft>
+              <a:buClrTx/>
+              <a:buSzTx/>
+              <a:buFontTx/>
+              <a:buNone/>
+              <a:tabLst/>
+              <a:defRPr/>
+            </a:pPr>
+            <a:fld id="{092CD1D2-9E42-4E1F-B86C-5AF6F74F6041}" type="slidenum">
+              <a:rPr kumimoji="0" lang="en-US" sz="1200" b="0" i="0" u="none" strike="noStrike" kern="1200" cap="none" spc="0" normalizeH="0" baseline="0" noProof="0" smtClean="0">
+                <a:ln>
+                  <a:noFill/>
+                </a:ln>
+                <a:solidFill>
+                  <a:prstClr val="black"/>
+                </a:solidFill>
+                <a:effectLst/>
+                <a:uLnTx/>
+                <a:uFillTx/>
+                <a:latin typeface="Aptos" panose="02110004020202020204"/>
+                <a:ea typeface="+mn-ea"/>
+                <a:cs typeface="+mn-cs"/>
+              </a:rPr>
+              <a:pPr marL="0" marR="0" lvl="0" indent="0" algn="r" defTabSz="914400" rtl="0" eaLnBrk="1" fontAlgn="auto" latinLnBrk="0" hangingPunct="1">
+                <a:lnSpc>
+                  <a:spcPct val="100000"/>
+                </a:lnSpc>
+                <a:spcBef>
+                  <a:spcPts val="0"/>
+                </a:spcBef>
+                <a:spcAft>
+                  <a:spcPts val="0"/>
+                </a:spcAft>
+                <a:buClrTx/>
+                <a:buSzTx/>
+                <a:buFontTx/>
+                <a:buNone/>
+                <a:tabLst/>
+                <a:defRPr/>
+              </a:pPr>
+              <a:t>14</a:t>
+            </a:fld>
+            <a:endParaRPr kumimoji="0" lang="en-US" sz="1200" b="0" i="0" u="none" strike="noStrike" kern="1200" cap="none" spc="0" normalizeH="0" baseline="0" noProof="0">
+              <a:ln>
+                <a:noFill/>
+              </a:ln>
+              <a:solidFill>
+                <a:prstClr val="black"/>
+              </a:solidFill>
+              <a:effectLst/>
+              <a:uLnTx/>
+              <a:uFillTx/>
+              <a:latin typeface="Aptos" panose="02110004020202020204"/>
+              <a:ea typeface="+mn-ea"/>
+              <a:cs typeface="+mn-cs"/>
+            </a:endParaRPr>
+          </a:p>
+        </p:txBody>
+      </p:sp>
+    </p:spTree>
+    <p:extLst>
+      <p:ext uri="{BB962C8B-B14F-4D97-AF65-F5344CB8AC3E}">
+        <p14:creationId xmlns:p14="http://schemas.microsoft.com/office/powerpoint/2010/main" val="944362918"/>
+      </p:ext>
+    </p:extLst>
+  </p:cSld>
+  <p:clrMapOvr>
+    <a:masterClrMapping/>
+  </p:clrMapOvr>
+</p:notes>
+</file>
+
+<file path=ppt/notesSlides/notesSlide14.xml><?xml version="1.0" encoding="utf-8"?>
+<p:notes xmlns:a="http://schemas.openxmlformats.org/drawingml/2006/main" xmlns:r="http://schemas.openxmlformats.org/officeDocument/2006/relationships" xmlns:p="http://schemas.openxmlformats.org/presentationml/2006/main">
+  <p:cSld>
+    <p:spTree>
+      <p:nvGrpSpPr>
+        <p:cNvPr id="1" name="">
+          <a:extLst>
+            <a:ext uri="{FF2B5EF4-FFF2-40B4-BE49-F238E27FC236}">
+              <a16:creationId xmlns:a16="http://schemas.microsoft.com/office/drawing/2014/main" id="{2E1910FB-29B4-16CA-7738-577BA4287BAC}"/>
+            </a:ext>
+          </a:extLst>
+        </p:cNvPr>
+        <p:cNvGrpSpPr/>
+        <p:nvPr/>
+      </p:nvGrpSpPr>
+      <p:grpSpPr>
+        <a:xfrm>
+          <a:off x="0" y="0"/>
+          <a:ext cx="0" cy="0"/>
+          <a:chOff x="0" y="0"/>
+          <a:chExt cx="0" cy="0"/>
+        </a:xfrm>
+      </p:grpSpPr>
+      <p:sp>
+        <p:nvSpPr>
+          <p:cNvPr id="2" name="Slide Image Placeholder 1">
+            <a:extLst>
+              <a:ext uri="{FF2B5EF4-FFF2-40B4-BE49-F238E27FC236}">
+                <a16:creationId xmlns:a16="http://schemas.microsoft.com/office/drawing/2014/main" id="{F5EF504A-0D1B-3AD4-DA4D-A3DC9F7CDC67}"/>
+              </a:ext>
+            </a:extLst>
+          </p:cNvPr>
+          <p:cNvSpPr>
+            <a:spLocks noGrp="1" noRot="1" noChangeAspect="1"/>
+          </p:cNvSpPr>
+          <p:nvPr>
+            <p:ph type="sldImg"/>
+          </p:nvPr>
+        </p:nvSpPr>
+        <p:spPr/>
+      </p:sp>
+      <p:sp>
+        <p:nvSpPr>
+          <p:cNvPr id="3" name="Notes Placeholder 2">
+            <a:extLst>
+              <a:ext uri="{FF2B5EF4-FFF2-40B4-BE49-F238E27FC236}">
+                <a16:creationId xmlns:a16="http://schemas.microsoft.com/office/drawing/2014/main" id="{1458E4EB-59F2-FB7E-7B63-DA979D56ED86}"/>
+              </a:ext>
+            </a:extLst>
+          </p:cNvPr>
+          <p:cNvSpPr>
+            <a:spLocks noGrp="1"/>
+          </p:cNvSpPr>
+          <p:nvPr>
+            <p:ph type="body" idx="1"/>
+          </p:nvPr>
+        </p:nvSpPr>
+        <p:spPr/>
+        <p:txBody>
+          <a:bodyPr/>
+          <a:lstStyle/>
+          <a:p>
+            <a:endParaRPr lang="en-US" dirty="0"/>
+          </a:p>
+        </p:txBody>
+      </p:sp>
+      <p:sp>
+        <p:nvSpPr>
+          <p:cNvPr id="4" name="Slide Number Placeholder 3">
+            <a:extLst>
+              <a:ext uri="{FF2B5EF4-FFF2-40B4-BE49-F238E27FC236}">
+                <a16:creationId xmlns:a16="http://schemas.microsoft.com/office/drawing/2014/main" id="{F173C432-B512-9BD0-9EF2-7C8C92FC0C57}"/>
+              </a:ext>
+            </a:extLst>
+          </p:cNvPr>
+          <p:cNvSpPr>
+            <a:spLocks noGrp="1"/>
+          </p:cNvSpPr>
+          <p:nvPr>
+            <p:ph type="sldNum" sz="quarter" idx="5"/>
+          </p:nvPr>
+        </p:nvSpPr>
+        <p:spPr/>
+        <p:txBody>
+          <a:bodyPr/>
+          <a:lstStyle/>
+          <a:p>
+            <a:pPr marL="0" marR="0" lvl="0" indent="0" algn="r" defTabSz="914400" rtl="0" eaLnBrk="1" fontAlgn="auto" latinLnBrk="0" hangingPunct="1">
+              <a:lnSpc>
+                <a:spcPct val="100000"/>
+              </a:lnSpc>
+              <a:spcBef>
+                <a:spcPts val="0"/>
+              </a:spcBef>
+              <a:spcAft>
+                <a:spcPts val="0"/>
+              </a:spcAft>
+              <a:buClrTx/>
+              <a:buSzTx/>
+              <a:buFontTx/>
+              <a:buNone/>
+              <a:tabLst/>
+              <a:defRPr/>
+            </a:pPr>
+            <a:fld id="{092CD1D2-9E42-4E1F-B86C-5AF6F74F6041}" type="slidenum">
+              <a:rPr kumimoji="0" lang="en-US" sz="1200" b="0" i="0" u="none" strike="noStrike" kern="1200" cap="none" spc="0" normalizeH="0" baseline="0" noProof="0" smtClean="0">
+                <a:ln>
+                  <a:noFill/>
+                </a:ln>
+                <a:solidFill>
+                  <a:prstClr val="black"/>
+                </a:solidFill>
+                <a:effectLst/>
+                <a:uLnTx/>
+                <a:uFillTx/>
+                <a:latin typeface="Aptos" panose="02110004020202020204"/>
+                <a:ea typeface="+mn-ea"/>
+                <a:cs typeface="+mn-cs"/>
+              </a:rPr>
+              <a:pPr marL="0" marR="0" lvl="0" indent="0" algn="r" defTabSz="914400" rtl="0" eaLnBrk="1" fontAlgn="auto" latinLnBrk="0" hangingPunct="1">
+                <a:lnSpc>
+                  <a:spcPct val="100000"/>
+                </a:lnSpc>
+                <a:spcBef>
+                  <a:spcPts val="0"/>
+                </a:spcBef>
+                <a:spcAft>
+                  <a:spcPts val="0"/>
+                </a:spcAft>
+                <a:buClrTx/>
+                <a:buSzTx/>
+                <a:buFontTx/>
+                <a:buNone/>
+                <a:tabLst/>
+                <a:defRPr/>
+              </a:pPr>
+              <a:t>15</a:t>
+            </a:fld>
+            <a:endParaRPr kumimoji="0" lang="en-US" sz="1200" b="0" i="0" u="none" strike="noStrike" kern="1200" cap="none" spc="0" normalizeH="0" baseline="0" noProof="0">
+              <a:ln>
+                <a:noFill/>
+              </a:ln>
+              <a:solidFill>
+                <a:prstClr val="black"/>
+              </a:solidFill>
+              <a:effectLst/>
+              <a:uLnTx/>
+              <a:uFillTx/>
+              <a:latin typeface="Aptos" panose="02110004020202020204"/>
+              <a:ea typeface="+mn-ea"/>
+              <a:cs typeface="+mn-cs"/>
+            </a:endParaRPr>
+          </a:p>
+        </p:txBody>
+      </p:sp>
+    </p:spTree>
+    <p:extLst>
+      <p:ext uri="{BB962C8B-B14F-4D97-AF65-F5344CB8AC3E}">
+        <p14:creationId xmlns:p14="http://schemas.microsoft.com/office/powerpoint/2010/main" val="1128506830"/>
+      </p:ext>
+    </p:extLst>
+  </p:cSld>
+  <p:clrMapOvr>
+    <a:masterClrMapping/>
+  </p:clrMapOvr>
+</p:notes>
+</file>
+
+<file path=ppt/notesSlides/notesSlide15.xml><?xml version="1.0" encoding="utf-8"?>
+<p:notes xmlns:a="http://schemas.openxmlformats.org/drawingml/2006/main" xmlns:r="http://schemas.openxmlformats.org/officeDocument/2006/relationships" xmlns:p="http://schemas.openxmlformats.org/presentationml/2006/main">
+  <p:cSld>
+    <p:spTree>
+      <p:nvGrpSpPr>
+        <p:cNvPr id="1" name="">
+          <a:extLst>
+            <a:ext uri="{FF2B5EF4-FFF2-40B4-BE49-F238E27FC236}">
+              <a16:creationId xmlns:a16="http://schemas.microsoft.com/office/drawing/2014/main" id="{D6658FCD-3EBC-93FF-6E95-CA756D68FD2B}"/>
+            </a:ext>
+          </a:extLst>
+        </p:cNvPr>
+        <p:cNvGrpSpPr/>
+        <p:nvPr/>
+      </p:nvGrpSpPr>
+      <p:grpSpPr>
+        <a:xfrm>
+          <a:off x="0" y="0"/>
+          <a:ext cx="0" cy="0"/>
+          <a:chOff x="0" y="0"/>
+          <a:chExt cx="0" cy="0"/>
+        </a:xfrm>
+      </p:grpSpPr>
+      <p:sp>
+        <p:nvSpPr>
+          <p:cNvPr id="2" name="Slide Image Placeholder 1">
+            <a:extLst>
+              <a:ext uri="{FF2B5EF4-FFF2-40B4-BE49-F238E27FC236}">
+                <a16:creationId xmlns:a16="http://schemas.microsoft.com/office/drawing/2014/main" id="{314027F3-9C12-5116-A0E9-B60318B991C5}"/>
+              </a:ext>
+            </a:extLst>
+          </p:cNvPr>
+          <p:cNvSpPr>
+            <a:spLocks noGrp="1" noRot="1" noChangeAspect="1"/>
+          </p:cNvSpPr>
+          <p:nvPr>
+            <p:ph type="sldImg"/>
+          </p:nvPr>
+        </p:nvSpPr>
+        <p:spPr/>
+      </p:sp>
+      <p:sp>
+        <p:nvSpPr>
+          <p:cNvPr id="3" name="Notes Placeholder 2">
+            <a:extLst>
+              <a:ext uri="{FF2B5EF4-FFF2-40B4-BE49-F238E27FC236}">
+                <a16:creationId xmlns:a16="http://schemas.microsoft.com/office/drawing/2014/main" id="{D435102F-8A84-BD5F-F1CD-C94C51F5CC77}"/>
+              </a:ext>
+            </a:extLst>
+          </p:cNvPr>
+          <p:cNvSpPr>
+            <a:spLocks noGrp="1"/>
+          </p:cNvSpPr>
+          <p:nvPr>
+            <p:ph type="body" idx="1"/>
+          </p:nvPr>
+        </p:nvSpPr>
+        <p:spPr/>
+        <p:txBody>
+          <a:bodyPr/>
+          <a:lstStyle/>
+          <a:p>
+            <a:endParaRPr lang="en-US" dirty="0"/>
+          </a:p>
+        </p:txBody>
+      </p:sp>
+      <p:sp>
+        <p:nvSpPr>
+          <p:cNvPr id="4" name="Slide Number Placeholder 3">
+            <a:extLst>
+              <a:ext uri="{FF2B5EF4-FFF2-40B4-BE49-F238E27FC236}">
+                <a16:creationId xmlns:a16="http://schemas.microsoft.com/office/drawing/2014/main" id="{FFF74946-FFF8-4595-4EEF-B20E66395473}"/>
+              </a:ext>
+            </a:extLst>
+          </p:cNvPr>
+          <p:cNvSpPr>
+            <a:spLocks noGrp="1"/>
+          </p:cNvSpPr>
+          <p:nvPr>
+            <p:ph type="sldNum" sz="quarter" idx="5"/>
+          </p:nvPr>
+        </p:nvSpPr>
+        <p:spPr/>
+        <p:txBody>
+          <a:bodyPr/>
+          <a:lstStyle/>
+          <a:p>
+            <a:pPr marL="0" marR="0" lvl="0" indent="0" algn="r" defTabSz="914400" rtl="0" eaLnBrk="1" fontAlgn="auto" latinLnBrk="0" hangingPunct="1">
+              <a:lnSpc>
+                <a:spcPct val="100000"/>
+              </a:lnSpc>
+              <a:spcBef>
+                <a:spcPts val="0"/>
+              </a:spcBef>
+              <a:spcAft>
+                <a:spcPts val="0"/>
+              </a:spcAft>
+              <a:buClrTx/>
+              <a:buSzTx/>
+              <a:buFontTx/>
+              <a:buNone/>
+              <a:tabLst/>
+              <a:defRPr/>
+            </a:pPr>
+            <a:fld id="{092CD1D2-9E42-4E1F-B86C-5AF6F74F6041}" type="slidenum">
+              <a:rPr kumimoji="0" lang="en-US" sz="1200" b="0" i="0" u="none" strike="noStrike" kern="1200" cap="none" spc="0" normalizeH="0" baseline="0" noProof="0" smtClean="0">
+                <a:ln>
+                  <a:noFill/>
+                </a:ln>
+                <a:solidFill>
+                  <a:prstClr val="black"/>
+                </a:solidFill>
+                <a:effectLst/>
+                <a:uLnTx/>
+                <a:uFillTx/>
+                <a:latin typeface="Aptos" panose="02110004020202020204"/>
+                <a:ea typeface="+mn-ea"/>
+                <a:cs typeface="+mn-cs"/>
+              </a:rPr>
+              <a:pPr marL="0" marR="0" lvl="0" indent="0" algn="r" defTabSz="914400" rtl="0" eaLnBrk="1" fontAlgn="auto" latinLnBrk="0" hangingPunct="1">
+                <a:lnSpc>
+                  <a:spcPct val="100000"/>
+                </a:lnSpc>
+                <a:spcBef>
+                  <a:spcPts val="0"/>
+                </a:spcBef>
+                <a:spcAft>
+                  <a:spcPts val="0"/>
+                </a:spcAft>
+                <a:buClrTx/>
+                <a:buSzTx/>
+                <a:buFontTx/>
+                <a:buNone/>
+                <a:tabLst/>
+                <a:defRPr/>
+              </a:pPr>
+              <a:t>16</a:t>
+            </a:fld>
+            <a:endParaRPr kumimoji="0" lang="en-US" sz="1200" b="0" i="0" u="none" strike="noStrike" kern="1200" cap="none" spc="0" normalizeH="0" baseline="0" noProof="0">
+              <a:ln>
+                <a:noFill/>
+              </a:ln>
+              <a:solidFill>
+                <a:prstClr val="black"/>
+              </a:solidFill>
+              <a:effectLst/>
+              <a:uLnTx/>
+              <a:uFillTx/>
+              <a:latin typeface="Aptos" panose="02110004020202020204"/>
+              <a:ea typeface="+mn-ea"/>
+              <a:cs typeface="+mn-cs"/>
+            </a:endParaRPr>
+          </a:p>
+        </p:txBody>
+      </p:sp>
+    </p:spTree>
+    <p:extLst>
+      <p:ext uri="{BB962C8B-B14F-4D97-AF65-F5344CB8AC3E}">
+        <p14:creationId xmlns:p14="http://schemas.microsoft.com/office/powerpoint/2010/main" val="1693564478"/>
+      </p:ext>
+    </p:extLst>
+  </p:cSld>
+  <p:clrMapOvr>
+    <a:masterClrMapping/>
+  </p:clrMapOvr>
+</p:notes>
+</file>
+
+<file path=ppt/notesSlides/notesSlide16.xml><?xml version="1.0" encoding="utf-8"?>
+<p:notes xmlns:a="http://schemas.openxmlformats.org/drawingml/2006/main" xmlns:r="http://schemas.openxmlformats.org/officeDocument/2006/relationships" xmlns:p="http://schemas.openxmlformats.org/presentationml/2006/main">
+  <p:cSld>
+    <p:spTree>
+      <p:nvGrpSpPr>
+        <p:cNvPr id="1" name="">
+          <a:extLst>
+            <a:ext uri="{FF2B5EF4-FFF2-40B4-BE49-F238E27FC236}">
+              <a16:creationId xmlns:a16="http://schemas.microsoft.com/office/drawing/2014/main" id="{D8DF31EE-B64C-8A98-30B2-CBFF7877C4B6}"/>
+            </a:ext>
+          </a:extLst>
+        </p:cNvPr>
+        <p:cNvGrpSpPr/>
+        <p:nvPr/>
+      </p:nvGrpSpPr>
+      <p:grpSpPr>
+        <a:xfrm>
+          <a:off x="0" y="0"/>
+          <a:ext cx="0" cy="0"/>
+          <a:chOff x="0" y="0"/>
+          <a:chExt cx="0" cy="0"/>
+        </a:xfrm>
+      </p:grpSpPr>
+      <p:sp>
+        <p:nvSpPr>
+          <p:cNvPr id="2" name="Slide Image Placeholder 1">
+            <a:extLst>
+              <a:ext uri="{FF2B5EF4-FFF2-40B4-BE49-F238E27FC236}">
+                <a16:creationId xmlns:a16="http://schemas.microsoft.com/office/drawing/2014/main" id="{EA9F2B75-769B-953D-34D1-CF5C39C15710}"/>
+              </a:ext>
+            </a:extLst>
+          </p:cNvPr>
+          <p:cNvSpPr>
+            <a:spLocks noGrp="1" noRot="1" noChangeAspect="1"/>
+          </p:cNvSpPr>
+          <p:nvPr>
+            <p:ph type="sldImg"/>
+          </p:nvPr>
+        </p:nvSpPr>
+        <p:spPr/>
+      </p:sp>
+      <p:sp>
+        <p:nvSpPr>
+          <p:cNvPr id="3" name="Notes Placeholder 2">
+            <a:extLst>
+              <a:ext uri="{FF2B5EF4-FFF2-40B4-BE49-F238E27FC236}">
+                <a16:creationId xmlns:a16="http://schemas.microsoft.com/office/drawing/2014/main" id="{5C63CFF8-A48D-4522-D4E8-7667D6223DE5}"/>
+              </a:ext>
+            </a:extLst>
+          </p:cNvPr>
+          <p:cNvSpPr>
+            <a:spLocks noGrp="1"/>
+          </p:cNvSpPr>
+          <p:nvPr>
+            <p:ph type="body" idx="1"/>
+          </p:nvPr>
+        </p:nvSpPr>
+        <p:spPr/>
+        <p:txBody>
+          <a:bodyPr/>
+          <a:lstStyle/>
+          <a:p>
+            <a:endParaRPr lang="en-US" dirty="0"/>
+          </a:p>
+        </p:txBody>
+      </p:sp>
+      <p:sp>
+        <p:nvSpPr>
+          <p:cNvPr id="4" name="Slide Number Placeholder 3">
+            <a:extLst>
+              <a:ext uri="{FF2B5EF4-FFF2-40B4-BE49-F238E27FC236}">
+                <a16:creationId xmlns:a16="http://schemas.microsoft.com/office/drawing/2014/main" id="{9A95A1F1-CBC8-CCA3-333C-A3643BFBFF35}"/>
+              </a:ext>
+            </a:extLst>
+          </p:cNvPr>
+          <p:cNvSpPr>
+            <a:spLocks noGrp="1"/>
+          </p:cNvSpPr>
+          <p:nvPr>
+            <p:ph type="sldNum" sz="quarter" idx="5"/>
+          </p:nvPr>
+        </p:nvSpPr>
+        <p:spPr/>
+        <p:txBody>
+          <a:bodyPr/>
+          <a:lstStyle/>
+          <a:p>
+            <a:pPr marL="0" marR="0" lvl="0" indent="0" algn="r" defTabSz="914400" rtl="0" eaLnBrk="1" fontAlgn="auto" latinLnBrk="0" hangingPunct="1">
+              <a:lnSpc>
+                <a:spcPct val="100000"/>
+              </a:lnSpc>
+              <a:spcBef>
+                <a:spcPts val="0"/>
+              </a:spcBef>
+              <a:spcAft>
+                <a:spcPts val="0"/>
+              </a:spcAft>
+              <a:buClrTx/>
+              <a:buSzTx/>
+              <a:buFontTx/>
+              <a:buNone/>
+              <a:tabLst/>
+              <a:defRPr/>
+            </a:pPr>
+            <a:fld id="{092CD1D2-9E42-4E1F-B86C-5AF6F74F6041}" type="slidenum">
+              <a:rPr kumimoji="0" lang="en-US" sz="1200" b="0" i="0" u="none" strike="noStrike" kern="1200" cap="none" spc="0" normalizeH="0" baseline="0" noProof="0" smtClean="0">
+                <a:ln>
+                  <a:noFill/>
+                </a:ln>
+                <a:solidFill>
+                  <a:prstClr val="black"/>
+                </a:solidFill>
+                <a:effectLst/>
+                <a:uLnTx/>
+                <a:uFillTx/>
+                <a:latin typeface="Aptos" panose="02110004020202020204"/>
+                <a:ea typeface="+mn-ea"/>
+                <a:cs typeface="+mn-cs"/>
+              </a:rPr>
+              <a:pPr marL="0" marR="0" lvl="0" indent="0" algn="r" defTabSz="914400" rtl="0" eaLnBrk="1" fontAlgn="auto" latinLnBrk="0" hangingPunct="1">
+                <a:lnSpc>
+                  <a:spcPct val="100000"/>
+                </a:lnSpc>
+                <a:spcBef>
+                  <a:spcPts val="0"/>
+                </a:spcBef>
+                <a:spcAft>
+                  <a:spcPts val="0"/>
+                </a:spcAft>
+                <a:buClrTx/>
+                <a:buSzTx/>
+                <a:buFontTx/>
+                <a:buNone/>
+                <a:tabLst/>
+                <a:defRPr/>
+              </a:pPr>
+              <a:t>17</a:t>
+            </a:fld>
+            <a:endParaRPr kumimoji="0" lang="en-US" sz="1200" b="0" i="0" u="none" strike="noStrike" kern="1200" cap="none" spc="0" normalizeH="0" baseline="0" noProof="0">
+              <a:ln>
+                <a:noFill/>
+              </a:ln>
+              <a:solidFill>
+                <a:prstClr val="black"/>
+              </a:solidFill>
+              <a:effectLst/>
+              <a:uLnTx/>
+              <a:uFillTx/>
+              <a:latin typeface="Aptos" panose="02110004020202020204"/>
+              <a:ea typeface="+mn-ea"/>
+              <a:cs typeface="+mn-cs"/>
+            </a:endParaRPr>
+          </a:p>
+        </p:txBody>
+      </p:sp>
+    </p:spTree>
+    <p:extLst>
+      <p:ext uri="{BB962C8B-B14F-4D97-AF65-F5344CB8AC3E}">
+        <p14:creationId xmlns:p14="http://schemas.microsoft.com/office/powerpoint/2010/main" val="934407805"/>
+      </p:ext>
+    </p:extLst>
+  </p:cSld>
+  <p:clrMapOvr>
+    <a:masterClrMapping/>
+  </p:clrMapOvr>
+</p:notes>
+</file>
+
 <file path=ppt/notesSlides/notesSlide2.xml><?xml version="1.0" encoding="utf-8"?>
 <p:notes xmlns:a="http://schemas.openxmlformats.org/drawingml/2006/main" xmlns:r="http://schemas.openxmlformats.org/officeDocument/2006/relationships" xmlns:p="http://schemas.openxmlformats.org/presentationml/2006/main">
   <p:cSld>
@@ -1646,6 +3028,510 @@
 </p:notes>
 </file>
 
+<file path=ppt/notesSlides/notesSlide7.xml><?xml version="1.0" encoding="utf-8"?>
+<p:notes xmlns:a="http://schemas.openxmlformats.org/drawingml/2006/main" xmlns:r="http://schemas.openxmlformats.org/officeDocument/2006/relationships" xmlns:p="http://schemas.openxmlformats.org/presentationml/2006/main">
+  <p:cSld>
+    <p:spTree>
+      <p:nvGrpSpPr>
+        <p:cNvPr id="1" name="">
+          <a:extLst>
+            <a:ext uri="{FF2B5EF4-FFF2-40B4-BE49-F238E27FC236}">
+              <a16:creationId xmlns:a16="http://schemas.microsoft.com/office/drawing/2014/main" id="{BCACD271-A958-F24D-6E09-B608AB3C1DB2}"/>
+            </a:ext>
+          </a:extLst>
+        </p:cNvPr>
+        <p:cNvGrpSpPr/>
+        <p:nvPr/>
+      </p:nvGrpSpPr>
+      <p:grpSpPr>
+        <a:xfrm>
+          <a:off x="0" y="0"/>
+          <a:ext cx="0" cy="0"/>
+          <a:chOff x="0" y="0"/>
+          <a:chExt cx="0" cy="0"/>
+        </a:xfrm>
+      </p:grpSpPr>
+      <p:sp>
+        <p:nvSpPr>
+          <p:cNvPr id="2" name="Slide Image Placeholder 1">
+            <a:extLst>
+              <a:ext uri="{FF2B5EF4-FFF2-40B4-BE49-F238E27FC236}">
+                <a16:creationId xmlns:a16="http://schemas.microsoft.com/office/drawing/2014/main" id="{4E23FD25-EBF9-9F7C-84EC-4E8D4146C39E}"/>
+              </a:ext>
+            </a:extLst>
+          </p:cNvPr>
+          <p:cNvSpPr>
+            <a:spLocks noGrp="1" noRot="1" noChangeAspect="1"/>
+          </p:cNvSpPr>
+          <p:nvPr>
+            <p:ph type="sldImg"/>
+          </p:nvPr>
+        </p:nvSpPr>
+        <p:spPr/>
+      </p:sp>
+      <p:sp>
+        <p:nvSpPr>
+          <p:cNvPr id="3" name="Notes Placeholder 2">
+            <a:extLst>
+              <a:ext uri="{FF2B5EF4-FFF2-40B4-BE49-F238E27FC236}">
+                <a16:creationId xmlns:a16="http://schemas.microsoft.com/office/drawing/2014/main" id="{A2BF6D16-9BA1-66C8-2588-64D40ED39638}"/>
+              </a:ext>
+            </a:extLst>
+          </p:cNvPr>
+          <p:cNvSpPr>
+            <a:spLocks noGrp="1"/>
+          </p:cNvSpPr>
+          <p:nvPr>
+            <p:ph type="body" idx="1"/>
+          </p:nvPr>
+        </p:nvSpPr>
+        <p:spPr/>
+        <p:txBody>
+          <a:bodyPr/>
+          <a:lstStyle/>
+          <a:p>
+            <a:endParaRPr lang="en-US" dirty="0"/>
+          </a:p>
+        </p:txBody>
+      </p:sp>
+      <p:sp>
+        <p:nvSpPr>
+          <p:cNvPr id="4" name="Slide Number Placeholder 3">
+            <a:extLst>
+              <a:ext uri="{FF2B5EF4-FFF2-40B4-BE49-F238E27FC236}">
+                <a16:creationId xmlns:a16="http://schemas.microsoft.com/office/drawing/2014/main" id="{10E94908-DEBC-34D0-7B0C-721148BA21E0}"/>
+              </a:ext>
+            </a:extLst>
+          </p:cNvPr>
+          <p:cNvSpPr>
+            <a:spLocks noGrp="1"/>
+          </p:cNvSpPr>
+          <p:nvPr>
+            <p:ph type="sldNum" sz="quarter" idx="5"/>
+          </p:nvPr>
+        </p:nvSpPr>
+        <p:spPr/>
+        <p:txBody>
+          <a:bodyPr/>
+          <a:lstStyle/>
+          <a:p>
+            <a:pPr marL="0" marR="0" lvl="0" indent="0" algn="r" defTabSz="914400" rtl="0" eaLnBrk="1" fontAlgn="auto" latinLnBrk="0" hangingPunct="1">
+              <a:lnSpc>
+                <a:spcPct val="100000"/>
+              </a:lnSpc>
+              <a:spcBef>
+                <a:spcPts val="0"/>
+              </a:spcBef>
+              <a:spcAft>
+                <a:spcPts val="0"/>
+              </a:spcAft>
+              <a:buClrTx/>
+              <a:buSzTx/>
+              <a:buFontTx/>
+              <a:buNone/>
+              <a:tabLst/>
+              <a:defRPr/>
+            </a:pPr>
+            <a:fld id="{092CD1D2-9E42-4E1F-B86C-5AF6F74F6041}" type="slidenum">
+              <a:rPr kumimoji="0" lang="en-US" sz="1200" b="0" i="0" u="none" strike="noStrike" kern="1200" cap="none" spc="0" normalizeH="0" baseline="0" noProof="0" smtClean="0">
+                <a:ln>
+                  <a:noFill/>
+                </a:ln>
+                <a:solidFill>
+                  <a:prstClr val="black"/>
+                </a:solidFill>
+                <a:effectLst/>
+                <a:uLnTx/>
+                <a:uFillTx/>
+                <a:latin typeface="Aptos" panose="02110004020202020204"/>
+                <a:ea typeface="+mn-ea"/>
+                <a:cs typeface="+mn-cs"/>
+              </a:rPr>
+              <a:pPr marL="0" marR="0" lvl="0" indent="0" algn="r" defTabSz="914400" rtl="0" eaLnBrk="1" fontAlgn="auto" latinLnBrk="0" hangingPunct="1">
+                <a:lnSpc>
+                  <a:spcPct val="100000"/>
+                </a:lnSpc>
+                <a:spcBef>
+                  <a:spcPts val="0"/>
+                </a:spcBef>
+                <a:spcAft>
+                  <a:spcPts val="0"/>
+                </a:spcAft>
+                <a:buClrTx/>
+                <a:buSzTx/>
+                <a:buFontTx/>
+                <a:buNone/>
+                <a:tabLst/>
+                <a:defRPr/>
+              </a:pPr>
+              <a:t>8</a:t>
+            </a:fld>
+            <a:endParaRPr kumimoji="0" lang="en-US" sz="1200" b="0" i="0" u="none" strike="noStrike" kern="1200" cap="none" spc="0" normalizeH="0" baseline="0" noProof="0">
+              <a:ln>
+                <a:noFill/>
+              </a:ln>
+              <a:solidFill>
+                <a:prstClr val="black"/>
+              </a:solidFill>
+              <a:effectLst/>
+              <a:uLnTx/>
+              <a:uFillTx/>
+              <a:latin typeface="Aptos" panose="02110004020202020204"/>
+              <a:ea typeface="+mn-ea"/>
+              <a:cs typeface="+mn-cs"/>
+            </a:endParaRPr>
+          </a:p>
+        </p:txBody>
+      </p:sp>
+    </p:spTree>
+    <p:extLst>
+      <p:ext uri="{BB962C8B-B14F-4D97-AF65-F5344CB8AC3E}">
+        <p14:creationId xmlns:p14="http://schemas.microsoft.com/office/powerpoint/2010/main" val="2242875272"/>
+      </p:ext>
+    </p:extLst>
+  </p:cSld>
+  <p:clrMapOvr>
+    <a:masterClrMapping/>
+  </p:clrMapOvr>
+</p:notes>
+</file>
+
+<file path=ppt/notesSlides/notesSlide8.xml><?xml version="1.0" encoding="utf-8"?>
+<p:notes xmlns:a="http://schemas.openxmlformats.org/drawingml/2006/main" xmlns:r="http://schemas.openxmlformats.org/officeDocument/2006/relationships" xmlns:p="http://schemas.openxmlformats.org/presentationml/2006/main">
+  <p:cSld>
+    <p:spTree>
+      <p:nvGrpSpPr>
+        <p:cNvPr id="1" name="">
+          <a:extLst>
+            <a:ext uri="{FF2B5EF4-FFF2-40B4-BE49-F238E27FC236}">
+              <a16:creationId xmlns:a16="http://schemas.microsoft.com/office/drawing/2014/main" id="{13DE77A5-C1C6-0332-0651-0DA9010FF367}"/>
+            </a:ext>
+          </a:extLst>
+        </p:cNvPr>
+        <p:cNvGrpSpPr/>
+        <p:nvPr/>
+      </p:nvGrpSpPr>
+      <p:grpSpPr>
+        <a:xfrm>
+          <a:off x="0" y="0"/>
+          <a:ext cx="0" cy="0"/>
+          <a:chOff x="0" y="0"/>
+          <a:chExt cx="0" cy="0"/>
+        </a:xfrm>
+      </p:grpSpPr>
+      <p:sp>
+        <p:nvSpPr>
+          <p:cNvPr id="2" name="Slide Image Placeholder 1">
+            <a:extLst>
+              <a:ext uri="{FF2B5EF4-FFF2-40B4-BE49-F238E27FC236}">
+                <a16:creationId xmlns:a16="http://schemas.microsoft.com/office/drawing/2014/main" id="{55E8A47E-F592-433C-839F-2FA115A66E21}"/>
+              </a:ext>
+            </a:extLst>
+          </p:cNvPr>
+          <p:cNvSpPr>
+            <a:spLocks noGrp="1" noRot="1" noChangeAspect="1"/>
+          </p:cNvSpPr>
+          <p:nvPr>
+            <p:ph type="sldImg"/>
+          </p:nvPr>
+        </p:nvSpPr>
+        <p:spPr/>
+      </p:sp>
+      <p:sp>
+        <p:nvSpPr>
+          <p:cNvPr id="3" name="Notes Placeholder 2">
+            <a:extLst>
+              <a:ext uri="{FF2B5EF4-FFF2-40B4-BE49-F238E27FC236}">
+                <a16:creationId xmlns:a16="http://schemas.microsoft.com/office/drawing/2014/main" id="{B8208564-8DBB-4FA9-4D08-0B699BA9832D}"/>
+              </a:ext>
+            </a:extLst>
+          </p:cNvPr>
+          <p:cNvSpPr>
+            <a:spLocks noGrp="1"/>
+          </p:cNvSpPr>
+          <p:nvPr>
+            <p:ph type="body" idx="1"/>
+          </p:nvPr>
+        </p:nvSpPr>
+        <p:spPr/>
+        <p:txBody>
+          <a:bodyPr/>
+          <a:lstStyle/>
+          <a:p>
+            <a:endParaRPr lang="en-US" dirty="0"/>
+          </a:p>
+        </p:txBody>
+      </p:sp>
+      <p:sp>
+        <p:nvSpPr>
+          <p:cNvPr id="4" name="Slide Number Placeholder 3">
+            <a:extLst>
+              <a:ext uri="{FF2B5EF4-FFF2-40B4-BE49-F238E27FC236}">
+                <a16:creationId xmlns:a16="http://schemas.microsoft.com/office/drawing/2014/main" id="{75BC551B-7E46-1DDC-C3F5-D07A8AECE440}"/>
+              </a:ext>
+            </a:extLst>
+          </p:cNvPr>
+          <p:cNvSpPr>
+            <a:spLocks noGrp="1"/>
+          </p:cNvSpPr>
+          <p:nvPr>
+            <p:ph type="sldNum" sz="quarter" idx="5"/>
+          </p:nvPr>
+        </p:nvSpPr>
+        <p:spPr/>
+        <p:txBody>
+          <a:bodyPr/>
+          <a:lstStyle/>
+          <a:p>
+            <a:pPr marL="0" marR="0" lvl="0" indent="0" algn="r" defTabSz="914400" rtl="0" eaLnBrk="1" fontAlgn="auto" latinLnBrk="0" hangingPunct="1">
+              <a:lnSpc>
+                <a:spcPct val="100000"/>
+              </a:lnSpc>
+              <a:spcBef>
+                <a:spcPts val="0"/>
+              </a:spcBef>
+              <a:spcAft>
+                <a:spcPts val="0"/>
+              </a:spcAft>
+              <a:buClrTx/>
+              <a:buSzTx/>
+              <a:buFontTx/>
+              <a:buNone/>
+              <a:tabLst/>
+              <a:defRPr/>
+            </a:pPr>
+            <a:fld id="{092CD1D2-9E42-4E1F-B86C-5AF6F74F6041}" type="slidenum">
+              <a:rPr kumimoji="0" lang="en-US" sz="1200" b="0" i="0" u="none" strike="noStrike" kern="1200" cap="none" spc="0" normalizeH="0" baseline="0" noProof="0" smtClean="0">
+                <a:ln>
+                  <a:noFill/>
+                </a:ln>
+                <a:solidFill>
+                  <a:prstClr val="black"/>
+                </a:solidFill>
+                <a:effectLst/>
+                <a:uLnTx/>
+                <a:uFillTx/>
+                <a:latin typeface="Aptos" panose="02110004020202020204"/>
+                <a:ea typeface="+mn-ea"/>
+                <a:cs typeface="+mn-cs"/>
+              </a:rPr>
+              <a:pPr marL="0" marR="0" lvl="0" indent="0" algn="r" defTabSz="914400" rtl="0" eaLnBrk="1" fontAlgn="auto" latinLnBrk="0" hangingPunct="1">
+                <a:lnSpc>
+                  <a:spcPct val="100000"/>
+                </a:lnSpc>
+                <a:spcBef>
+                  <a:spcPts val="0"/>
+                </a:spcBef>
+                <a:spcAft>
+                  <a:spcPts val="0"/>
+                </a:spcAft>
+                <a:buClrTx/>
+                <a:buSzTx/>
+                <a:buFontTx/>
+                <a:buNone/>
+                <a:tabLst/>
+                <a:defRPr/>
+              </a:pPr>
+              <a:t>9</a:t>
+            </a:fld>
+            <a:endParaRPr kumimoji="0" lang="en-US" sz="1200" b="0" i="0" u="none" strike="noStrike" kern="1200" cap="none" spc="0" normalizeH="0" baseline="0" noProof="0">
+              <a:ln>
+                <a:noFill/>
+              </a:ln>
+              <a:solidFill>
+                <a:prstClr val="black"/>
+              </a:solidFill>
+              <a:effectLst/>
+              <a:uLnTx/>
+              <a:uFillTx/>
+              <a:latin typeface="Aptos" panose="02110004020202020204"/>
+              <a:ea typeface="+mn-ea"/>
+              <a:cs typeface="+mn-cs"/>
+            </a:endParaRPr>
+          </a:p>
+        </p:txBody>
+      </p:sp>
+    </p:spTree>
+    <p:extLst>
+      <p:ext uri="{BB962C8B-B14F-4D97-AF65-F5344CB8AC3E}">
+        <p14:creationId xmlns:p14="http://schemas.microsoft.com/office/powerpoint/2010/main" val="812113878"/>
+      </p:ext>
+    </p:extLst>
+  </p:cSld>
+  <p:clrMapOvr>
+    <a:masterClrMapping/>
+  </p:clrMapOvr>
+</p:notes>
+</file>
+
+<file path=ppt/notesSlides/notesSlide9.xml><?xml version="1.0" encoding="utf-8"?>
+<p:notes xmlns:a="http://schemas.openxmlformats.org/drawingml/2006/main" xmlns:r="http://schemas.openxmlformats.org/officeDocument/2006/relationships" xmlns:p="http://schemas.openxmlformats.org/presentationml/2006/main">
+  <p:cSld>
+    <p:spTree>
+      <p:nvGrpSpPr>
+        <p:cNvPr id="1" name="">
+          <a:extLst>
+            <a:ext uri="{FF2B5EF4-FFF2-40B4-BE49-F238E27FC236}">
+              <a16:creationId xmlns:a16="http://schemas.microsoft.com/office/drawing/2014/main" id="{E3CAC15D-90EE-CA13-67EF-3386D5F41E8C}"/>
+            </a:ext>
+          </a:extLst>
+        </p:cNvPr>
+        <p:cNvGrpSpPr/>
+        <p:nvPr/>
+      </p:nvGrpSpPr>
+      <p:grpSpPr>
+        <a:xfrm>
+          <a:off x="0" y="0"/>
+          <a:ext cx="0" cy="0"/>
+          <a:chOff x="0" y="0"/>
+          <a:chExt cx="0" cy="0"/>
+        </a:xfrm>
+      </p:grpSpPr>
+      <p:sp>
+        <p:nvSpPr>
+          <p:cNvPr id="2" name="Slide Image Placeholder 1">
+            <a:extLst>
+              <a:ext uri="{FF2B5EF4-FFF2-40B4-BE49-F238E27FC236}">
+                <a16:creationId xmlns:a16="http://schemas.microsoft.com/office/drawing/2014/main" id="{1CE0B02F-7EAE-E880-4C43-02DD6087D186}"/>
+              </a:ext>
+            </a:extLst>
+          </p:cNvPr>
+          <p:cNvSpPr>
+            <a:spLocks noGrp="1" noRot="1" noChangeAspect="1"/>
+          </p:cNvSpPr>
+          <p:nvPr>
+            <p:ph type="sldImg"/>
+          </p:nvPr>
+        </p:nvSpPr>
+        <p:spPr/>
+      </p:sp>
+      <p:sp>
+        <p:nvSpPr>
+          <p:cNvPr id="3" name="Notes Placeholder 2">
+            <a:extLst>
+              <a:ext uri="{FF2B5EF4-FFF2-40B4-BE49-F238E27FC236}">
+                <a16:creationId xmlns:a16="http://schemas.microsoft.com/office/drawing/2014/main" id="{F69D4327-6B7B-E952-3FDD-6FB87056EBBD}"/>
+              </a:ext>
+            </a:extLst>
+          </p:cNvPr>
+          <p:cNvSpPr>
+            <a:spLocks noGrp="1"/>
+          </p:cNvSpPr>
+          <p:nvPr>
+            <p:ph type="body" idx="1"/>
+          </p:nvPr>
+        </p:nvSpPr>
+        <p:spPr/>
+        <p:txBody>
+          <a:bodyPr/>
+          <a:lstStyle/>
+          <a:p>
+            <a:endParaRPr lang="en-US" dirty="0"/>
+          </a:p>
+        </p:txBody>
+      </p:sp>
+      <p:sp>
+        <p:nvSpPr>
+          <p:cNvPr id="4" name="Slide Number Placeholder 3">
+            <a:extLst>
+              <a:ext uri="{FF2B5EF4-FFF2-40B4-BE49-F238E27FC236}">
+                <a16:creationId xmlns:a16="http://schemas.microsoft.com/office/drawing/2014/main" id="{400B6521-9A8D-35EE-56C3-2673D58ADCB4}"/>
+              </a:ext>
+            </a:extLst>
+          </p:cNvPr>
+          <p:cNvSpPr>
+            <a:spLocks noGrp="1"/>
+          </p:cNvSpPr>
+          <p:nvPr>
+            <p:ph type="sldNum" sz="quarter" idx="5"/>
+          </p:nvPr>
+        </p:nvSpPr>
+        <p:spPr/>
+        <p:txBody>
+          <a:bodyPr/>
+          <a:lstStyle/>
+          <a:p>
+            <a:pPr marL="0" marR="0" lvl="0" indent="0" algn="r" defTabSz="914400" rtl="0" eaLnBrk="1" fontAlgn="auto" latinLnBrk="0" hangingPunct="1">
+              <a:lnSpc>
+                <a:spcPct val="100000"/>
+              </a:lnSpc>
+              <a:spcBef>
+                <a:spcPts val="0"/>
+              </a:spcBef>
+              <a:spcAft>
+                <a:spcPts val="0"/>
+              </a:spcAft>
+              <a:buClrTx/>
+              <a:buSzTx/>
+              <a:buFontTx/>
+              <a:buNone/>
+              <a:tabLst/>
+              <a:defRPr/>
+            </a:pPr>
+            <a:fld id="{092CD1D2-9E42-4E1F-B86C-5AF6F74F6041}" type="slidenum">
+              <a:rPr kumimoji="0" lang="en-US" sz="1200" b="0" i="0" u="none" strike="noStrike" kern="1200" cap="none" spc="0" normalizeH="0" baseline="0" noProof="0" smtClean="0">
+                <a:ln>
+                  <a:noFill/>
+                </a:ln>
+                <a:solidFill>
+                  <a:prstClr val="black"/>
+                </a:solidFill>
+                <a:effectLst/>
+                <a:uLnTx/>
+                <a:uFillTx/>
+                <a:latin typeface="Aptos" panose="02110004020202020204"/>
+                <a:ea typeface="+mn-ea"/>
+                <a:cs typeface="+mn-cs"/>
+              </a:rPr>
+              <a:pPr marL="0" marR="0" lvl="0" indent="0" algn="r" defTabSz="914400" rtl="0" eaLnBrk="1" fontAlgn="auto" latinLnBrk="0" hangingPunct="1">
+                <a:lnSpc>
+                  <a:spcPct val="100000"/>
+                </a:lnSpc>
+                <a:spcBef>
+                  <a:spcPts val="0"/>
+                </a:spcBef>
+                <a:spcAft>
+                  <a:spcPts val="0"/>
+                </a:spcAft>
+                <a:buClrTx/>
+                <a:buSzTx/>
+                <a:buFontTx/>
+                <a:buNone/>
+                <a:tabLst/>
+                <a:defRPr/>
+              </a:pPr>
+              <a:t>10</a:t>
+            </a:fld>
+            <a:endParaRPr kumimoji="0" lang="en-US" sz="1200" b="0" i="0" u="none" strike="noStrike" kern="1200" cap="none" spc="0" normalizeH="0" baseline="0" noProof="0">
+              <a:ln>
+                <a:noFill/>
+              </a:ln>
+              <a:solidFill>
+                <a:prstClr val="black"/>
+              </a:solidFill>
+              <a:effectLst/>
+              <a:uLnTx/>
+              <a:uFillTx/>
+              <a:latin typeface="Aptos" panose="02110004020202020204"/>
+              <a:ea typeface="+mn-ea"/>
+              <a:cs typeface="+mn-cs"/>
+            </a:endParaRPr>
+          </a:p>
+        </p:txBody>
+      </p:sp>
+    </p:spTree>
+    <p:extLst>
+      <p:ext uri="{BB962C8B-B14F-4D97-AF65-F5344CB8AC3E}">
+        <p14:creationId xmlns:p14="http://schemas.microsoft.com/office/powerpoint/2010/main" val="3456067379"/>
+      </p:ext>
+    </p:extLst>
+  </p:cSld>
+  <p:clrMapOvr>
+    <a:masterClrMapping/>
+  </p:clrMapOvr>
+</p:notes>
+</file>
+
 <file path=ppt/slideLayouts/slideLayout1.xml><?xml version="1.0" encoding="utf-8"?>
 <p:sldLayout xmlns:a="http://schemas.openxmlformats.org/drawingml/2006/main" xmlns:r="http://schemas.openxmlformats.org/officeDocument/2006/relationships" xmlns:p="http://schemas.openxmlformats.org/presentationml/2006/main" type="title" preserve="1">
   <p:cSld name="Title Slide">
@@ -1793,7 +3679,7 @@
           <a:p>
             <a:fld id="{B0D925FC-16E2-4760-8BBA-129557D517F1}" type="datetimeFigureOut">
               <a:rPr lang="en-US" smtClean="0"/>
-              <a:t>3/2/2026</a:t>
+              <a:t>3/7/2026</a:t>
             </a:fld>
             <a:endParaRPr lang="en-US"/>
           </a:p>
@@ -1991,7 +3877,7 @@
           <a:p>
             <a:fld id="{B0D925FC-16E2-4760-8BBA-129557D517F1}" type="datetimeFigureOut">
               <a:rPr lang="en-US" smtClean="0"/>
-              <a:t>3/2/2026</a:t>
+              <a:t>3/7/2026</a:t>
             </a:fld>
             <a:endParaRPr lang="en-US"/>
           </a:p>
@@ -2199,7 +4085,7 @@
           <a:p>
             <a:fld id="{B0D925FC-16E2-4760-8BBA-129557D517F1}" type="datetimeFigureOut">
               <a:rPr lang="en-US" smtClean="0"/>
-              <a:t>3/2/2026</a:t>
+              <a:t>3/7/2026</a:t>
             </a:fld>
             <a:endParaRPr lang="en-US"/>
           </a:p>
@@ -2397,7 +4283,7 @@
           <a:p>
             <a:fld id="{B0D925FC-16E2-4760-8BBA-129557D517F1}" type="datetimeFigureOut">
               <a:rPr lang="en-US" smtClean="0"/>
-              <a:t>3/2/2026</a:t>
+              <a:t>3/7/2026</a:t>
             </a:fld>
             <a:endParaRPr lang="en-US"/>
           </a:p>
@@ -2672,7 +4558,7 @@
           <a:p>
             <a:fld id="{B0D925FC-16E2-4760-8BBA-129557D517F1}" type="datetimeFigureOut">
               <a:rPr lang="en-US" smtClean="0"/>
-              <a:t>3/2/2026</a:t>
+              <a:t>3/7/2026</a:t>
             </a:fld>
             <a:endParaRPr lang="en-US"/>
           </a:p>
@@ -2937,7 +4823,7 @@
           <a:p>
             <a:fld id="{B0D925FC-16E2-4760-8BBA-129557D517F1}" type="datetimeFigureOut">
               <a:rPr lang="en-US" smtClean="0"/>
-              <a:t>3/2/2026</a:t>
+              <a:t>3/7/2026</a:t>
             </a:fld>
             <a:endParaRPr lang="en-US"/>
           </a:p>
@@ -3349,7 +5235,7 @@
           <a:p>
             <a:fld id="{B0D925FC-16E2-4760-8BBA-129557D517F1}" type="datetimeFigureOut">
               <a:rPr lang="en-US" smtClean="0"/>
-              <a:t>3/2/2026</a:t>
+              <a:t>3/7/2026</a:t>
             </a:fld>
             <a:endParaRPr lang="en-US"/>
           </a:p>
@@ -3490,7 +5376,7 @@
           <a:p>
             <a:fld id="{B0D925FC-16E2-4760-8BBA-129557D517F1}" type="datetimeFigureOut">
               <a:rPr lang="en-US" smtClean="0"/>
-              <a:t>3/2/2026</a:t>
+              <a:t>3/7/2026</a:t>
             </a:fld>
             <a:endParaRPr lang="en-US"/>
           </a:p>
@@ -3603,7 +5489,7 @@
           <a:p>
             <a:fld id="{B0D925FC-16E2-4760-8BBA-129557D517F1}" type="datetimeFigureOut">
               <a:rPr lang="en-US" smtClean="0"/>
-              <a:t>3/2/2026</a:t>
+              <a:t>3/7/2026</a:t>
             </a:fld>
             <a:endParaRPr lang="en-US"/>
           </a:p>
@@ -3914,7 +5800,7 @@
           <a:p>
             <a:fld id="{B0D925FC-16E2-4760-8BBA-129557D517F1}" type="datetimeFigureOut">
               <a:rPr lang="en-US" smtClean="0"/>
-              <a:t>3/2/2026</a:t>
+              <a:t>3/7/2026</a:t>
             </a:fld>
             <a:endParaRPr lang="en-US"/>
           </a:p>
@@ -4202,7 +6088,7 @@
           <a:p>
             <a:fld id="{B0D925FC-16E2-4760-8BBA-129557D517F1}" type="datetimeFigureOut">
               <a:rPr lang="en-US" smtClean="0"/>
-              <a:t>3/2/2026</a:t>
+              <a:t>3/7/2026</a:t>
             </a:fld>
             <a:endParaRPr lang="en-US"/>
           </a:p>
@@ -4443,7 +6329,7 @@
           <a:p>
             <a:fld id="{B0D925FC-16E2-4760-8BBA-129557D517F1}" type="datetimeFigureOut">
               <a:rPr lang="en-US" smtClean="0"/>
-              <a:t>3/2/2026</a:t>
+              <a:t>3/7/2026</a:t>
             </a:fld>
             <a:endParaRPr lang="en-US"/>
           </a:p>
@@ -4992,6 +6878,3482 @@
 </p:sld>
 </file>
 
+<file path=ppt/slides/slide10.xml><?xml version="1.0" encoding="utf-8"?>
+<p:sld xmlns:a="http://schemas.openxmlformats.org/drawingml/2006/main" xmlns:r="http://schemas.openxmlformats.org/officeDocument/2006/relationships" xmlns:p="http://schemas.openxmlformats.org/presentationml/2006/main">
+  <p:cSld>
+    <p:bg>
+      <p:bgPr>
+        <a:gradFill>
+          <a:gsLst>
+            <a:gs pos="0">
+              <a:schemeClr val="bg1">
+                <a:lumMod val="95000"/>
+              </a:schemeClr>
+            </a:gs>
+            <a:gs pos="74000">
+              <a:schemeClr val="bg1">
+                <a:lumMod val="85000"/>
+              </a:schemeClr>
+            </a:gs>
+            <a:gs pos="83000">
+              <a:schemeClr val="bg1">
+                <a:lumMod val="75000"/>
+              </a:schemeClr>
+            </a:gs>
+            <a:gs pos="100000">
+              <a:schemeClr val="bg1">
+                <a:lumMod val="50000"/>
+              </a:schemeClr>
+            </a:gs>
+          </a:gsLst>
+          <a:lin ang="5400000" scaled="1"/>
+        </a:gradFill>
+        <a:effectLst/>
+      </p:bgPr>
+    </p:bg>
+    <p:spTree>
+      <p:nvGrpSpPr>
+        <p:cNvPr id="1" name="">
+          <a:extLst>
+            <a:ext uri="{FF2B5EF4-FFF2-40B4-BE49-F238E27FC236}">
+              <a16:creationId xmlns:a16="http://schemas.microsoft.com/office/drawing/2014/main" id="{4A201EC4-CDAF-1FCC-790B-02442409D924}"/>
+            </a:ext>
+          </a:extLst>
+        </p:cNvPr>
+        <p:cNvGrpSpPr/>
+        <p:nvPr/>
+      </p:nvGrpSpPr>
+      <p:grpSpPr>
+        <a:xfrm>
+          <a:off x="0" y="0"/>
+          <a:ext cx="0" cy="0"/>
+          <a:chOff x="0" y="0"/>
+          <a:chExt cx="0" cy="0"/>
+        </a:xfrm>
+      </p:grpSpPr>
+      <p:sp>
+        <p:nvSpPr>
+          <p:cNvPr id="2" name="Title 1">
+            <a:extLst>
+              <a:ext uri="{FF2B5EF4-FFF2-40B4-BE49-F238E27FC236}">
+                <a16:creationId xmlns:a16="http://schemas.microsoft.com/office/drawing/2014/main" id="{0E21D462-3CBD-5396-5612-6382A50F8028}"/>
+              </a:ext>
+            </a:extLst>
+          </p:cNvPr>
+          <p:cNvSpPr>
+            <a:spLocks noGrp="1"/>
+          </p:cNvSpPr>
+          <p:nvPr>
+            <p:ph type="title"/>
+          </p:nvPr>
+        </p:nvSpPr>
+        <p:spPr>
+          <a:xfrm>
+            <a:off x="97834" y="0"/>
+            <a:ext cx="11996331" cy="1325563"/>
+          </a:xfrm>
+        </p:spPr>
+        <p:txBody>
+          <a:bodyPr>
+            <a:normAutofit/>
+          </a:bodyPr>
+          <a:lstStyle/>
+          <a:p>
+            <a:r>
+              <a:rPr lang="en-US" b="1" dirty="0">
+                <a:latin typeface="Times New Roman" panose="02020603050405020304" pitchFamily="18" charset="0"/>
+                <a:cs typeface="Times New Roman" panose="02020603050405020304" pitchFamily="18" charset="0"/>
+              </a:rPr>
+              <a:t>The Go Files (Marshal JSON):</a:t>
+            </a:r>
+            <a:endParaRPr lang="en-US" sz="4200" b="1" dirty="0">
+              <a:latin typeface="Times New Roman" panose="02020603050405020304" pitchFamily="18" charset="0"/>
+              <a:cs typeface="Times New Roman" panose="02020603050405020304" pitchFamily="18" charset="0"/>
+            </a:endParaRPr>
+          </a:p>
+        </p:txBody>
+      </p:sp>
+      <p:pic>
+        <p:nvPicPr>
+          <p:cNvPr id="4" name="Picture 3">
+            <a:extLst>
+              <a:ext uri="{FF2B5EF4-FFF2-40B4-BE49-F238E27FC236}">
+                <a16:creationId xmlns:a16="http://schemas.microsoft.com/office/drawing/2014/main" id="{CDB8A5E6-03E2-7A10-089C-9629BA7153A9}"/>
+              </a:ext>
+            </a:extLst>
+          </p:cNvPr>
+          <p:cNvPicPr>
+            <a:picLocks noChangeAspect="1"/>
+          </p:cNvPicPr>
+          <p:nvPr/>
+        </p:nvPicPr>
+        <p:blipFill>
+          <a:blip r:embed="rId4"/>
+          <a:stretch>
+            <a:fillRect/>
+          </a:stretch>
+        </p:blipFill>
+        <p:spPr>
+          <a:xfrm>
+            <a:off x="1618868" y="1065243"/>
+            <a:ext cx="8954261" cy="5691157"/>
+          </a:xfrm>
+          <a:prstGeom prst="rect">
+            <a:avLst/>
+          </a:prstGeom>
+        </p:spPr>
+      </p:pic>
+    </p:spTree>
+    <p:custDataLst>
+      <p:tags r:id="rId1"/>
+    </p:custDataLst>
+    <p:extLst>
+      <p:ext uri="{BB962C8B-B14F-4D97-AF65-F5344CB8AC3E}">
+        <p14:creationId xmlns:p14="http://schemas.microsoft.com/office/powerpoint/2010/main" val="2625449716"/>
+      </p:ext>
+    </p:extLst>
+  </p:cSld>
+  <p:clrMapOvr>
+    <a:masterClrMapping/>
+  </p:clrMapOvr>
+  <mc:AlternateContent xmlns:mc="http://schemas.openxmlformats.org/markup-compatibility/2006" xmlns:p14="http://schemas.microsoft.com/office/powerpoint/2010/main">
+    <mc:Choice Requires="p14">
+      <p:transition spd="slow" p14:dur="2000" advTm="207460"/>
+    </mc:Choice>
+    <mc:Fallback xmlns="">
+      <p:transition spd="slow" advTm="207460"/>
+    </mc:Fallback>
+  </mc:AlternateContent>
+</p:sld>
+</file>
+
+<file path=ppt/slides/slide11.xml><?xml version="1.0" encoding="utf-8"?>
+<p:sld xmlns:a="http://schemas.openxmlformats.org/drawingml/2006/main" xmlns:r="http://schemas.openxmlformats.org/officeDocument/2006/relationships" xmlns:p="http://schemas.openxmlformats.org/presentationml/2006/main">
+  <p:cSld>
+    <p:bg>
+      <p:bgPr>
+        <a:gradFill>
+          <a:gsLst>
+            <a:gs pos="0">
+              <a:schemeClr val="bg1">
+                <a:lumMod val="95000"/>
+              </a:schemeClr>
+            </a:gs>
+            <a:gs pos="74000">
+              <a:schemeClr val="bg1">
+                <a:lumMod val="85000"/>
+              </a:schemeClr>
+            </a:gs>
+            <a:gs pos="83000">
+              <a:schemeClr val="bg1">
+                <a:lumMod val="75000"/>
+              </a:schemeClr>
+            </a:gs>
+            <a:gs pos="100000">
+              <a:schemeClr val="bg1">
+                <a:lumMod val="50000"/>
+              </a:schemeClr>
+            </a:gs>
+          </a:gsLst>
+          <a:lin ang="5400000" scaled="1"/>
+        </a:gradFill>
+        <a:effectLst/>
+      </p:bgPr>
+    </p:bg>
+    <p:spTree>
+      <p:nvGrpSpPr>
+        <p:cNvPr id="1" name="">
+          <a:extLst>
+            <a:ext uri="{FF2B5EF4-FFF2-40B4-BE49-F238E27FC236}">
+              <a16:creationId xmlns:a16="http://schemas.microsoft.com/office/drawing/2014/main" id="{889AA768-842E-3BE8-3FA0-7D4B102022A8}"/>
+            </a:ext>
+          </a:extLst>
+        </p:cNvPr>
+        <p:cNvGrpSpPr/>
+        <p:nvPr/>
+      </p:nvGrpSpPr>
+      <p:grpSpPr>
+        <a:xfrm>
+          <a:off x="0" y="0"/>
+          <a:ext cx="0" cy="0"/>
+          <a:chOff x="0" y="0"/>
+          <a:chExt cx="0" cy="0"/>
+        </a:xfrm>
+      </p:grpSpPr>
+      <p:sp>
+        <p:nvSpPr>
+          <p:cNvPr id="2" name="Title 1">
+            <a:extLst>
+              <a:ext uri="{FF2B5EF4-FFF2-40B4-BE49-F238E27FC236}">
+                <a16:creationId xmlns:a16="http://schemas.microsoft.com/office/drawing/2014/main" id="{0B3707D6-8861-0F3F-DC85-1E83146F1250}"/>
+              </a:ext>
+            </a:extLst>
+          </p:cNvPr>
+          <p:cNvSpPr>
+            <a:spLocks noGrp="1"/>
+          </p:cNvSpPr>
+          <p:nvPr>
+            <p:ph type="title"/>
+          </p:nvPr>
+        </p:nvSpPr>
+        <p:spPr>
+          <a:xfrm>
+            <a:off x="97834" y="0"/>
+            <a:ext cx="11996331" cy="1325563"/>
+          </a:xfrm>
+        </p:spPr>
+        <p:txBody>
+          <a:bodyPr>
+            <a:normAutofit/>
+          </a:bodyPr>
+          <a:lstStyle/>
+          <a:p>
+            <a:r>
+              <a:rPr lang="en-US" b="1" dirty="0">
+                <a:latin typeface="Times New Roman" panose="02020603050405020304" pitchFamily="18" charset="0"/>
+                <a:cs typeface="Times New Roman" panose="02020603050405020304" pitchFamily="18" charset="0"/>
+              </a:rPr>
+              <a:t>The Go Files (</a:t>
+            </a:r>
+            <a:r>
+              <a:rPr lang="en-US" b="1" dirty="0" err="1">
+                <a:latin typeface="Times New Roman" panose="02020603050405020304" pitchFamily="18" charset="0"/>
+                <a:cs typeface="Times New Roman" panose="02020603050405020304" pitchFamily="18" charset="0"/>
+              </a:rPr>
+              <a:t>UnMarshal</a:t>
+            </a:r>
+            <a:r>
+              <a:rPr lang="en-US" b="1" dirty="0">
+                <a:latin typeface="Times New Roman" panose="02020603050405020304" pitchFamily="18" charset="0"/>
+                <a:cs typeface="Times New Roman" panose="02020603050405020304" pitchFamily="18" charset="0"/>
+              </a:rPr>
+              <a:t> JSON):</a:t>
+            </a:r>
+            <a:endParaRPr lang="en-US" sz="4200" b="1" dirty="0">
+              <a:latin typeface="Times New Roman" panose="02020603050405020304" pitchFamily="18" charset="0"/>
+              <a:cs typeface="Times New Roman" panose="02020603050405020304" pitchFamily="18" charset="0"/>
+            </a:endParaRPr>
+          </a:p>
+        </p:txBody>
+      </p:sp>
+      <p:pic>
+        <p:nvPicPr>
+          <p:cNvPr id="5" name="Picture 4">
+            <a:extLst>
+              <a:ext uri="{FF2B5EF4-FFF2-40B4-BE49-F238E27FC236}">
+                <a16:creationId xmlns:a16="http://schemas.microsoft.com/office/drawing/2014/main" id="{84A01F18-D5B6-6BDC-5D8A-8961F72CA0B8}"/>
+              </a:ext>
+            </a:extLst>
+          </p:cNvPr>
+          <p:cNvPicPr>
+            <a:picLocks noChangeAspect="1"/>
+          </p:cNvPicPr>
+          <p:nvPr/>
+        </p:nvPicPr>
+        <p:blipFill>
+          <a:blip r:embed="rId4"/>
+          <a:stretch>
+            <a:fillRect/>
+          </a:stretch>
+        </p:blipFill>
+        <p:spPr>
+          <a:xfrm>
+            <a:off x="1875691" y="964641"/>
+            <a:ext cx="8440615" cy="5792875"/>
+          </a:xfrm>
+          <a:prstGeom prst="rect">
+            <a:avLst/>
+          </a:prstGeom>
+        </p:spPr>
+      </p:pic>
+    </p:spTree>
+    <p:custDataLst>
+      <p:tags r:id="rId1"/>
+    </p:custDataLst>
+    <p:extLst>
+      <p:ext uri="{BB962C8B-B14F-4D97-AF65-F5344CB8AC3E}">
+        <p14:creationId xmlns:p14="http://schemas.microsoft.com/office/powerpoint/2010/main" val="352498132"/>
+      </p:ext>
+    </p:extLst>
+  </p:cSld>
+  <p:clrMapOvr>
+    <a:masterClrMapping/>
+  </p:clrMapOvr>
+  <mc:AlternateContent xmlns:mc="http://schemas.openxmlformats.org/markup-compatibility/2006" xmlns:p14="http://schemas.microsoft.com/office/powerpoint/2010/main">
+    <mc:Choice Requires="p14">
+      <p:transition spd="slow" p14:dur="2000" advTm="207460"/>
+    </mc:Choice>
+    <mc:Fallback xmlns="">
+      <p:transition spd="slow" advTm="207460"/>
+    </mc:Fallback>
+  </mc:AlternateContent>
+</p:sld>
+</file>
+
+<file path=ppt/slides/slide12.xml><?xml version="1.0" encoding="utf-8"?>
+<p:sld xmlns:a="http://schemas.openxmlformats.org/drawingml/2006/main" xmlns:r="http://schemas.openxmlformats.org/officeDocument/2006/relationships" xmlns:p="http://schemas.openxmlformats.org/presentationml/2006/main">
+  <p:cSld>
+    <p:bg>
+      <p:bgPr>
+        <a:gradFill>
+          <a:gsLst>
+            <a:gs pos="0">
+              <a:schemeClr val="bg1">
+                <a:lumMod val="95000"/>
+              </a:schemeClr>
+            </a:gs>
+            <a:gs pos="74000">
+              <a:schemeClr val="bg1">
+                <a:lumMod val="85000"/>
+              </a:schemeClr>
+            </a:gs>
+            <a:gs pos="83000">
+              <a:schemeClr val="bg1">
+                <a:lumMod val="75000"/>
+              </a:schemeClr>
+            </a:gs>
+            <a:gs pos="100000">
+              <a:schemeClr val="bg1">
+                <a:lumMod val="50000"/>
+              </a:schemeClr>
+            </a:gs>
+          </a:gsLst>
+          <a:lin ang="5400000" scaled="1"/>
+        </a:gradFill>
+        <a:effectLst/>
+      </p:bgPr>
+    </p:bg>
+    <p:spTree>
+      <p:nvGrpSpPr>
+        <p:cNvPr id="1" name="">
+          <a:extLst>
+            <a:ext uri="{FF2B5EF4-FFF2-40B4-BE49-F238E27FC236}">
+              <a16:creationId xmlns:a16="http://schemas.microsoft.com/office/drawing/2014/main" id="{C7DA1A88-211C-201F-D648-59FB7FC020D3}"/>
+            </a:ext>
+          </a:extLst>
+        </p:cNvPr>
+        <p:cNvGrpSpPr/>
+        <p:nvPr/>
+      </p:nvGrpSpPr>
+      <p:grpSpPr>
+        <a:xfrm>
+          <a:off x="0" y="0"/>
+          <a:ext cx="0" cy="0"/>
+          <a:chOff x="0" y="0"/>
+          <a:chExt cx="0" cy="0"/>
+        </a:xfrm>
+      </p:grpSpPr>
+      <p:sp>
+        <p:nvSpPr>
+          <p:cNvPr id="2" name="Title 1">
+            <a:extLst>
+              <a:ext uri="{FF2B5EF4-FFF2-40B4-BE49-F238E27FC236}">
+                <a16:creationId xmlns:a16="http://schemas.microsoft.com/office/drawing/2014/main" id="{3241ED32-55D4-3165-88B0-808D3F179C28}"/>
+              </a:ext>
+            </a:extLst>
+          </p:cNvPr>
+          <p:cNvSpPr>
+            <a:spLocks noGrp="1"/>
+          </p:cNvSpPr>
+          <p:nvPr>
+            <p:ph type="title"/>
+          </p:nvPr>
+        </p:nvSpPr>
+        <p:spPr>
+          <a:xfrm>
+            <a:off x="97834" y="0"/>
+            <a:ext cx="11996331" cy="1325563"/>
+          </a:xfrm>
+        </p:spPr>
+        <p:txBody>
+          <a:bodyPr>
+            <a:normAutofit/>
+          </a:bodyPr>
+          <a:lstStyle/>
+          <a:p>
+            <a:r>
+              <a:rPr lang="en-US" sz="4200" b="1" dirty="0">
+                <a:latin typeface="Times New Roman" panose="02020603050405020304" pitchFamily="18" charset="0"/>
+                <a:cs typeface="Times New Roman" panose="02020603050405020304" pitchFamily="18" charset="0"/>
+              </a:rPr>
+              <a:t>Go &amp; </a:t>
+            </a:r>
+            <a:r>
+              <a:rPr lang="en-US" sz="4200" b="1" dirty="0" err="1">
+                <a:latin typeface="Times New Roman" panose="02020603050405020304" pitchFamily="18" charset="0"/>
+                <a:cs typeface="Times New Roman" panose="02020603050405020304" pitchFamily="18" charset="0"/>
+              </a:rPr>
+              <a:t>mySQL</a:t>
+            </a:r>
+            <a:r>
+              <a:rPr lang="en-US" sz="4200" b="1" dirty="0">
+                <a:latin typeface="Times New Roman" panose="02020603050405020304" pitchFamily="18" charset="0"/>
+                <a:cs typeface="Times New Roman" panose="02020603050405020304" pitchFamily="18" charset="0"/>
+              </a:rPr>
+              <a:t> (Configuration):</a:t>
+            </a:r>
+          </a:p>
+        </p:txBody>
+      </p:sp>
+      <p:pic>
+        <p:nvPicPr>
+          <p:cNvPr id="4" name="Picture 3">
+            <a:extLst>
+              <a:ext uri="{FF2B5EF4-FFF2-40B4-BE49-F238E27FC236}">
+                <a16:creationId xmlns:a16="http://schemas.microsoft.com/office/drawing/2014/main" id="{D87C486C-1D45-545F-4295-ABF2BCDFD8E5}"/>
+              </a:ext>
+            </a:extLst>
+          </p:cNvPr>
+          <p:cNvPicPr>
+            <a:picLocks noChangeAspect="1"/>
+          </p:cNvPicPr>
+          <p:nvPr/>
+        </p:nvPicPr>
+        <p:blipFill>
+          <a:blip r:embed="rId4"/>
+          <a:stretch>
+            <a:fillRect/>
+          </a:stretch>
+        </p:blipFill>
+        <p:spPr>
+          <a:xfrm>
+            <a:off x="1414167" y="989152"/>
+            <a:ext cx="9176796" cy="5715495"/>
+          </a:xfrm>
+          <a:prstGeom prst="rect">
+            <a:avLst/>
+          </a:prstGeom>
+        </p:spPr>
+      </p:pic>
+      <p:cxnSp>
+        <p:nvCxnSpPr>
+          <p:cNvPr id="5" name="Straight Arrow Connector 4">
+            <a:extLst>
+              <a:ext uri="{FF2B5EF4-FFF2-40B4-BE49-F238E27FC236}">
+                <a16:creationId xmlns:a16="http://schemas.microsoft.com/office/drawing/2014/main" id="{6A3092D1-4FC1-56EB-C31C-212F1E26A865}"/>
+              </a:ext>
+            </a:extLst>
+          </p:cNvPr>
+          <p:cNvCxnSpPr/>
+          <p:nvPr/>
+        </p:nvCxnSpPr>
+        <p:spPr>
+          <a:xfrm>
+            <a:off x="4009292" y="2391508"/>
+            <a:ext cx="1145512" cy="0"/>
+          </a:xfrm>
+          <a:prstGeom prst="straightConnector1">
+            <a:avLst/>
+          </a:prstGeom>
+          <a:ln>
+            <a:solidFill>
+              <a:srgbClr val="FF0000"/>
+            </a:solidFill>
+            <a:tailEnd type="triangle"/>
+          </a:ln>
+        </p:spPr>
+        <p:style>
+          <a:lnRef idx="2">
+            <a:schemeClr val="accent1"/>
+          </a:lnRef>
+          <a:fillRef idx="0">
+            <a:schemeClr val="accent1"/>
+          </a:fillRef>
+          <a:effectRef idx="1">
+            <a:schemeClr val="accent1"/>
+          </a:effectRef>
+          <a:fontRef idx="minor">
+            <a:schemeClr val="tx1"/>
+          </a:fontRef>
+        </p:style>
+      </p:cxnSp>
+      <p:sp>
+        <p:nvSpPr>
+          <p:cNvPr id="6" name="Right Brace 5">
+            <a:extLst>
+              <a:ext uri="{FF2B5EF4-FFF2-40B4-BE49-F238E27FC236}">
+                <a16:creationId xmlns:a16="http://schemas.microsoft.com/office/drawing/2014/main" id="{2A4E867C-B88F-CD60-6A6C-D36EF4CAD1B7}"/>
+              </a:ext>
+            </a:extLst>
+          </p:cNvPr>
+          <p:cNvSpPr/>
+          <p:nvPr/>
+        </p:nvSpPr>
+        <p:spPr>
+          <a:xfrm>
+            <a:off x="6229977" y="3457453"/>
+            <a:ext cx="1330081" cy="1205802"/>
+          </a:xfrm>
+          <a:prstGeom prst="rightBrace">
+            <a:avLst/>
+          </a:prstGeom>
+          <a:ln>
+            <a:solidFill>
+              <a:srgbClr val="FF0000"/>
+            </a:solidFill>
+          </a:ln>
+        </p:spPr>
+        <p:style>
+          <a:lnRef idx="2">
+            <a:schemeClr val="accent1"/>
+          </a:lnRef>
+          <a:fillRef idx="0">
+            <a:schemeClr val="accent1"/>
+          </a:fillRef>
+          <a:effectRef idx="1">
+            <a:schemeClr val="accent1"/>
+          </a:effectRef>
+          <a:fontRef idx="minor">
+            <a:schemeClr val="tx1"/>
+          </a:fontRef>
+        </p:style>
+        <p:txBody>
+          <a:bodyPr rtlCol="0" anchor="ctr"/>
+          <a:lstStyle/>
+          <a:p>
+            <a:pPr algn="ctr"/>
+            <a:endParaRPr lang="en-US"/>
+          </a:p>
+        </p:txBody>
+      </p:sp>
+      <p:sp>
+        <p:nvSpPr>
+          <p:cNvPr id="7" name="TextBox 6">
+            <a:extLst>
+              <a:ext uri="{FF2B5EF4-FFF2-40B4-BE49-F238E27FC236}">
+                <a16:creationId xmlns:a16="http://schemas.microsoft.com/office/drawing/2014/main" id="{B5E073CE-9156-8324-486D-D3A413F6F817}"/>
+              </a:ext>
+            </a:extLst>
+          </p:cNvPr>
+          <p:cNvSpPr txBox="1"/>
+          <p:nvPr/>
+        </p:nvSpPr>
+        <p:spPr>
+          <a:xfrm>
+            <a:off x="5154804" y="2206842"/>
+            <a:ext cx="4712677" cy="646331"/>
+          </a:xfrm>
+          <a:prstGeom prst="rect">
+            <a:avLst/>
+          </a:prstGeom>
+          <a:noFill/>
+        </p:spPr>
+        <p:txBody>
+          <a:bodyPr wrap="square" rtlCol="0">
+            <a:spAutoFit/>
+          </a:bodyPr>
+          <a:lstStyle/>
+          <a:p>
+            <a:r>
+              <a:rPr lang="en-US" b="1" dirty="0">
+                <a:solidFill>
+                  <a:schemeClr val="bg1"/>
+                </a:solidFill>
+                <a:latin typeface="Arial" panose="020B0604020202020204" pitchFamily="34" charset="0"/>
+                <a:cs typeface="Arial" panose="020B0604020202020204" pitchFamily="34" charset="0"/>
+              </a:rPr>
+              <a:t>Database handle that will be used in every SQL statement</a:t>
+            </a:r>
+          </a:p>
+        </p:txBody>
+      </p:sp>
+      <p:sp>
+        <p:nvSpPr>
+          <p:cNvPr id="8" name="TextBox 7">
+            <a:extLst>
+              <a:ext uri="{FF2B5EF4-FFF2-40B4-BE49-F238E27FC236}">
+                <a16:creationId xmlns:a16="http://schemas.microsoft.com/office/drawing/2014/main" id="{34B1BA29-2A4C-264C-F638-01F37D21AE9E}"/>
+              </a:ext>
+            </a:extLst>
+          </p:cNvPr>
+          <p:cNvSpPr txBox="1"/>
+          <p:nvPr/>
+        </p:nvSpPr>
+        <p:spPr>
+          <a:xfrm>
+            <a:off x="7560058" y="3737188"/>
+            <a:ext cx="1915537" cy="646331"/>
+          </a:xfrm>
+          <a:prstGeom prst="rect">
+            <a:avLst/>
+          </a:prstGeom>
+          <a:noFill/>
+        </p:spPr>
+        <p:txBody>
+          <a:bodyPr wrap="square" rtlCol="0">
+            <a:spAutoFit/>
+          </a:bodyPr>
+          <a:lstStyle/>
+          <a:p>
+            <a:r>
+              <a:rPr lang="en-US" b="1" dirty="0">
+                <a:solidFill>
+                  <a:schemeClr val="bg1"/>
+                </a:solidFill>
+                <a:latin typeface="Arial" panose="020B0604020202020204" pitchFamily="34" charset="0"/>
+                <a:cs typeface="Arial" panose="020B0604020202020204" pitchFamily="34" charset="0"/>
+              </a:rPr>
+              <a:t>Connection string</a:t>
+            </a:r>
+          </a:p>
+        </p:txBody>
+      </p:sp>
+    </p:spTree>
+    <p:custDataLst>
+      <p:tags r:id="rId1"/>
+    </p:custDataLst>
+    <p:extLst>
+      <p:ext uri="{BB962C8B-B14F-4D97-AF65-F5344CB8AC3E}">
+        <p14:creationId xmlns:p14="http://schemas.microsoft.com/office/powerpoint/2010/main" val="4193596081"/>
+      </p:ext>
+    </p:extLst>
+  </p:cSld>
+  <p:clrMapOvr>
+    <a:masterClrMapping/>
+  </p:clrMapOvr>
+  <mc:AlternateContent xmlns:mc="http://schemas.openxmlformats.org/markup-compatibility/2006" xmlns:p14="http://schemas.microsoft.com/office/powerpoint/2010/main">
+    <mc:Choice Requires="p14">
+      <p:transition spd="slow" p14:dur="2000" advTm="207460"/>
+    </mc:Choice>
+    <mc:Fallback xmlns="">
+      <p:transition spd="slow" advTm="207460"/>
+    </mc:Fallback>
+  </mc:AlternateContent>
+</p:sld>
+</file>
+
+<file path=ppt/slides/slide13.xml><?xml version="1.0" encoding="utf-8"?>
+<p:sld xmlns:a="http://schemas.openxmlformats.org/drawingml/2006/main" xmlns:r="http://schemas.openxmlformats.org/officeDocument/2006/relationships" xmlns:p="http://schemas.openxmlformats.org/presentationml/2006/main">
+  <p:cSld>
+    <p:bg>
+      <p:bgPr>
+        <a:gradFill>
+          <a:gsLst>
+            <a:gs pos="0">
+              <a:schemeClr val="bg1">
+                <a:lumMod val="95000"/>
+              </a:schemeClr>
+            </a:gs>
+            <a:gs pos="74000">
+              <a:schemeClr val="bg1">
+                <a:lumMod val="85000"/>
+              </a:schemeClr>
+            </a:gs>
+            <a:gs pos="83000">
+              <a:schemeClr val="bg1">
+                <a:lumMod val="75000"/>
+              </a:schemeClr>
+            </a:gs>
+            <a:gs pos="100000">
+              <a:schemeClr val="bg1">
+                <a:lumMod val="50000"/>
+              </a:schemeClr>
+            </a:gs>
+          </a:gsLst>
+          <a:lin ang="5400000" scaled="1"/>
+        </a:gradFill>
+        <a:effectLst/>
+      </p:bgPr>
+    </p:bg>
+    <p:spTree>
+      <p:nvGrpSpPr>
+        <p:cNvPr id="1" name="">
+          <a:extLst>
+            <a:ext uri="{FF2B5EF4-FFF2-40B4-BE49-F238E27FC236}">
+              <a16:creationId xmlns:a16="http://schemas.microsoft.com/office/drawing/2014/main" id="{6BE76238-FAF7-141C-EDB7-77420F54492E}"/>
+            </a:ext>
+          </a:extLst>
+        </p:cNvPr>
+        <p:cNvGrpSpPr/>
+        <p:nvPr/>
+      </p:nvGrpSpPr>
+      <p:grpSpPr>
+        <a:xfrm>
+          <a:off x="0" y="0"/>
+          <a:ext cx="0" cy="0"/>
+          <a:chOff x="0" y="0"/>
+          <a:chExt cx="0" cy="0"/>
+        </a:xfrm>
+      </p:grpSpPr>
+      <p:sp>
+        <p:nvSpPr>
+          <p:cNvPr id="2" name="Title 1">
+            <a:extLst>
+              <a:ext uri="{FF2B5EF4-FFF2-40B4-BE49-F238E27FC236}">
+                <a16:creationId xmlns:a16="http://schemas.microsoft.com/office/drawing/2014/main" id="{CEEE7112-E15C-C76D-CFF5-3C39558B7557}"/>
+              </a:ext>
+            </a:extLst>
+          </p:cNvPr>
+          <p:cNvSpPr>
+            <a:spLocks noGrp="1"/>
+          </p:cNvSpPr>
+          <p:nvPr>
+            <p:ph type="title"/>
+          </p:nvPr>
+        </p:nvSpPr>
+        <p:spPr>
+          <a:xfrm>
+            <a:off x="97832" y="-179711"/>
+            <a:ext cx="11996331" cy="1325563"/>
+          </a:xfrm>
+        </p:spPr>
+        <p:txBody>
+          <a:bodyPr>
+            <a:normAutofit/>
+          </a:bodyPr>
+          <a:lstStyle/>
+          <a:p>
+            <a:r>
+              <a:rPr lang="en-US" sz="4200" b="1" dirty="0">
+                <a:latin typeface="Times New Roman" panose="02020603050405020304" pitchFamily="18" charset="0"/>
+                <a:cs typeface="Times New Roman" panose="02020603050405020304" pitchFamily="18" charset="0"/>
+              </a:rPr>
+              <a:t>Go &amp; </a:t>
+            </a:r>
+            <a:r>
+              <a:rPr lang="en-US" sz="4200" b="1" dirty="0" err="1">
+                <a:latin typeface="Times New Roman" panose="02020603050405020304" pitchFamily="18" charset="0"/>
+                <a:cs typeface="Times New Roman" panose="02020603050405020304" pitchFamily="18" charset="0"/>
+              </a:rPr>
+              <a:t>mySQL</a:t>
+            </a:r>
+            <a:r>
+              <a:rPr lang="en-US" sz="4200" b="1" dirty="0">
+                <a:latin typeface="Times New Roman" panose="02020603050405020304" pitchFamily="18" charset="0"/>
+                <a:cs typeface="Times New Roman" panose="02020603050405020304" pitchFamily="18" charset="0"/>
+              </a:rPr>
+              <a:t> (SELECT Statement):</a:t>
+            </a:r>
+          </a:p>
+        </p:txBody>
+      </p:sp>
+      <p:pic>
+        <p:nvPicPr>
+          <p:cNvPr id="9" name="Picture 8">
+            <a:extLst>
+              <a:ext uri="{FF2B5EF4-FFF2-40B4-BE49-F238E27FC236}">
+                <a16:creationId xmlns:a16="http://schemas.microsoft.com/office/drawing/2014/main" id="{114CCF71-1646-0AA4-A8F6-41815D154C49}"/>
+              </a:ext>
+            </a:extLst>
+          </p:cNvPr>
+          <p:cNvPicPr>
+            <a:picLocks noChangeAspect="1"/>
+          </p:cNvPicPr>
+          <p:nvPr/>
+        </p:nvPicPr>
+        <p:blipFill>
+          <a:blip r:embed="rId4"/>
+          <a:stretch>
+            <a:fillRect/>
+          </a:stretch>
+        </p:blipFill>
+        <p:spPr>
+          <a:xfrm>
+            <a:off x="0" y="838094"/>
+            <a:ext cx="5114679" cy="1131383"/>
+          </a:xfrm>
+          <a:prstGeom prst="rect">
+            <a:avLst/>
+          </a:prstGeom>
+        </p:spPr>
+      </p:pic>
+      <p:sp>
+        <p:nvSpPr>
+          <p:cNvPr id="10" name="Rectangle 9">
+            <a:extLst>
+              <a:ext uri="{FF2B5EF4-FFF2-40B4-BE49-F238E27FC236}">
+                <a16:creationId xmlns:a16="http://schemas.microsoft.com/office/drawing/2014/main" id="{F2A2B557-6446-A906-8750-D4E35B38B88C}"/>
+              </a:ext>
+            </a:extLst>
+          </p:cNvPr>
+          <p:cNvSpPr/>
+          <p:nvPr/>
+        </p:nvSpPr>
+        <p:spPr>
+          <a:xfrm>
+            <a:off x="5212511" y="1026731"/>
+            <a:ext cx="6397768" cy="530933"/>
+          </a:xfrm>
+          <a:prstGeom prst="rect">
+            <a:avLst/>
+          </a:prstGeom>
+          <a:ln>
+            <a:noFill/>
+          </a:ln>
+        </p:spPr>
+        <p:style>
+          <a:lnRef idx="2">
+            <a:schemeClr val="accent1">
+              <a:shade val="15000"/>
+            </a:schemeClr>
+          </a:lnRef>
+          <a:fillRef idx="1">
+            <a:schemeClr val="accent1"/>
+          </a:fillRef>
+          <a:effectRef idx="0">
+            <a:schemeClr val="accent1"/>
+          </a:effectRef>
+          <a:fontRef idx="minor">
+            <a:schemeClr val="lt1"/>
+          </a:fontRef>
+        </p:style>
+        <p:txBody>
+          <a:bodyPr rtlCol="0" anchor="ctr"/>
+          <a:lstStyle/>
+          <a:p>
+            <a:pPr algn="ctr"/>
+            <a:r>
+              <a:rPr lang="en-US" b="1" dirty="0">
+                <a:solidFill>
+                  <a:schemeClr val="bg1"/>
+                </a:solidFill>
+                <a:latin typeface="Arial" panose="020B0604020202020204" pitchFamily="34" charset="0"/>
+                <a:cs typeface="Arial" panose="020B0604020202020204" pitchFamily="34" charset="0"/>
+              </a:rPr>
+              <a:t>First, you have to create a struct that has elements corresponding to the table fields you want</a:t>
+            </a:r>
+          </a:p>
+        </p:txBody>
+      </p:sp>
+      <p:pic>
+        <p:nvPicPr>
+          <p:cNvPr id="12" name="Picture 11">
+            <a:extLst>
+              <a:ext uri="{FF2B5EF4-FFF2-40B4-BE49-F238E27FC236}">
+                <a16:creationId xmlns:a16="http://schemas.microsoft.com/office/drawing/2014/main" id="{23C14EA5-44D8-4EB3-29F2-828814EDDC4B}"/>
+              </a:ext>
+            </a:extLst>
+          </p:cNvPr>
+          <p:cNvPicPr>
+            <a:picLocks noChangeAspect="1"/>
+          </p:cNvPicPr>
+          <p:nvPr/>
+        </p:nvPicPr>
+        <p:blipFill>
+          <a:blip r:embed="rId5"/>
+          <a:stretch>
+            <a:fillRect/>
+          </a:stretch>
+        </p:blipFill>
+        <p:spPr>
+          <a:xfrm>
+            <a:off x="50240" y="2069957"/>
+            <a:ext cx="8410472" cy="4701947"/>
+          </a:xfrm>
+          <a:prstGeom prst="rect">
+            <a:avLst/>
+          </a:prstGeom>
+        </p:spPr>
+      </p:pic>
+      <p:sp>
+        <p:nvSpPr>
+          <p:cNvPr id="13" name="Cloud 12">
+            <a:extLst>
+              <a:ext uri="{FF2B5EF4-FFF2-40B4-BE49-F238E27FC236}">
+                <a16:creationId xmlns:a16="http://schemas.microsoft.com/office/drawing/2014/main" id="{DE0D4603-6B25-A07C-3542-399D75BD7D2E}"/>
+              </a:ext>
+            </a:extLst>
+          </p:cNvPr>
+          <p:cNvSpPr/>
+          <p:nvPr/>
+        </p:nvSpPr>
+        <p:spPr>
+          <a:xfrm>
+            <a:off x="8703655" y="1969476"/>
+            <a:ext cx="2906624" cy="1325563"/>
+          </a:xfrm>
+          <a:prstGeom prst="cloud">
+            <a:avLst/>
+          </a:prstGeom>
+        </p:spPr>
+        <p:style>
+          <a:lnRef idx="2">
+            <a:schemeClr val="accent1">
+              <a:shade val="15000"/>
+            </a:schemeClr>
+          </a:lnRef>
+          <a:fillRef idx="1">
+            <a:schemeClr val="accent1"/>
+          </a:fillRef>
+          <a:effectRef idx="0">
+            <a:schemeClr val="accent1"/>
+          </a:effectRef>
+          <a:fontRef idx="minor">
+            <a:schemeClr val="lt1"/>
+          </a:fontRef>
+        </p:style>
+        <p:txBody>
+          <a:bodyPr rtlCol="0" anchor="ctr"/>
+          <a:lstStyle/>
+          <a:p>
+            <a:pPr algn="ctr"/>
+            <a:r>
+              <a:rPr lang="en-US" sz="2000" b="1" dirty="0">
+                <a:latin typeface="Arial" panose="020B0604020202020204" pitchFamily="34" charset="0"/>
+                <a:cs typeface="Arial" panose="020B0604020202020204" pitchFamily="34" charset="0"/>
+              </a:rPr>
+              <a:t>Query multiple data</a:t>
+            </a:r>
+          </a:p>
+        </p:txBody>
+      </p:sp>
+      <p:grpSp>
+        <p:nvGrpSpPr>
+          <p:cNvPr id="19" name="Group 18">
+            <a:extLst>
+              <a:ext uri="{FF2B5EF4-FFF2-40B4-BE49-F238E27FC236}">
+                <a16:creationId xmlns:a16="http://schemas.microsoft.com/office/drawing/2014/main" id="{E6C1CF46-C9D3-6D6B-59E7-0B98C59CECC1}"/>
+              </a:ext>
+            </a:extLst>
+          </p:cNvPr>
+          <p:cNvGrpSpPr/>
+          <p:nvPr/>
+        </p:nvGrpSpPr>
+        <p:grpSpPr>
+          <a:xfrm>
+            <a:off x="2585805" y="3538946"/>
+            <a:ext cx="626400" cy="362520"/>
+            <a:chOff x="2585805" y="3538946"/>
+            <a:chExt cx="626400" cy="362520"/>
+          </a:xfrm>
+        </p:grpSpPr>
+        <mc:AlternateContent xmlns:mc="http://schemas.openxmlformats.org/markup-compatibility/2006" xmlns:p14="http://schemas.microsoft.com/office/powerpoint/2010/main">
+          <mc:Choice Requires="p14">
+            <p:contentPart p14:bwMode="auto" r:id="rId6">
+              <p14:nvContentPartPr>
+                <p14:cNvPr id="17" name="Ink 16">
+                  <a:extLst>
+                    <a:ext uri="{FF2B5EF4-FFF2-40B4-BE49-F238E27FC236}">
+                      <a16:creationId xmlns:a16="http://schemas.microsoft.com/office/drawing/2014/main" id="{EE3BACD9-4373-5C89-2621-F6EC8BA6475C}"/>
+                    </a:ext>
+                  </a:extLst>
+                </p14:cNvPr>
+                <p14:cNvContentPartPr/>
+                <p14:nvPr/>
+              </p14:nvContentPartPr>
+              <p14:xfrm>
+                <a:off x="2585805" y="3538946"/>
+                <a:ext cx="513720" cy="231480"/>
+              </p14:xfrm>
+            </p:contentPart>
+          </mc:Choice>
+          <mc:Fallback xmlns="">
+            <p:pic>
+              <p:nvPicPr>
+                <p:cNvPr id="17" name="Ink 16">
+                  <a:extLst>
+                    <a:ext uri="{FF2B5EF4-FFF2-40B4-BE49-F238E27FC236}">
+                      <a16:creationId xmlns:a16="http://schemas.microsoft.com/office/drawing/2014/main" id="{EE3BACD9-4373-5C89-2621-F6EC8BA6475C}"/>
+                    </a:ext>
+                  </a:extLst>
+                </p:cNvPr>
+                <p:cNvPicPr/>
+                <p:nvPr/>
+              </p:nvPicPr>
+              <p:blipFill>
+                <a:blip r:embed="rId7"/>
+                <a:stretch>
+                  <a:fillRect/>
+                </a:stretch>
+              </p:blipFill>
+              <p:spPr>
+                <a:xfrm>
+                  <a:off x="2571395" y="3524546"/>
+                  <a:ext cx="541820" cy="259560"/>
+                </a:xfrm>
+                <a:prstGeom prst="rect">
+                  <a:avLst/>
+                </a:prstGeom>
+              </p:spPr>
+            </p:pic>
+          </mc:Fallback>
+        </mc:AlternateContent>
+        <mc:AlternateContent xmlns:mc="http://schemas.openxmlformats.org/markup-compatibility/2006" xmlns:p14="http://schemas.microsoft.com/office/powerpoint/2010/main">
+          <mc:Choice Requires="p14">
+            <p:contentPart p14:bwMode="auto" r:id="rId8">
+              <p14:nvContentPartPr>
+                <p14:cNvPr id="18" name="Ink 17">
+                  <a:extLst>
+                    <a:ext uri="{FF2B5EF4-FFF2-40B4-BE49-F238E27FC236}">
+                      <a16:creationId xmlns:a16="http://schemas.microsoft.com/office/drawing/2014/main" id="{F9A01C51-C388-6757-4452-DE8B9C608E6E}"/>
+                    </a:ext>
+                  </a:extLst>
+                </p14:cNvPr>
+                <p14:cNvContentPartPr/>
+                <p14:nvPr/>
+              </p14:nvContentPartPr>
+              <p14:xfrm>
+                <a:off x="3017805" y="3639746"/>
+                <a:ext cx="194400" cy="261720"/>
+              </p14:xfrm>
+            </p:contentPart>
+          </mc:Choice>
+          <mc:Fallback xmlns="">
+            <p:pic>
+              <p:nvPicPr>
+                <p:cNvPr id="18" name="Ink 17">
+                  <a:extLst>
+                    <a:ext uri="{FF2B5EF4-FFF2-40B4-BE49-F238E27FC236}">
+                      <a16:creationId xmlns:a16="http://schemas.microsoft.com/office/drawing/2014/main" id="{F9A01C51-C388-6757-4452-DE8B9C608E6E}"/>
+                    </a:ext>
+                  </a:extLst>
+                </p:cNvPr>
+                <p:cNvPicPr/>
+                <p:nvPr/>
+              </p:nvPicPr>
+              <p:blipFill>
+                <a:blip r:embed="rId9"/>
+                <a:stretch>
+                  <a:fillRect/>
+                </a:stretch>
+              </p:blipFill>
+              <p:spPr>
+                <a:xfrm>
+                  <a:off x="3003405" y="3625366"/>
+                  <a:ext cx="222480" cy="289761"/>
+                </a:xfrm>
+                <a:prstGeom prst="rect">
+                  <a:avLst/>
+                </a:prstGeom>
+              </p:spPr>
+            </p:pic>
+          </mc:Fallback>
+        </mc:AlternateContent>
+      </p:grpSp>
+      <p:sp>
+        <p:nvSpPr>
+          <p:cNvPr id="20" name="TextBox 19">
+            <a:extLst>
+              <a:ext uri="{FF2B5EF4-FFF2-40B4-BE49-F238E27FC236}">
+                <a16:creationId xmlns:a16="http://schemas.microsoft.com/office/drawing/2014/main" id="{143405FC-3F72-EA21-F5D2-EFDB2193AFB7}"/>
+              </a:ext>
+            </a:extLst>
+          </p:cNvPr>
+          <p:cNvSpPr txBox="1"/>
+          <p:nvPr/>
+        </p:nvSpPr>
+        <p:spPr>
+          <a:xfrm>
+            <a:off x="3278751" y="3538946"/>
+            <a:ext cx="4712677" cy="369332"/>
+          </a:xfrm>
+          <a:prstGeom prst="rect">
+            <a:avLst/>
+          </a:prstGeom>
+          <a:noFill/>
+        </p:spPr>
+        <p:txBody>
+          <a:bodyPr wrap="square" rtlCol="0">
+            <a:spAutoFit/>
+          </a:bodyPr>
+          <a:lstStyle/>
+          <a:p>
+            <a:r>
+              <a:rPr lang="en-US" b="1" dirty="0">
+                <a:solidFill>
+                  <a:schemeClr val="bg1"/>
+                </a:solidFill>
+                <a:latin typeface="Arial" panose="020B0604020202020204" pitchFamily="34" charset="0"/>
+                <a:cs typeface="Arial" panose="020B0604020202020204" pitchFamily="34" charset="0"/>
+              </a:rPr>
+              <a:t>Works like throwing exceptions</a:t>
+            </a:r>
+          </a:p>
+        </p:txBody>
+      </p:sp>
+      <p:grpSp>
+        <p:nvGrpSpPr>
+          <p:cNvPr id="23" name="Group 22">
+            <a:extLst>
+              <a:ext uri="{FF2B5EF4-FFF2-40B4-BE49-F238E27FC236}">
+                <a16:creationId xmlns:a16="http://schemas.microsoft.com/office/drawing/2014/main" id="{A21432F1-4294-02DB-E3F7-C22D52084F61}"/>
+              </a:ext>
+            </a:extLst>
+          </p:cNvPr>
+          <p:cNvGrpSpPr/>
+          <p:nvPr/>
+        </p:nvGrpSpPr>
+        <p:grpSpPr>
+          <a:xfrm>
+            <a:off x="2563739" y="4484340"/>
+            <a:ext cx="407340" cy="248220"/>
+            <a:chOff x="2539720" y="4464020"/>
+            <a:chExt cx="407340" cy="248220"/>
+          </a:xfrm>
+        </p:grpSpPr>
+        <mc:AlternateContent xmlns:mc="http://schemas.openxmlformats.org/markup-compatibility/2006" xmlns:p14="http://schemas.microsoft.com/office/powerpoint/2010/main">
+          <mc:Choice Requires="p14">
+            <p:contentPart p14:bwMode="auto" r:id="rId10">
+              <p14:nvContentPartPr>
+                <p14:cNvPr id="21" name="Ink 20">
+                  <a:extLst>
+                    <a:ext uri="{FF2B5EF4-FFF2-40B4-BE49-F238E27FC236}">
+                      <a16:creationId xmlns:a16="http://schemas.microsoft.com/office/drawing/2014/main" id="{5FD7CEB2-45CE-333C-B047-8D1B2656B51B}"/>
+                    </a:ext>
+                  </a:extLst>
+                </p14:cNvPr>
+                <p14:cNvContentPartPr/>
+                <p14:nvPr/>
+              </p14:nvContentPartPr>
+              <p14:xfrm>
+                <a:off x="2539720" y="4532240"/>
+                <a:ext cx="374040" cy="180000"/>
+              </p14:xfrm>
+            </p:contentPart>
+          </mc:Choice>
+          <mc:Fallback xmlns="">
+            <p:pic>
+              <p:nvPicPr>
+                <p:cNvPr id="21" name="Ink 20">
+                  <a:extLst>
+                    <a:ext uri="{FF2B5EF4-FFF2-40B4-BE49-F238E27FC236}">
+                      <a16:creationId xmlns:a16="http://schemas.microsoft.com/office/drawing/2014/main" id="{5FD7CEB2-45CE-333C-B047-8D1B2656B51B}"/>
+                    </a:ext>
+                  </a:extLst>
+                </p:cNvPr>
+                <p:cNvPicPr/>
+                <p:nvPr/>
+              </p:nvPicPr>
+              <p:blipFill>
+                <a:blip r:embed="rId11"/>
+                <a:stretch>
+                  <a:fillRect/>
+                </a:stretch>
+              </p:blipFill>
+              <p:spPr>
+                <a:xfrm>
+                  <a:off x="2525320" y="4517840"/>
+                  <a:ext cx="402120" cy="208080"/>
+                </a:xfrm>
+                <a:prstGeom prst="rect">
+                  <a:avLst/>
+                </a:prstGeom>
+              </p:spPr>
+            </p:pic>
+          </mc:Fallback>
+        </mc:AlternateContent>
+        <mc:AlternateContent xmlns:mc="http://schemas.openxmlformats.org/markup-compatibility/2006" xmlns:p14="http://schemas.microsoft.com/office/powerpoint/2010/main">
+          <mc:Choice Requires="p14">
+            <p:contentPart p14:bwMode="auto" r:id="rId12">
+              <p14:nvContentPartPr>
+                <p14:cNvPr id="22" name="Ink 21">
+                  <a:extLst>
+                    <a:ext uri="{FF2B5EF4-FFF2-40B4-BE49-F238E27FC236}">
+                      <a16:creationId xmlns:a16="http://schemas.microsoft.com/office/drawing/2014/main" id="{4B96B0FB-30A0-EFEF-A5D5-BBC03542BD72}"/>
+                    </a:ext>
+                  </a:extLst>
+                </p14:cNvPr>
+                <p14:cNvContentPartPr/>
+                <p14:nvPr/>
+              </p14:nvContentPartPr>
+              <p14:xfrm>
+                <a:off x="2880460" y="4464020"/>
+                <a:ext cx="66600" cy="136440"/>
+              </p14:xfrm>
+            </p:contentPart>
+          </mc:Choice>
+          <mc:Fallback xmlns="">
+            <p:pic>
+              <p:nvPicPr>
+                <p:cNvPr id="22" name="Ink 21">
+                  <a:extLst>
+                    <a:ext uri="{FF2B5EF4-FFF2-40B4-BE49-F238E27FC236}">
+                      <a16:creationId xmlns:a16="http://schemas.microsoft.com/office/drawing/2014/main" id="{4B96B0FB-30A0-EFEF-A5D5-BBC03542BD72}"/>
+                    </a:ext>
+                  </a:extLst>
+                </p:cNvPr>
+                <p:cNvPicPr/>
+                <p:nvPr/>
+              </p:nvPicPr>
+              <p:blipFill>
+                <a:blip r:embed="rId13"/>
+                <a:stretch>
+                  <a:fillRect/>
+                </a:stretch>
+              </p:blipFill>
+              <p:spPr>
+                <a:xfrm>
+                  <a:off x="2866060" y="4449620"/>
+                  <a:ext cx="94680" cy="164520"/>
+                </a:xfrm>
+                <a:prstGeom prst="rect">
+                  <a:avLst/>
+                </a:prstGeom>
+              </p:spPr>
+            </p:pic>
+          </mc:Fallback>
+        </mc:AlternateContent>
+      </p:grpSp>
+      <p:sp>
+        <p:nvSpPr>
+          <p:cNvPr id="26" name="TextBox 25">
+            <a:extLst>
+              <a:ext uri="{FF2B5EF4-FFF2-40B4-BE49-F238E27FC236}">
+                <a16:creationId xmlns:a16="http://schemas.microsoft.com/office/drawing/2014/main" id="{6555C8EE-B38D-8FDE-A3E7-D15CCABAA2CD}"/>
+              </a:ext>
+            </a:extLst>
+          </p:cNvPr>
+          <p:cNvSpPr txBox="1"/>
+          <p:nvPr/>
+        </p:nvSpPr>
+        <p:spPr>
+          <a:xfrm>
+            <a:off x="2995931" y="4398671"/>
+            <a:ext cx="6114003" cy="307777"/>
+          </a:xfrm>
+          <a:prstGeom prst="rect">
+            <a:avLst/>
+          </a:prstGeom>
+          <a:noFill/>
+        </p:spPr>
+        <p:txBody>
+          <a:bodyPr wrap="square" rtlCol="0">
+            <a:spAutoFit/>
+          </a:bodyPr>
+          <a:lstStyle/>
+          <a:p>
+            <a:r>
+              <a:rPr lang="en-US" sz="1400" b="1" dirty="0">
+                <a:solidFill>
+                  <a:schemeClr val="bg1"/>
+                </a:solidFill>
+                <a:latin typeface="Arial" panose="020B0604020202020204" pitchFamily="34" charset="0"/>
+                <a:cs typeface="Arial" panose="020B0604020202020204" pitchFamily="34" charset="0"/>
+              </a:rPr>
+              <a:t>Make sure of the order of the fields and don’t forget the &amp;</a:t>
+            </a:r>
+          </a:p>
+        </p:txBody>
+      </p:sp>
+      <p:pic>
+        <p:nvPicPr>
+          <p:cNvPr id="4" name="Picture 3">
+            <a:extLst>
+              <a:ext uri="{FF2B5EF4-FFF2-40B4-BE49-F238E27FC236}">
+                <a16:creationId xmlns:a16="http://schemas.microsoft.com/office/drawing/2014/main" id="{189DB390-4D72-8F76-14A2-16171EE84273}"/>
+              </a:ext>
+            </a:extLst>
+          </p:cNvPr>
+          <p:cNvPicPr>
+            <a:picLocks noChangeAspect="1"/>
+          </p:cNvPicPr>
+          <p:nvPr/>
+        </p:nvPicPr>
+        <p:blipFill>
+          <a:blip r:embed="rId14"/>
+          <a:stretch>
+            <a:fillRect/>
+          </a:stretch>
+        </p:blipFill>
+        <p:spPr>
+          <a:xfrm>
+            <a:off x="6753672" y="5100321"/>
+            <a:ext cx="5113207" cy="1671584"/>
+          </a:xfrm>
+          <a:prstGeom prst="rect">
+            <a:avLst/>
+          </a:prstGeom>
+        </p:spPr>
+      </p:pic>
+      <p:sp>
+        <p:nvSpPr>
+          <p:cNvPr id="5" name="Rectangle 4">
+            <a:extLst>
+              <a:ext uri="{FF2B5EF4-FFF2-40B4-BE49-F238E27FC236}">
+                <a16:creationId xmlns:a16="http://schemas.microsoft.com/office/drawing/2014/main" id="{BE2500B8-CF83-1B66-FBF5-FDFD7626CBD7}"/>
+              </a:ext>
+            </a:extLst>
+          </p:cNvPr>
+          <p:cNvSpPr/>
+          <p:nvPr/>
+        </p:nvSpPr>
+        <p:spPr>
+          <a:xfrm>
+            <a:off x="9766774" y="4502953"/>
+            <a:ext cx="2100105" cy="597368"/>
+          </a:xfrm>
+          <a:prstGeom prst="rect">
+            <a:avLst/>
+          </a:prstGeom>
+          <a:ln>
+            <a:noFill/>
+          </a:ln>
+        </p:spPr>
+        <p:style>
+          <a:lnRef idx="2">
+            <a:schemeClr val="accent1">
+              <a:shade val="15000"/>
+            </a:schemeClr>
+          </a:lnRef>
+          <a:fillRef idx="1">
+            <a:schemeClr val="accent1"/>
+          </a:fillRef>
+          <a:effectRef idx="0">
+            <a:schemeClr val="accent1"/>
+          </a:effectRef>
+          <a:fontRef idx="minor">
+            <a:schemeClr val="lt1"/>
+          </a:fontRef>
+        </p:style>
+        <p:txBody>
+          <a:bodyPr rtlCol="0" anchor="ctr"/>
+          <a:lstStyle/>
+          <a:p>
+            <a:pPr algn="ctr"/>
+            <a:r>
+              <a:rPr lang="en-US" sz="2000" b="1" dirty="0">
+                <a:solidFill>
+                  <a:schemeClr val="bg1"/>
+                </a:solidFill>
+                <a:latin typeface="Arial" panose="020B0604020202020204" pitchFamily="34" charset="0"/>
+                <a:cs typeface="Arial" panose="020B0604020202020204" pitchFamily="34" charset="0"/>
+              </a:rPr>
+              <a:t>Calling in main</a:t>
+            </a:r>
+          </a:p>
+        </p:txBody>
+      </p:sp>
+    </p:spTree>
+    <p:custDataLst>
+      <p:tags r:id="rId1"/>
+    </p:custDataLst>
+    <p:extLst>
+      <p:ext uri="{BB962C8B-B14F-4D97-AF65-F5344CB8AC3E}">
+        <p14:creationId xmlns:p14="http://schemas.microsoft.com/office/powerpoint/2010/main" val="1092647628"/>
+      </p:ext>
+    </p:extLst>
+  </p:cSld>
+  <p:clrMapOvr>
+    <a:masterClrMapping/>
+  </p:clrMapOvr>
+  <mc:AlternateContent xmlns:mc="http://schemas.openxmlformats.org/markup-compatibility/2006" xmlns:p14="http://schemas.microsoft.com/office/powerpoint/2010/main">
+    <mc:Choice Requires="p14">
+      <p:transition spd="slow" p14:dur="2000" advTm="207460"/>
+    </mc:Choice>
+    <mc:Fallback xmlns="">
+      <p:transition spd="slow" advTm="207460"/>
+    </mc:Fallback>
+  </mc:AlternateContent>
+</p:sld>
+</file>
+
+<file path=ppt/slides/slide14.xml><?xml version="1.0" encoding="utf-8"?>
+<p:sld xmlns:a="http://schemas.openxmlformats.org/drawingml/2006/main" xmlns:r="http://schemas.openxmlformats.org/officeDocument/2006/relationships" xmlns:p="http://schemas.openxmlformats.org/presentationml/2006/main">
+  <p:cSld>
+    <p:bg>
+      <p:bgPr>
+        <a:gradFill>
+          <a:gsLst>
+            <a:gs pos="0">
+              <a:schemeClr val="bg1">
+                <a:lumMod val="95000"/>
+              </a:schemeClr>
+            </a:gs>
+            <a:gs pos="74000">
+              <a:schemeClr val="bg1">
+                <a:lumMod val="85000"/>
+              </a:schemeClr>
+            </a:gs>
+            <a:gs pos="83000">
+              <a:schemeClr val="bg1">
+                <a:lumMod val="75000"/>
+              </a:schemeClr>
+            </a:gs>
+            <a:gs pos="100000">
+              <a:schemeClr val="bg1">
+                <a:lumMod val="50000"/>
+              </a:schemeClr>
+            </a:gs>
+          </a:gsLst>
+          <a:lin ang="5400000" scaled="1"/>
+        </a:gradFill>
+        <a:effectLst/>
+      </p:bgPr>
+    </p:bg>
+    <p:spTree>
+      <p:nvGrpSpPr>
+        <p:cNvPr id="1" name="">
+          <a:extLst>
+            <a:ext uri="{FF2B5EF4-FFF2-40B4-BE49-F238E27FC236}">
+              <a16:creationId xmlns:a16="http://schemas.microsoft.com/office/drawing/2014/main" id="{CC4EFF5F-0DF7-BFA9-E2EE-0482494CBD13}"/>
+            </a:ext>
+          </a:extLst>
+        </p:cNvPr>
+        <p:cNvGrpSpPr/>
+        <p:nvPr/>
+      </p:nvGrpSpPr>
+      <p:grpSpPr>
+        <a:xfrm>
+          <a:off x="0" y="0"/>
+          <a:ext cx="0" cy="0"/>
+          <a:chOff x="0" y="0"/>
+          <a:chExt cx="0" cy="0"/>
+        </a:xfrm>
+      </p:grpSpPr>
+      <p:sp>
+        <p:nvSpPr>
+          <p:cNvPr id="2" name="Title 1">
+            <a:extLst>
+              <a:ext uri="{FF2B5EF4-FFF2-40B4-BE49-F238E27FC236}">
+                <a16:creationId xmlns:a16="http://schemas.microsoft.com/office/drawing/2014/main" id="{30DCDC29-EDE6-732E-0ACF-AD57A3E04AC9}"/>
+              </a:ext>
+            </a:extLst>
+          </p:cNvPr>
+          <p:cNvSpPr>
+            <a:spLocks noGrp="1"/>
+          </p:cNvSpPr>
+          <p:nvPr>
+            <p:ph type="title"/>
+          </p:nvPr>
+        </p:nvSpPr>
+        <p:spPr>
+          <a:xfrm>
+            <a:off x="97832" y="-179711"/>
+            <a:ext cx="11996331" cy="1325563"/>
+          </a:xfrm>
+        </p:spPr>
+        <p:txBody>
+          <a:bodyPr>
+            <a:normAutofit/>
+          </a:bodyPr>
+          <a:lstStyle/>
+          <a:p>
+            <a:r>
+              <a:rPr lang="en-US" sz="4200" b="1" dirty="0">
+                <a:latin typeface="Times New Roman" panose="02020603050405020304" pitchFamily="18" charset="0"/>
+                <a:cs typeface="Times New Roman" panose="02020603050405020304" pitchFamily="18" charset="0"/>
+              </a:rPr>
+              <a:t>Go &amp; </a:t>
+            </a:r>
+            <a:r>
+              <a:rPr lang="en-US" sz="4200" b="1" dirty="0" err="1">
+                <a:latin typeface="Times New Roman" panose="02020603050405020304" pitchFamily="18" charset="0"/>
+                <a:cs typeface="Times New Roman" panose="02020603050405020304" pitchFamily="18" charset="0"/>
+              </a:rPr>
+              <a:t>mySQL</a:t>
+            </a:r>
+            <a:r>
+              <a:rPr lang="en-US" sz="4200" b="1" dirty="0">
+                <a:latin typeface="Times New Roman" panose="02020603050405020304" pitchFamily="18" charset="0"/>
+                <a:cs typeface="Times New Roman" panose="02020603050405020304" pitchFamily="18" charset="0"/>
+              </a:rPr>
+              <a:t> (SELECT Statement):</a:t>
+            </a:r>
+          </a:p>
+        </p:txBody>
+      </p:sp>
+      <p:pic>
+        <p:nvPicPr>
+          <p:cNvPr id="9" name="Picture 8">
+            <a:extLst>
+              <a:ext uri="{FF2B5EF4-FFF2-40B4-BE49-F238E27FC236}">
+                <a16:creationId xmlns:a16="http://schemas.microsoft.com/office/drawing/2014/main" id="{D44E8DC2-D94D-4B1E-1ECE-6B867064C84A}"/>
+              </a:ext>
+            </a:extLst>
+          </p:cNvPr>
+          <p:cNvPicPr>
+            <a:picLocks noChangeAspect="1"/>
+          </p:cNvPicPr>
+          <p:nvPr/>
+        </p:nvPicPr>
+        <p:blipFill>
+          <a:blip r:embed="rId4"/>
+          <a:stretch>
+            <a:fillRect/>
+          </a:stretch>
+        </p:blipFill>
+        <p:spPr>
+          <a:xfrm>
+            <a:off x="0" y="838094"/>
+            <a:ext cx="5114679" cy="1131383"/>
+          </a:xfrm>
+          <a:prstGeom prst="rect">
+            <a:avLst/>
+          </a:prstGeom>
+        </p:spPr>
+      </p:pic>
+      <p:sp>
+        <p:nvSpPr>
+          <p:cNvPr id="10" name="Rectangle 9">
+            <a:extLst>
+              <a:ext uri="{FF2B5EF4-FFF2-40B4-BE49-F238E27FC236}">
+                <a16:creationId xmlns:a16="http://schemas.microsoft.com/office/drawing/2014/main" id="{DDB16E16-7D1B-719C-EE46-4F7B0CF7A800}"/>
+              </a:ext>
+            </a:extLst>
+          </p:cNvPr>
+          <p:cNvSpPr/>
+          <p:nvPr/>
+        </p:nvSpPr>
+        <p:spPr>
+          <a:xfrm>
+            <a:off x="5212511" y="1026731"/>
+            <a:ext cx="6397768" cy="530933"/>
+          </a:xfrm>
+          <a:prstGeom prst="rect">
+            <a:avLst/>
+          </a:prstGeom>
+          <a:ln>
+            <a:noFill/>
+          </a:ln>
+        </p:spPr>
+        <p:style>
+          <a:lnRef idx="2">
+            <a:schemeClr val="accent1">
+              <a:shade val="15000"/>
+            </a:schemeClr>
+          </a:lnRef>
+          <a:fillRef idx="1">
+            <a:schemeClr val="accent1"/>
+          </a:fillRef>
+          <a:effectRef idx="0">
+            <a:schemeClr val="accent1"/>
+          </a:effectRef>
+          <a:fontRef idx="minor">
+            <a:schemeClr val="lt1"/>
+          </a:fontRef>
+        </p:style>
+        <p:txBody>
+          <a:bodyPr rtlCol="0" anchor="ctr"/>
+          <a:lstStyle/>
+          <a:p>
+            <a:pPr algn="ctr"/>
+            <a:r>
+              <a:rPr lang="en-US" b="1" dirty="0">
+                <a:solidFill>
+                  <a:schemeClr val="bg1"/>
+                </a:solidFill>
+                <a:latin typeface="Arial" panose="020B0604020202020204" pitchFamily="34" charset="0"/>
+                <a:cs typeface="Arial" panose="020B0604020202020204" pitchFamily="34" charset="0"/>
+              </a:rPr>
+              <a:t>First, you have to create a struct that has elements corresponding to the table fields you want</a:t>
+            </a:r>
+          </a:p>
+        </p:txBody>
+      </p:sp>
+      <p:sp>
+        <p:nvSpPr>
+          <p:cNvPr id="13" name="Cloud 12">
+            <a:extLst>
+              <a:ext uri="{FF2B5EF4-FFF2-40B4-BE49-F238E27FC236}">
+                <a16:creationId xmlns:a16="http://schemas.microsoft.com/office/drawing/2014/main" id="{5047C479-430A-DC5F-1BDA-4B8CB71FEACB}"/>
+              </a:ext>
+            </a:extLst>
+          </p:cNvPr>
+          <p:cNvSpPr/>
+          <p:nvPr/>
+        </p:nvSpPr>
+        <p:spPr>
+          <a:xfrm>
+            <a:off x="8703655" y="1969476"/>
+            <a:ext cx="2906624" cy="1325563"/>
+          </a:xfrm>
+          <a:prstGeom prst="cloud">
+            <a:avLst/>
+          </a:prstGeom>
+        </p:spPr>
+        <p:style>
+          <a:lnRef idx="2">
+            <a:schemeClr val="accent1">
+              <a:shade val="15000"/>
+            </a:schemeClr>
+          </a:lnRef>
+          <a:fillRef idx="1">
+            <a:schemeClr val="accent1"/>
+          </a:fillRef>
+          <a:effectRef idx="0">
+            <a:schemeClr val="accent1"/>
+          </a:effectRef>
+          <a:fontRef idx="minor">
+            <a:schemeClr val="lt1"/>
+          </a:fontRef>
+        </p:style>
+        <p:txBody>
+          <a:bodyPr rtlCol="0" anchor="ctr"/>
+          <a:lstStyle/>
+          <a:p>
+            <a:pPr algn="ctr"/>
+            <a:r>
+              <a:rPr lang="en-US" sz="2000" b="1" dirty="0">
+                <a:latin typeface="Arial" panose="020B0604020202020204" pitchFamily="34" charset="0"/>
+                <a:cs typeface="Arial" panose="020B0604020202020204" pitchFamily="34" charset="0"/>
+              </a:rPr>
+              <a:t>Query One Row</a:t>
+            </a:r>
+          </a:p>
+        </p:txBody>
+      </p:sp>
+      <p:pic>
+        <p:nvPicPr>
+          <p:cNvPr id="29" name="Picture 28">
+            <a:extLst>
+              <a:ext uri="{FF2B5EF4-FFF2-40B4-BE49-F238E27FC236}">
+                <a16:creationId xmlns:a16="http://schemas.microsoft.com/office/drawing/2014/main" id="{B1DCEA0F-2FB4-5A59-ECB0-B0415E1746CE}"/>
+              </a:ext>
+            </a:extLst>
+          </p:cNvPr>
+          <p:cNvPicPr>
+            <a:picLocks noChangeAspect="1"/>
+          </p:cNvPicPr>
+          <p:nvPr/>
+        </p:nvPicPr>
+        <p:blipFill>
+          <a:blip r:embed="rId5"/>
+          <a:stretch>
+            <a:fillRect/>
+          </a:stretch>
+        </p:blipFill>
+        <p:spPr>
+          <a:xfrm>
+            <a:off x="97832" y="2352294"/>
+            <a:ext cx="8077900" cy="3337306"/>
+          </a:xfrm>
+          <a:prstGeom prst="rect">
+            <a:avLst/>
+          </a:prstGeom>
+        </p:spPr>
+      </p:pic>
+      <p:pic>
+        <p:nvPicPr>
+          <p:cNvPr id="31" name="Picture 30">
+            <a:extLst>
+              <a:ext uri="{FF2B5EF4-FFF2-40B4-BE49-F238E27FC236}">
+                <a16:creationId xmlns:a16="http://schemas.microsoft.com/office/drawing/2014/main" id="{5CD66EC3-3C17-0E8B-E215-902CD36AC6C2}"/>
+              </a:ext>
+            </a:extLst>
+          </p:cNvPr>
+          <p:cNvPicPr>
+            <a:picLocks noChangeAspect="1"/>
+          </p:cNvPicPr>
+          <p:nvPr/>
+        </p:nvPicPr>
+        <p:blipFill>
+          <a:blip r:embed="rId6"/>
+          <a:stretch>
+            <a:fillRect/>
+          </a:stretch>
+        </p:blipFill>
+        <p:spPr>
+          <a:xfrm>
+            <a:off x="6890779" y="5210190"/>
+            <a:ext cx="5223704" cy="1586850"/>
+          </a:xfrm>
+          <a:prstGeom prst="rect">
+            <a:avLst/>
+          </a:prstGeom>
+        </p:spPr>
+      </p:pic>
+      <p:sp>
+        <p:nvSpPr>
+          <p:cNvPr id="32" name="Rectangle 31">
+            <a:extLst>
+              <a:ext uri="{FF2B5EF4-FFF2-40B4-BE49-F238E27FC236}">
+                <a16:creationId xmlns:a16="http://schemas.microsoft.com/office/drawing/2014/main" id="{7E06BF8C-B930-4481-2052-0967837AA788}"/>
+              </a:ext>
+            </a:extLst>
+          </p:cNvPr>
+          <p:cNvSpPr/>
+          <p:nvPr/>
+        </p:nvSpPr>
+        <p:spPr>
+          <a:xfrm>
+            <a:off x="9994058" y="4612822"/>
+            <a:ext cx="2100105" cy="597368"/>
+          </a:xfrm>
+          <a:prstGeom prst="rect">
+            <a:avLst/>
+          </a:prstGeom>
+          <a:ln>
+            <a:noFill/>
+          </a:ln>
+        </p:spPr>
+        <p:style>
+          <a:lnRef idx="2">
+            <a:schemeClr val="accent1">
+              <a:shade val="15000"/>
+            </a:schemeClr>
+          </a:lnRef>
+          <a:fillRef idx="1">
+            <a:schemeClr val="accent1"/>
+          </a:fillRef>
+          <a:effectRef idx="0">
+            <a:schemeClr val="accent1"/>
+          </a:effectRef>
+          <a:fontRef idx="minor">
+            <a:schemeClr val="lt1"/>
+          </a:fontRef>
+        </p:style>
+        <p:txBody>
+          <a:bodyPr rtlCol="0" anchor="ctr"/>
+          <a:lstStyle/>
+          <a:p>
+            <a:pPr algn="ctr"/>
+            <a:r>
+              <a:rPr lang="en-US" sz="2000" b="1" dirty="0">
+                <a:solidFill>
+                  <a:schemeClr val="bg1"/>
+                </a:solidFill>
+                <a:latin typeface="Arial" panose="020B0604020202020204" pitchFamily="34" charset="0"/>
+                <a:cs typeface="Arial" panose="020B0604020202020204" pitchFamily="34" charset="0"/>
+              </a:rPr>
+              <a:t>Calling in main</a:t>
+            </a:r>
+          </a:p>
+        </p:txBody>
+      </p:sp>
+    </p:spTree>
+    <p:custDataLst>
+      <p:tags r:id="rId1"/>
+    </p:custDataLst>
+    <p:extLst>
+      <p:ext uri="{BB962C8B-B14F-4D97-AF65-F5344CB8AC3E}">
+        <p14:creationId xmlns:p14="http://schemas.microsoft.com/office/powerpoint/2010/main" val="1504915458"/>
+      </p:ext>
+    </p:extLst>
+  </p:cSld>
+  <p:clrMapOvr>
+    <a:masterClrMapping/>
+  </p:clrMapOvr>
+  <mc:AlternateContent xmlns:mc="http://schemas.openxmlformats.org/markup-compatibility/2006" xmlns:p14="http://schemas.microsoft.com/office/powerpoint/2010/main">
+    <mc:Choice Requires="p14">
+      <p:transition spd="slow" p14:dur="2000" advTm="207460"/>
+    </mc:Choice>
+    <mc:Fallback xmlns="">
+      <p:transition spd="slow" advTm="207460"/>
+    </mc:Fallback>
+  </mc:AlternateContent>
+</p:sld>
+</file>
+
+<file path=ppt/slides/slide15.xml><?xml version="1.0" encoding="utf-8"?>
+<p:sld xmlns:a="http://schemas.openxmlformats.org/drawingml/2006/main" xmlns:r="http://schemas.openxmlformats.org/officeDocument/2006/relationships" xmlns:p="http://schemas.openxmlformats.org/presentationml/2006/main">
+  <p:cSld>
+    <p:bg>
+      <p:bgPr>
+        <a:gradFill>
+          <a:gsLst>
+            <a:gs pos="0">
+              <a:schemeClr val="bg1">
+                <a:lumMod val="95000"/>
+              </a:schemeClr>
+            </a:gs>
+            <a:gs pos="74000">
+              <a:schemeClr val="bg1">
+                <a:lumMod val="85000"/>
+              </a:schemeClr>
+            </a:gs>
+            <a:gs pos="83000">
+              <a:schemeClr val="bg1">
+                <a:lumMod val="75000"/>
+              </a:schemeClr>
+            </a:gs>
+            <a:gs pos="100000">
+              <a:schemeClr val="bg1">
+                <a:lumMod val="50000"/>
+              </a:schemeClr>
+            </a:gs>
+          </a:gsLst>
+          <a:lin ang="5400000" scaled="1"/>
+        </a:gradFill>
+        <a:effectLst/>
+      </p:bgPr>
+    </p:bg>
+    <p:spTree>
+      <p:nvGrpSpPr>
+        <p:cNvPr id="1" name="">
+          <a:extLst>
+            <a:ext uri="{FF2B5EF4-FFF2-40B4-BE49-F238E27FC236}">
+              <a16:creationId xmlns:a16="http://schemas.microsoft.com/office/drawing/2014/main" id="{D9F18507-D343-7C41-B14D-A0A456A4AB86}"/>
+            </a:ext>
+          </a:extLst>
+        </p:cNvPr>
+        <p:cNvGrpSpPr/>
+        <p:nvPr/>
+      </p:nvGrpSpPr>
+      <p:grpSpPr>
+        <a:xfrm>
+          <a:off x="0" y="0"/>
+          <a:ext cx="0" cy="0"/>
+          <a:chOff x="0" y="0"/>
+          <a:chExt cx="0" cy="0"/>
+        </a:xfrm>
+      </p:grpSpPr>
+      <p:sp>
+        <p:nvSpPr>
+          <p:cNvPr id="2" name="Title 1">
+            <a:extLst>
+              <a:ext uri="{FF2B5EF4-FFF2-40B4-BE49-F238E27FC236}">
+                <a16:creationId xmlns:a16="http://schemas.microsoft.com/office/drawing/2014/main" id="{2BB3CF38-A226-CE13-A35F-7C567A504821}"/>
+              </a:ext>
+            </a:extLst>
+          </p:cNvPr>
+          <p:cNvSpPr>
+            <a:spLocks noGrp="1"/>
+          </p:cNvSpPr>
+          <p:nvPr>
+            <p:ph type="title"/>
+          </p:nvPr>
+        </p:nvSpPr>
+        <p:spPr>
+          <a:xfrm>
+            <a:off x="97832" y="-179711"/>
+            <a:ext cx="11996331" cy="1325563"/>
+          </a:xfrm>
+        </p:spPr>
+        <p:txBody>
+          <a:bodyPr>
+            <a:normAutofit/>
+          </a:bodyPr>
+          <a:lstStyle/>
+          <a:p>
+            <a:r>
+              <a:rPr lang="en-US" sz="4200" b="1" dirty="0">
+                <a:latin typeface="Times New Roman" panose="02020603050405020304" pitchFamily="18" charset="0"/>
+                <a:cs typeface="Times New Roman" panose="02020603050405020304" pitchFamily="18" charset="0"/>
+              </a:rPr>
+              <a:t>Go &amp; </a:t>
+            </a:r>
+            <a:r>
+              <a:rPr lang="en-US" sz="4200" b="1" dirty="0" err="1">
+                <a:latin typeface="Times New Roman" panose="02020603050405020304" pitchFamily="18" charset="0"/>
+                <a:cs typeface="Times New Roman" panose="02020603050405020304" pitchFamily="18" charset="0"/>
+              </a:rPr>
+              <a:t>mySQL</a:t>
+            </a:r>
+            <a:r>
+              <a:rPr lang="en-US" sz="4200" b="1" dirty="0">
+                <a:latin typeface="Times New Roman" panose="02020603050405020304" pitchFamily="18" charset="0"/>
+                <a:cs typeface="Times New Roman" panose="02020603050405020304" pitchFamily="18" charset="0"/>
+              </a:rPr>
+              <a:t> (Add Data):</a:t>
+            </a:r>
+          </a:p>
+        </p:txBody>
+      </p:sp>
+      <p:pic>
+        <p:nvPicPr>
+          <p:cNvPr id="9" name="Picture 8">
+            <a:extLst>
+              <a:ext uri="{FF2B5EF4-FFF2-40B4-BE49-F238E27FC236}">
+                <a16:creationId xmlns:a16="http://schemas.microsoft.com/office/drawing/2014/main" id="{B4CD46D0-2070-587E-B74A-3232211BA7F3}"/>
+              </a:ext>
+            </a:extLst>
+          </p:cNvPr>
+          <p:cNvPicPr>
+            <a:picLocks noChangeAspect="1"/>
+          </p:cNvPicPr>
+          <p:nvPr/>
+        </p:nvPicPr>
+        <p:blipFill>
+          <a:blip r:embed="rId4"/>
+          <a:stretch>
+            <a:fillRect/>
+          </a:stretch>
+        </p:blipFill>
+        <p:spPr>
+          <a:xfrm>
+            <a:off x="0" y="838094"/>
+            <a:ext cx="5114679" cy="1131383"/>
+          </a:xfrm>
+          <a:prstGeom prst="rect">
+            <a:avLst/>
+          </a:prstGeom>
+        </p:spPr>
+      </p:pic>
+      <p:sp>
+        <p:nvSpPr>
+          <p:cNvPr id="10" name="Rectangle 9">
+            <a:extLst>
+              <a:ext uri="{FF2B5EF4-FFF2-40B4-BE49-F238E27FC236}">
+                <a16:creationId xmlns:a16="http://schemas.microsoft.com/office/drawing/2014/main" id="{904E1C84-E16B-0192-C160-7D1F45FBF119}"/>
+              </a:ext>
+            </a:extLst>
+          </p:cNvPr>
+          <p:cNvSpPr/>
+          <p:nvPr/>
+        </p:nvSpPr>
+        <p:spPr>
+          <a:xfrm>
+            <a:off x="5212511" y="1026731"/>
+            <a:ext cx="6397768" cy="530933"/>
+          </a:xfrm>
+          <a:prstGeom prst="rect">
+            <a:avLst/>
+          </a:prstGeom>
+          <a:ln>
+            <a:noFill/>
+          </a:ln>
+        </p:spPr>
+        <p:style>
+          <a:lnRef idx="2">
+            <a:schemeClr val="accent1">
+              <a:shade val="15000"/>
+            </a:schemeClr>
+          </a:lnRef>
+          <a:fillRef idx="1">
+            <a:schemeClr val="accent1"/>
+          </a:fillRef>
+          <a:effectRef idx="0">
+            <a:schemeClr val="accent1"/>
+          </a:effectRef>
+          <a:fontRef idx="minor">
+            <a:schemeClr val="lt1"/>
+          </a:fontRef>
+        </p:style>
+        <p:txBody>
+          <a:bodyPr rtlCol="0" anchor="ctr"/>
+          <a:lstStyle/>
+          <a:p>
+            <a:pPr algn="ctr"/>
+            <a:r>
+              <a:rPr lang="en-US" b="1" dirty="0">
+                <a:solidFill>
+                  <a:schemeClr val="bg1"/>
+                </a:solidFill>
+                <a:latin typeface="Arial" panose="020B0604020202020204" pitchFamily="34" charset="0"/>
+                <a:cs typeface="Arial" panose="020B0604020202020204" pitchFamily="34" charset="0"/>
+              </a:rPr>
+              <a:t>First, you have to create a struct that has elements corresponding to the table fields you want</a:t>
+            </a:r>
+          </a:p>
+        </p:txBody>
+      </p:sp>
+      <p:pic>
+        <p:nvPicPr>
+          <p:cNvPr id="4" name="Picture 3">
+            <a:extLst>
+              <a:ext uri="{FF2B5EF4-FFF2-40B4-BE49-F238E27FC236}">
+                <a16:creationId xmlns:a16="http://schemas.microsoft.com/office/drawing/2014/main" id="{2303F090-31C4-7AA3-FEF8-F0D152F6A262}"/>
+              </a:ext>
+            </a:extLst>
+          </p:cNvPr>
+          <p:cNvPicPr>
+            <a:picLocks noChangeAspect="1"/>
+          </p:cNvPicPr>
+          <p:nvPr/>
+        </p:nvPicPr>
+        <p:blipFill>
+          <a:blip r:embed="rId5"/>
+          <a:stretch>
+            <a:fillRect/>
+          </a:stretch>
+        </p:blipFill>
+        <p:spPr>
+          <a:xfrm>
+            <a:off x="97832" y="2082376"/>
+            <a:ext cx="10275528" cy="3190663"/>
+          </a:xfrm>
+          <a:prstGeom prst="rect">
+            <a:avLst/>
+          </a:prstGeom>
+        </p:spPr>
+      </p:pic>
+      <p:pic>
+        <p:nvPicPr>
+          <p:cNvPr id="6" name="Picture 5">
+            <a:extLst>
+              <a:ext uri="{FF2B5EF4-FFF2-40B4-BE49-F238E27FC236}">
+                <a16:creationId xmlns:a16="http://schemas.microsoft.com/office/drawing/2014/main" id="{33AE12C6-7AAB-D2B9-4F91-E575212FC436}"/>
+              </a:ext>
+            </a:extLst>
+          </p:cNvPr>
+          <p:cNvPicPr>
+            <a:picLocks noChangeAspect="1"/>
+          </p:cNvPicPr>
+          <p:nvPr/>
+        </p:nvPicPr>
+        <p:blipFill>
+          <a:blip r:embed="rId6"/>
+          <a:stretch>
+            <a:fillRect/>
+          </a:stretch>
+        </p:blipFill>
+        <p:spPr>
+          <a:xfrm>
+            <a:off x="6624320" y="4582160"/>
+            <a:ext cx="5469843" cy="2171209"/>
+          </a:xfrm>
+          <a:prstGeom prst="rect">
+            <a:avLst/>
+          </a:prstGeom>
+        </p:spPr>
+      </p:pic>
+      <p:sp>
+        <p:nvSpPr>
+          <p:cNvPr id="7" name="Rectangle 6">
+            <a:extLst>
+              <a:ext uri="{FF2B5EF4-FFF2-40B4-BE49-F238E27FC236}">
+                <a16:creationId xmlns:a16="http://schemas.microsoft.com/office/drawing/2014/main" id="{0B4FC080-55DB-FD6C-F802-259EAC2859FF}"/>
+              </a:ext>
+            </a:extLst>
+          </p:cNvPr>
+          <p:cNvSpPr/>
+          <p:nvPr/>
+        </p:nvSpPr>
+        <p:spPr>
+          <a:xfrm>
+            <a:off x="9994058" y="3984792"/>
+            <a:ext cx="2100105" cy="597368"/>
+          </a:xfrm>
+          <a:prstGeom prst="rect">
+            <a:avLst/>
+          </a:prstGeom>
+          <a:ln>
+            <a:noFill/>
+          </a:ln>
+        </p:spPr>
+        <p:style>
+          <a:lnRef idx="2">
+            <a:schemeClr val="accent1">
+              <a:shade val="15000"/>
+            </a:schemeClr>
+          </a:lnRef>
+          <a:fillRef idx="1">
+            <a:schemeClr val="accent1"/>
+          </a:fillRef>
+          <a:effectRef idx="0">
+            <a:schemeClr val="accent1"/>
+          </a:effectRef>
+          <a:fontRef idx="minor">
+            <a:schemeClr val="lt1"/>
+          </a:fontRef>
+        </p:style>
+        <p:txBody>
+          <a:bodyPr rtlCol="0" anchor="ctr"/>
+          <a:lstStyle/>
+          <a:p>
+            <a:pPr algn="ctr"/>
+            <a:r>
+              <a:rPr lang="en-US" sz="2000" b="1" dirty="0">
+                <a:solidFill>
+                  <a:schemeClr val="bg1"/>
+                </a:solidFill>
+                <a:latin typeface="Arial" panose="020B0604020202020204" pitchFamily="34" charset="0"/>
+                <a:cs typeface="Arial" panose="020B0604020202020204" pitchFamily="34" charset="0"/>
+              </a:rPr>
+              <a:t>Calling in main</a:t>
+            </a:r>
+          </a:p>
+        </p:txBody>
+      </p:sp>
+      <p:sp>
+        <p:nvSpPr>
+          <p:cNvPr id="8" name="Rectangle 7">
+            <a:extLst>
+              <a:ext uri="{FF2B5EF4-FFF2-40B4-BE49-F238E27FC236}">
+                <a16:creationId xmlns:a16="http://schemas.microsoft.com/office/drawing/2014/main" id="{F99665BF-1FC2-5358-24FF-04429531536C}"/>
+              </a:ext>
+            </a:extLst>
+          </p:cNvPr>
+          <p:cNvSpPr/>
+          <p:nvPr/>
+        </p:nvSpPr>
+        <p:spPr>
+          <a:xfrm>
+            <a:off x="97832" y="5402297"/>
+            <a:ext cx="6397768" cy="907063"/>
+          </a:xfrm>
+          <a:prstGeom prst="rect">
+            <a:avLst/>
+          </a:prstGeom>
+          <a:ln>
+            <a:noFill/>
+          </a:ln>
+        </p:spPr>
+        <p:style>
+          <a:lnRef idx="2">
+            <a:schemeClr val="accent1">
+              <a:shade val="15000"/>
+            </a:schemeClr>
+          </a:lnRef>
+          <a:fillRef idx="1">
+            <a:schemeClr val="accent1"/>
+          </a:fillRef>
+          <a:effectRef idx="0">
+            <a:schemeClr val="accent1"/>
+          </a:effectRef>
+          <a:fontRef idx="minor">
+            <a:schemeClr val="lt1"/>
+          </a:fontRef>
+        </p:style>
+        <p:txBody>
+          <a:bodyPr rtlCol="0" anchor="ctr"/>
+          <a:lstStyle/>
+          <a:p>
+            <a:pPr algn="ctr"/>
+            <a:r>
+              <a:rPr lang="en-US" b="1" dirty="0">
+                <a:solidFill>
+                  <a:schemeClr val="bg1"/>
+                </a:solidFill>
+                <a:latin typeface="Arial" panose="020B0604020202020204" pitchFamily="34" charset="0"/>
+                <a:cs typeface="Arial" panose="020B0604020202020204" pitchFamily="34" charset="0"/>
+              </a:rPr>
+              <a:t>DELETE &amp; UPDATE statements work the same as INSERT statements using </a:t>
+            </a:r>
+            <a:r>
+              <a:rPr lang="en-US" b="1" dirty="0" err="1">
+                <a:solidFill>
+                  <a:schemeClr val="bg1"/>
+                </a:solidFill>
+                <a:latin typeface="Arial" panose="020B0604020202020204" pitchFamily="34" charset="0"/>
+                <a:cs typeface="Arial" panose="020B0604020202020204" pitchFamily="34" charset="0"/>
+              </a:rPr>
+              <a:t>db.Exec</a:t>
+            </a:r>
+            <a:r>
+              <a:rPr lang="en-US" b="1" dirty="0">
+                <a:solidFill>
+                  <a:schemeClr val="bg1"/>
+                </a:solidFill>
+                <a:latin typeface="Arial" panose="020B0604020202020204" pitchFamily="34" charset="0"/>
+                <a:cs typeface="Arial" panose="020B0604020202020204" pitchFamily="34" charset="0"/>
+              </a:rPr>
+              <a:t>()</a:t>
+            </a:r>
+          </a:p>
+        </p:txBody>
+      </p:sp>
+    </p:spTree>
+    <p:custDataLst>
+      <p:tags r:id="rId1"/>
+    </p:custDataLst>
+    <p:extLst>
+      <p:ext uri="{BB962C8B-B14F-4D97-AF65-F5344CB8AC3E}">
+        <p14:creationId xmlns:p14="http://schemas.microsoft.com/office/powerpoint/2010/main" val="984975922"/>
+      </p:ext>
+    </p:extLst>
+  </p:cSld>
+  <p:clrMapOvr>
+    <a:masterClrMapping/>
+  </p:clrMapOvr>
+  <mc:AlternateContent xmlns:mc="http://schemas.openxmlformats.org/markup-compatibility/2006" xmlns:p14="http://schemas.microsoft.com/office/powerpoint/2010/main">
+    <mc:Choice Requires="p14">
+      <p:transition spd="slow" p14:dur="2000" advTm="207460"/>
+    </mc:Choice>
+    <mc:Fallback xmlns="">
+      <p:transition spd="slow" advTm="207460"/>
+    </mc:Fallback>
+  </mc:AlternateContent>
+</p:sld>
+</file>
+
+<file path=ppt/slides/slide16.xml><?xml version="1.0" encoding="utf-8"?>
+<p:sld xmlns:a="http://schemas.openxmlformats.org/drawingml/2006/main" xmlns:r="http://schemas.openxmlformats.org/officeDocument/2006/relationships" xmlns:p="http://schemas.openxmlformats.org/presentationml/2006/main">
+  <p:cSld>
+    <p:bg>
+      <p:bgPr>
+        <a:gradFill>
+          <a:gsLst>
+            <a:gs pos="0">
+              <a:schemeClr val="bg1">
+                <a:lumMod val="95000"/>
+              </a:schemeClr>
+            </a:gs>
+            <a:gs pos="74000">
+              <a:schemeClr val="bg1">
+                <a:lumMod val="85000"/>
+              </a:schemeClr>
+            </a:gs>
+            <a:gs pos="83000">
+              <a:schemeClr val="bg1">
+                <a:lumMod val="75000"/>
+              </a:schemeClr>
+            </a:gs>
+            <a:gs pos="100000">
+              <a:schemeClr val="bg1">
+                <a:lumMod val="50000"/>
+              </a:schemeClr>
+            </a:gs>
+          </a:gsLst>
+          <a:lin ang="5400000" scaled="1"/>
+        </a:gradFill>
+        <a:effectLst/>
+      </p:bgPr>
+    </p:bg>
+    <p:spTree>
+      <p:nvGrpSpPr>
+        <p:cNvPr id="1" name="">
+          <a:extLst>
+            <a:ext uri="{FF2B5EF4-FFF2-40B4-BE49-F238E27FC236}">
+              <a16:creationId xmlns:a16="http://schemas.microsoft.com/office/drawing/2014/main" id="{F1C09EB5-D618-8382-1415-8B4B1FFA1AC7}"/>
+            </a:ext>
+          </a:extLst>
+        </p:cNvPr>
+        <p:cNvGrpSpPr/>
+        <p:nvPr/>
+      </p:nvGrpSpPr>
+      <p:grpSpPr>
+        <a:xfrm>
+          <a:off x="0" y="0"/>
+          <a:ext cx="0" cy="0"/>
+          <a:chOff x="0" y="0"/>
+          <a:chExt cx="0" cy="0"/>
+        </a:xfrm>
+      </p:grpSpPr>
+      <p:sp>
+        <p:nvSpPr>
+          <p:cNvPr id="2" name="Title 1">
+            <a:extLst>
+              <a:ext uri="{FF2B5EF4-FFF2-40B4-BE49-F238E27FC236}">
+                <a16:creationId xmlns:a16="http://schemas.microsoft.com/office/drawing/2014/main" id="{2591A616-7EBB-31AE-A072-E2DD89C90691}"/>
+              </a:ext>
+            </a:extLst>
+          </p:cNvPr>
+          <p:cNvSpPr>
+            <a:spLocks noGrp="1"/>
+          </p:cNvSpPr>
+          <p:nvPr>
+            <p:ph type="title"/>
+          </p:nvPr>
+        </p:nvSpPr>
+        <p:spPr>
+          <a:xfrm>
+            <a:off x="97832" y="-179711"/>
+            <a:ext cx="11996331" cy="1325563"/>
+          </a:xfrm>
+        </p:spPr>
+        <p:txBody>
+          <a:bodyPr>
+            <a:normAutofit/>
+          </a:bodyPr>
+          <a:lstStyle/>
+          <a:p>
+            <a:r>
+              <a:rPr lang="en-US" sz="4200" b="1" dirty="0">
+                <a:latin typeface="Times New Roman" panose="02020603050405020304" pitchFamily="18" charset="0"/>
+                <a:cs typeface="Times New Roman" panose="02020603050405020304" pitchFamily="18" charset="0"/>
+              </a:rPr>
+              <a:t>Go Packages:</a:t>
+            </a:r>
+          </a:p>
+        </p:txBody>
+      </p:sp>
+      <p:sp>
+        <p:nvSpPr>
+          <p:cNvPr id="3" name="Rectangle 2">
+            <a:extLst>
+              <a:ext uri="{FF2B5EF4-FFF2-40B4-BE49-F238E27FC236}">
+                <a16:creationId xmlns:a16="http://schemas.microsoft.com/office/drawing/2014/main" id="{92BAAFF3-F573-25BD-B6BC-47CFA45E98DF}"/>
+              </a:ext>
+            </a:extLst>
+          </p:cNvPr>
+          <p:cNvSpPr/>
+          <p:nvPr/>
+        </p:nvSpPr>
+        <p:spPr>
+          <a:xfrm>
+            <a:off x="97832" y="1012425"/>
+            <a:ext cx="111760" cy="555118"/>
+          </a:xfrm>
+          <a:prstGeom prst="rect">
+            <a:avLst/>
+          </a:prstGeom>
+          <a:solidFill>
+            <a:schemeClr val="tx1"/>
+          </a:solidFill>
+          <a:ln>
+            <a:noFill/>
+          </a:ln>
+          <a:effectLst>
+            <a:outerShdw blurRad="50800" dist="38100" dir="2700000" algn="tl" rotWithShape="0">
+              <a:prstClr val="black">
+                <a:alpha val="40000"/>
+              </a:prstClr>
+            </a:outerShdw>
+          </a:effectLst>
+        </p:spPr>
+        <p:style>
+          <a:lnRef idx="2">
+            <a:schemeClr val="accent1">
+              <a:shade val="15000"/>
+            </a:schemeClr>
+          </a:lnRef>
+          <a:fillRef idx="1">
+            <a:schemeClr val="accent1"/>
+          </a:fillRef>
+          <a:effectRef idx="0">
+            <a:schemeClr val="accent1"/>
+          </a:effectRef>
+          <a:fontRef idx="minor">
+            <a:schemeClr val="lt1"/>
+          </a:fontRef>
+        </p:style>
+        <p:txBody>
+          <a:bodyPr rtlCol="0" anchor="ctr"/>
+          <a:lstStyle/>
+          <a:p>
+            <a:pPr marL="0" marR="0" lvl="0" indent="0" algn="ctr" defTabSz="914400" rtl="0" eaLnBrk="1" fontAlgn="auto" latinLnBrk="0" hangingPunct="1">
+              <a:lnSpc>
+                <a:spcPct val="100000"/>
+              </a:lnSpc>
+              <a:spcBef>
+                <a:spcPts val="0"/>
+              </a:spcBef>
+              <a:spcAft>
+                <a:spcPts val="0"/>
+              </a:spcAft>
+              <a:buClrTx/>
+              <a:buSzTx/>
+              <a:buFontTx/>
+              <a:buNone/>
+              <a:tabLst/>
+              <a:defRPr/>
+            </a:pPr>
+            <a:endParaRPr kumimoji="0" lang="en-US" sz="1800" b="0" i="0" u="none" strike="noStrike" kern="1200" cap="none" spc="0" normalizeH="0" baseline="0" noProof="0">
+              <a:ln>
+                <a:noFill/>
+              </a:ln>
+              <a:solidFill>
+                <a:prstClr val="white"/>
+              </a:solidFill>
+              <a:effectLst/>
+              <a:uLnTx/>
+              <a:uFillTx/>
+              <a:latin typeface="Aptos" panose="02110004020202020204"/>
+              <a:ea typeface="+mn-ea"/>
+              <a:cs typeface="+mn-cs"/>
+            </a:endParaRPr>
+          </a:p>
+        </p:txBody>
+      </p:sp>
+      <p:sp>
+        <p:nvSpPr>
+          <p:cNvPr id="5" name="Rectangle 4">
+            <a:extLst>
+              <a:ext uri="{FF2B5EF4-FFF2-40B4-BE49-F238E27FC236}">
+                <a16:creationId xmlns:a16="http://schemas.microsoft.com/office/drawing/2014/main" id="{05D40681-77C8-DC11-4592-A1E09B6E8FD3}"/>
+              </a:ext>
+            </a:extLst>
+          </p:cNvPr>
+          <p:cNvSpPr/>
+          <p:nvPr/>
+        </p:nvSpPr>
+        <p:spPr>
+          <a:xfrm>
+            <a:off x="174031" y="1012425"/>
+            <a:ext cx="11895551" cy="555118"/>
+          </a:xfrm>
+          <a:prstGeom prst="rect">
+            <a:avLst/>
+          </a:prstGeom>
+          <a:solidFill>
+            <a:schemeClr val="tx1"/>
+          </a:solidFill>
+          <a:ln>
+            <a:noFill/>
+          </a:ln>
+          <a:effectLst>
+            <a:outerShdw blurRad="50800" dist="38100" dir="2700000" algn="tl" rotWithShape="0">
+              <a:prstClr val="black">
+                <a:alpha val="40000"/>
+              </a:prstClr>
+            </a:outerShdw>
+          </a:effectLst>
+        </p:spPr>
+        <p:style>
+          <a:lnRef idx="2">
+            <a:schemeClr val="accent1">
+              <a:shade val="15000"/>
+            </a:schemeClr>
+          </a:lnRef>
+          <a:fillRef idx="1">
+            <a:schemeClr val="accent1"/>
+          </a:fillRef>
+          <a:effectRef idx="0">
+            <a:schemeClr val="accent1"/>
+          </a:effectRef>
+          <a:fontRef idx="minor">
+            <a:schemeClr val="lt1"/>
+          </a:fontRef>
+        </p:style>
+        <p:txBody>
+          <a:bodyPr rtlCol="0" anchor="ctr"/>
+          <a:lstStyle/>
+          <a:p>
+            <a:pPr marL="0" marR="0" lvl="0" indent="0" algn="l" defTabSz="914400" rtl="0" eaLnBrk="1" fontAlgn="auto" latinLnBrk="0" hangingPunct="1">
+              <a:lnSpc>
+                <a:spcPct val="100000"/>
+              </a:lnSpc>
+              <a:spcBef>
+                <a:spcPts val="0"/>
+              </a:spcBef>
+              <a:spcAft>
+                <a:spcPts val="0"/>
+              </a:spcAft>
+              <a:buClrTx/>
+              <a:buSzTx/>
+              <a:buFontTx/>
+              <a:buNone/>
+              <a:tabLst/>
+              <a:defRPr/>
+            </a:pPr>
+            <a:r>
+              <a:rPr kumimoji="0" lang="en-US" sz="1800" b="1" i="0" u="none" strike="noStrike" kern="1200" cap="none" spc="0" normalizeH="0" baseline="0" noProof="0" dirty="0">
+                <a:ln>
+                  <a:noFill/>
+                </a:ln>
+                <a:solidFill>
+                  <a:prstClr val="white"/>
+                </a:solidFill>
+                <a:effectLst/>
+                <a:uLnTx/>
+                <a:uFillTx/>
+                <a:latin typeface="Arial" panose="020B0604020202020204" pitchFamily="34" charset="0"/>
+                <a:ea typeface="+mn-ea"/>
+                <a:cs typeface="Arial" panose="020B0604020202020204" pitchFamily="34" charset="0"/>
+              </a:rPr>
+              <a:t>Packages only really make sense in the context of a separate program that uses them.</a:t>
+            </a:r>
+          </a:p>
+        </p:txBody>
+      </p:sp>
+      <p:sp>
+        <p:nvSpPr>
+          <p:cNvPr id="11" name="Rectangle 10">
+            <a:extLst>
+              <a:ext uri="{FF2B5EF4-FFF2-40B4-BE49-F238E27FC236}">
+                <a16:creationId xmlns:a16="http://schemas.microsoft.com/office/drawing/2014/main" id="{D3D071B5-1AFE-8BBF-74DF-609E193CF7F5}"/>
+              </a:ext>
+            </a:extLst>
+          </p:cNvPr>
+          <p:cNvSpPr/>
+          <p:nvPr/>
+        </p:nvSpPr>
+        <p:spPr>
+          <a:xfrm>
+            <a:off x="97832" y="1675616"/>
+            <a:ext cx="111760" cy="786230"/>
+          </a:xfrm>
+          <a:prstGeom prst="rect">
+            <a:avLst/>
+          </a:prstGeom>
+          <a:solidFill>
+            <a:schemeClr val="tx1"/>
+          </a:solidFill>
+          <a:ln>
+            <a:noFill/>
+          </a:ln>
+          <a:effectLst>
+            <a:outerShdw blurRad="50800" dist="38100" dir="2700000" algn="tl" rotWithShape="0">
+              <a:prstClr val="black">
+                <a:alpha val="40000"/>
+              </a:prstClr>
+            </a:outerShdw>
+          </a:effectLst>
+        </p:spPr>
+        <p:style>
+          <a:lnRef idx="2">
+            <a:schemeClr val="accent1">
+              <a:shade val="15000"/>
+            </a:schemeClr>
+          </a:lnRef>
+          <a:fillRef idx="1">
+            <a:schemeClr val="accent1"/>
+          </a:fillRef>
+          <a:effectRef idx="0">
+            <a:schemeClr val="accent1"/>
+          </a:effectRef>
+          <a:fontRef idx="minor">
+            <a:schemeClr val="lt1"/>
+          </a:fontRef>
+        </p:style>
+        <p:txBody>
+          <a:bodyPr rtlCol="0" anchor="ctr"/>
+          <a:lstStyle/>
+          <a:p>
+            <a:pPr marL="0" marR="0" lvl="0" indent="0" algn="ctr" defTabSz="914400" eaLnBrk="1" fontAlgn="auto" latinLnBrk="0" hangingPunct="1">
+              <a:lnSpc>
+                <a:spcPct val="100000"/>
+              </a:lnSpc>
+              <a:spcBef>
+                <a:spcPts val="0"/>
+              </a:spcBef>
+              <a:spcAft>
+                <a:spcPts val="0"/>
+              </a:spcAft>
+              <a:buClrTx/>
+              <a:buSzTx/>
+              <a:buFontTx/>
+              <a:buNone/>
+              <a:tabLst/>
+              <a:defRPr/>
+            </a:pPr>
+            <a:endParaRPr kumimoji="0" lang="en-US" sz="1800" b="0" i="0" u="none" strike="noStrike" kern="1200" cap="none" spc="0" normalizeH="0" baseline="0" noProof="0">
+              <a:ln>
+                <a:noFill/>
+              </a:ln>
+              <a:solidFill>
+                <a:prstClr val="white"/>
+              </a:solidFill>
+              <a:effectLst/>
+              <a:uLnTx/>
+              <a:uFillTx/>
+              <a:latin typeface="Aptos" panose="02110004020202020204"/>
+              <a:ea typeface="+mn-ea"/>
+              <a:cs typeface="+mn-cs"/>
+            </a:endParaRPr>
+          </a:p>
+        </p:txBody>
+      </p:sp>
+      <p:sp>
+        <p:nvSpPr>
+          <p:cNvPr id="12" name="Rectangle 11">
+            <a:extLst>
+              <a:ext uri="{FF2B5EF4-FFF2-40B4-BE49-F238E27FC236}">
+                <a16:creationId xmlns:a16="http://schemas.microsoft.com/office/drawing/2014/main" id="{11593152-2996-08E5-4719-8271EADCF5BE}"/>
+              </a:ext>
+            </a:extLst>
+          </p:cNvPr>
+          <p:cNvSpPr/>
+          <p:nvPr/>
+        </p:nvSpPr>
+        <p:spPr>
+          <a:xfrm>
+            <a:off x="174031" y="1675616"/>
+            <a:ext cx="11895551" cy="786230"/>
+          </a:xfrm>
+          <a:prstGeom prst="rect">
+            <a:avLst/>
+          </a:prstGeom>
+          <a:solidFill>
+            <a:schemeClr val="tx1"/>
+          </a:solidFill>
+          <a:ln>
+            <a:noFill/>
+          </a:ln>
+          <a:effectLst>
+            <a:outerShdw blurRad="50800" dist="38100" dir="2700000" algn="tl" rotWithShape="0">
+              <a:prstClr val="black">
+                <a:alpha val="40000"/>
+              </a:prstClr>
+            </a:outerShdw>
+          </a:effectLst>
+        </p:spPr>
+        <p:style>
+          <a:lnRef idx="2">
+            <a:schemeClr val="accent1">
+              <a:shade val="15000"/>
+            </a:schemeClr>
+          </a:lnRef>
+          <a:fillRef idx="1">
+            <a:schemeClr val="accent1"/>
+          </a:fillRef>
+          <a:effectRef idx="0">
+            <a:schemeClr val="accent1"/>
+          </a:effectRef>
+          <a:fontRef idx="minor">
+            <a:schemeClr val="lt1"/>
+          </a:fontRef>
+        </p:style>
+        <p:txBody>
+          <a:bodyPr rtlCol="0" anchor="ctr"/>
+          <a:lstStyle/>
+          <a:p>
+            <a:pPr marL="0" marR="0" lvl="0" indent="0" algn="l" defTabSz="914400" eaLnBrk="1" fontAlgn="auto" latinLnBrk="0" hangingPunct="1">
+              <a:lnSpc>
+                <a:spcPct val="100000"/>
+              </a:lnSpc>
+              <a:spcBef>
+                <a:spcPts val="0"/>
+              </a:spcBef>
+              <a:spcAft>
+                <a:spcPts val="0"/>
+              </a:spcAft>
+              <a:buClrTx/>
+              <a:buSzTx/>
+              <a:buFontTx/>
+              <a:buNone/>
+              <a:tabLst/>
+              <a:defRPr/>
+            </a:pPr>
+            <a:r>
+              <a:rPr kumimoji="0" lang="en-US" sz="1800" b="1" i="0" u="none" strike="noStrike" kern="1200" cap="none" spc="0" normalizeH="0" baseline="0" noProof="0" dirty="0">
+                <a:ln>
+                  <a:noFill/>
+                </a:ln>
+                <a:solidFill>
+                  <a:prstClr val="white"/>
+                </a:solidFill>
+                <a:effectLst/>
+                <a:uLnTx/>
+                <a:uFillTx/>
+                <a:latin typeface="Arial" panose="020B0604020202020204" pitchFamily="34" charset="0"/>
+                <a:ea typeface="+mn-ea"/>
+                <a:cs typeface="Arial" panose="020B0604020202020204" pitchFamily="34" charset="0"/>
+              </a:rPr>
+              <a:t>First, create a folder in which packages will be located, then in the terminal run </a:t>
+            </a:r>
+            <a:br>
+              <a:rPr kumimoji="0" lang="en-US" sz="1800" b="1" i="0" u="none" strike="noStrike" kern="1200" cap="none" spc="0" normalizeH="0" baseline="0" noProof="0" dirty="0">
+                <a:ln>
+                  <a:noFill/>
+                </a:ln>
+                <a:solidFill>
+                  <a:prstClr val="white"/>
+                </a:solidFill>
+                <a:effectLst/>
+                <a:uLnTx/>
+                <a:uFillTx/>
+                <a:latin typeface="Arial" panose="020B0604020202020204" pitchFamily="34" charset="0"/>
+                <a:ea typeface="+mn-ea"/>
+                <a:cs typeface="Arial" panose="020B0604020202020204" pitchFamily="34" charset="0"/>
+              </a:rPr>
+            </a:br>
+            <a:r>
+              <a:rPr kumimoji="0" lang="en-US" sz="1800" b="1" i="0" u="none" strike="noStrike" kern="1200" cap="none" spc="0" normalizeH="0" baseline="0" noProof="0" dirty="0">
+                <a:ln>
+                  <a:noFill/>
+                </a:ln>
+                <a:solidFill>
+                  <a:schemeClr val="accent2"/>
+                </a:solidFill>
+                <a:effectLst/>
+                <a:uLnTx/>
+                <a:uFillTx/>
+                <a:latin typeface="Arial" panose="020B0604020202020204" pitchFamily="34" charset="0"/>
+                <a:ea typeface="+mn-ea"/>
+                <a:cs typeface="Arial" panose="020B0604020202020204" pitchFamily="34" charset="0"/>
+              </a:rPr>
+              <a:t>go mod </a:t>
+            </a:r>
+            <a:r>
+              <a:rPr kumimoji="0" lang="en-US" sz="1800" b="1" i="0" u="none" strike="noStrike" kern="1200" cap="none" spc="0" normalizeH="0" baseline="0" noProof="0" dirty="0" err="1">
+                <a:ln>
+                  <a:noFill/>
+                </a:ln>
+                <a:solidFill>
+                  <a:schemeClr val="accent2"/>
+                </a:solidFill>
+                <a:effectLst/>
+                <a:uLnTx/>
+                <a:uFillTx/>
+                <a:latin typeface="Arial" panose="020B0604020202020204" pitchFamily="34" charset="0"/>
+                <a:ea typeface="+mn-ea"/>
+                <a:cs typeface="Arial" panose="020B0604020202020204" pitchFamily="34" charset="0"/>
+              </a:rPr>
+              <a:t>init</a:t>
+            </a:r>
+            <a:r>
+              <a:rPr kumimoji="0" lang="en-US" sz="1800" b="1" i="0" u="none" strike="noStrike" kern="1200" cap="none" spc="0" normalizeH="0" baseline="0" noProof="0" dirty="0">
+                <a:ln>
+                  <a:noFill/>
+                </a:ln>
+                <a:solidFill>
+                  <a:schemeClr val="accent2"/>
+                </a:solidFill>
+                <a:effectLst/>
+                <a:uLnTx/>
+                <a:uFillTx/>
+                <a:latin typeface="Arial" panose="020B0604020202020204" pitchFamily="34" charset="0"/>
+                <a:ea typeface="+mn-ea"/>
+                <a:cs typeface="Arial" panose="020B0604020202020204" pitchFamily="34" charset="0"/>
+              </a:rPr>
+              <a:t> &lt;</a:t>
+            </a:r>
+            <a:r>
+              <a:rPr kumimoji="0" lang="en-US" sz="1800" b="1" i="0" u="none" strike="noStrike" kern="1200" cap="none" spc="0" normalizeH="0" baseline="0" noProof="0" dirty="0" err="1">
+                <a:ln>
+                  <a:noFill/>
+                </a:ln>
+                <a:solidFill>
+                  <a:schemeClr val="accent2"/>
+                </a:solidFill>
+                <a:effectLst/>
+                <a:uLnTx/>
+                <a:uFillTx/>
+                <a:latin typeface="Arial" panose="020B0604020202020204" pitchFamily="34" charset="0"/>
+                <a:ea typeface="+mn-ea"/>
+                <a:cs typeface="Arial" panose="020B0604020202020204" pitchFamily="34" charset="0"/>
+              </a:rPr>
+              <a:t>any_name</a:t>
+            </a:r>
+            <a:r>
+              <a:rPr kumimoji="0" lang="en-US" sz="1800" b="1" i="0" u="none" strike="noStrike" kern="1200" cap="none" spc="0" normalizeH="0" baseline="0" noProof="0" dirty="0">
+                <a:ln>
+                  <a:noFill/>
+                </a:ln>
+                <a:solidFill>
+                  <a:schemeClr val="accent2"/>
+                </a:solidFill>
+                <a:effectLst/>
+                <a:uLnTx/>
+                <a:uFillTx/>
+                <a:latin typeface="Arial" panose="020B0604020202020204" pitchFamily="34" charset="0"/>
+                <a:ea typeface="+mn-ea"/>
+                <a:cs typeface="Arial" panose="020B0604020202020204" pitchFamily="34" charset="0"/>
+              </a:rPr>
+              <a:t>&gt;/</a:t>
+            </a:r>
+            <a:r>
+              <a:rPr kumimoji="0" lang="en-US" sz="1800" b="1" i="0" u="none" strike="noStrike" kern="1200" cap="none" spc="0" normalizeH="0" baseline="0" noProof="0" dirty="0" err="1">
+                <a:ln>
+                  <a:noFill/>
+                </a:ln>
+                <a:solidFill>
+                  <a:schemeClr val="accent2"/>
+                </a:solidFill>
+                <a:effectLst/>
+                <a:uLnTx/>
+                <a:uFillTx/>
+                <a:latin typeface="Arial" panose="020B0604020202020204" pitchFamily="34" charset="0"/>
+                <a:ea typeface="+mn-ea"/>
+                <a:cs typeface="Arial" panose="020B0604020202020204" pitchFamily="34" charset="0"/>
+              </a:rPr>
+              <a:t>folder_name</a:t>
+            </a:r>
+            <a:r>
+              <a:rPr kumimoji="0" lang="en-US" sz="1800" b="1" i="0" u="none" strike="noStrike" kern="1200" cap="none" spc="0" normalizeH="0" baseline="0" noProof="0" dirty="0">
+                <a:ln>
+                  <a:noFill/>
+                </a:ln>
+                <a:solidFill>
+                  <a:schemeClr val="accent2"/>
+                </a:solidFill>
+                <a:effectLst/>
+                <a:uLnTx/>
+                <a:uFillTx/>
+                <a:latin typeface="Arial" panose="020B0604020202020204" pitchFamily="34" charset="0"/>
+                <a:ea typeface="+mn-ea"/>
+                <a:cs typeface="Arial" panose="020B0604020202020204" pitchFamily="34" charset="0"/>
+              </a:rPr>
+              <a:t> </a:t>
+            </a:r>
+            <a:r>
+              <a:rPr lang="en-US" b="1" dirty="0">
+                <a:solidFill>
+                  <a:prstClr val="white"/>
+                </a:solidFill>
+                <a:latin typeface="Arial" panose="020B0604020202020204" pitchFamily="34" charset="0"/>
+                <a:cs typeface="Arial" panose="020B0604020202020204" pitchFamily="34" charset="0"/>
+              </a:rPr>
+              <a:t>[This will be the path any package import starts with]</a:t>
+            </a:r>
+          </a:p>
+        </p:txBody>
+      </p:sp>
+      <p:sp>
+        <p:nvSpPr>
+          <p:cNvPr id="13" name="Rectangle 12">
+            <a:extLst>
+              <a:ext uri="{FF2B5EF4-FFF2-40B4-BE49-F238E27FC236}">
+                <a16:creationId xmlns:a16="http://schemas.microsoft.com/office/drawing/2014/main" id="{B089CC88-FA8A-6647-CB53-F1F8E69D38F0}"/>
+              </a:ext>
+            </a:extLst>
+          </p:cNvPr>
+          <p:cNvSpPr/>
+          <p:nvPr/>
+        </p:nvSpPr>
+        <p:spPr>
+          <a:xfrm>
+            <a:off x="133393" y="2569919"/>
+            <a:ext cx="111760" cy="786230"/>
+          </a:xfrm>
+          <a:prstGeom prst="rect">
+            <a:avLst/>
+          </a:prstGeom>
+          <a:solidFill>
+            <a:schemeClr val="tx1"/>
+          </a:solidFill>
+          <a:ln>
+            <a:noFill/>
+          </a:ln>
+          <a:effectLst>
+            <a:outerShdw blurRad="50800" dist="38100" dir="2700000" algn="tl" rotWithShape="0">
+              <a:prstClr val="black">
+                <a:alpha val="40000"/>
+              </a:prstClr>
+            </a:outerShdw>
+          </a:effectLst>
+        </p:spPr>
+        <p:style>
+          <a:lnRef idx="2">
+            <a:schemeClr val="accent1">
+              <a:shade val="15000"/>
+            </a:schemeClr>
+          </a:lnRef>
+          <a:fillRef idx="1">
+            <a:schemeClr val="accent1"/>
+          </a:fillRef>
+          <a:effectRef idx="0">
+            <a:schemeClr val="accent1"/>
+          </a:effectRef>
+          <a:fontRef idx="minor">
+            <a:schemeClr val="lt1"/>
+          </a:fontRef>
+        </p:style>
+        <p:txBody>
+          <a:bodyPr rtlCol="0" anchor="ctr"/>
+          <a:lstStyle/>
+          <a:p>
+            <a:pPr marL="0" marR="0" lvl="0" indent="0" algn="ctr" defTabSz="914400" eaLnBrk="1" fontAlgn="auto" latinLnBrk="0" hangingPunct="1">
+              <a:lnSpc>
+                <a:spcPct val="100000"/>
+              </a:lnSpc>
+              <a:spcBef>
+                <a:spcPts val="0"/>
+              </a:spcBef>
+              <a:spcAft>
+                <a:spcPts val="0"/>
+              </a:spcAft>
+              <a:buClrTx/>
+              <a:buSzTx/>
+              <a:buFontTx/>
+              <a:buNone/>
+              <a:tabLst/>
+              <a:defRPr/>
+            </a:pPr>
+            <a:endParaRPr kumimoji="0" lang="en-US" sz="1800" b="0" i="0" u="none" strike="noStrike" kern="1200" cap="none" spc="0" normalizeH="0" baseline="0" noProof="0">
+              <a:ln>
+                <a:noFill/>
+              </a:ln>
+              <a:solidFill>
+                <a:prstClr val="white"/>
+              </a:solidFill>
+              <a:effectLst/>
+              <a:uLnTx/>
+              <a:uFillTx/>
+              <a:latin typeface="Aptos" panose="02110004020202020204"/>
+              <a:ea typeface="+mn-ea"/>
+              <a:cs typeface="+mn-cs"/>
+            </a:endParaRPr>
+          </a:p>
+        </p:txBody>
+      </p:sp>
+      <p:sp>
+        <p:nvSpPr>
+          <p:cNvPr id="14" name="Rectangle 13">
+            <a:extLst>
+              <a:ext uri="{FF2B5EF4-FFF2-40B4-BE49-F238E27FC236}">
+                <a16:creationId xmlns:a16="http://schemas.microsoft.com/office/drawing/2014/main" id="{E36BD453-35FD-968A-0074-5FFDBD164F48}"/>
+              </a:ext>
+            </a:extLst>
+          </p:cNvPr>
+          <p:cNvSpPr/>
+          <p:nvPr/>
+        </p:nvSpPr>
+        <p:spPr>
+          <a:xfrm>
+            <a:off x="209592" y="2569919"/>
+            <a:ext cx="11895551" cy="786230"/>
+          </a:xfrm>
+          <a:prstGeom prst="rect">
+            <a:avLst/>
+          </a:prstGeom>
+          <a:solidFill>
+            <a:schemeClr val="tx1"/>
+          </a:solidFill>
+          <a:ln>
+            <a:noFill/>
+          </a:ln>
+          <a:effectLst>
+            <a:outerShdw blurRad="50800" dist="38100" dir="2700000" algn="tl" rotWithShape="0">
+              <a:prstClr val="black">
+                <a:alpha val="40000"/>
+              </a:prstClr>
+            </a:outerShdw>
+          </a:effectLst>
+        </p:spPr>
+        <p:style>
+          <a:lnRef idx="2">
+            <a:schemeClr val="accent1">
+              <a:shade val="15000"/>
+            </a:schemeClr>
+          </a:lnRef>
+          <a:fillRef idx="1">
+            <a:schemeClr val="accent1"/>
+          </a:fillRef>
+          <a:effectRef idx="0">
+            <a:schemeClr val="accent1"/>
+          </a:effectRef>
+          <a:fontRef idx="minor">
+            <a:schemeClr val="lt1"/>
+          </a:fontRef>
+        </p:style>
+        <p:txBody>
+          <a:bodyPr rtlCol="0" anchor="ctr"/>
+          <a:lstStyle/>
+          <a:p>
+            <a:pPr marL="0" marR="0" lvl="0" indent="0" algn="l" defTabSz="914400" eaLnBrk="1" fontAlgn="auto" latinLnBrk="0" hangingPunct="1">
+              <a:lnSpc>
+                <a:spcPct val="100000"/>
+              </a:lnSpc>
+              <a:spcBef>
+                <a:spcPts val="0"/>
+              </a:spcBef>
+              <a:spcAft>
+                <a:spcPts val="0"/>
+              </a:spcAft>
+              <a:buClrTx/>
+              <a:buSzTx/>
+              <a:buFontTx/>
+              <a:buNone/>
+              <a:tabLst/>
+              <a:defRPr/>
+            </a:pPr>
+            <a:r>
+              <a:rPr kumimoji="0" lang="en-US" sz="1800" b="1" i="0" u="none" strike="noStrike" kern="1200" cap="none" spc="0" normalizeH="0" baseline="0" noProof="0" dirty="0">
+                <a:ln>
+                  <a:noFill/>
+                </a:ln>
+                <a:solidFill>
+                  <a:prstClr val="white"/>
+                </a:solidFill>
+                <a:effectLst/>
+                <a:uLnTx/>
+                <a:uFillTx/>
+                <a:latin typeface="Arial" panose="020B0604020202020204" pitchFamily="34" charset="0"/>
+                <a:ea typeface="+mn-ea"/>
+                <a:cs typeface="Arial" panose="020B0604020202020204" pitchFamily="34" charset="0"/>
+              </a:rPr>
+              <a:t>Create a folder for each package. Each script in the package folder should start with </a:t>
+            </a:r>
+            <a:br>
+              <a:rPr kumimoji="0" lang="en-US" sz="1800" b="1" i="0" u="none" strike="noStrike" kern="1200" cap="none" spc="0" normalizeH="0" baseline="0" noProof="0" dirty="0">
+                <a:ln>
+                  <a:noFill/>
+                </a:ln>
+                <a:solidFill>
+                  <a:prstClr val="white"/>
+                </a:solidFill>
+                <a:effectLst/>
+                <a:uLnTx/>
+                <a:uFillTx/>
+                <a:latin typeface="Arial" panose="020B0604020202020204" pitchFamily="34" charset="0"/>
+                <a:ea typeface="+mn-ea"/>
+                <a:cs typeface="Arial" panose="020B0604020202020204" pitchFamily="34" charset="0"/>
+              </a:rPr>
+            </a:br>
+            <a:r>
+              <a:rPr kumimoji="0" lang="en-US" sz="1800" b="1" i="0" u="none" strike="noStrike" kern="1200" cap="none" spc="0" normalizeH="0" baseline="0" noProof="0" dirty="0">
+                <a:ln>
+                  <a:noFill/>
+                </a:ln>
+                <a:solidFill>
+                  <a:schemeClr val="accent2"/>
+                </a:solidFill>
+                <a:effectLst/>
+                <a:uLnTx/>
+                <a:uFillTx/>
+                <a:latin typeface="Arial" panose="020B0604020202020204" pitchFamily="34" charset="0"/>
+                <a:ea typeface="+mn-ea"/>
+                <a:cs typeface="Arial" panose="020B0604020202020204" pitchFamily="34" charset="0"/>
+              </a:rPr>
+              <a:t>&lt;package </a:t>
+            </a:r>
+            <a:r>
+              <a:rPr kumimoji="0" lang="en-US" sz="1800" b="1" i="0" u="none" strike="noStrike" kern="1200" cap="none" spc="0" normalizeH="0" baseline="0" noProof="0" dirty="0" err="1">
+                <a:ln>
+                  <a:noFill/>
+                </a:ln>
+                <a:solidFill>
+                  <a:schemeClr val="accent2"/>
+                </a:solidFill>
+                <a:effectLst/>
+                <a:uLnTx/>
+                <a:uFillTx/>
+                <a:latin typeface="Arial" panose="020B0604020202020204" pitchFamily="34" charset="0"/>
+                <a:ea typeface="+mn-ea"/>
+                <a:cs typeface="Arial" panose="020B0604020202020204" pitchFamily="34" charset="0"/>
+              </a:rPr>
+              <a:t>folder_name</a:t>
+            </a:r>
+            <a:r>
+              <a:rPr kumimoji="0" lang="en-US" sz="1800" b="1" i="0" u="none" strike="noStrike" kern="1200" cap="none" spc="0" normalizeH="0" baseline="0" noProof="0" dirty="0">
+                <a:ln>
+                  <a:noFill/>
+                </a:ln>
+                <a:solidFill>
+                  <a:schemeClr val="accent2"/>
+                </a:solidFill>
+                <a:effectLst/>
+                <a:uLnTx/>
+                <a:uFillTx/>
+                <a:latin typeface="Arial" panose="020B0604020202020204" pitchFamily="34" charset="0"/>
+                <a:ea typeface="+mn-ea"/>
+                <a:cs typeface="Arial" panose="020B0604020202020204" pitchFamily="34" charset="0"/>
+              </a:rPr>
+              <a:t>&gt;</a:t>
+            </a:r>
+            <a:endParaRPr lang="en-US" b="1" dirty="0">
+              <a:solidFill>
+                <a:schemeClr val="accent2"/>
+              </a:solidFill>
+              <a:latin typeface="Arial" panose="020B0604020202020204" pitchFamily="34" charset="0"/>
+              <a:cs typeface="Arial" panose="020B0604020202020204" pitchFamily="34" charset="0"/>
+            </a:endParaRPr>
+          </a:p>
+        </p:txBody>
+      </p:sp>
+      <p:sp>
+        <p:nvSpPr>
+          <p:cNvPr id="15" name="Rectangle 14">
+            <a:extLst>
+              <a:ext uri="{FF2B5EF4-FFF2-40B4-BE49-F238E27FC236}">
+                <a16:creationId xmlns:a16="http://schemas.microsoft.com/office/drawing/2014/main" id="{507BF569-8285-BA13-A70E-AB49883D79AD}"/>
+              </a:ext>
+            </a:extLst>
+          </p:cNvPr>
+          <p:cNvSpPr/>
+          <p:nvPr/>
+        </p:nvSpPr>
+        <p:spPr>
+          <a:xfrm>
+            <a:off x="122413" y="3464222"/>
+            <a:ext cx="111760" cy="786230"/>
+          </a:xfrm>
+          <a:prstGeom prst="rect">
+            <a:avLst/>
+          </a:prstGeom>
+          <a:solidFill>
+            <a:schemeClr val="tx1"/>
+          </a:solidFill>
+          <a:ln>
+            <a:noFill/>
+          </a:ln>
+          <a:effectLst>
+            <a:outerShdw blurRad="50800" dist="38100" dir="2700000" algn="tl" rotWithShape="0">
+              <a:prstClr val="black">
+                <a:alpha val="40000"/>
+              </a:prstClr>
+            </a:outerShdw>
+          </a:effectLst>
+        </p:spPr>
+        <p:style>
+          <a:lnRef idx="2">
+            <a:schemeClr val="accent1">
+              <a:shade val="15000"/>
+            </a:schemeClr>
+          </a:lnRef>
+          <a:fillRef idx="1">
+            <a:schemeClr val="accent1"/>
+          </a:fillRef>
+          <a:effectRef idx="0">
+            <a:schemeClr val="accent1"/>
+          </a:effectRef>
+          <a:fontRef idx="minor">
+            <a:schemeClr val="lt1"/>
+          </a:fontRef>
+        </p:style>
+        <p:txBody>
+          <a:bodyPr rtlCol="0" anchor="ctr"/>
+          <a:lstStyle/>
+          <a:p>
+            <a:pPr marL="0" marR="0" lvl="0" indent="0" algn="ctr" defTabSz="914400" eaLnBrk="1" fontAlgn="auto" latinLnBrk="0" hangingPunct="1">
+              <a:lnSpc>
+                <a:spcPct val="100000"/>
+              </a:lnSpc>
+              <a:spcBef>
+                <a:spcPts val="0"/>
+              </a:spcBef>
+              <a:spcAft>
+                <a:spcPts val="0"/>
+              </a:spcAft>
+              <a:buClrTx/>
+              <a:buSzTx/>
+              <a:buFontTx/>
+              <a:buNone/>
+              <a:tabLst/>
+              <a:defRPr/>
+            </a:pPr>
+            <a:endParaRPr kumimoji="0" lang="en-US" sz="1800" b="0" i="0" u="none" strike="noStrike" kern="1200" cap="none" spc="0" normalizeH="0" baseline="0" noProof="0">
+              <a:ln>
+                <a:noFill/>
+              </a:ln>
+              <a:solidFill>
+                <a:prstClr val="white"/>
+              </a:solidFill>
+              <a:effectLst/>
+              <a:uLnTx/>
+              <a:uFillTx/>
+              <a:latin typeface="Aptos" panose="02110004020202020204"/>
+              <a:ea typeface="+mn-ea"/>
+              <a:cs typeface="+mn-cs"/>
+            </a:endParaRPr>
+          </a:p>
+        </p:txBody>
+      </p:sp>
+      <p:sp>
+        <p:nvSpPr>
+          <p:cNvPr id="16" name="Rectangle 15">
+            <a:extLst>
+              <a:ext uri="{FF2B5EF4-FFF2-40B4-BE49-F238E27FC236}">
+                <a16:creationId xmlns:a16="http://schemas.microsoft.com/office/drawing/2014/main" id="{9812DA14-1AF6-0AFC-7B83-151A8ADC6334}"/>
+              </a:ext>
+            </a:extLst>
+          </p:cNvPr>
+          <p:cNvSpPr/>
+          <p:nvPr/>
+        </p:nvSpPr>
+        <p:spPr>
+          <a:xfrm>
+            <a:off x="198612" y="3464222"/>
+            <a:ext cx="11895551" cy="786230"/>
+          </a:xfrm>
+          <a:prstGeom prst="rect">
+            <a:avLst/>
+          </a:prstGeom>
+          <a:solidFill>
+            <a:schemeClr val="tx1"/>
+          </a:solidFill>
+          <a:ln>
+            <a:noFill/>
+          </a:ln>
+          <a:effectLst>
+            <a:outerShdw blurRad="50800" dist="38100" dir="2700000" algn="tl" rotWithShape="0">
+              <a:prstClr val="black">
+                <a:alpha val="40000"/>
+              </a:prstClr>
+            </a:outerShdw>
+          </a:effectLst>
+        </p:spPr>
+        <p:style>
+          <a:lnRef idx="2">
+            <a:schemeClr val="accent1">
+              <a:shade val="15000"/>
+            </a:schemeClr>
+          </a:lnRef>
+          <a:fillRef idx="1">
+            <a:schemeClr val="accent1"/>
+          </a:fillRef>
+          <a:effectRef idx="0">
+            <a:schemeClr val="accent1"/>
+          </a:effectRef>
+          <a:fontRef idx="minor">
+            <a:schemeClr val="lt1"/>
+          </a:fontRef>
+        </p:style>
+        <p:txBody>
+          <a:bodyPr rtlCol="0" anchor="ctr"/>
+          <a:lstStyle/>
+          <a:p>
+            <a:pPr marL="0" marR="0" lvl="0" indent="0" algn="l" defTabSz="914400" eaLnBrk="1" fontAlgn="auto" latinLnBrk="0" hangingPunct="1">
+              <a:lnSpc>
+                <a:spcPct val="100000"/>
+              </a:lnSpc>
+              <a:spcBef>
+                <a:spcPts val="0"/>
+              </a:spcBef>
+              <a:spcAft>
+                <a:spcPts val="0"/>
+              </a:spcAft>
+              <a:buClrTx/>
+              <a:buSzTx/>
+              <a:buFontTx/>
+              <a:buNone/>
+              <a:tabLst/>
+              <a:defRPr/>
+            </a:pPr>
+            <a:r>
+              <a:rPr lang="en-US" b="1" dirty="0">
+                <a:solidFill>
+                  <a:prstClr val="white"/>
+                </a:solidFill>
+                <a:latin typeface="Arial" panose="020B0604020202020204" pitchFamily="34" charset="0"/>
+                <a:cs typeface="Arial" panose="020B0604020202020204" pitchFamily="34" charset="0"/>
+              </a:rPr>
+              <a:t>In the main folder where you run </a:t>
+            </a:r>
+            <a:r>
+              <a:rPr lang="en-US" b="1" dirty="0">
+                <a:solidFill>
+                  <a:schemeClr val="accent2"/>
+                </a:solidFill>
+                <a:latin typeface="Arial" panose="020B0604020202020204" pitchFamily="34" charset="0"/>
+                <a:cs typeface="Arial" panose="020B0604020202020204" pitchFamily="34" charset="0"/>
+              </a:rPr>
+              <a:t>&lt;go mod </a:t>
+            </a:r>
+            <a:r>
+              <a:rPr lang="en-US" b="1" dirty="0" err="1">
+                <a:solidFill>
+                  <a:schemeClr val="accent2"/>
+                </a:solidFill>
+                <a:latin typeface="Arial" panose="020B0604020202020204" pitchFamily="34" charset="0"/>
+                <a:cs typeface="Arial" panose="020B0604020202020204" pitchFamily="34" charset="0"/>
+              </a:rPr>
+              <a:t>init</a:t>
+            </a:r>
+            <a:r>
+              <a:rPr lang="en-US" b="1" dirty="0">
+                <a:solidFill>
+                  <a:schemeClr val="accent2"/>
+                </a:solidFill>
+                <a:latin typeface="Arial" panose="020B0604020202020204" pitchFamily="34" charset="0"/>
+                <a:cs typeface="Arial" panose="020B0604020202020204" pitchFamily="34" charset="0"/>
+              </a:rPr>
+              <a:t>&gt;</a:t>
+            </a:r>
+            <a:r>
+              <a:rPr lang="en-US" b="1" dirty="0">
+                <a:solidFill>
+                  <a:prstClr val="white"/>
+                </a:solidFill>
+                <a:latin typeface="Arial" panose="020B0604020202020204" pitchFamily="34" charset="0"/>
+                <a:cs typeface="Arial" panose="020B0604020202020204" pitchFamily="34" charset="0"/>
+              </a:rPr>
+              <a:t> place your </a:t>
+            </a:r>
+            <a:r>
+              <a:rPr lang="en-US" b="1" dirty="0" err="1">
+                <a:solidFill>
+                  <a:prstClr val="white"/>
+                </a:solidFill>
+                <a:latin typeface="Arial" panose="020B0604020202020204" pitchFamily="34" charset="0"/>
+                <a:cs typeface="Arial" panose="020B0604020202020204" pitchFamily="34" charset="0"/>
+              </a:rPr>
+              <a:t>main.go</a:t>
+            </a:r>
+            <a:r>
+              <a:rPr lang="en-US" b="1" dirty="0">
+                <a:solidFill>
+                  <a:prstClr val="white"/>
+                </a:solidFill>
+                <a:latin typeface="Arial" panose="020B0604020202020204" pitchFamily="34" charset="0"/>
+                <a:cs typeface="Arial" panose="020B0604020202020204" pitchFamily="34" charset="0"/>
+              </a:rPr>
+              <a:t> file, then import your package.</a:t>
+            </a:r>
+            <a:endParaRPr lang="en-US" b="1" dirty="0">
+              <a:solidFill>
+                <a:schemeClr val="accent2"/>
+              </a:solidFill>
+              <a:latin typeface="Arial" panose="020B0604020202020204" pitchFamily="34" charset="0"/>
+              <a:cs typeface="Arial" panose="020B0604020202020204" pitchFamily="34" charset="0"/>
+            </a:endParaRPr>
+          </a:p>
+        </p:txBody>
+      </p:sp>
+    </p:spTree>
+    <p:custDataLst>
+      <p:tags r:id="rId1"/>
+    </p:custDataLst>
+    <p:extLst>
+      <p:ext uri="{BB962C8B-B14F-4D97-AF65-F5344CB8AC3E}">
+        <p14:creationId xmlns:p14="http://schemas.microsoft.com/office/powerpoint/2010/main" val="1131673820"/>
+      </p:ext>
+    </p:extLst>
+  </p:cSld>
+  <p:clrMapOvr>
+    <a:masterClrMapping/>
+  </p:clrMapOvr>
+  <mc:AlternateContent xmlns:mc="http://schemas.openxmlformats.org/markup-compatibility/2006">
+    <mc:Choice xmlns:p14="http://schemas.microsoft.com/office/powerpoint/2010/main" Requires="p14">
+      <p:transition spd="slow" p14:dur="2000" advTm="207460"/>
+    </mc:Choice>
+    <mc:Fallback>
+      <p:transition spd="slow" advTm="207460"/>
+    </mc:Fallback>
+  </mc:AlternateContent>
+</p:sld>
+</file>
+
+<file path=ppt/slides/slide17.xml><?xml version="1.0" encoding="utf-8"?>
+<p:sld xmlns:a="http://schemas.openxmlformats.org/drawingml/2006/main" xmlns:r="http://schemas.openxmlformats.org/officeDocument/2006/relationships" xmlns:p="http://schemas.openxmlformats.org/presentationml/2006/main">
+  <p:cSld>
+    <p:bg>
+      <p:bgPr>
+        <a:gradFill>
+          <a:gsLst>
+            <a:gs pos="0">
+              <a:schemeClr val="bg1">
+                <a:lumMod val="95000"/>
+              </a:schemeClr>
+            </a:gs>
+            <a:gs pos="74000">
+              <a:schemeClr val="bg1">
+                <a:lumMod val="85000"/>
+              </a:schemeClr>
+            </a:gs>
+            <a:gs pos="83000">
+              <a:schemeClr val="bg1">
+                <a:lumMod val="75000"/>
+              </a:schemeClr>
+            </a:gs>
+            <a:gs pos="100000">
+              <a:schemeClr val="bg1">
+                <a:lumMod val="50000"/>
+              </a:schemeClr>
+            </a:gs>
+          </a:gsLst>
+          <a:lin ang="5400000" scaled="1"/>
+        </a:gradFill>
+        <a:effectLst/>
+      </p:bgPr>
+    </p:bg>
+    <p:spTree>
+      <p:nvGrpSpPr>
+        <p:cNvPr id="1" name="">
+          <a:extLst>
+            <a:ext uri="{FF2B5EF4-FFF2-40B4-BE49-F238E27FC236}">
+              <a16:creationId xmlns:a16="http://schemas.microsoft.com/office/drawing/2014/main" id="{EBC75CBE-FBB9-B5A7-BA66-B34923B9F8A8}"/>
+            </a:ext>
+          </a:extLst>
+        </p:cNvPr>
+        <p:cNvGrpSpPr/>
+        <p:nvPr/>
+      </p:nvGrpSpPr>
+      <p:grpSpPr>
+        <a:xfrm>
+          <a:off x="0" y="0"/>
+          <a:ext cx="0" cy="0"/>
+          <a:chOff x="0" y="0"/>
+          <a:chExt cx="0" cy="0"/>
+        </a:xfrm>
+      </p:grpSpPr>
+      <p:sp>
+        <p:nvSpPr>
+          <p:cNvPr id="2" name="Title 1">
+            <a:extLst>
+              <a:ext uri="{FF2B5EF4-FFF2-40B4-BE49-F238E27FC236}">
+                <a16:creationId xmlns:a16="http://schemas.microsoft.com/office/drawing/2014/main" id="{C8DB8938-F441-DDB7-8E1C-B69B5FDA57EE}"/>
+              </a:ext>
+            </a:extLst>
+          </p:cNvPr>
+          <p:cNvSpPr>
+            <a:spLocks noGrp="1"/>
+          </p:cNvSpPr>
+          <p:nvPr>
+            <p:ph type="title"/>
+          </p:nvPr>
+        </p:nvSpPr>
+        <p:spPr>
+          <a:xfrm>
+            <a:off x="97832" y="-179711"/>
+            <a:ext cx="11996331" cy="1325563"/>
+          </a:xfrm>
+        </p:spPr>
+        <p:txBody>
+          <a:bodyPr>
+            <a:normAutofit/>
+          </a:bodyPr>
+          <a:lstStyle/>
+          <a:p>
+            <a:r>
+              <a:rPr lang="en-US" sz="4200" b="1" dirty="0">
+                <a:latin typeface="Times New Roman" panose="02020603050405020304" pitchFamily="18" charset="0"/>
+                <a:cs typeface="Times New Roman" panose="02020603050405020304" pitchFamily="18" charset="0"/>
+              </a:rPr>
+              <a:t>Go Packages:</a:t>
+            </a:r>
+          </a:p>
+        </p:txBody>
+      </p:sp>
+      <p:pic>
+        <p:nvPicPr>
+          <p:cNvPr id="6" name="Picture 5">
+            <a:extLst>
+              <a:ext uri="{FF2B5EF4-FFF2-40B4-BE49-F238E27FC236}">
+                <a16:creationId xmlns:a16="http://schemas.microsoft.com/office/drawing/2014/main" id="{7A47276C-A769-DC6B-A12C-BA272CFFA6A0}"/>
+              </a:ext>
+            </a:extLst>
+          </p:cNvPr>
+          <p:cNvPicPr>
+            <a:picLocks noChangeAspect="1"/>
+          </p:cNvPicPr>
+          <p:nvPr/>
+        </p:nvPicPr>
+        <p:blipFill>
+          <a:blip r:embed="rId4"/>
+          <a:srcRect l="7664" t="10582" r="3028"/>
+          <a:stretch>
+            <a:fillRect/>
+          </a:stretch>
+        </p:blipFill>
+        <p:spPr>
+          <a:xfrm>
+            <a:off x="-1" y="804207"/>
+            <a:ext cx="5718217" cy="3858229"/>
+          </a:xfrm>
+          <a:prstGeom prst="rect">
+            <a:avLst/>
+          </a:prstGeom>
+        </p:spPr>
+      </p:pic>
+      <p:pic>
+        <p:nvPicPr>
+          <p:cNvPr id="8" name="Picture 7">
+            <a:extLst>
+              <a:ext uri="{FF2B5EF4-FFF2-40B4-BE49-F238E27FC236}">
+                <a16:creationId xmlns:a16="http://schemas.microsoft.com/office/drawing/2014/main" id="{1CBA195D-5EDF-B930-CDAD-0D4257395A67}"/>
+              </a:ext>
+            </a:extLst>
+          </p:cNvPr>
+          <p:cNvPicPr>
+            <a:picLocks noChangeAspect="1"/>
+          </p:cNvPicPr>
+          <p:nvPr/>
+        </p:nvPicPr>
+        <p:blipFill>
+          <a:blip r:embed="rId5"/>
+          <a:srcRect l="5594" t="8066" r="7366"/>
+          <a:stretch>
+            <a:fillRect/>
+          </a:stretch>
+        </p:blipFill>
+        <p:spPr>
+          <a:xfrm>
+            <a:off x="6096000" y="804207"/>
+            <a:ext cx="5998163" cy="3858228"/>
+          </a:xfrm>
+          <a:prstGeom prst="rect">
+            <a:avLst/>
+          </a:prstGeom>
+        </p:spPr>
+      </p:pic>
+      <p:pic>
+        <p:nvPicPr>
+          <p:cNvPr id="10" name="Picture 9">
+            <a:extLst>
+              <a:ext uri="{FF2B5EF4-FFF2-40B4-BE49-F238E27FC236}">
+                <a16:creationId xmlns:a16="http://schemas.microsoft.com/office/drawing/2014/main" id="{06795308-37E8-3890-4D2A-A771EE8D3132}"/>
+              </a:ext>
+            </a:extLst>
+          </p:cNvPr>
+          <p:cNvPicPr>
+            <a:picLocks noChangeAspect="1"/>
+          </p:cNvPicPr>
+          <p:nvPr/>
+        </p:nvPicPr>
+        <p:blipFill>
+          <a:blip r:embed="rId6"/>
+          <a:stretch>
+            <a:fillRect/>
+          </a:stretch>
+        </p:blipFill>
+        <p:spPr>
+          <a:xfrm>
+            <a:off x="97831" y="4853353"/>
+            <a:ext cx="9578731" cy="1934308"/>
+          </a:xfrm>
+          <a:prstGeom prst="rect">
+            <a:avLst/>
+          </a:prstGeom>
+        </p:spPr>
+      </p:pic>
+    </p:spTree>
+    <p:custDataLst>
+      <p:tags r:id="rId1"/>
+    </p:custDataLst>
+    <p:extLst>
+      <p:ext uri="{BB962C8B-B14F-4D97-AF65-F5344CB8AC3E}">
+        <p14:creationId xmlns:p14="http://schemas.microsoft.com/office/powerpoint/2010/main" val="4260968618"/>
+      </p:ext>
+    </p:extLst>
+  </p:cSld>
+  <p:clrMapOvr>
+    <a:masterClrMapping/>
+  </p:clrMapOvr>
+  <mc:AlternateContent xmlns:mc="http://schemas.openxmlformats.org/markup-compatibility/2006">
+    <mc:Choice xmlns:p14="http://schemas.microsoft.com/office/powerpoint/2010/main" Requires="p14">
+      <p:transition spd="slow" p14:dur="2000" advTm="207460"/>
+    </mc:Choice>
+    <mc:Fallback>
+      <p:transition spd="slow" advTm="207460"/>
+    </mc:Fallback>
+  </mc:AlternateContent>
+</p:sld>
+</file>
+
 <file path=ppt/slides/slide2.xml><?xml version="1.0" encoding="utf-8"?>
 <p:sld xmlns:a="http://schemas.openxmlformats.org/drawingml/2006/main" xmlns:r="http://schemas.openxmlformats.org/officeDocument/2006/relationships" xmlns:p="http://schemas.openxmlformats.org/presentationml/2006/main">
   <p:cSld>
@@ -6273,11 +11635,11 @@
   <p:clrMapOvr>
     <a:masterClrMapping/>
   </p:clrMapOvr>
-  <mc:AlternateContent xmlns:mc="http://schemas.openxmlformats.org/markup-compatibility/2006">
-    <mc:Choice xmlns:p14="http://schemas.microsoft.com/office/powerpoint/2010/main" Requires="p14">
+  <mc:AlternateContent xmlns:mc="http://schemas.openxmlformats.org/markup-compatibility/2006" xmlns:p14="http://schemas.microsoft.com/office/powerpoint/2010/main">
+    <mc:Choice Requires="p14">
       <p:transition spd="slow" p14:dur="2000" advTm="207460"/>
     </mc:Choice>
-    <mc:Fallback>
+    <mc:Fallback xmlns="">
       <p:transition spd="slow" advTm="207460"/>
     </mc:Fallback>
   </mc:AlternateContent>
@@ -6588,110 +11950,131 @@
           </a:prstGeom>
         </p:spPr>
       </p:pic>
-      <mc:AlternateContent xmlns:mc="http://schemas.openxmlformats.org/markup-compatibility/2006">
-        <mc:Choice xmlns:p14="http://schemas.microsoft.com/office/powerpoint/2010/main" Requires="p14">
-          <p:contentPart p14:bwMode="auto" r:id="rId6">
-            <p14:nvContentPartPr>
-              <p14:cNvPr id="8" name="Ink 7">
-                <a:extLst>
-                  <a:ext uri="{FF2B5EF4-FFF2-40B4-BE49-F238E27FC236}">
-                    <a16:creationId xmlns:a16="http://schemas.microsoft.com/office/drawing/2014/main" id="{DDD8E86A-6B85-4B18-0C87-B66E471DB348}"/>
-                  </a:ext>
-                </a:extLst>
-              </p14:cNvPr>
-              <p14:cNvContentPartPr/>
-              <p14:nvPr/>
-            </p14:nvContentPartPr>
-            <p14:xfrm>
-              <a:off x="6380925" y="3657651"/>
-              <a:ext cx="1541880" cy="612360"/>
-            </p14:xfrm>
-          </p:contentPart>
-        </mc:Choice>
-        <mc:Fallback>
-          <p:pic>
-            <p:nvPicPr>
-              <p:cNvPr id="8" name="Ink 7">
-                <a:extLst>
-                  <a:ext uri="{FF2B5EF4-FFF2-40B4-BE49-F238E27FC236}">
-                    <a16:creationId xmlns:a16="http://schemas.microsoft.com/office/drawing/2014/main" id="{DDD8E86A-6B85-4B18-0C87-B66E471DB348}"/>
-                  </a:ext>
-                </a:extLst>
-              </p:cNvPr>
-              <p:cNvPicPr/>
-              <p:nvPr/>
-            </p:nvPicPr>
-            <p:blipFill>
-              <a:blip r:embed="rId7"/>
-              <a:stretch>
-                <a:fillRect/>
-              </a:stretch>
-            </p:blipFill>
-            <p:spPr>
-              <a:xfrm>
-                <a:off x="6361845" y="3638571"/>
-                <a:ext cx="1579680" cy="650160"/>
-              </a:xfrm>
-              <a:prstGeom prst="rect">
-                <a:avLst/>
-              </a:prstGeom>
-            </p:spPr>
-          </p:pic>
-        </mc:Fallback>
-      </mc:AlternateContent>
-      <mc:AlternateContent xmlns:mc="http://schemas.openxmlformats.org/markup-compatibility/2006">
-        <mc:Choice xmlns:p14="http://schemas.microsoft.com/office/powerpoint/2010/main" Requires="p14">
-          <p:contentPart p14:bwMode="auto" r:id="rId8">
-            <p14:nvContentPartPr>
-              <p14:cNvPr id="10" name="Ink 9">
-                <a:extLst>
-                  <a:ext uri="{FF2B5EF4-FFF2-40B4-BE49-F238E27FC236}">
-                    <a16:creationId xmlns:a16="http://schemas.microsoft.com/office/drawing/2014/main" id="{C034770E-B1F8-482B-0B8E-2257B954D4F9}"/>
-                  </a:ext>
-                </a:extLst>
-              </p14:cNvPr>
-              <p14:cNvContentPartPr/>
-              <p14:nvPr/>
-            </p14:nvContentPartPr>
-            <p14:xfrm>
-              <a:off x="7810845" y="4129971"/>
-              <a:ext cx="178560" cy="219960"/>
-            </p14:xfrm>
-          </p:contentPart>
-        </mc:Choice>
-        <mc:Fallback>
-          <p:pic>
-            <p:nvPicPr>
-              <p:cNvPr id="10" name="Ink 9">
-                <a:extLst>
-                  <a:ext uri="{FF2B5EF4-FFF2-40B4-BE49-F238E27FC236}">
-                    <a16:creationId xmlns:a16="http://schemas.microsoft.com/office/drawing/2014/main" id="{C034770E-B1F8-482B-0B8E-2257B954D4F9}"/>
-                  </a:ext>
-                </a:extLst>
-              </p:cNvPr>
-              <p:cNvPicPr/>
-              <p:nvPr/>
-            </p:nvPicPr>
-            <p:blipFill>
-              <a:blip r:embed="rId9"/>
-              <a:stretch>
-                <a:fillRect/>
-              </a:stretch>
-            </p:blipFill>
-            <p:spPr>
-              <a:xfrm>
-                <a:off x="7802205" y="4120971"/>
-                <a:ext cx="196200" cy="237600"/>
-              </a:xfrm>
-              <a:prstGeom prst="rect">
-                <a:avLst/>
-              </a:prstGeom>
-            </p:spPr>
-          </p:pic>
-        </mc:Fallback>
-      </mc:AlternateContent>
-      <mc:AlternateContent xmlns:mc="http://schemas.openxmlformats.org/markup-compatibility/2006">
-        <mc:Choice xmlns:p14="http://schemas.microsoft.com/office/powerpoint/2010/main" Requires="p14">
+      <p:grpSp>
+        <p:nvGrpSpPr>
+          <p:cNvPr id="3" name="Group 2">
+            <a:extLst>
+              <a:ext uri="{FF2B5EF4-FFF2-40B4-BE49-F238E27FC236}">
+                <a16:creationId xmlns:a16="http://schemas.microsoft.com/office/drawing/2014/main" id="{79F43F66-6BBB-5281-8961-50FD3631CA39}"/>
+              </a:ext>
+            </a:extLst>
+          </p:cNvPr>
+          <p:cNvGrpSpPr/>
+          <p:nvPr/>
+        </p:nvGrpSpPr>
+        <p:grpSpPr>
+          <a:xfrm>
+            <a:off x="6380925" y="3657651"/>
+            <a:ext cx="1608480" cy="692280"/>
+            <a:chOff x="6380925" y="3657651"/>
+            <a:chExt cx="1608480" cy="692280"/>
+          </a:xfrm>
+        </p:grpSpPr>
+        <mc:AlternateContent xmlns:mc="http://schemas.openxmlformats.org/markup-compatibility/2006" xmlns:p14="http://schemas.microsoft.com/office/powerpoint/2010/main">
+          <mc:Choice Requires="p14">
+            <p:contentPart p14:bwMode="auto" r:id="rId6">
+              <p14:nvContentPartPr>
+                <p14:cNvPr id="8" name="Ink 7">
+                  <a:extLst>
+                    <a:ext uri="{FF2B5EF4-FFF2-40B4-BE49-F238E27FC236}">
+                      <a16:creationId xmlns:a16="http://schemas.microsoft.com/office/drawing/2014/main" id="{DDD8E86A-6B85-4B18-0C87-B66E471DB348}"/>
+                    </a:ext>
+                  </a:extLst>
+                </p14:cNvPr>
+                <p14:cNvContentPartPr/>
+                <p14:nvPr/>
+              </p14:nvContentPartPr>
+              <p14:xfrm>
+                <a:off x="6380925" y="3657651"/>
+                <a:ext cx="1541880" cy="612360"/>
+              </p14:xfrm>
+            </p:contentPart>
+          </mc:Choice>
+          <mc:Fallback xmlns="">
+            <p:pic>
+              <p:nvPicPr>
+                <p:cNvPr id="8" name="Ink 7">
+                  <a:extLst>
+                    <a:ext uri="{FF2B5EF4-FFF2-40B4-BE49-F238E27FC236}">
+                      <a16:creationId xmlns:a16="http://schemas.microsoft.com/office/drawing/2014/main" id="{DDD8E86A-6B85-4B18-0C87-B66E471DB348}"/>
+                    </a:ext>
+                  </a:extLst>
+                </p:cNvPr>
+                <p:cNvPicPr/>
+                <p:nvPr/>
+              </p:nvPicPr>
+              <p:blipFill>
+                <a:blip r:embed="rId7"/>
+                <a:stretch>
+                  <a:fillRect/>
+                </a:stretch>
+              </p:blipFill>
+              <p:spPr>
+                <a:xfrm>
+                  <a:off x="6361849" y="3638571"/>
+                  <a:ext cx="1579671" cy="650160"/>
+                </a:xfrm>
+                <a:prstGeom prst="rect">
+                  <a:avLst/>
+                </a:prstGeom>
+              </p:spPr>
+            </p:pic>
+          </mc:Fallback>
+        </mc:AlternateContent>
+        <mc:AlternateContent xmlns:mc="http://schemas.openxmlformats.org/markup-compatibility/2006" xmlns:p14="http://schemas.microsoft.com/office/powerpoint/2010/main">
+          <mc:Choice Requires="p14">
+            <p:contentPart p14:bwMode="auto" r:id="rId8">
+              <p14:nvContentPartPr>
+                <p14:cNvPr id="10" name="Ink 9">
+                  <a:extLst>
+                    <a:ext uri="{FF2B5EF4-FFF2-40B4-BE49-F238E27FC236}">
+                      <a16:creationId xmlns:a16="http://schemas.microsoft.com/office/drawing/2014/main" id="{C034770E-B1F8-482B-0B8E-2257B954D4F9}"/>
+                    </a:ext>
+                  </a:extLst>
+                </p14:cNvPr>
+                <p14:cNvContentPartPr/>
+                <p14:nvPr/>
+              </p14:nvContentPartPr>
+              <p14:xfrm>
+                <a:off x="7810845" y="4129971"/>
+                <a:ext cx="178560" cy="219960"/>
+              </p14:xfrm>
+            </p:contentPart>
+          </mc:Choice>
+          <mc:Fallback xmlns="">
+            <p:pic>
+              <p:nvPicPr>
+                <p:cNvPr id="10" name="Ink 9">
+                  <a:extLst>
+                    <a:ext uri="{FF2B5EF4-FFF2-40B4-BE49-F238E27FC236}">
+                      <a16:creationId xmlns:a16="http://schemas.microsoft.com/office/drawing/2014/main" id="{C034770E-B1F8-482B-0B8E-2257B954D4F9}"/>
+                    </a:ext>
+                  </a:extLst>
+                </p:cNvPr>
+                <p:cNvPicPr/>
+                <p:nvPr/>
+              </p:nvPicPr>
+              <p:blipFill>
+                <a:blip r:embed="rId9"/>
+                <a:stretch>
+                  <a:fillRect/>
+                </a:stretch>
+              </p:blipFill>
+              <p:spPr>
+                <a:xfrm>
+                  <a:off x="7801845" y="4120986"/>
+                  <a:ext cx="196200" cy="237571"/>
+                </a:xfrm>
+                <a:prstGeom prst="rect">
+                  <a:avLst/>
+                </a:prstGeom>
+              </p:spPr>
+            </p:pic>
+          </mc:Fallback>
+        </mc:AlternateContent>
+      </p:grpSp>
+      <mc:AlternateContent xmlns:mc="http://schemas.openxmlformats.org/markup-compatibility/2006" xmlns:p14="http://schemas.microsoft.com/office/powerpoint/2010/main">
+        <mc:Choice Requires="p14">
           <p:contentPart p14:bwMode="auto" r:id="rId10">
             <p14:nvContentPartPr>
               <p14:cNvPr id="11" name="Ink 10">
@@ -6710,7 +12093,7 @@
             </p14:xfrm>
           </p:contentPart>
         </mc:Choice>
-        <mc:Fallback>
+        <mc:Fallback xmlns="">
           <p:pic>
             <p:nvPicPr>
               <p:cNvPr id="11" name="Ink 10">
@@ -6798,8 +12181,8 @@
           </a:p>
         </p:txBody>
       </p:sp>
-      <mc:AlternateContent xmlns:mc="http://schemas.openxmlformats.org/markup-compatibility/2006">
-        <mc:Choice xmlns:p14="http://schemas.microsoft.com/office/powerpoint/2010/main" Requires="p14">
+      <mc:AlternateContent xmlns:mc="http://schemas.openxmlformats.org/markup-compatibility/2006" xmlns:p14="http://schemas.microsoft.com/office/powerpoint/2010/main">
+        <mc:Choice Requires="p14">
           <p:contentPart p14:bwMode="auto" r:id="rId12">
             <p14:nvContentPartPr>
               <p14:cNvPr id="13" name="Ink 12">
@@ -6818,7 +12201,7 @@
             </p14:xfrm>
           </p:contentPart>
         </mc:Choice>
-        <mc:Fallback>
+        <mc:Fallback xmlns="">
           <p:pic>
             <p:nvPicPr>
               <p:cNvPr id="13" name="Ink 12">
@@ -6849,8 +12232,8 @@
           </p:pic>
         </mc:Fallback>
       </mc:AlternateContent>
-      <mc:AlternateContent xmlns:mc="http://schemas.openxmlformats.org/markup-compatibility/2006">
-        <mc:Choice xmlns:p14="http://schemas.microsoft.com/office/powerpoint/2010/main" Requires="p14">
+      <mc:AlternateContent xmlns:mc="http://schemas.openxmlformats.org/markup-compatibility/2006" xmlns:p14="http://schemas.microsoft.com/office/powerpoint/2010/main">
+        <mc:Choice Requires="p14">
           <p:contentPart p14:bwMode="auto" r:id="rId14">
             <p14:nvContentPartPr>
               <p14:cNvPr id="14" name="Ink 13">
@@ -6869,7 +12252,7 @@
             </p14:xfrm>
           </p:contentPart>
         </mc:Choice>
-        <mc:Fallback>
+        <mc:Fallback xmlns="">
           <p:pic>
             <p:nvPicPr>
               <p:cNvPr id="14" name="Ink 13">
@@ -6954,11 +12337,11 @@
   <p:clrMapOvr>
     <a:masterClrMapping/>
   </p:clrMapOvr>
-  <mc:AlternateContent xmlns:mc="http://schemas.openxmlformats.org/markup-compatibility/2006">
-    <mc:Choice xmlns:p14="http://schemas.microsoft.com/office/powerpoint/2010/main" Requires="p14">
+  <mc:AlternateContent xmlns:mc="http://schemas.openxmlformats.org/markup-compatibility/2006" xmlns:p14="http://schemas.microsoft.com/office/powerpoint/2010/main">
+    <mc:Choice Requires="p14">
       <p:transition spd="slow" p14:dur="2000" advTm="207460"/>
     </mc:Choice>
-    <mc:Fallback>
+    <mc:Fallback xmlns="">
       <p:transition spd="slow" advTm="207460"/>
     </mc:Fallback>
   </mc:AlternateContent>
@@ -7060,8 +12443,8 @@
           </a:p>
         </p:txBody>
       </p:sp>
-      <mc:AlternateContent xmlns:mc="http://schemas.openxmlformats.org/markup-compatibility/2006">
-        <mc:Choice xmlns:p14="http://schemas.microsoft.com/office/powerpoint/2010/main" Requires="p14">
+      <mc:AlternateContent xmlns:mc="http://schemas.openxmlformats.org/markup-compatibility/2006" xmlns:p14="http://schemas.microsoft.com/office/powerpoint/2010/main">
+        <mc:Choice Requires="p14">
           <p:contentPart p14:bwMode="auto" r:id="rId4">
             <p14:nvContentPartPr>
               <p14:cNvPr id="11" name="Ink 10">
@@ -7080,7 +12463,7 @@
             </p14:xfrm>
           </p:contentPart>
         </mc:Choice>
-        <mc:Fallback>
+        <mc:Fallback xmlns="">
           <p:pic>
             <p:nvPicPr>
               <p:cNvPr id="11" name="Ink 10">
@@ -7154,11 +12537,1969 @@
   <p:clrMapOvr>
     <a:masterClrMapping/>
   </p:clrMapOvr>
-  <mc:AlternateContent xmlns:mc="http://schemas.openxmlformats.org/markup-compatibility/2006">
-    <mc:Choice xmlns:p14="http://schemas.microsoft.com/office/powerpoint/2010/main" Requires="p14">
+  <mc:AlternateContent xmlns:mc="http://schemas.openxmlformats.org/markup-compatibility/2006" xmlns:p14="http://schemas.microsoft.com/office/powerpoint/2010/main">
+    <mc:Choice Requires="p14">
       <p:transition spd="slow" p14:dur="2000" advTm="207460"/>
     </mc:Choice>
-    <mc:Fallback>
+    <mc:Fallback xmlns="">
+      <p:transition spd="slow" advTm="207460"/>
+    </mc:Fallback>
+  </mc:AlternateContent>
+</p:sld>
+</file>
+
+<file path=ppt/slides/slide8.xml><?xml version="1.0" encoding="utf-8"?>
+<p:sld xmlns:a="http://schemas.openxmlformats.org/drawingml/2006/main" xmlns:r="http://schemas.openxmlformats.org/officeDocument/2006/relationships" xmlns:p="http://schemas.openxmlformats.org/presentationml/2006/main">
+  <p:cSld>
+    <p:bg>
+      <p:bgPr>
+        <a:gradFill>
+          <a:gsLst>
+            <a:gs pos="0">
+              <a:schemeClr val="bg1">
+                <a:lumMod val="95000"/>
+              </a:schemeClr>
+            </a:gs>
+            <a:gs pos="74000">
+              <a:schemeClr val="bg1">
+                <a:lumMod val="85000"/>
+              </a:schemeClr>
+            </a:gs>
+            <a:gs pos="83000">
+              <a:schemeClr val="bg1">
+                <a:lumMod val="75000"/>
+              </a:schemeClr>
+            </a:gs>
+            <a:gs pos="100000">
+              <a:schemeClr val="bg1">
+                <a:lumMod val="50000"/>
+              </a:schemeClr>
+            </a:gs>
+          </a:gsLst>
+          <a:lin ang="5400000" scaled="1"/>
+        </a:gradFill>
+        <a:effectLst/>
+      </p:bgPr>
+    </p:bg>
+    <p:spTree>
+      <p:nvGrpSpPr>
+        <p:cNvPr id="1" name="">
+          <a:extLst>
+            <a:ext uri="{FF2B5EF4-FFF2-40B4-BE49-F238E27FC236}">
+              <a16:creationId xmlns:a16="http://schemas.microsoft.com/office/drawing/2014/main" id="{6F094CF5-5BEE-3EC5-D9CD-164CEB71DA9E}"/>
+            </a:ext>
+          </a:extLst>
+        </p:cNvPr>
+        <p:cNvGrpSpPr/>
+        <p:nvPr/>
+      </p:nvGrpSpPr>
+      <p:grpSpPr>
+        <a:xfrm>
+          <a:off x="0" y="0"/>
+          <a:ext cx="0" cy="0"/>
+          <a:chOff x="0" y="0"/>
+          <a:chExt cx="0" cy="0"/>
+        </a:xfrm>
+      </p:grpSpPr>
+      <p:sp>
+        <p:nvSpPr>
+          <p:cNvPr id="2" name="Title 1">
+            <a:extLst>
+              <a:ext uri="{FF2B5EF4-FFF2-40B4-BE49-F238E27FC236}">
+                <a16:creationId xmlns:a16="http://schemas.microsoft.com/office/drawing/2014/main" id="{AA484F24-684C-58EB-1637-5252AF2B0913}"/>
+              </a:ext>
+            </a:extLst>
+          </p:cNvPr>
+          <p:cNvSpPr>
+            <a:spLocks noGrp="1"/>
+          </p:cNvSpPr>
+          <p:nvPr>
+            <p:ph type="title"/>
+          </p:nvPr>
+        </p:nvSpPr>
+        <p:spPr>
+          <a:xfrm>
+            <a:off x="9345" y="35221"/>
+            <a:ext cx="11996331" cy="1325563"/>
+          </a:xfrm>
+        </p:spPr>
+        <p:txBody>
+          <a:bodyPr>
+            <a:normAutofit/>
+          </a:bodyPr>
+          <a:lstStyle/>
+          <a:p>
+            <a:r>
+              <a:rPr lang="en-US" sz="4200" b="1" dirty="0">
+                <a:latin typeface="Times New Roman" panose="02020603050405020304" pitchFamily="18" charset="0"/>
+                <a:cs typeface="Times New Roman" panose="02020603050405020304" pitchFamily="18" charset="0"/>
+              </a:rPr>
+              <a:t>Marshaling &amp; JSON</a:t>
+            </a:r>
+          </a:p>
+        </p:txBody>
+      </p:sp>
+      <p:sp>
+        <p:nvSpPr>
+          <p:cNvPr id="4" name="Rectangle 3">
+            <a:extLst>
+              <a:ext uri="{FF2B5EF4-FFF2-40B4-BE49-F238E27FC236}">
+                <a16:creationId xmlns:a16="http://schemas.microsoft.com/office/drawing/2014/main" id="{912BD4E3-2D56-D15C-A064-67DC46107AA8}"/>
+              </a:ext>
+            </a:extLst>
+          </p:cNvPr>
+          <p:cNvSpPr/>
+          <p:nvPr/>
+        </p:nvSpPr>
+        <p:spPr>
+          <a:xfrm>
+            <a:off x="110125" y="2088368"/>
+            <a:ext cx="111760" cy="767894"/>
+          </a:xfrm>
+          <a:prstGeom prst="rect">
+            <a:avLst/>
+          </a:prstGeom>
+          <a:solidFill>
+            <a:schemeClr val="tx1"/>
+          </a:solidFill>
+          <a:ln>
+            <a:noFill/>
+          </a:ln>
+          <a:effectLst>
+            <a:outerShdw blurRad="50800" dist="38100" dir="2700000" algn="tl" rotWithShape="0">
+              <a:prstClr val="black">
+                <a:alpha val="40000"/>
+              </a:prstClr>
+            </a:outerShdw>
+          </a:effectLst>
+        </p:spPr>
+        <p:style>
+          <a:lnRef idx="2">
+            <a:schemeClr val="accent1">
+              <a:shade val="15000"/>
+            </a:schemeClr>
+          </a:lnRef>
+          <a:fillRef idx="1">
+            <a:schemeClr val="accent1"/>
+          </a:fillRef>
+          <a:effectRef idx="0">
+            <a:schemeClr val="accent1"/>
+          </a:effectRef>
+          <a:fontRef idx="minor">
+            <a:schemeClr val="lt1"/>
+          </a:fontRef>
+        </p:style>
+        <p:txBody>
+          <a:bodyPr rtlCol="0" anchor="ctr"/>
+          <a:lstStyle/>
+          <a:p>
+            <a:pPr marL="0" marR="0" lvl="0" indent="0" algn="ctr" defTabSz="914400" rtl="0" eaLnBrk="1" fontAlgn="auto" latinLnBrk="0" hangingPunct="1">
+              <a:lnSpc>
+                <a:spcPct val="100000"/>
+              </a:lnSpc>
+              <a:spcBef>
+                <a:spcPts val="0"/>
+              </a:spcBef>
+              <a:spcAft>
+                <a:spcPts val="0"/>
+              </a:spcAft>
+              <a:buClrTx/>
+              <a:buSzTx/>
+              <a:buFontTx/>
+              <a:buNone/>
+              <a:tabLst/>
+              <a:defRPr/>
+            </a:pPr>
+            <a:endParaRPr kumimoji="0" lang="en-US" sz="1800" b="0" i="0" u="none" strike="noStrike" kern="1200" cap="none" spc="0" normalizeH="0" baseline="0" noProof="0">
+              <a:ln>
+                <a:noFill/>
+              </a:ln>
+              <a:solidFill>
+                <a:prstClr val="white"/>
+              </a:solidFill>
+              <a:effectLst/>
+              <a:uLnTx/>
+              <a:uFillTx/>
+              <a:latin typeface="Aptos" panose="02110004020202020204"/>
+              <a:ea typeface="+mn-ea"/>
+              <a:cs typeface="+mn-cs"/>
+            </a:endParaRPr>
+          </a:p>
+        </p:txBody>
+      </p:sp>
+      <p:sp>
+        <p:nvSpPr>
+          <p:cNvPr id="6" name="Rectangle 5">
+            <a:extLst>
+              <a:ext uri="{FF2B5EF4-FFF2-40B4-BE49-F238E27FC236}">
+                <a16:creationId xmlns:a16="http://schemas.microsoft.com/office/drawing/2014/main" id="{E5D371CC-011B-A048-4584-5ACCB1C01F04}"/>
+              </a:ext>
+            </a:extLst>
+          </p:cNvPr>
+          <p:cNvSpPr/>
+          <p:nvPr/>
+        </p:nvSpPr>
+        <p:spPr>
+          <a:xfrm>
+            <a:off x="186324" y="2088368"/>
+            <a:ext cx="11895551" cy="767894"/>
+          </a:xfrm>
+          <a:prstGeom prst="rect">
+            <a:avLst/>
+          </a:prstGeom>
+          <a:solidFill>
+            <a:schemeClr val="tx1"/>
+          </a:solidFill>
+          <a:ln>
+            <a:noFill/>
+          </a:ln>
+          <a:effectLst>
+            <a:outerShdw blurRad="50800" dist="38100" dir="2700000" algn="tl" rotWithShape="0">
+              <a:prstClr val="black">
+                <a:alpha val="40000"/>
+              </a:prstClr>
+            </a:outerShdw>
+          </a:effectLst>
+        </p:spPr>
+        <p:style>
+          <a:lnRef idx="2">
+            <a:schemeClr val="accent1">
+              <a:shade val="15000"/>
+            </a:schemeClr>
+          </a:lnRef>
+          <a:fillRef idx="1">
+            <a:schemeClr val="accent1"/>
+          </a:fillRef>
+          <a:effectRef idx="0">
+            <a:schemeClr val="accent1"/>
+          </a:effectRef>
+          <a:fontRef idx="minor">
+            <a:schemeClr val="lt1"/>
+          </a:fontRef>
+        </p:style>
+        <p:txBody>
+          <a:bodyPr rtlCol="0" anchor="ctr"/>
+          <a:lstStyle/>
+          <a:p>
+            <a:pPr marL="0" marR="0" lvl="0" indent="0" algn="l" defTabSz="914400" rtl="0" eaLnBrk="1" fontAlgn="auto" latinLnBrk="0" hangingPunct="1">
+              <a:lnSpc>
+                <a:spcPct val="100000"/>
+              </a:lnSpc>
+              <a:spcBef>
+                <a:spcPts val="0"/>
+              </a:spcBef>
+              <a:spcAft>
+                <a:spcPts val="0"/>
+              </a:spcAft>
+              <a:buClrTx/>
+              <a:buSzTx/>
+              <a:buFontTx/>
+              <a:buNone/>
+              <a:tabLst/>
+              <a:defRPr/>
+            </a:pPr>
+            <a:r>
+              <a:rPr kumimoji="0" lang="en-US" sz="1800" b="1" i="0" u="none" strike="noStrike" kern="1200" cap="none" spc="0" normalizeH="0" baseline="0" noProof="0" dirty="0">
+                <a:ln>
+                  <a:noFill/>
+                </a:ln>
+                <a:solidFill>
+                  <a:prstClr val="white"/>
+                </a:solidFill>
+                <a:effectLst/>
+                <a:uLnTx/>
+                <a:uFillTx/>
+                <a:latin typeface="Arial" panose="020B0604020202020204" pitchFamily="34" charset="0"/>
+                <a:ea typeface="+mn-ea"/>
+                <a:cs typeface="Arial" panose="020B0604020202020204" pitchFamily="34" charset="0"/>
+              </a:rPr>
+              <a:t>Structs can contain binary data; if this were printed as text, it would not be readable for a human. Moreover, the data does not contain the name of the struct field, so we don’t know what the data means.</a:t>
+            </a:r>
+          </a:p>
+        </p:txBody>
+      </p:sp>
+      <p:sp>
+        <p:nvSpPr>
+          <p:cNvPr id="7" name="Rectangle 6">
+            <a:extLst>
+              <a:ext uri="{FF2B5EF4-FFF2-40B4-BE49-F238E27FC236}">
+                <a16:creationId xmlns:a16="http://schemas.microsoft.com/office/drawing/2014/main" id="{ABCF7D58-49C1-3AA1-8B83-30C3ABE43DD2}"/>
+              </a:ext>
+            </a:extLst>
+          </p:cNvPr>
+          <p:cNvSpPr/>
+          <p:nvPr/>
+        </p:nvSpPr>
+        <p:spPr>
+          <a:xfrm>
+            <a:off x="110125" y="3013585"/>
+            <a:ext cx="111760" cy="767894"/>
+          </a:xfrm>
+          <a:prstGeom prst="rect">
+            <a:avLst/>
+          </a:prstGeom>
+          <a:solidFill>
+            <a:schemeClr val="tx1"/>
+          </a:solidFill>
+          <a:ln>
+            <a:noFill/>
+          </a:ln>
+          <a:effectLst>
+            <a:outerShdw blurRad="50800" dist="38100" dir="2700000" algn="tl" rotWithShape="0">
+              <a:prstClr val="black">
+                <a:alpha val="40000"/>
+              </a:prstClr>
+            </a:outerShdw>
+          </a:effectLst>
+        </p:spPr>
+        <p:style>
+          <a:lnRef idx="2">
+            <a:schemeClr val="accent1">
+              <a:shade val="15000"/>
+            </a:schemeClr>
+          </a:lnRef>
+          <a:fillRef idx="1">
+            <a:schemeClr val="accent1"/>
+          </a:fillRef>
+          <a:effectRef idx="0">
+            <a:schemeClr val="accent1"/>
+          </a:effectRef>
+          <a:fontRef idx="minor">
+            <a:schemeClr val="lt1"/>
+          </a:fontRef>
+        </p:style>
+        <p:txBody>
+          <a:bodyPr rtlCol="0" anchor="ctr"/>
+          <a:lstStyle/>
+          <a:p>
+            <a:pPr marL="0" marR="0" lvl="0" indent="0" algn="ctr" defTabSz="914400" rtl="0" eaLnBrk="1" fontAlgn="auto" latinLnBrk="0" hangingPunct="1">
+              <a:lnSpc>
+                <a:spcPct val="100000"/>
+              </a:lnSpc>
+              <a:spcBef>
+                <a:spcPts val="0"/>
+              </a:spcBef>
+              <a:spcAft>
+                <a:spcPts val="0"/>
+              </a:spcAft>
+              <a:buClrTx/>
+              <a:buSzTx/>
+              <a:buFontTx/>
+              <a:buNone/>
+              <a:tabLst/>
+              <a:defRPr/>
+            </a:pPr>
+            <a:endParaRPr kumimoji="0" lang="en-US" sz="1800" b="0" i="0" u="none" strike="noStrike" kern="1200" cap="none" spc="0" normalizeH="0" baseline="0" noProof="0">
+              <a:ln>
+                <a:noFill/>
+              </a:ln>
+              <a:solidFill>
+                <a:prstClr val="white"/>
+              </a:solidFill>
+              <a:effectLst/>
+              <a:uLnTx/>
+              <a:uFillTx/>
+              <a:latin typeface="Aptos" panose="02110004020202020204"/>
+              <a:ea typeface="+mn-ea"/>
+              <a:cs typeface="+mn-cs"/>
+            </a:endParaRPr>
+          </a:p>
+        </p:txBody>
+      </p:sp>
+      <p:sp>
+        <p:nvSpPr>
+          <p:cNvPr id="12" name="Rectangle 11">
+            <a:extLst>
+              <a:ext uri="{FF2B5EF4-FFF2-40B4-BE49-F238E27FC236}">
+                <a16:creationId xmlns:a16="http://schemas.microsoft.com/office/drawing/2014/main" id="{629ECB3B-6215-BED0-AF46-538A15507995}"/>
+              </a:ext>
+            </a:extLst>
+          </p:cNvPr>
+          <p:cNvSpPr/>
+          <p:nvPr/>
+        </p:nvSpPr>
+        <p:spPr>
+          <a:xfrm>
+            <a:off x="186324" y="3013585"/>
+            <a:ext cx="11895551" cy="767894"/>
+          </a:xfrm>
+          <a:prstGeom prst="rect">
+            <a:avLst/>
+          </a:prstGeom>
+          <a:solidFill>
+            <a:schemeClr val="tx1"/>
+          </a:solidFill>
+          <a:ln>
+            <a:noFill/>
+          </a:ln>
+          <a:effectLst>
+            <a:outerShdw blurRad="50800" dist="38100" dir="2700000" algn="tl" rotWithShape="0">
+              <a:prstClr val="black">
+                <a:alpha val="40000"/>
+              </a:prstClr>
+            </a:outerShdw>
+          </a:effectLst>
+        </p:spPr>
+        <p:style>
+          <a:lnRef idx="2">
+            <a:schemeClr val="accent1">
+              <a:shade val="15000"/>
+            </a:schemeClr>
+          </a:lnRef>
+          <a:fillRef idx="1">
+            <a:schemeClr val="accent1"/>
+          </a:fillRef>
+          <a:effectRef idx="0">
+            <a:schemeClr val="accent1"/>
+          </a:effectRef>
+          <a:fontRef idx="minor">
+            <a:schemeClr val="lt1"/>
+          </a:fontRef>
+        </p:style>
+        <p:txBody>
+          <a:bodyPr rtlCol="0" anchor="ctr"/>
+          <a:lstStyle/>
+          <a:p>
+            <a:pPr marL="0" marR="0" lvl="0" indent="0" algn="l" defTabSz="914400" rtl="0" eaLnBrk="1" fontAlgn="auto" latinLnBrk="0" hangingPunct="1">
+              <a:lnSpc>
+                <a:spcPct val="100000"/>
+              </a:lnSpc>
+              <a:spcBef>
+                <a:spcPts val="0"/>
+              </a:spcBef>
+              <a:spcAft>
+                <a:spcPts val="0"/>
+              </a:spcAft>
+              <a:buClrTx/>
+              <a:buSzTx/>
+              <a:buFontTx/>
+              <a:buNone/>
+              <a:tabLst/>
+              <a:defRPr/>
+            </a:pPr>
+            <a:r>
+              <a:rPr kumimoji="0" lang="en-US" sz="1800" b="1" i="0" u="none" strike="noStrike" kern="1200" cap="none" spc="0" normalizeH="0" baseline="0" noProof="0" dirty="0">
+                <a:ln>
+                  <a:noFill/>
+                </a:ln>
+                <a:solidFill>
+                  <a:prstClr val="white"/>
+                </a:solidFill>
+                <a:effectLst/>
+                <a:uLnTx/>
+                <a:uFillTx/>
+                <a:latin typeface="Arial" panose="020B0604020202020204" pitchFamily="34" charset="0"/>
+                <a:ea typeface="+mn-ea"/>
+                <a:cs typeface="Arial" panose="020B0604020202020204" pitchFamily="34" charset="0"/>
+              </a:rPr>
+              <a:t>To remedy this, several formats have been devised, which transform the data into plain text, but annotated by their field names, so humans can read and understand the data</a:t>
+            </a:r>
+          </a:p>
+        </p:txBody>
+      </p:sp>
+      <p:sp>
+        <p:nvSpPr>
+          <p:cNvPr id="3" name="Rectangle 2">
+            <a:extLst>
+              <a:ext uri="{FF2B5EF4-FFF2-40B4-BE49-F238E27FC236}">
+                <a16:creationId xmlns:a16="http://schemas.microsoft.com/office/drawing/2014/main" id="{D0B825E0-59B6-EC5A-C980-3AFC5701DEF4}"/>
+              </a:ext>
+            </a:extLst>
+          </p:cNvPr>
+          <p:cNvSpPr/>
+          <p:nvPr/>
+        </p:nvSpPr>
+        <p:spPr>
+          <a:xfrm>
+            <a:off x="110125" y="1163151"/>
+            <a:ext cx="111760" cy="767894"/>
+          </a:xfrm>
+          <a:prstGeom prst="rect">
+            <a:avLst/>
+          </a:prstGeom>
+          <a:solidFill>
+            <a:schemeClr val="tx1"/>
+          </a:solidFill>
+          <a:ln>
+            <a:noFill/>
+          </a:ln>
+          <a:effectLst>
+            <a:outerShdw blurRad="50800" dist="38100" dir="2700000" algn="tl" rotWithShape="0">
+              <a:prstClr val="black">
+                <a:alpha val="40000"/>
+              </a:prstClr>
+            </a:outerShdw>
+          </a:effectLst>
+        </p:spPr>
+        <p:style>
+          <a:lnRef idx="2">
+            <a:schemeClr val="accent1">
+              <a:shade val="15000"/>
+            </a:schemeClr>
+          </a:lnRef>
+          <a:fillRef idx="1">
+            <a:schemeClr val="accent1"/>
+          </a:fillRef>
+          <a:effectRef idx="0">
+            <a:schemeClr val="accent1"/>
+          </a:effectRef>
+          <a:fontRef idx="minor">
+            <a:schemeClr val="lt1"/>
+          </a:fontRef>
+        </p:style>
+        <p:txBody>
+          <a:bodyPr rtlCol="0" anchor="ctr"/>
+          <a:lstStyle/>
+          <a:p>
+            <a:pPr marL="0" marR="0" lvl="0" indent="0" algn="ctr" defTabSz="914400" rtl="0" eaLnBrk="1" fontAlgn="auto" latinLnBrk="0" hangingPunct="1">
+              <a:lnSpc>
+                <a:spcPct val="100000"/>
+              </a:lnSpc>
+              <a:spcBef>
+                <a:spcPts val="0"/>
+              </a:spcBef>
+              <a:spcAft>
+                <a:spcPts val="0"/>
+              </a:spcAft>
+              <a:buClrTx/>
+              <a:buSzTx/>
+              <a:buFontTx/>
+              <a:buNone/>
+              <a:tabLst/>
+              <a:defRPr/>
+            </a:pPr>
+            <a:endParaRPr kumimoji="0" lang="en-US" sz="1800" b="0" i="0" u="none" strike="noStrike" kern="1200" cap="none" spc="0" normalizeH="0" baseline="0" noProof="0">
+              <a:ln>
+                <a:noFill/>
+              </a:ln>
+              <a:solidFill>
+                <a:prstClr val="white"/>
+              </a:solidFill>
+              <a:effectLst/>
+              <a:uLnTx/>
+              <a:uFillTx/>
+              <a:latin typeface="Aptos" panose="02110004020202020204"/>
+              <a:ea typeface="+mn-ea"/>
+              <a:cs typeface="+mn-cs"/>
+            </a:endParaRPr>
+          </a:p>
+        </p:txBody>
+      </p:sp>
+      <p:sp>
+        <p:nvSpPr>
+          <p:cNvPr id="5" name="Rectangle 4">
+            <a:extLst>
+              <a:ext uri="{FF2B5EF4-FFF2-40B4-BE49-F238E27FC236}">
+                <a16:creationId xmlns:a16="http://schemas.microsoft.com/office/drawing/2014/main" id="{1A63822E-C8FA-C393-D8FE-06EDABBBD95C}"/>
+              </a:ext>
+            </a:extLst>
+          </p:cNvPr>
+          <p:cNvSpPr/>
+          <p:nvPr/>
+        </p:nvSpPr>
+        <p:spPr>
+          <a:xfrm>
+            <a:off x="186324" y="1163151"/>
+            <a:ext cx="11895551" cy="767894"/>
+          </a:xfrm>
+          <a:prstGeom prst="rect">
+            <a:avLst/>
+          </a:prstGeom>
+          <a:solidFill>
+            <a:schemeClr val="tx1"/>
+          </a:solidFill>
+          <a:ln>
+            <a:noFill/>
+          </a:ln>
+          <a:effectLst>
+            <a:outerShdw blurRad="50800" dist="38100" dir="2700000" algn="tl" rotWithShape="0">
+              <a:prstClr val="black">
+                <a:alpha val="40000"/>
+              </a:prstClr>
+            </a:outerShdw>
+          </a:effectLst>
+        </p:spPr>
+        <p:style>
+          <a:lnRef idx="2">
+            <a:schemeClr val="accent1">
+              <a:shade val="15000"/>
+            </a:schemeClr>
+          </a:lnRef>
+          <a:fillRef idx="1">
+            <a:schemeClr val="accent1"/>
+          </a:fillRef>
+          <a:effectRef idx="0">
+            <a:schemeClr val="accent1"/>
+          </a:effectRef>
+          <a:fontRef idx="minor">
+            <a:schemeClr val="lt1"/>
+          </a:fontRef>
+        </p:style>
+        <p:txBody>
+          <a:bodyPr rtlCol="0" anchor="ctr"/>
+          <a:lstStyle/>
+          <a:p>
+            <a:pPr marL="0" marR="0" lvl="0" indent="0" algn="l" defTabSz="914400" rtl="0" eaLnBrk="1" fontAlgn="auto" latinLnBrk="0" hangingPunct="1">
+              <a:lnSpc>
+                <a:spcPct val="100000"/>
+              </a:lnSpc>
+              <a:spcBef>
+                <a:spcPts val="0"/>
+              </a:spcBef>
+              <a:spcAft>
+                <a:spcPts val="0"/>
+              </a:spcAft>
+              <a:buClrTx/>
+              <a:buSzTx/>
+              <a:buFontTx/>
+              <a:buNone/>
+              <a:tabLst/>
+              <a:defRPr/>
+            </a:pPr>
+            <a:r>
+              <a:rPr kumimoji="0" lang="en-US" sz="1800" b="1" i="0" u="none" strike="noStrike" kern="1200" cap="none" spc="0" normalizeH="0" baseline="0" noProof="0" dirty="0">
+                <a:ln>
+                  <a:noFill/>
+                </a:ln>
+                <a:solidFill>
+                  <a:prstClr val="white"/>
+                </a:solidFill>
+                <a:effectLst/>
+                <a:uLnTx/>
+                <a:uFillTx/>
+                <a:latin typeface="Arial" panose="020B0604020202020204" pitchFamily="34" charset="0"/>
+                <a:ea typeface="+mn-ea"/>
+                <a:cs typeface="Arial" panose="020B0604020202020204" pitchFamily="34" charset="0"/>
+              </a:rPr>
+              <a:t>To transmit a data structure across a network or to store it in a file, it must be encoded and then decoded again; many encodings exist: JSON, XML, gob, Google’s protocol buffers, and others</a:t>
+            </a:r>
+          </a:p>
+        </p:txBody>
+      </p:sp>
+      <p:sp>
+        <p:nvSpPr>
+          <p:cNvPr id="16" name="Rectangle 15">
+            <a:extLst>
+              <a:ext uri="{FF2B5EF4-FFF2-40B4-BE49-F238E27FC236}">
+                <a16:creationId xmlns:a16="http://schemas.microsoft.com/office/drawing/2014/main" id="{293BB5AE-8AB2-ACFF-D849-978FE3E400EB}"/>
+              </a:ext>
+            </a:extLst>
+          </p:cNvPr>
+          <p:cNvSpPr/>
+          <p:nvPr/>
+        </p:nvSpPr>
+        <p:spPr>
+          <a:xfrm>
+            <a:off x="110125" y="3938801"/>
+            <a:ext cx="111760" cy="944697"/>
+          </a:xfrm>
+          <a:prstGeom prst="rect">
+            <a:avLst/>
+          </a:prstGeom>
+          <a:solidFill>
+            <a:schemeClr val="tx1"/>
+          </a:solidFill>
+          <a:ln>
+            <a:noFill/>
+          </a:ln>
+          <a:effectLst>
+            <a:outerShdw blurRad="50800" dist="38100" dir="2700000" algn="tl" rotWithShape="0">
+              <a:prstClr val="black">
+                <a:alpha val="40000"/>
+              </a:prstClr>
+            </a:outerShdw>
+          </a:effectLst>
+        </p:spPr>
+        <p:style>
+          <a:lnRef idx="2">
+            <a:schemeClr val="accent1">
+              <a:shade val="15000"/>
+            </a:schemeClr>
+          </a:lnRef>
+          <a:fillRef idx="1">
+            <a:schemeClr val="accent1"/>
+          </a:fillRef>
+          <a:effectRef idx="0">
+            <a:schemeClr val="accent1"/>
+          </a:effectRef>
+          <a:fontRef idx="minor">
+            <a:schemeClr val="lt1"/>
+          </a:fontRef>
+        </p:style>
+        <p:txBody>
+          <a:bodyPr rtlCol="0" anchor="ctr"/>
+          <a:lstStyle/>
+          <a:p>
+            <a:pPr marL="0" marR="0" lvl="0" indent="0" algn="ctr" defTabSz="914400" rtl="0" eaLnBrk="1" fontAlgn="auto" latinLnBrk="0" hangingPunct="1">
+              <a:lnSpc>
+                <a:spcPct val="100000"/>
+              </a:lnSpc>
+              <a:spcBef>
+                <a:spcPts val="0"/>
+              </a:spcBef>
+              <a:spcAft>
+                <a:spcPts val="0"/>
+              </a:spcAft>
+              <a:buClrTx/>
+              <a:buSzTx/>
+              <a:buFontTx/>
+              <a:buNone/>
+              <a:tabLst/>
+              <a:defRPr/>
+            </a:pPr>
+            <a:endParaRPr kumimoji="0" lang="en-US" sz="1800" b="0" i="0" u="none" strike="noStrike" kern="1200" cap="none" spc="0" normalizeH="0" baseline="0" noProof="0">
+              <a:ln>
+                <a:noFill/>
+              </a:ln>
+              <a:solidFill>
+                <a:prstClr val="white"/>
+              </a:solidFill>
+              <a:effectLst/>
+              <a:uLnTx/>
+              <a:uFillTx/>
+              <a:latin typeface="Aptos" panose="02110004020202020204"/>
+              <a:ea typeface="+mn-ea"/>
+              <a:cs typeface="+mn-cs"/>
+            </a:endParaRPr>
+          </a:p>
+        </p:txBody>
+      </p:sp>
+      <p:sp>
+        <p:nvSpPr>
+          <p:cNvPr id="17" name="Rectangle 16">
+            <a:extLst>
+              <a:ext uri="{FF2B5EF4-FFF2-40B4-BE49-F238E27FC236}">
+                <a16:creationId xmlns:a16="http://schemas.microsoft.com/office/drawing/2014/main" id="{47580AF1-A471-1E3A-472A-178F3BFFC0A3}"/>
+              </a:ext>
+            </a:extLst>
+          </p:cNvPr>
+          <p:cNvSpPr/>
+          <p:nvPr/>
+        </p:nvSpPr>
+        <p:spPr>
+          <a:xfrm>
+            <a:off x="186324" y="3938801"/>
+            <a:ext cx="11895551" cy="944697"/>
+          </a:xfrm>
+          <a:prstGeom prst="rect">
+            <a:avLst/>
+          </a:prstGeom>
+          <a:solidFill>
+            <a:schemeClr val="tx1"/>
+          </a:solidFill>
+          <a:ln>
+            <a:noFill/>
+          </a:ln>
+          <a:effectLst>
+            <a:outerShdw blurRad="50800" dist="38100" dir="2700000" algn="tl" rotWithShape="0">
+              <a:prstClr val="black">
+                <a:alpha val="40000"/>
+              </a:prstClr>
+            </a:outerShdw>
+          </a:effectLst>
+        </p:spPr>
+        <p:style>
+          <a:lnRef idx="2">
+            <a:schemeClr val="accent1">
+              <a:shade val="15000"/>
+            </a:schemeClr>
+          </a:lnRef>
+          <a:fillRef idx="1">
+            <a:schemeClr val="accent1"/>
+          </a:fillRef>
+          <a:effectRef idx="0">
+            <a:schemeClr val="accent1"/>
+          </a:effectRef>
+          <a:fontRef idx="minor">
+            <a:schemeClr val="lt1"/>
+          </a:fontRef>
+        </p:style>
+        <p:txBody>
+          <a:bodyPr rtlCol="0" anchor="ctr"/>
+          <a:lstStyle/>
+          <a:p>
+            <a:pPr marL="0" marR="0" lvl="0" indent="0" algn="l" defTabSz="914400" rtl="0" eaLnBrk="1" fontAlgn="auto" latinLnBrk="0" hangingPunct="1">
+              <a:lnSpc>
+                <a:spcPct val="100000"/>
+              </a:lnSpc>
+              <a:spcBef>
+                <a:spcPts val="0"/>
+              </a:spcBef>
+              <a:spcAft>
+                <a:spcPts val="0"/>
+              </a:spcAft>
+              <a:buClrTx/>
+              <a:buSzTx/>
+              <a:buFontTx/>
+              <a:buNone/>
+              <a:tabLst/>
+              <a:defRPr/>
+            </a:pPr>
+            <a:r>
+              <a:rPr kumimoji="0" lang="en-US" sz="1800" b="1" i="0" u="none" strike="noStrike" kern="1200" cap="none" spc="0" normalizeH="0" baseline="0" noProof="0" dirty="0">
+                <a:ln>
+                  <a:noFill/>
+                </a:ln>
+                <a:solidFill>
+                  <a:prstClr val="white"/>
+                </a:solidFill>
+                <a:effectLst/>
+                <a:uLnTx/>
+                <a:uFillTx/>
+                <a:latin typeface="Arial" panose="020B0604020202020204" pitchFamily="34" charset="0"/>
+                <a:ea typeface="+mn-ea"/>
+                <a:cs typeface="Arial" panose="020B0604020202020204" pitchFamily="34" charset="0"/>
+              </a:rPr>
+              <a:t>Data in these formats can be transmitted over a network: in this way, the data are platform independent and can be used as input/output in all kinds of applications, no matter what the programming language or the operating system is.</a:t>
+            </a:r>
+          </a:p>
+        </p:txBody>
+      </p:sp>
+      <p:pic>
+        <p:nvPicPr>
+          <p:cNvPr id="19" name="Picture 18">
+            <a:extLst>
+              <a:ext uri="{FF2B5EF4-FFF2-40B4-BE49-F238E27FC236}">
+                <a16:creationId xmlns:a16="http://schemas.microsoft.com/office/drawing/2014/main" id="{34268D82-4986-37F2-0D15-625CFE3615B7}"/>
+              </a:ext>
+            </a:extLst>
+          </p:cNvPr>
+          <p:cNvPicPr>
+            <a:picLocks noChangeAspect="1"/>
+          </p:cNvPicPr>
+          <p:nvPr/>
+        </p:nvPicPr>
+        <p:blipFill>
+          <a:blip r:embed="rId4"/>
+          <a:stretch>
+            <a:fillRect/>
+          </a:stretch>
+        </p:blipFill>
+        <p:spPr>
+          <a:xfrm>
+            <a:off x="110125" y="4961220"/>
+            <a:ext cx="7074446" cy="1817180"/>
+          </a:xfrm>
+          <a:prstGeom prst="rect">
+            <a:avLst/>
+          </a:prstGeom>
+        </p:spPr>
+      </p:pic>
+      <p:sp>
+        <p:nvSpPr>
+          <p:cNvPr id="20" name="Rectangle 19">
+            <a:extLst>
+              <a:ext uri="{FF2B5EF4-FFF2-40B4-BE49-F238E27FC236}">
+                <a16:creationId xmlns:a16="http://schemas.microsoft.com/office/drawing/2014/main" id="{9ECEA7AB-506E-5A5F-1D14-0C7D8D79239E}"/>
+              </a:ext>
+            </a:extLst>
+          </p:cNvPr>
+          <p:cNvSpPr/>
+          <p:nvPr/>
+        </p:nvSpPr>
+        <p:spPr>
+          <a:xfrm>
+            <a:off x="7546313" y="5367844"/>
+            <a:ext cx="4491613" cy="1228565"/>
+          </a:xfrm>
+          <a:prstGeom prst="rect">
+            <a:avLst/>
+          </a:prstGeom>
+          <a:ln>
+            <a:noFill/>
+          </a:ln>
+        </p:spPr>
+        <p:style>
+          <a:lnRef idx="2">
+            <a:schemeClr val="accent1">
+              <a:shade val="15000"/>
+            </a:schemeClr>
+          </a:lnRef>
+          <a:fillRef idx="1">
+            <a:schemeClr val="accent1"/>
+          </a:fillRef>
+          <a:effectRef idx="0">
+            <a:schemeClr val="accent1"/>
+          </a:effectRef>
+          <a:fontRef idx="minor">
+            <a:schemeClr val="lt1"/>
+          </a:fontRef>
+        </p:style>
+        <p:txBody>
+          <a:bodyPr rtlCol="0" anchor="ctr"/>
+          <a:lstStyle/>
+          <a:p>
+            <a:pPr marL="0" marR="0" lvl="0" indent="0" algn="l" defTabSz="914400" rtl="0" eaLnBrk="1" fontAlgn="auto" latinLnBrk="0" hangingPunct="1">
+              <a:lnSpc>
+                <a:spcPct val="100000"/>
+              </a:lnSpc>
+              <a:spcBef>
+                <a:spcPts val="0"/>
+              </a:spcBef>
+              <a:spcAft>
+                <a:spcPts val="0"/>
+              </a:spcAft>
+              <a:buClrTx/>
+              <a:buSzTx/>
+              <a:buFontTx/>
+              <a:buNone/>
+              <a:tabLst/>
+              <a:defRPr/>
+            </a:pPr>
+            <a:r>
+              <a:rPr kumimoji="0" lang="en-US" sz="1800" b="1" i="0" u="none" strike="noStrike" kern="1200" cap="none" spc="0" normalizeH="0" baseline="0" noProof="0" dirty="0">
+                <a:ln>
+                  <a:noFill/>
+                </a:ln>
+                <a:solidFill>
+                  <a:prstClr val="white"/>
+                </a:solidFill>
+                <a:effectLst/>
+                <a:uLnTx/>
+                <a:uFillTx/>
+                <a:latin typeface="Arial" panose="020B0604020202020204" pitchFamily="34" charset="0"/>
+                <a:ea typeface="+mn-ea"/>
+                <a:cs typeface="Arial" panose="020B0604020202020204" pitchFamily="34" charset="0"/>
+              </a:rPr>
+              <a:t>Marshaling is used to convert in-memory data to a special format (data -&gt; string), and vice versa for </a:t>
+            </a:r>
+            <a:r>
+              <a:rPr kumimoji="0" lang="en-US" sz="1800" b="1" i="0" u="none" strike="noStrike" kern="1200" cap="none" spc="0" normalizeH="0" baseline="0" noProof="0" dirty="0" err="1">
+                <a:ln>
+                  <a:noFill/>
+                </a:ln>
+                <a:solidFill>
+                  <a:prstClr val="white"/>
+                </a:solidFill>
+                <a:effectLst/>
+                <a:uLnTx/>
+                <a:uFillTx/>
+                <a:latin typeface="Arial" panose="020B0604020202020204" pitchFamily="34" charset="0"/>
+                <a:ea typeface="+mn-ea"/>
+                <a:cs typeface="Arial" panose="020B0604020202020204" pitchFamily="34" charset="0"/>
+              </a:rPr>
+              <a:t>unmarshaling</a:t>
+            </a:r>
+            <a:r>
+              <a:rPr kumimoji="0" lang="en-US" sz="1800" b="1" i="0" u="none" strike="noStrike" kern="1200" cap="none" spc="0" normalizeH="0" baseline="0" noProof="0" dirty="0">
+                <a:ln>
+                  <a:noFill/>
+                </a:ln>
+                <a:solidFill>
+                  <a:prstClr val="white"/>
+                </a:solidFill>
+                <a:effectLst/>
+                <a:uLnTx/>
+                <a:uFillTx/>
+                <a:latin typeface="Arial" panose="020B0604020202020204" pitchFamily="34" charset="0"/>
+                <a:ea typeface="+mn-ea"/>
+                <a:cs typeface="Arial" panose="020B0604020202020204" pitchFamily="34" charset="0"/>
+              </a:rPr>
+              <a:t> (string -&gt; data structure).</a:t>
+            </a:r>
+          </a:p>
+        </p:txBody>
+      </p:sp>
+      <p:sp>
+        <p:nvSpPr>
+          <p:cNvPr id="22" name="TextBox 21">
+            <a:extLst>
+              <a:ext uri="{FF2B5EF4-FFF2-40B4-BE49-F238E27FC236}">
+                <a16:creationId xmlns:a16="http://schemas.microsoft.com/office/drawing/2014/main" id="{3F2E3587-3B59-685C-FEED-7B69AA33D735}"/>
+              </a:ext>
+            </a:extLst>
+          </p:cNvPr>
+          <p:cNvSpPr txBox="1"/>
+          <p:nvPr/>
+        </p:nvSpPr>
+        <p:spPr>
+          <a:xfrm>
+            <a:off x="934498" y="5455236"/>
+            <a:ext cx="6611815" cy="338554"/>
+          </a:xfrm>
+          <a:prstGeom prst="rect">
+            <a:avLst/>
+          </a:prstGeom>
+          <a:noFill/>
+        </p:spPr>
+        <p:txBody>
+          <a:bodyPr wrap="square" rtlCol="0">
+            <a:spAutoFit/>
+          </a:bodyPr>
+          <a:lstStyle/>
+          <a:p>
+            <a:pPr marL="0" marR="0" lvl="0" indent="0" algn="l" defTabSz="914400" rtl="0" eaLnBrk="1" fontAlgn="auto" latinLnBrk="0" hangingPunct="1">
+              <a:lnSpc>
+                <a:spcPct val="100000"/>
+              </a:lnSpc>
+              <a:spcBef>
+                <a:spcPts val="0"/>
+              </a:spcBef>
+              <a:spcAft>
+                <a:spcPts val="0"/>
+              </a:spcAft>
+              <a:buClrTx/>
+              <a:buSzTx/>
+              <a:buFontTx/>
+              <a:buNone/>
+              <a:tabLst/>
+              <a:defRPr/>
+            </a:pPr>
+            <a:r>
+              <a:rPr kumimoji="0" lang="en-US" sz="1600" b="1" i="0" u="none" strike="noStrike" kern="1200" cap="none" spc="0" normalizeH="0" baseline="0" noProof="0" dirty="0">
+                <a:ln>
+                  <a:noFill/>
+                </a:ln>
+                <a:solidFill>
+                  <a:srgbClr val="FF0000"/>
+                </a:solidFill>
+                <a:effectLst/>
+                <a:uLnTx/>
+                <a:uFillTx/>
+                <a:latin typeface="Arial" panose="020B0604020202020204" pitchFamily="34" charset="0"/>
+                <a:ea typeface="+mn-ea"/>
+                <a:cs typeface="Arial" panose="020B0604020202020204" pitchFamily="34" charset="0"/>
+              </a:rPr>
+              <a:t>Encoding does the same thing, but the output is a stream of data</a:t>
+            </a:r>
+          </a:p>
+        </p:txBody>
+      </p:sp>
+      <p:sp>
+        <p:nvSpPr>
+          <p:cNvPr id="23" name="TextBox 22">
+            <a:extLst>
+              <a:ext uri="{FF2B5EF4-FFF2-40B4-BE49-F238E27FC236}">
+                <a16:creationId xmlns:a16="http://schemas.microsoft.com/office/drawing/2014/main" id="{1FD3F4A2-9DC3-0803-02A4-A33D5807A69B}"/>
+              </a:ext>
+            </a:extLst>
+          </p:cNvPr>
+          <p:cNvSpPr txBox="1"/>
+          <p:nvPr/>
+        </p:nvSpPr>
+        <p:spPr>
+          <a:xfrm>
+            <a:off x="221885" y="6439846"/>
+            <a:ext cx="9715935" cy="338554"/>
+          </a:xfrm>
+          <a:prstGeom prst="rect">
+            <a:avLst/>
+          </a:prstGeom>
+          <a:noFill/>
+        </p:spPr>
+        <p:txBody>
+          <a:bodyPr wrap="square" rtlCol="0">
+            <a:spAutoFit/>
+          </a:bodyPr>
+          <a:lstStyle/>
+          <a:p>
+            <a:pPr marL="0" marR="0" lvl="0" indent="0" algn="l" defTabSz="914400" rtl="0" eaLnBrk="1" fontAlgn="auto" latinLnBrk="0" hangingPunct="1">
+              <a:lnSpc>
+                <a:spcPct val="100000"/>
+              </a:lnSpc>
+              <a:spcBef>
+                <a:spcPts val="0"/>
+              </a:spcBef>
+              <a:spcAft>
+                <a:spcPts val="0"/>
+              </a:spcAft>
+              <a:buClrTx/>
+              <a:buSzTx/>
+              <a:buFontTx/>
+              <a:buNone/>
+              <a:tabLst/>
+              <a:defRPr/>
+            </a:pPr>
+            <a:r>
+              <a:rPr kumimoji="0" lang="en-US" sz="1600" b="1" i="0" u="none" strike="noStrike" kern="1200" cap="none" spc="0" normalizeH="0" baseline="0" noProof="0" dirty="0">
+                <a:ln>
+                  <a:noFill/>
+                </a:ln>
+                <a:solidFill>
+                  <a:srgbClr val="FF0000"/>
+                </a:solidFill>
+                <a:effectLst/>
+                <a:uLnTx/>
+                <a:uFillTx/>
+                <a:latin typeface="Arial" panose="020B0604020202020204" pitchFamily="34" charset="0"/>
+                <a:ea typeface="+mn-ea"/>
+                <a:cs typeface="Arial" panose="020B0604020202020204" pitchFamily="34" charset="0"/>
+              </a:rPr>
+              <a:t>Decoding starts from a stream of data and populates a data structure.</a:t>
+            </a:r>
+          </a:p>
+        </p:txBody>
+      </p:sp>
+    </p:spTree>
+    <p:custDataLst>
+      <p:tags r:id="rId1"/>
+    </p:custDataLst>
+    <p:extLst>
+      <p:ext uri="{BB962C8B-B14F-4D97-AF65-F5344CB8AC3E}">
+        <p14:creationId xmlns:p14="http://schemas.microsoft.com/office/powerpoint/2010/main" val="3953751660"/>
+      </p:ext>
+    </p:extLst>
+  </p:cSld>
+  <p:clrMapOvr>
+    <a:masterClrMapping/>
+  </p:clrMapOvr>
+  <mc:AlternateContent xmlns:mc="http://schemas.openxmlformats.org/markup-compatibility/2006" xmlns:p14="http://schemas.microsoft.com/office/powerpoint/2010/main">
+    <mc:Choice Requires="p14">
+      <p:transition spd="slow" p14:dur="2000" advTm="207460"/>
+    </mc:Choice>
+    <mc:Fallback xmlns="">
+      <p:transition spd="slow" advTm="207460"/>
+    </mc:Fallback>
+  </mc:AlternateContent>
+</p:sld>
+</file>
+
+<file path=ppt/slides/slide9.xml><?xml version="1.0" encoding="utf-8"?>
+<p:sld xmlns:a="http://schemas.openxmlformats.org/drawingml/2006/main" xmlns:r="http://schemas.openxmlformats.org/officeDocument/2006/relationships" xmlns:p="http://schemas.openxmlformats.org/presentationml/2006/main">
+  <p:cSld>
+    <p:bg>
+      <p:bgPr>
+        <a:gradFill>
+          <a:gsLst>
+            <a:gs pos="0">
+              <a:schemeClr val="bg1">
+                <a:lumMod val="95000"/>
+              </a:schemeClr>
+            </a:gs>
+            <a:gs pos="74000">
+              <a:schemeClr val="bg1">
+                <a:lumMod val="85000"/>
+              </a:schemeClr>
+            </a:gs>
+            <a:gs pos="83000">
+              <a:schemeClr val="bg1">
+                <a:lumMod val="75000"/>
+              </a:schemeClr>
+            </a:gs>
+            <a:gs pos="100000">
+              <a:schemeClr val="bg1">
+                <a:lumMod val="50000"/>
+              </a:schemeClr>
+            </a:gs>
+          </a:gsLst>
+          <a:lin ang="5400000" scaled="1"/>
+        </a:gradFill>
+        <a:effectLst/>
+      </p:bgPr>
+    </p:bg>
+    <p:spTree>
+      <p:nvGrpSpPr>
+        <p:cNvPr id="1" name="">
+          <a:extLst>
+            <a:ext uri="{FF2B5EF4-FFF2-40B4-BE49-F238E27FC236}">
+              <a16:creationId xmlns:a16="http://schemas.microsoft.com/office/drawing/2014/main" id="{A235E810-8E4B-A87B-B406-69F16FC8D738}"/>
+            </a:ext>
+          </a:extLst>
+        </p:cNvPr>
+        <p:cNvGrpSpPr/>
+        <p:nvPr/>
+      </p:nvGrpSpPr>
+      <p:grpSpPr>
+        <a:xfrm>
+          <a:off x="0" y="0"/>
+          <a:ext cx="0" cy="0"/>
+          <a:chOff x="0" y="0"/>
+          <a:chExt cx="0" cy="0"/>
+        </a:xfrm>
+      </p:grpSpPr>
+      <p:sp>
+        <p:nvSpPr>
+          <p:cNvPr id="2" name="Title 1">
+            <a:extLst>
+              <a:ext uri="{FF2B5EF4-FFF2-40B4-BE49-F238E27FC236}">
+                <a16:creationId xmlns:a16="http://schemas.microsoft.com/office/drawing/2014/main" id="{B79A1050-AF59-D804-CAC3-CD911829CD96}"/>
+              </a:ext>
+            </a:extLst>
+          </p:cNvPr>
+          <p:cNvSpPr>
+            <a:spLocks noGrp="1"/>
+          </p:cNvSpPr>
+          <p:nvPr>
+            <p:ph type="title"/>
+          </p:nvPr>
+        </p:nvSpPr>
+        <p:spPr>
+          <a:xfrm>
+            <a:off x="97834" y="0"/>
+            <a:ext cx="11996331" cy="1325563"/>
+          </a:xfrm>
+        </p:spPr>
+        <p:txBody>
+          <a:bodyPr>
+            <a:normAutofit/>
+          </a:bodyPr>
+          <a:lstStyle/>
+          <a:p>
+            <a:r>
+              <a:rPr lang="en-US" b="1" dirty="0">
+                <a:latin typeface="Times New Roman" panose="02020603050405020304" pitchFamily="18" charset="0"/>
+                <a:cs typeface="Times New Roman" panose="02020603050405020304" pitchFamily="18" charset="0"/>
+              </a:rPr>
+              <a:t>The Go Files (JSON):</a:t>
+            </a:r>
+            <a:endParaRPr lang="en-US" sz="4200" b="1" dirty="0">
+              <a:latin typeface="Times New Roman" panose="02020603050405020304" pitchFamily="18" charset="0"/>
+              <a:cs typeface="Times New Roman" panose="02020603050405020304" pitchFamily="18" charset="0"/>
+            </a:endParaRPr>
+          </a:p>
+        </p:txBody>
+      </p:sp>
+      <mc:AlternateContent xmlns:mc="http://schemas.openxmlformats.org/markup-compatibility/2006" xmlns:p14="http://schemas.microsoft.com/office/powerpoint/2010/main">
+        <mc:Choice Requires="p14">
+          <p:contentPart p14:bwMode="auto" r:id="rId4">
+            <p14:nvContentPartPr>
+              <p14:cNvPr id="11" name="Ink 10">
+                <a:extLst>
+                  <a:ext uri="{FF2B5EF4-FFF2-40B4-BE49-F238E27FC236}">
+                    <a16:creationId xmlns:a16="http://schemas.microsoft.com/office/drawing/2014/main" id="{22DE50D0-52C5-CC02-535C-B3DB6CB78A4E}"/>
+                  </a:ext>
+                </a:extLst>
+              </p14:cNvPr>
+              <p14:cNvContentPartPr/>
+              <p14:nvPr/>
+            </p14:nvContentPartPr>
+            <p14:xfrm>
+              <a:off x="9475485" y="5978571"/>
+              <a:ext cx="360" cy="2160"/>
+            </p14:xfrm>
+          </p:contentPart>
+        </mc:Choice>
+        <mc:Fallback xmlns="">
+          <p:pic>
+            <p:nvPicPr>
+              <p:cNvPr id="11" name="Ink 10">
+                <a:extLst>
+                  <a:ext uri="{FF2B5EF4-FFF2-40B4-BE49-F238E27FC236}">
+                    <a16:creationId xmlns:a16="http://schemas.microsoft.com/office/drawing/2014/main" id="{22DE50D0-52C5-CC02-535C-B3DB6CB78A4E}"/>
+                  </a:ext>
+                </a:extLst>
+              </p:cNvPr>
+              <p:cNvPicPr/>
+              <p:nvPr/>
+            </p:nvPicPr>
+            <p:blipFill>
+              <a:blip r:embed="rId5"/>
+              <a:stretch>
+                <a:fillRect/>
+              </a:stretch>
+            </p:blipFill>
+            <p:spPr>
+              <a:xfrm>
+                <a:off x="9466485" y="5969571"/>
+                <a:ext cx="18000" cy="19800"/>
+              </a:xfrm>
+              <a:prstGeom prst="rect">
+                <a:avLst/>
+              </a:prstGeom>
+            </p:spPr>
+          </p:pic>
+        </mc:Fallback>
+      </mc:AlternateContent>
+      <p:cxnSp>
+        <p:nvCxnSpPr>
+          <p:cNvPr id="5" name="Straight Connector 4">
+            <a:extLst>
+              <a:ext uri="{FF2B5EF4-FFF2-40B4-BE49-F238E27FC236}">
+                <a16:creationId xmlns:a16="http://schemas.microsoft.com/office/drawing/2014/main" id="{436CB14C-85BF-D854-E0CD-20262A315197}"/>
+              </a:ext>
+            </a:extLst>
+          </p:cNvPr>
+          <p:cNvCxnSpPr>
+            <a:stCxn id="2" idx="2"/>
+          </p:cNvCxnSpPr>
+          <p:nvPr/>
+        </p:nvCxnSpPr>
+        <p:spPr>
+          <a:xfrm>
+            <a:off x="6096000" y="1325563"/>
+            <a:ext cx="0" cy="5396784"/>
+          </a:xfrm>
+          <a:prstGeom prst="line">
+            <a:avLst/>
+          </a:prstGeom>
+          <a:ln w="57150"/>
+        </p:spPr>
+        <p:style>
+          <a:lnRef idx="2">
+            <a:schemeClr val="dk1"/>
+          </a:lnRef>
+          <a:fillRef idx="0">
+            <a:schemeClr val="dk1"/>
+          </a:fillRef>
+          <a:effectRef idx="1">
+            <a:schemeClr val="dk1"/>
+          </a:effectRef>
+          <a:fontRef idx="minor">
+            <a:schemeClr val="tx1"/>
+          </a:fontRef>
+        </p:style>
+      </p:cxnSp>
+      <p:sp>
+        <p:nvSpPr>
+          <p:cNvPr id="6" name="Rectangle 5">
+            <a:extLst>
+              <a:ext uri="{FF2B5EF4-FFF2-40B4-BE49-F238E27FC236}">
+                <a16:creationId xmlns:a16="http://schemas.microsoft.com/office/drawing/2014/main" id="{5807B7A5-8327-2762-4A3D-365FF890A579}"/>
+              </a:ext>
+            </a:extLst>
+          </p:cNvPr>
+          <p:cNvSpPr/>
+          <p:nvPr/>
+        </p:nvSpPr>
+        <p:spPr>
+          <a:xfrm>
+            <a:off x="1868994" y="1325563"/>
+            <a:ext cx="2100105" cy="597368"/>
+          </a:xfrm>
+          <a:prstGeom prst="rect">
+            <a:avLst/>
+          </a:prstGeom>
+          <a:ln>
+            <a:noFill/>
+          </a:ln>
+        </p:spPr>
+        <p:style>
+          <a:lnRef idx="2">
+            <a:schemeClr val="accent1">
+              <a:shade val="15000"/>
+            </a:schemeClr>
+          </a:lnRef>
+          <a:fillRef idx="1">
+            <a:schemeClr val="accent1"/>
+          </a:fillRef>
+          <a:effectRef idx="0">
+            <a:schemeClr val="accent1"/>
+          </a:effectRef>
+          <a:fontRef idx="minor">
+            <a:schemeClr val="lt1"/>
+          </a:fontRef>
+        </p:style>
+        <p:txBody>
+          <a:bodyPr rtlCol="0" anchor="ctr"/>
+          <a:lstStyle/>
+          <a:p>
+            <a:pPr algn="ctr"/>
+            <a:r>
+              <a:rPr lang="en-US" sz="2000" b="1" dirty="0">
+                <a:solidFill>
+                  <a:schemeClr val="bg1"/>
+                </a:solidFill>
+                <a:latin typeface="Arial" panose="020B0604020202020204" pitchFamily="34" charset="0"/>
+                <a:cs typeface="Arial" panose="020B0604020202020204" pitchFamily="34" charset="0"/>
+              </a:rPr>
+              <a:t>Parsing JSON</a:t>
+            </a:r>
+          </a:p>
+        </p:txBody>
+      </p:sp>
+      <p:sp>
+        <p:nvSpPr>
+          <p:cNvPr id="7" name="Rectangle 6">
+            <a:extLst>
+              <a:ext uri="{FF2B5EF4-FFF2-40B4-BE49-F238E27FC236}">
+                <a16:creationId xmlns:a16="http://schemas.microsoft.com/office/drawing/2014/main" id="{CCDD50E1-BA56-3F18-98E4-A4267C180D8B}"/>
+              </a:ext>
+            </a:extLst>
+          </p:cNvPr>
+          <p:cNvSpPr/>
+          <p:nvPr/>
+        </p:nvSpPr>
+        <p:spPr>
+          <a:xfrm>
+            <a:off x="8045030" y="1325563"/>
+            <a:ext cx="2100105" cy="597368"/>
+          </a:xfrm>
+          <a:prstGeom prst="rect">
+            <a:avLst/>
+          </a:prstGeom>
+          <a:ln>
+            <a:noFill/>
+          </a:ln>
+        </p:spPr>
+        <p:style>
+          <a:lnRef idx="2">
+            <a:schemeClr val="accent1">
+              <a:shade val="15000"/>
+            </a:schemeClr>
+          </a:lnRef>
+          <a:fillRef idx="1">
+            <a:schemeClr val="accent1"/>
+          </a:fillRef>
+          <a:effectRef idx="0">
+            <a:schemeClr val="accent1"/>
+          </a:effectRef>
+          <a:fontRef idx="minor">
+            <a:schemeClr val="lt1"/>
+          </a:fontRef>
+        </p:style>
+        <p:txBody>
+          <a:bodyPr rtlCol="0" anchor="ctr"/>
+          <a:lstStyle/>
+          <a:p>
+            <a:pPr algn="ctr"/>
+            <a:r>
+              <a:rPr lang="en-US" sz="2000" b="1" dirty="0">
+                <a:solidFill>
+                  <a:schemeClr val="bg1"/>
+                </a:solidFill>
+                <a:latin typeface="Arial" panose="020B0604020202020204" pitchFamily="34" charset="0"/>
+                <a:cs typeface="Arial" panose="020B0604020202020204" pitchFamily="34" charset="0"/>
+              </a:rPr>
+              <a:t>Creating JSON</a:t>
+            </a:r>
+          </a:p>
+        </p:txBody>
+      </p:sp>
+      <p:sp>
+        <p:nvSpPr>
+          <p:cNvPr id="8" name="Cloud 7">
+            <a:extLst>
+              <a:ext uri="{FF2B5EF4-FFF2-40B4-BE49-F238E27FC236}">
+                <a16:creationId xmlns:a16="http://schemas.microsoft.com/office/drawing/2014/main" id="{6096C827-8757-0B92-0D67-C7BD9CDAA94A}"/>
+              </a:ext>
+            </a:extLst>
+          </p:cNvPr>
+          <p:cNvSpPr/>
+          <p:nvPr/>
+        </p:nvSpPr>
+        <p:spPr>
+          <a:xfrm>
+            <a:off x="97834" y="2411604"/>
+            <a:ext cx="2414252" cy="1017396"/>
+          </a:xfrm>
+          <a:prstGeom prst="cloud">
+            <a:avLst/>
+          </a:prstGeom>
+        </p:spPr>
+        <p:style>
+          <a:lnRef idx="2">
+            <a:schemeClr val="accent1">
+              <a:shade val="15000"/>
+            </a:schemeClr>
+          </a:lnRef>
+          <a:fillRef idx="1">
+            <a:schemeClr val="accent1"/>
+          </a:fillRef>
+          <a:effectRef idx="0">
+            <a:schemeClr val="accent1"/>
+          </a:effectRef>
+          <a:fontRef idx="minor">
+            <a:schemeClr val="lt1"/>
+          </a:fontRef>
+        </p:style>
+        <p:txBody>
+          <a:bodyPr rtlCol="0" anchor="ctr"/>
+          <a:lstStyle/>
+          <a:p>
+            <a:pPr algn="ctr"/>
+            <a:r>
+              <a:rPr lang="en-US" sz="1600" b="1" dirty="0">
+                <a:latin typeface="Arial" panose="020B0604020202020204" pitchFamily="34" charset="0"/>
+                <a:cs typeface="Arial" panose="020B0604020202020204" pitchFamily="34" charset="0"/>
+              </a:rPr>
+              <a:t>Create structs to store JSON data</a:t>
+            </a:r>
+          </a:p>
+        </p:txBody>
+      </p:sp>
+      <p:sp>
+        <p:nvSpPr>
+          <p:cNvPr id="9" name="Cloud 8">
+            <a:extLst>
+              <a:ext uri="{FF2B5EF4-FFF2-40B4-BE49-F238E27FC236}">
+                <a16:creationId xmlns:a16="http://schemas.microsoft.com/office/drawing/2014/main" id="{ACBAFA94-62FB-9CF0-A50D-FB7C98B10BA6}"/>
+              </a:ext>
+            </a:extLst>
+          </p:cNvPr>
+          <p:cNvSpPr/>
+          <p:nvPr/>
+        </p:nvSpPr>
+        <p:spPr>
+          <a:xfrm>
+            <a:off x="3621457" y="2411604"/>
+            <a:ext cx="2414252" cy="1017396"/>
+          </a:xfrm>
+          <a:prstGeom prst="cloud">
+            <a:avLst/>
+          </a:prstGeom>
+        </p:spPr>
+        <p:style>
+          <a:lnRef idx="2">
+            <a:schemeClr val="accent1">
+              <a:shade val="15000"/>
+            </a:schemeClr>
+          </a:lnRef>
+          <a:fillRef idx="1">
+            <a:schemeClr val="accent1"/>
+          </a:fillRef>
+          <a:effectRef idx="0">
+            <a:schemeClr val="accent1"/>
+          </a:effectRef>
+          <a:fontRef idx="minor">
+            <a:schemeClr val="lt1"/>
+          </a:fontRef>
+        </p:style>
+        <p:txBody>
+          <a:bodyPr rtlCol="0" anchor="ctr"/>
+          <a:lstStyle/>
+          <a:p>
+            <a:pPr algn="ctr"/>
+            <a:r>
+              <a:rPr lang="en-US" sz="1600" b="1" dirty="0" err="1">
+                <a:latin typeface="Arial" panose="020B0604020202020204" pitchFamily="34" charset="0"/>
+                <a:cs typeface="Arial" panose="020B0604020202020204" pitchFamily="34" charset="0"/>
+              </a:rPr>
+              <a:t>Unmarshal</a:t>
+            </a:r>
+            <a:r>
+              <a:rPr lang="en-US" sz="1600" b="1" dirty="0">
+                <a:latin typeface="Arial" panose="020B0604020202020204" pitchFamily="34" charset="0"/>
+                <a:cs typeface="Arial" panose="020B0604020202020204" pitchFamily="34" charset="0"/>
+              </a:rPr>
+              <a:t> JSON into structs</a:t>
+            </a:r>
+          </a:p>
+        </p:txBody>
+      </p:sp>
+      <p:cxnSp>
+        <p:nvCxnSpPr>
+          <p:cNvPr id="12" name="Straight Arrow Connector 11">
+            <a:extLst>
+              <a:ext uri="{FF2B5EF4-FFF2-40B4-BE49-F238E27FC236}">
+                <a16:creationId xmlns:a16="http://schemas.microsoft.com/office/drawing/2014/main" id="{E9322FB6-874B-25BF-3FD3-B7569529EDEF}"/>
+              </a:ext>
+            </a:extLst>
+          </p:cNvPr>
+          <p:cNvCxnSpPr>
+            <a:cxnSpLocks/>
+          </p:cNvCxnSpPr>
+          <p:nvPr/>
+        </p:nvCxnSpPr>
+        <p:spPr>
+          <a:xfrm>
+            <a:off x="2594513" y="2920302"/>
+            <a:ext cx="966656" cy="0"/>
+          </a:xfrm>
+          <a:prstGeom prst="straightConnector1">
+            <a:avLst/>
+          </a:prstGeom>
+          <a:ln w="38100">
+            <a:solidFill>
+              <a:srgbClr val="FF0000"/>
+            </a:solidFill>
+            <a:tailEnd type="triangle"/>
+          </a:ln>
+        </p:spPr>
+        <p:style>
+          <a:lnRef idx="2">
+            <a:schemeClr val="accent1"/>
+          </a:lnRef>
+          <a:fillRef idx="0">
+            <a:schemeClr val="accent1"/>
+          </a:fillRef>
+          <a:effectRef idx="1">
+            <a:schemeClr val="accent1"/>
+          </a:effectRef>
+          <a:fontRef idx="minor">
+            <a:schemeClr val="tx1"/>
+          </a:fontRef>
+        </p:style>
+      </p:cxnSp>
+      <p:sp>
+        <p:nvSpPr>
+          <p:cNvPr id="15" name="Cloud 14">
+            <a:extLst>
+              <a:ext uri="{FF2B5EF4-FFF2-40B4-BE49-F238E27FC236}">
+                <a16:creationId xmlns:a16="http://schemas.microsoft.com/office/drawing/2014/main" id="{23CE8FBF-8216-7F4D-47D7-37B6AC68EDCF}"/>
+              </a:ext>
+            </a:extLst>
+          </p:cNvPr>
+          <p:cNvSpPr/>
+          <p:nvPr/>
+        </p:nvSpPr>
+        <p:spPr>
+          <a:xfrm>
+            <a:off x="6156292" y="2424657"/>
+            <a:ext cx="2414252" cy="1017396"/>
+          </a:xfrm>
+          <a:prstGeom prst="cloud">
+            <a:avLst/>
+          </a:prstGeom>
+        </p:spPr>
+        <p:style>
+          <a:lnRef idx="2">
+            <a:schemeClr val="accent1">
+              <a:shade val="15000"/>
+            </a:schemeClr>
+          </a:lnRef>
+          <a:fillRef idx="1">
+            <a:schemeClr val="accent1"/>
+          </a:fillRef>
+          <a:effectRef idx="0">
+            <a:schemeClr val="accent1"/>
+          </a:effectRef>
+          <a:fontRef idx="minor">
+            <a:schemeClr val="lt1"/>
+          </a:fontRef>
+        </p:style>
+        <p:txBody>
+          <a:bodyPr rtlCol="0" anchor="ctr"/>
+          <a:lstStyle/>
+          <a:p>
+            <a:pPr algn="ctr"/>
+            <a:r>
+              <a:rPr lang="en-US" sz="1600" b="1" dirty="0">
+                <a:latin typeface="Arial" panose="020B0604020202020204" pitchFamily="34" charset="0"/>
+                <a:cs typeface="Arial" panose="020B0604020202020204" pitchFamily="34" charset="0"/>
+              </a:rPr>
+              <a:t>Create structs and populate with data</a:t>
+            </a:r>
+          </a:p>
+        </p:txBody>
+      </p:sp>
+      <p:sp>
+        <p:nvSpPr>
+          <p:cNvPr id="16" name="Cloud 15">
+            <a:extLst>
+              <a:ext uri="{FF2B5EF4-FFF2-40B4-BE49-F238E27FC236}">
+                <a16:creationId xmlns:a16="http://schemas.microsoft.com/office/drawing/2014/main" id="{6934C061-3A39-1D64-D16C-82C5C42E1E47}"/>
+              </a:ext>
+            </a:extLst>
+          </p:cNvPr>
+          <p:cNvSpPr/>
+          <p:nvPr/>
+        </p:nvSpPr>
+        <p:spPr>
+          <a:xfrm>
+            <a:off x="9679915" y="2424657"/>
+            <a:ext cx="2414252" cy="1017396"/>
+          </a:xfrm>
+          <a:prstGeom prst="cloud">
+            <a:avLst/>
+          </a:prstGeom>
+        </p:spPr>
+        <p:style>
+          <a:lnRef idx="2">
+            <a:schemeClr val="accent1">
+              <a:shade val="15000"/>
+            </a:schemeClr>
+          </a:lnRef>
+          <a:fillRef idx="1">
+            <a:schemeClr val="accent1"/>
+          </a:fillRef>
+          <a:effectRef idx="0">
+            <a:schemeClr val="accent1"/>
+          </a:effectRef>
+          <a:fontRef idx="minor">
+            <a:schemeClr val="lt1"/>
+          </a:fontRef>
+        </p:style>
+        <p:txBody>
+          <a:bodyPr rtlCol="0" anchor="ctr"/>
+          <a:lstStyle/>
+          <a:p>
+            <a:pPr algn="ctr"/>
+            <a:r>
+              <a:rPr lang="en-US" sz="1600" b="1" dirty="0">
+                <a:latin typeface="Arial" panose="020B0604020202020204" pitchFamily="34" charset="0"/>
+                <a:cs typeface="Arial" panose="020B0604020202020204" pitchFamily="34" charset="0"/>
+              </a:rPr>
+              <a:t>Marshal structs into JSON data</a:t>
+            </a:r>
+          </a:p>
+        </p:txBody>
+      </p:sp>
+      <p:cxnSp>
+        <p:nvCxnSpPr>
+          <p:cNvPr id="17" name="Straight Arrow Connector 16">
+            <a:extLst>
+              <a:ext uri="{FF2B5EF4-FFF2-40B4-BE49-F238E27FC236}">
+                <a16:creationId xmlns:a16="http://schemas.microsoft.com/office/drawing/2014/main" id="{6ED39D99-FC03-E4E4-CEDD-8B13025705E1}"/>
+              </a:ext>
+            </a:extLst>
+          </p:cNvPr>
+          <p:cNvCxnSpPr>
+            <a:cxnSpLocks/>
+          </p:cNvCxnSpPr>
+          <p:nvPr/>
+        </p:nvCxnSpPr>
+        <p:spPr>
+          <a:xfrm>
+            <a:off x="8652971" y="2933355"/>
+            <a:ext cx="966656" cy="0"/>
+          </a:xfrm>
+          <a:prstGeom prst="straightConnector1">
+            <a:avLst/>
+          </a:prstGeom>
+          <a:ln w="38100">
+            <a:solidFill>
+              <a:srgbClr val="FF0000"/>
+            </a:solidFill>
+            <a:tailEnd type="triangle"/>
+          </a:ln>
+        </p:spPr>
+        <p:style>
+          <a:lnRef idx="2">
+            <a:schemeClr val="accent1"/>
+          </a:lnRef>
+          <a:fillRef idx="0">
+            <a:schemeClr val="accent1"/>
+          </a:fillRef>
+          <a:effectRef idx="1">
+            <a:schemeClr val="accent1"/>
+          </a:effectRef>
+          <a:fontRef idx="minor">
+            <a:schemeClr val="tx1"/>
+          </a:fontRef>
+        </p:style>
+      </p:cxnSp>
+      <p:pic>
+        <p:nvPicPr>
+          <p:cNvPr id="19" name="Picture 18">
+            <a:extLst>
+              <a:ext uri="{FF2B5EF4-FFF2-40B4-BE49-F238E27FC236}">
+                <a16:creationId xmlns:a16="http://schemas.microsoft.com/office/drawing/2014/main" id="{F377F686-DE26-1BD7-98FF-84DD0A9E2B60}"/>
+              </a:ext>
+            </a:extLst>
+          </p:cNvPr>
+          <p:cNvPicPr>
+            <a:picLocks noChangeAspect="1"/>
+          </p:cNvPicPr>
+          <p:nvPr/>
+        </p:nvPicPr>
+        <p:blipFill>
+          <a:blip r:embed="rId6"/>
+          <a:stretch>
+            <a:fillRect/>
+          </a:stretch>
+        </p:blipFill>
+        <p:spPr>
+          <a:xfrm>
+            <a:off x="144543" y="3718720"/>
+            <a:ext cx="5891166" cy="3003626"/>
+          </a:xfrm>
+          <a:prstGeom prst="rect">
+            <a:avLst/>
+          </a:prstGeom>
+        </p:spPr>
+      </p:pic>
+      <p:grpSp>
+        <p:nvGrpSpPr>
+          <p:cNvPr id="24" name="Group 23">
+            <a:extLst>
+              <a:ext uri="{FF2B5EF4-FFF2-40B4-BE49-F238E27FC236}">
+                <a16:creationId xmlns:a16="http://schemas.microsoft.com/office/drawing/2014/main" id="{6E318A78-5EC6-AB6F-CF51-26E4C4B25D2D}"/>
+              </a:ext>
+            </a:extLst>
+          </p:cNvPr>
+          <p:cNvGrpSpPr/>
+          <p:nvPr/>
+        </p:nvGrpSpPr>
+        <p:grpSpPr>
+          <a:xfrm>
+            <a:off x="2220106" y="3641006"/>
+            <a:ext cx="992820" cy="393260"/>
+            <a:chOff x="2146620" y="3779840"/>
+            <a:chExt cx="554400" cy="219600"/>
+          </a:xfrm>
+        </p:grpSpPr>
+        <mc:AlternateContent xmlns:mc="http://schemas.openxmlformats.org/markup-compatibility/2006" xmlns:p14="http://schemas.microsoft.com/office/powerpoint/2010/main">
+          <mc:Choice Requires="p14">
+            <p:contentPart p14:bwMode="auto" r:id="rId7">
+              <p14:nvContentPartPr>
+                <p14:cNvPr id="22" name="Ink 21">
+                  <a:extLst>
+                    <a:ext uri="{FF2B5EF4-FFF2-40B4-BE49-F238E27FC236}">
+                      <a16:creationId xmlns:a16="http://schemas.microsoft.com/office/drawing/2014/main" id="{8208BD70-52AA-39E2-08F0-13589D3A15B4}"/>
+                    </a:ext>
+                  </a:extLst>
+                </p14:cNvPr>
+                <p14:cNvContentPartPr/>
+                <p14:nvPr/>
+              </p14:nvContentPartPr>
+              <p14:xfrm>
+                <a:off x="2146620" y="3779840"/>
+                <a:ext cx="529560" cy="156240"/>
+              </p14:xfrm>
+            </p:contentPart>
+          </mc:Choice>
+          <mc:Fallback xmlns="">
+            <p:pic>
+              <p:nvPicPr>
+                <p:cNvPr id="22" name="Ink 21">
+                  <a:extLst>
+                    <a:ext uri="{FF2B5EF4-FFF2-40B4-BE49-F238E27FC236}">
+                      <a16:creationId xmlns:a16="http://schemas.microsoft.com/office/drawing/2014/main" id="{8208BD70-52AA-39E2-08F0-13589D3A15B4}"/>
+                    </a:ext>
+                  </a:extLst>
+                </p:cNvPr>
+                <p:cNvPicPr/>
+                <p:nvPr/>
+              </p:nvPicPr>
+              <p:blipFill>
+                <a:blip r:embed="rId8"/>
+                <a:stretch>
+                  <a:fillRect/>
+                </a:stretch>
+              </p:blipFill>
+              <p:spPr>
+                <a:xfrm>
+                  <a:off x="2141592" y="3775014"/>
+                  <a:ext cx="539415" cy="166093"/>
+                </a:xfrm>
+                <a:prstGeom prst="rect">
+                  <a:avLst/>
+                </a:prstGeom>
+              </p:spPr>
+            </p:pic>
+          </mc:Fallback>
+        </mc:AlternateContent>
+        <mc:AlternateContent xmlns:mc="http://schemas.openxmlformats.org/markup-compatibility/2006" xmlns:p14="http://schemas.microsoft.com/office/powerpoint/2010/main">
+          <mc:Choice Requires="p14">
+            <p:contentPart p14:bwMode="auto" r:id="rId9">
+              <p14:nvContentPartPr>
+                <p14:cNvPr id="23" name="Ink 22">
+                  <a:extLst>
+                    <a:ext uri="{FF2B5EF4-FFF2-40B4-BE49-F238E27FC236}">
+                      <a16:creationId xmlns:a16="http://schemas.microsoft.com/office/drawing/2014/main" id="{139DC5A4-A118-38C3-B380-3FC0C2F9A238}"/>
+                    </a:ext>
+                  </a:extLst>
+                </p14:cNvPr>
+                <p14:cNvContentPartPr/>
+                <p14:nvPr/>
+              </p14:nvContentPartPr>
+              <p14:xfrm>
+                <a:off x="2579700" y="3844640"/>
+                <a:ext cx="121320" cy="154800"/>
+              </p14:xfrm>
+            </p:contentPart>
+          </mc:Choice>
+          <mc:Fallback xmlns="">
+            <p:pic>
+              <p:nvPicPr>
+                <p:cNvPr id="23" name="Ink 22">
+                  <a:extLst>
+                    <a:ext uri="{FF2B5EF4-FFF2-40B4-BE49-F238E27FC236}">
+                      <a16:creationId xmlns:a16="http://schemas.microsoft.com/office/drawing/2014/main" id="{139DC5A4-A118-38C3-B380-3FC0C2F9A238}"/>
+                    </a:ext>
+                  </a:extLst>
+                </p:cNvPr>
+                <p:cNvPicPr/>
+                <p:nvPr/>
+              </p:nvPicPr>
+              <p:blipFill>
+                <a:blip r:embed="rId10"/>
+                <a:stretch>
+                  <a:fillRect/>
+                </a:stretch>
+              </p:blipFill>
+              <p:spPr>
+                <a:xfrm>
+                  <a:off x="2574678" y="3839607"/>
+                  <a:ext cx="131162" cy="164664"/>
+                </a:xfrm>
+                <a:prstGeom prst="rect">
+                  <a:avLst/>
+                </a:prstGeom>
+              </p:spPr>
+            </p:pic>
+          </mc:Fallback>
+        </mc:AlternateContent>
+      </p:grpSp>
+      <p:sp>
+        <p:nvSpPr>
+          <p:cNvPr id="25" name="TextBox 24">
+            <a:extLst>
+              <a:ext uri="{FF2B5EF4-FFF2-40B4-BE49-F238E27FC236}">
+                <a16:creationId xmlns:a16="http://schemas.microsoft.com/office/drawing/2014/main" id="{B92F70CC-A166-C2A6-B498-129AF82CD0F1}"/>
+              </a:ext>
+            </a:extLst>
+          </p:cNvPr>
+          <p:cNvSpPr txBox="1"/>
+          <p:nvPr/>
+        </p:nvSpPr>
+        <p:spPr>
+          <a:xfrm>
+            <a:off x="3057252" y="3930726"/>
+            <a:ext cx="3242009" cy="646331"/>
+          </a:xfrm>
+          <a:prstGeom prst="rect">
+            <a:avLst/>
+          </a:prstGeom>
+          <a:noFill/>
+        </p:spPr>
+        <p:txBody>
+          <a:bodyPr wrap="square" rtlCol="0">
+            <a:spAutoFit/>
+          </a:bodyPr>
+          <a:lstStyle/>
+          <a:p>
+            <a:r>
+              <a:rPr lang="en-US" b="1" dirty="0">
+                <a:solidFill>
+                  <a:schemeClr val="bg1"/>
+                </a:solidFill>
+                <a:latin typeface="Arial" panose="020B0604020202020204" pitchFamily="34" charset="0"/>
+                <a:cs typeface="Arial" panose="020B0604020202020204" pitchFamily="34" charset="0"/>
+              </a:rPr>
+              <a:t>A populated object from a struct</a:t>
+            </a:r>
+          </a:p>
+        </p:txBody>
+      </p:sp>
+      <p:pic>
+        <p:nvPicPr>
+          <p:cNvPr id="4" name="Picture 3">
+            <a:extLst>
+              <a:ext uri="{FF2B5EF4-FFF2-40B4-BE49-F238E27FC236}">
+                <a16:creationId xmlns:a16="http://schemas.microsoft.com/office/drawing/2014/main" id="{D926B31D-627B-6886-75E2-148EA3EE5E4C}"/>
+              </a:ext>
+            </a:extLst>
+          </p:cNvPr>
+          <p:cNvPicPr>
+            <a:picLocks noChangeAspect="1"/>
+          </p:cNvPicPr>
+          <p:nvPr/>
+        </p:nvPicPr>
+        <p:blipFill>
+          <a:blip r:embed="rId11"/>
+          <a:stretch>
+            <a:fillRect/>
+          </a:stretch>
+        </p:blipFill>
+        <p:spPr>
+          <a:xfrm>
+            <a:off x="6156291" y="3718720"/>
+            <a:ext cx="5937873" cy="3003626"/>
+          </a:xfrm>
+          <a:prstGeom prst="rect">
+            <a:avLst/>
+          </a:prstGeom>
+        </p:spPr>
+      </p:pic>
+    </p:spTree>
+    <p:custDataLst>
+      <p:tags r:id="rId1"/>
+    </p:custDataLst>
+    <p:extLst>
+      <p:ext uri="{BB962C8B-B14F-4D97-AF65-F5344CB8AC3E}">
+        <p14:creationId xmlns:p14="http://schemas.microsoft.com/office/powerpoint/2010/main" val="431812350"/>
+      </p:ext>
+    </p:extLst>
+  </p:cSld>
+  <p:clrMapOvr>
+    <a:masterClrMapping/>
+  </p:clrMapOvr>
+  <mc:AlternateContent xmlns:mc="http://schemas.openxmlformats.org/markup-compatibility/2006" xmlns:p14="http://schemas.microsoft.com/office/powerpoint/2010/main">
+    <mc:Choice Requires="p14">
+      <p:transition spd="slow" p14:dur="2000" advTm="207460"/>
+    </mc:Choice>
+    <mc:Fallback xmlns="">
       <p:transition spd="slow" advTm="207460"/>
     </mc:Fallback>
   </mc:AlternateContent>
@@ -7166,6 +14507,48 @@
 </file>
 
 <file path=ppt/tags/tag1.xml><?xml version="1.0" encoding="utf-8"?>
+<p:tagLst xmlns:a="http://schemas.openxmlformats.org/drawingml/2006/main" xmlns:r="http://schemas.openxmlformats.org/officeDocument/2006/relationships" xmlns:p="http://schemas.openxmlformats.org/presentationml/2006/main">
+  <p:tag name="TIMING" val="|5.6|40.3|25.2|40.6|10.1"/>
+</p:tagLst>
+</file>
+
+<file path=ppt/tags/tag10.xml><?xml version="1.0" encoding="utf-8"?>
+<p:tagLst xmlns:a="http://schemas.openxmlformats.org/drawingml/2006/main" xmlns:r="http://schemas.openxmlformats.org/officeDocument/2006/relationships" xmlns:p="http://schemas.openxmlformats.org/presentationml/2006/main">
+  <p:tag name="TIMING" val="|5.6|40.3|25.2|40.6|10.1"/>
+</p:tagLst>
+</file>
+
+<file path=ppt/tags/tag11.xml><?xml version="1.0" encoding="utf-8"?>
+<p:tagLst xmlns:a="http://schemas.openxmlformats.org/drawingml/2006/main" xmlns:r="http://schemas.openxmlformats.org/officeDocument/2006/relationships" xmlns:p="http://schemas.openxmlformats.org/presentationml/2006/main">
+  <p:tag name="TIMING" val="|5.6|40.3|25.2|40.6|10.1"/>
+</p:tagLst>
+</file>
+
+<file path=ppt/tags/tag12.xml><?xml version="1.0" encoding="utf-8"?>
+<p:tagLst xmlns:a="http://schemas.openxmlformats.org/drawingml/2006/main" xmlns:r="http://schemas.openxmlformats.org/officeDocument/2006/relationships" xmlns:p="http://schemas.openxmlformats.org/presentationml/2006/main">
+  <p:tag name="TIMING" val="|5.6|40.3|25.2|40.6|10.1"/>
+</p:tagLst>
+</file>
+
+<file path=ppt/tags/tag13.xml><?xml version="1.0" encoding="utf-8"?>
+<p:tagLst xmlns:a="http://schemas.openxmlformats.org/drawingml/2006/main" xmlns:r="http://schemas.openxmlformats.org/officeDocument/2006/relationships" xmlns:p="http://schemas.openxmlformats.org/presentationml/2006/main">
+  <p:tag name="TIMING" val="|5.6|40.3|25.2|40.6|10.1"/>
+</p:tagLst>
+</file>
+
+<file path=ppt/tags/tag14.xml><?xml version="1.0" encoding="utf-8"?>
+<p:tagLst xmlns:a="http://schemas.openxmlformats.org/drawingml/2006/main" xmlns:r="http://schemas.openxmlformats.org/officeDocument/2006/relationships" xmlns:p="http://schemas.openxmlformats.org/presentationml/2006/main">
+  <p:tag name="TIMING" val="|5.6|40.3|25.2|40.6|10.1"/>
+</p:tagLst>
+</file>
+
+<file path=ppt/tags/tag15.xml><?xml version="1.0" encoding="utf-8"?>
+<p:tagLst xmlns:a="http://schemas.openxmlformats.org/drawingml/2006/main" xmlns:r="http://schemas.openxmlformats.org/officeDocument/2006/relationships" xmlns:p="http://schemas.openxmlformats.org/presentationml/2006/main">
+  <p:tag name="TIMING" val="|5.6|40.3|25.2|40.6|10.1"/>
+</p:tagLst>
+</file>
+
+<file path=ppt/tags/tag16.xml><?xml version="1.0" encoding="utf-8"?>
 <p:tagLst xmlns:a="http://schemas.openxmlformats.org/drawingml/2006/main" xmlns:r="http://schemas.openxmlformats.org/officeDocument/2006/relationships" xmlns:p="http://schemas.openxmlformats.org/presentationml/2006/main">
   <p:tag name="TIMING" val="|5.6|40.3|25.2|40.6|10.1"/>
 </p:tagLst>
@@ -7196,6 +14579,24 @@
 </file>
 
 <file path=ppt/tags/tag6.xml><?xml version="1.0" encoding="utf-8"?>
+<p:tagLst xmlns:a="http://schemas.openxmlformats.org/drawingml/2006/main" xmlns:r="http://schemas.openxmlformats.org/officeDocument/2006/relationships" xmlns:p="http://schemas.openxmlformats.org/presentationml/2006/main">
+  <p:tag name="TIMING" val="|5.6|40.3|25.2|40.6|10.1"/>
+</p:tagLst>
+</file>
+
+<file path=ppt/tags/tag7.xml><?xml version="1.0" encoding="utf-8"?>
+<p:tagLst xmlns:a="http://schemas.openxmlformats.org/drawingml/2006/main" xmlns:r="http://schemas.openxmlformats.org/officeDocument/2006/relationships" xmlns:p="http://schemas.openxmlformats.org/presentationml/2006/main">
+  <p:tag name="TIMING" val="|5.6|40.3|25.2|40.6|10.1"/>
+</p:tagLst>
+</file>
+
+<file path=ppt/tags/tag8.xml><?xml version="1.0" encoding="utf-8"?>
+<p:tagLst xmlns:a="http://schemas.openxmlformats.org/drawingml/2006/main" xmlns:r="http://schemas.openxmlformats.org/officeDocument/2006/relationships" xmlns:p="http://schemas.openxmlformats.org/presentationml/2006/main">
+  <p:tag name="TIMING" val="|5.6|40.3|25.2|40.6|10.1"/>
+</p:tagLst>
+</file>
+
+<file path=ppt/tags/tag9.xml><?xml version="1.0" encoding="utf-8"?>
 <p:tagLst xmlns:a="http://schemas.openxmlformats.org/drawingml/2006/main" xmlns:r="http://schemas.openxmlformats.org/officeDocument/2006/relationships" xmlns:p="http://schemas.openxmlformats.org/presentationml/2006/main">
   <p:tag name="TIMING" val="|5.6|40.3|25.2|40.6|10.1"/>
 </p:tagLst>

--- a/Section 3/Go streams and DBS.pptx
+++ b/Section 3/Go streams and DBS.pptx
@@ -5,7 +5,7 @@
     <p:sldMasterId id="2147483648" r:id="rId1"/>
   </p:sldMasterIdLst>
   <p:notesMasterIdLst>
-    <p:notesMasterId r:id="rId19"/>
+    <p:notesMasterId r:id="rId20"/>
   </p:notesMasterIdLst>
   <p:sldIdLst>
     <p:sldId id="256" r:id="rId2"/>
@@ -25,6 +25,7 @@
     <p:sldId id="372" r:id="rId16"/>
     <p:sldId id="373" r:id="rId17"/>
     <p:sldId id="374" r:id="rId18"/>
+    <p:sldId id="375" r:id="rId19"/>
   </p:sldIdLst>
   <p:sldSz cx="12192000" cy="6858000"/>
   <p:notesSz cx="6858000" cy="9144000"/>
@@ -577,7 +578,7 @@
           <a:p>
             <a:fld id="{2FE14760-2987-41FC-B6E1-A6F257AE46F6}" type="datetimeFigureOut">
               <a:rPr lang="en-US" smtClean="0"/>
-              <a:t>3/7/2026</a:t>
+              <a:t>3/12/2026</a:t>
             </a:fld>
             <a:endParaRPr lang="en-US"/>
           </a:p>
@@ -2188,6 +2189,174 @@
 </p:notes>
 </file>
 
+<file path=ppt/notesSlides/notesSlide17.xml><?xml version="1.0" encoding="utf-8"?>
+<p:notes xmlns:a="http://schemas.openxmlformats.org/drawingml/2006/main" xmlns:r="http://schemas.openxmlformats.org/officeDocument/2006/relationships" xmlns:p="http://schemas.openxmlformats.org/presentationml/2006/main">
+  <p:cSld>
+    <p:spTree>
+      <p:nvGrpSpPr>
+        <p:cNvPr id="1" name="">
+          <a:extLst>
+            <a:ext uri="{FF2B5EF4-FFF2-40B4-BE49-F238E27FC236}">
+              <a16:creationId xmlns:a16="http://schemas.microsoft.com/office/drawing/2014/main" id="{190F94FD-5D0F-A2B3-8990-6BB87141F369}"/>
+            </a:ext>
+          </a:extLst>
+        </p:cNvPr>
+        <p:cNvGrpSpPr/>
+        <p:nvPr/>
+      </p:nvGrpSpPr>
+      <p:grpSpPr>
+        <a:xfrm>
+          <a:off x="0" y="0"/>
+          <a:ext cx="0" cy="0"/>
+          <a:chOff x="0" y="0"/>
+          <a:chExt cx="0" cy="0"/>
+        </a:xfrm>
+      </p:grpSpPr>
+      <p:sp>
+        <p:nvSpPr>
+          <p:cNvPr id="2" name="Slide Image Placeholder 1">
+            <a:extLst>
+              <a:ext uri="{FF2B5EF4-FFF2-40B4-BE49-F238E27FC236}">
+                <a16:creationId xmlns:a16="http://schemas.microsoft.com/office/drawing/2014/main" id="{46BBC61F-B445-B570-FDB7-DE9991A15D32}"/>
+              </a:ext>
+            </a:extLst>
+          </p:cNvPr>
+          <p:cNvSpPr>
+            <a:spLocks noGrp="1" noRot="1" noChangeAspect="1"/>
+          </p:cNvSpPr>
+          <p:nvPr>
+            <p:ph type="sldImg"/>
+          </p:nvPr>
+        </p:nvSpPr>
+        <p:spPr/>
+      </p:sp>
+      <p:sp>
+        <p:nvSpPr>
+          <p:cNvPr id="3" name="Notes Placeholder 2">
+            <a:extLst>
+              <a:ext uri="{FF2B5EF4-FFF2-40B4-BE49-F238E27FC236}">
+                <a16:creationId xmlns:a16="http://schemas.microsoft.com/office/drawing/2014/main" id="{F9CEF8D4-E99D-E36C-2459-F85ADF360473}"/>
+              </a:ext>
+            </a:extLst>
+          </p:cNvPr>
+          <p:cNvSpPr>
+            <a:spLocks noGrp="1"/>
+          </p:cNvSpPr>
+          <p:nvPr>
+            <p:ph type="body" idx="1"/>
+          </p:nvPr>
+        </p:nvSpPr>
+        <p:spPr/>
+        <p:txBody>
+          <a:bodyPr/>
+          <a:lstStyle/>
+          <a:p>
+            <a:endParaRPr lang="en-US" dirty="0"/>
+          </a:p>
+        </p:txBody>
+      </p:sp>
+      <p:sp>
+        <p:nvSpPr>
+          <p:cNvPr id="4" name="Slide Number Placeholder 3">
+            <a:extLst>
+              <a:ext uri="{FF2B5EF4-FFF2-40B4-BE49-F238E27FC236}">
+                <a16:creationId xmlns:a16="http://schemas.microsoft.com/office/drawing/2014/main" id="{82EB5F3E-E47A-E4AC-E2C4-A1B4E4BC0CBA}"/>
+              </a:ext>
+            </a:extLst>
+          </p:cNvPr>
+          <p:cNvSpPr>
+            <a:spLocks noGrp="1"/>
+          </p:cNvSpPr>
+          <p:nvPr>
+            <p:ph type="sldNum" sz="quarter" idx="5"/>
+          </p:nvPr>
+        </p:nvSpPr>
+        <p:spPr/>
+        <p:txBody>
+          <a:bodyPr/>
+          <a:lstStyle/>
+          <a:p>
+            <a:pPr marL="0" marR="0" lvl="0" indent="0" algn="r" defTabSz="914400" rtl="0" eaLnBrk="1" fontAlgn="auto" latinLnBrk="0" hangingPunct="1">
+              <a:lnSpc>
+                <a:spcPct val="100000"/>
+              </a:lnSpc>
+              <a:spcBef>
+                <a:spcPts val="0"/>
+              </a:spcBef>
+              <a:spcAft>
+                <a:spcPts val="0"/>
+              </a:spcAft>
+              <a:buClrTx/>
+              <a:buSzTx/>
+              <a:buFontTx/>
+              <a:buNone/>
+              <a:tabLst/>
+              <a:defRPr/>
+            </a:pPr>
+            <a:fld id="{092CD1D2-9E42-4E1F-B86C-5AF6F74F6041}" type="slidenum">
+              <a:rPr kumimoji="0" lang="en-US" sz="1200" b="0" i="0" u="none" strike="noStrike" kern="1200" cap="none" spc="0" normalizeH="0" baseline="0" noProof="0" smtClean="0">
+                <a:ln>
+                  <a:noFill/>
+                </a:ln>
+                <a:solidFill>
+                  <a:prstClr val="black"/>
+                </a:solidFill>
+                <a:effectLst/>
+                <a:uLnTx/>
+                <a:uFillTx/>
+                <a:latin typeface="Aptos" panose="02110004020202020204"/>
+                <a:ea typeface="+mn-ea"/>
+                <a:cs typeface="+mn-cs"/>
+              </a:rPr>
+              <a:pPr marL="0" marR="0" lvl="0" indent="0" algn="r" defTabSz="914400" rtl="0" eaLnBrk="1" fontAlgn="auto" latinLnBrk="0" hangingPunct="1">
+                <a:lnSpc>
+                  <a:spcPct val="100000"/>
+                </a:lnSpc>
+                <a:spcBef>
+                  <a:spcPts val="0"/>
+                </a:spcBef>
+                <a:spcAft>
+                  <a:spcPts val="0"/>
+                </a:spcAft>
+                <a:buClrTx/>
+                <a:buSzTx/>
+                <a:buFontTx/>
+                <a:buNone/>
+                <a:tabLst/>
+                <a:defRPr/>
+              </a:pPr>
+              <a:t>18</a:t>
+            </a:fld>
+            <a:endParaRPr kumimoji="0" lang="en-US" sz="1200" b="0" i="0" u="none" strike="noStrike" kern="1200" cap="none" spc="0" normalizeH="0" baseline="0" noProof="0">
+              <a:ln>
+                <a:noFill/>
+              </a:ln>
+              <a:solidFill>
+                <a:prstClr val="black"/>
+              </a:solidFill>
+              <a:effectLst/>
+              <a:uLnTx/>
+              <a:uFillTx/>
+              <a:latin typeface="Aptos" panose="02110004020202020204"/>
+              <a:ea typeface="+mn-ea"/>
+              <a:cs typeface="+mn-cs"/>
+            </a:endParaRPr>
+          </a:p>
+        </p:txBody>
+      </p:sp>
+    </p:spTree>
+    <p:extLst>
+      <p:ext uri="{BB962C8B-B14F-4D97-AF65-F5344CB8AC3E}">
+        <p14:creationId xmlns:p14="http://schemas.microsoft.com/office/powerpoint/2010/main" val="3259757291"/>
+      </p:ext>
+    </p:extLst>
+  </p:cSld>
+  <p:clrMapOvr>
+    <a:masterClrMapping/>
+  </p:clrMapOvr>
+</p:notes>
+</file>
+
 <file path=ppt/notesSlides/notesSlide2.xml><?xml version="1.0" encoding="utf-8"?>
 <p:notes xmlns:a="http://schemas.openxmlformats.org/drawingml/2006/main" xmlns:r="http://schemas.openxmlformats.org/officeDocument/2006/relationships" xmlns:p="http://schemas.openxmlformats.org/presentationml/2006/main">
   <p:cSld>
@@ -3679,7 +3848,7 @@
           <a:p>
             <a:fld id="{B0D925FC-16E2-4760-8BBA-129557D517F1}" type="datetimeFigureOut">
               <a:rPr lang="en-US" smtClean="0"/>
-              <a:t>3/7/2026</a:t>
+              <a:t>3/12/2026</a:t>
             </a:fld>
             <a:endParaRPr lang="en-US"/>
           </a:p>
@@ -3877,7 +4046,7 @@
           <a:p>
             <a:fld id="{B0D925FC-16E2-4760-8BBA-129557D517F1}" type="datetimeFigureOut">
               <a:rPr lang="en-US" smtClean="0"/>
-              <a:t>3/7/2026</a:t>
+              <a:t>3/12/2026</a:t>
             </a:fld>
             <a:endParaRPr lang="en-US"/>
           </a:p>
@@ -4085,7 +4254,7 @@
           <a:p>
             <a:fld id="{B0D925FC-16E2-4760-8BBA-129557D517F1}" type="datetimeFigureOut">
               <a:rPr lang="en-US" smtClean="0"/>
-              <a:t>3/7/2026</a:t>
+              <a:t>3/12/2026</a:t>
             </a:fld>
             <a:endParaRPr lang="en-US"/>
           </a:p>
@@ -4283,7 +4452,7 @@
           <a:p>
             <a:fld id="{B0D925FC-16E2-4760-8BBA-129557D517F1}" type="datetimeFigureOut">
               <a:rPr lang="en-US" smtClean="0"/>
-              <a:t>3/7/2026</a:t>
+              <a:t>3/12/2026</a:t>
             </a:fld>
             <a:endParaRPr lang="en-US"/>
           </a:p>
@@ -4558,7 +4727,7 @@
           <a:p>
             <a:fld id="{B0D925FC-16E2-4760-8BBA-129557D517F1}" type="datetimeFigureOut">
               <a:rPr lang="en-US" smtClean="0"/>
-              <a:t>3/7/2026</a:t>
+              <a:t>3/12/2026</a:t>
             </a:fld>
             <a:endParaRPr lang="en-US"/>
           </a:p>
@@ -4823,7 +4992,7 @@
           <a:p>
             <a:fld id="{B0D925FC-16E2-4760-8BBA-129557D517F1}" type="datetimeFigureOut">
               <a:rPr lang="en-US" smtClean="0"/>
-              <a:t>3/7/2026</a:t>
+              <a:t>3/12/2026</a:t>
             </a:fld>
             <a:endParaRPr lang="en-US"/>
           </a:p>
@@ -5235,7 +5404,7 @@
           <a:p>
             <a:fld id="{B0D925FC-16E2-4760-8BBA-129557D517F1}" type="datetimeFigureOut">
               <a:rPr lang="en-US" smtClean="0"/>
-              <a:t>3/7/2026</a:t>
+              <a:t>3/12/2026</a:t>
             </a:fld>
             <a:endParaRPr lang="en-US"/>
           </a:p>
@@ -5376,7 +5545,7 @@
           <a:p>
             <a:fld id="{B0D925FC-16E2-4760-8BBA-129557D517F1}" type="datetimeFigureOut">
               <a:rPr lang="en-US" smtClean="0"/>
-              <a:t>3/7/2026</a:t>
+              <a:t>3/12/2026</a:t>
             </a:fld>
             <a:endParaRPr lang="en-US"/>
           </a:p>
@@ -5489,7 +5658,7 @@
           <a:p>
             <a:fld id="{B0D925FC-16E2-4760-8BBA-129557D517F1}" type="datetimeFigureOut">
               <a:rPr lang="en-US" smtClean="0"/>
-              <a:t>3/7/2026</a:t>
+              <a:t>3/12/2026</a:t>
             </a:fld>
             <a:endParaRPr lang="en-US"/>
           </a:p>
@@ -5800,7 +5969,7 @@
           <a:p>
             <a:fld id="{B0D925FC-16E2-4760-8BBA-129557D517F1}" type="datetimeFigureOut">
               <a:rPr lang="en-US" smtClean="0"/>
-              <a:t>3/7/2026</a:t>
+              <a:t>3/12/2026</a:t>
             </a:fld>
             <a:endParaRPr lang="en-US"/>
           </a:p>
@@ -6088,7 +6257,7 @@
           <a:p>
             <a:fld id="{B0D925FC-16E2-4760-8BBA-129557D517F1}" type="datetimeFigureOut">
               <a:rPr lang="en-US" smtClean="0"/>
-              <a:t>3/7/2026</a:t>
+              <a:t>3/12/2026</a:t>
             </a:fld>
             <a:endParaRPr lang="en-US"/>
           </a:p>
@@ -6329,7 +6498,7 @@
           <a:p>
             <a:fld id="{B0D925FC-16E2-4760-8BBA-129557D517F1}" type="datetimeFigureOut">
               <a:rPr lang="en-US" smtClean="0"/>
-              <a:t>3/7/2026</a:t>
+              <a:t>3/12/2026</a:t>
             </a:fld>
             <a:endParaRPr lang="en-US"/>
           </a:p>
@@ -7498,6 +7667,36 @@
           </a:p>
         </p:txBody>
       </p:sp>
+      <p:pic>
+        <p:nvPicPr>
+          <p:cNvPr id="10" name="Picture 9">
+            <a:extLst>
+              <a:ext uri="{FF2B5EF4-FFF2-40B4-BE49-F238E27FC236}">
+                <a16:creationId xmlns:a16="http://schemas.microsoft.com/office/drawing/2014/main" id="{DFC56DED-6054-3CCF-EBC5-E4A9737F88F5}"/>
+              </a:ext>
+            </a:extLst>
+          </p:cNvPr>
+          <p:cNvPicPr>
+            <a:picLocks noChangeAspect="1"/>
+          </p:cNvPicPr>
+          <p:nvPr/>
+        </p:nvPicPr>
+        <p:blipFill>
+          <a:blip r:embed="rId5"/>
+          <a:stretch>
+            <a:fillRect/>
+          </a:stretch>
+        </p:blipFill>
+        <p:spPr>
+          <a:xfrm>
+            <a:off x="7278106" y="153353"/>
+            <a:ext cx="4675382" cy="776497"/>
+          </a:xfrm>
+          <a:prstGeom prst="rect">
+            <a:avLst/>
+          </a:prstGeom>
+        </p:spPr>
+      </p:pic>
     </p:spTree>
     <p:custDataLst>
       <p:tags r:id="rId1"/>
@@ -10136,11 +10335,11 @@
   <p:clrMapOvr>
     <a:masterClrMapping/>
   </p:clrMapOvr>
-  <mc:AlternateContent xmlns:mc="http://schemas.openxmlformats.org/markup-compatibility/2006">
-    <mc:Choice xmlns:p14="http://schemas.microsoft.com/office/powerpoint/2010/main" Requires="p14">
+  <mc:AlternateContent xmlns:mc="http://schemas.openxmlformats.org/markup-compatibility/2006" xmlns:p14="http://schemas.microsoft.com/office/powerpoint/2010/main">
+    <mc:Choice Requires="p14">
       <p:transition spd="slow" p14:dur="2000" advTm="207460"/>
     </mc:Choice>
-    <mc:Fallback>
+    <mc:Fallback xmlns="">
       <p:transition spd="slow" advTm="207460"/>
     </mc:Fallback>
   </mc:AlternateContent>
@@ -10337,6 +10536,160 @@
     <p:extLst>
       <p:ext uri="{BB962C8B-B14F-4D97-AF65-F5344CB8AC3E}">
         <p14:creationId xmlns:p14="http://schemas.microsoft.com/office/powerpoint/2010/main" val="4260968618"/>
+      </p:ext>
+    </p:extLst>
+  </p:cSld>
+  <p:clrMapOvr>
+    <a:masterClrMapping/>
+  </p:clrMapOvr>
+  <mc:AlternateContent xmlns:mc="http://schemas.openxmlformats.org/markup-compatibility/2006" xmlns:p14="http://schemas.microsoft.com/office/powerpoint/2010/main">
+    <mc:Choice Requires="p14">
+      <p:transition spd="slow" p14:dur="2000" advTm="207460"/>
+    </mc:Choice>
+    <mc:Fallback xmlns="">
+      <p:transition spd="slow" advTm="207460"/>
+    </mc:Fallback>
+  </mc:AlternateContent>
+</p:sld>
+</file>
+
+<file path=ppt/slides/slide18.xml><?xml version="1.0" encoding="utf-8"?>
+<p:sld xmlns:a="http://schemas.openxmlformats.org/drawingml/2006/main" xmlns:r="http://schemas.openxmlformats.org/officeDocument/2006/relationships" xmlns:p="http://schemas.openxmlformats.org/presentationml/2006/main">
+  <p:cSld>
+    <p:bg>
+      <p:bgPr>
+        <a:gradFill>
+          <a:gsLst>
+            <a:gs pos="0">
+              <a:schemeClr val="bg1">
+                <a:lumMod val="95000"/>
+              </a:schemeClr>
+            </a:gs>
+            <a:gs pos="74000">
+              <a:schemeClr val="bg1">
+                <a:lumMod val="85000"/>
+              </a:schemeClr>
+            </a:gs>
+            <a:gs pos="83000">
+              <a:schemeClr val="bg1">
+                <a:lumMod val="75000"/>
+              </a:schemeClr>
+            </a:gs>
+            <a:gs pos="100000">
+              <a:schemeClr val="bg1">
+                <a:lumMod val="50000"/>
+              </a:schemeClr>
+            </a:gs>
+          </a:gsLst>
+          <a:lin ang="5400000" scaled="1"/>
+        </a:gradFill>
+        <a:effectLst/>
+      </p:bgPr>
+    </p:bg>
+    <p:spTree>
+      <p:nvGrpSpPr>
+        <p:cNvPr id="1" name="">
+          <a:extLst>
+            <a:ext uri="{FF2B5EF4-FFF2-40B4-BE49-F238E27FC236}">
+              <a16:creationId xmlns:a16="http://schemas.microsoft.com/office/drawing/2014/main" id="{006A73EA-A6E7-0ADC-2A5D-C1BADB4E24D7}"/>
+            </a:ext>
+          </a:extLst>
+        </p:cNvPr>
+        <p:cNvGrpSpPr/>
+        <p:nvPr/>
+      </p:nvGrpSpPr>
+      <p:grpSpPr>
+        <a:xfrm>
+          <a:off x="0" y="0"/>
+          <a:ext cx="0" cy="0"/>
+          <a:chOff x="0" y="0"/>
+          <a:chExt cx="0" cy="0"/>
+        </a:xfrm>
+      </p:grpSpPr>
+      <p:sp>
+        <p:nvSpPr>
+          <p:cNvPr id="2" name="Title 1">
+            <a:extLst>
+              <a:ext uri="{FF2B5EF4-FFF2-40B4-BE49-F238E27FC236}">
+                <a16:creationId xmlns:a16="http://schemas.microsoft.com/office/drawing/2014/main" id="{F9B2A211-8C0B-E1CD-CD67-3A418E520D05}"/>
+              </a:ext>
+            </a:extLst>
+          </p:cNvPr>
+          <p:cNvSpPr>
+            <a:spLocks noGrp="1"/>
+          </p:cNvSpPr>
+          <p:nvPr>
+            <p:ph type="title"/>
+          </p:nvPr>
+        </p:nvSpPr>
+        <p:spPr>
+          <a:xfrm>
+            <a:off x="97832" y="-179711"/>
+            <a:ext cx="11996331" cy="1325563"/>
+          </a:xfrm>
+        </p:spPr>
+        <p:txBody>
+          <a:bodyPr>
+            <a:normAutofit/>
+          </a:bodyPr>
+          <a:lstStyle/>
+          <a:p>
+            <a:r>
+              <a:rPr lang="en-US" sz="4200" b="1" dirty="0">
+                <a:latin typeface="Times New Roman" panose="02020603050405020304" pitchFamily="18" charset="0"/>
+                <a:cs typeface="Times New Roman" panose="02020603050405020304" pitchFamily="18" charset="0"/>
+              </a:rPr>
+              <a:t>Section Record:</a:t>
+            </a:r>
+          </a:p>
+        </p:txBody>
+      </p:sp>
+      <p:sp>
+        <p:nvSpPr>
+          <p:cNvPr id="4" name="TextBox 3">
+            <a:extLst>
+              <a:ext uri="{FF2B5EF4-FFF2-40B4-BE49-F238E27FC236}">
+                <a16:creationId xmlns:a16="http://schemas.microsoft.com/office/drawing/2014/main" id="{CDEA5D01-5301-8769-1557-A40442B2C6EB}"/>
+              </a:ext>
+            </a:extLst>
+          </p:cNvPr>
+          <p:cNvSpPr txBox="1"/>
+          <p:nvPr/>
+        </p:nvSpPr>
+        <p:spPr>
+          <a:xfrm>
+            <a:off x="216568" y="1319146"/>
+            <a:ext cx="10924673" cy="830997"/>
+          </a:xfrm>
+          <a:prstGeom prst="rect">
+            <a:avLst/>
+          </a:prstGeom>
+          <a:noFill/>
+        </p:spPr>
+        <p:txBody>
+          <a:bodyPr wrap="square">
+            <a:spAutoFit/>
+          </a:bodyPr>
+          <a:lstStyle/>
+          <a:p>
+            <a:r>
+              <a:rPr lang="ar-EG" sz="2400" b="1" i="1" u="sng" dirty="0">
+                <a:solidFill>
+                  <a:schemeClr val="accent1"/>
+                </a:solidFill>
+              </a:rPr>
+              <a:t>https://drive.google.com/file/d/15wt33h9WPW5K0DWiGRJRU9CTi104BpwS/view?usp=sharing</a:t>
+            </a:r>
+          </a:p>
+        </p:txBody>
+      </p:sp>
+    </p:spTree>
+    <p:custDataLst>
+      <p:tags r:id="rId1"/>
+    </p:custDataLst>
+    <p:extLst>
+      <p:ext uri="{BB962C8B-B14F-4D97-AF65-F5344CB8AC3E}">
+        <p14:creationId xmlns:p14="http://schemas.microsoft.com/office/powerpoint/2010/main" val="2701483784"/>
       </p:ext>
     </p:extLst>
   </p:cSld>
@@ -13841,10 +14194,10 @@
       </p:cxnSp>
       <p:sp>
         <p:nvSpPr>
-          <p:cNvPr id="6" name="Rectangle 5">
-            <a:extLst>
-              <a:ext uri="{FF2B5EF4-FFF2-40B4-BE49-F238E27FC236}">
-                <a16:creationId xmlns:a16="http://schemas.microsoft.com/office/drawing/2014/main" id="{5807B7A5-8327-2762-4A3D-365FF890A579}"/>
+          <p:cNvPr id="7" name="Rectangle 6">
+            <a:extLst>
+              <a:ext uri="{FF2B5EF4-FFF2-40B4-BE49-F238E27FC236}">
+                <a16:creationId xmlns:a16="http://schemas.microsoft.com/office/drawing/2014/main" id="{CCDD50E1-BA56-3F18-98E4-A4267C180D8B}"/>
               </a:ext>
             </a:extLst>
           </p:cNvPr>
@@ -13853,7 +14206,7 @@
         </p:nvSpPr>
         <p:spPr>
           <a:xfrm>
-            <a:off x="1868994" y="1325563"/>
+            <a:off x="1918882" y="1312674"/>
             <a:ext cx="2100105" cy="597368"/>
           </a:xfrm>
           <a:prstGeom prst="rect">
@@ -13892,17 +14245,17 @@
                 <a:latin typeface="Arial" panose="020B0604020202020204" pitchFamily="34" charset="0"/>
                 <a:cs typeface="Arial" panose="020B0604020202020204" pitchFamily="34" charset="0"/>
               </a:rPr>
-              <a:t>Parsing JSON</a:t>
-            </a:r>
-          </a:p>
-        </p:txBody>
-      </p:sp>
-      <p:sp>
-        <p:nvSpPr>
-          <p:cNvPr id="7" name="Rectangle 6">
-            <a:extLst>
-              <a:ext uri="{FF2B5EF4-FFF2-40B4-BE49-F238E27FC236}">
-                <a16:creationId xmlns:a16="http://schemas.microsoft.com/office/drawing/2014/main" id="{CCDD50E1-BA56-3F18-98E4-A4267C180D8B}"/>
+              <a:t>Creating JSON</a:t>
+            </a:r>
+          </a:p>
+        </p:txBody>
+      </p:sp>
+      <p:sp>
+        <p:nvSpPr>
+          <p:cNvPr id="15" name="Cloud 14">
+            <a:extLst>
+              <a:ext uri="{FF2B5EF4-FFF2-40B4-BE49-F238E27FC236}">
+                <a16:creationId xmlns:a16="http://schemas.microsoft.com/office/drawing/2014/main" id="{23CE8FBF-8216-7F4D-47D7-37B6AC68EDCF}"/>
               </a:ext>
             </a:extLst>
           </p:cNvPr>
@@ -13911,65 +14264,7 @@
         </p:nvSpPr>
         <p:spPr>
           <a:xfrm>
-            <a:off x="8045030" y="1325563"/>
-            <a:ext cx="2100105" cy="597368"/>
-          </a:xfrm>
-          <a:prstGeom prst="rect">
-            <a:avLst/>
-          </a:prstGeom>
-          <a:ln>
-            <a:noFill/>
-          </a:ln>
-        </p:spPr>
-        <p:style>
-          <a:lnRef idx="2">
-            <a:schemeClr val="accent1">
-              <a:shade val="15000"/>
-            </a:schemeClr>
-          </a:lnRef>
-          <a:fillRef idx="1">
-            <a:schemeClr val="accent1"/>
-          </a:fillRef>
-          <a:effectRef idx="0">
-            <a:schemeClr val="accent1"/>
-          </a:effectRef>
-          <a:fontRef idx="minor">
-            <a:schemeClr val="lt1"/>
-          </a:fontRef>
-        </p:style>
-        <p:txBody>
-          <a:bodyPr rtlCol="0" anchor="ctr"/>
-          <a:lstStyle/>
-          <a:p>
-            <a:pPr algn="ctr"/>
-            <a:r>
-              <a:rPr lang="en-US" sz="2000" b="1" dirty="0">
-                <a:solidFill>
-                  <a:schemeClr val="bg1"/>
-                </a:solidFill>
-                <a:latin typeface="Arial" panose="020B0604020202020204" pitchFamily="34" charset="0"/>
-                <a:cs typeface="Arial" panose="020B0604020202020204" pitchFamily="34" charset="0"/>
-              </a:rPr>
-              <a:t>Creating JSON</a:t>
-            </a:r>
-          </a:p>
-        </p:txBody>
-      </p:sp>
-      <p:sp>
-        <p:nvSpPr>
-          <p:cNvPr id="8" name="Cloud 7">
-            <a:extLst>
-              <a:ext uri="{FF2B5EF4-FFF2-40B4-BE49-F238E27FC236}">
-                <a16:creationId xmlns:a16="http://schemas.microsoft.com/office/drawing/2014/main" id="{6096C827-8757-0B92-0D67-C7BD9CDAA94A}"/>
-              </a:ext>
-            </a:extLst>
-          </p:cNvPr>
-          <p:cNvSpPr/>
-          <p:nvPr/>
-        </p:nvSpPr>
-        <p:spPr>
-          <a:xfrm>
-            <a:off x="97834" y="2411604"/>
+            <a:off x="30144" y="2411768"/>
             <a:ext cx="2414252" cy="1017396"/>
           </a:xfrm>
           <a:prstGeom prst="cloud">
@@ -14002,17 +14297,17 @@
                 <a:latin typeface="Arial" panose="020B0604020202020204" pitchFamily="34" charset="0"/>
                 <a:cs typeface="Arial" panose="020B0604020202020204" pitchFamily="34" charset="0"/>
               </a:rPr>
-              <a:t>Create structs to store JSON data</a:t>
-            </a:r>
-          </a:p>
-        </p:txBody>
-      </p:sp>
-      <p:sp>
-        <p:nvSpPr>
-          <p:cNvPr id="9" name="Cloud 8">
-            <a:extLst>
-              <a:ext uri="{FF2B5EF4-FFF2-40B4-BE49-F238E27FC236}">
-                <a16:creationId xmlns:a16="http://schemas.microsoft.com/office/drawing/2014/main" id="{ACBAFA94-62FB-9CF0-A50D-FB7C98B10BA6}"/>
+              <a:t>Create structs and populate with data</a:t>
+            </a:r>
+          </a:p>
+        </p:txBody>
+      </p:sp>
+      <p:sp>
+        <p:nvSpPr>
+          <p:cNvPr id="16" name="Cloud 15">
+            <a:extLst>
+              <a:ext uri="{FF2B5EF4-FFF2-40B4-BE49-F238E27FC236}">
+                <a16:creationId xmlns:a16="http://schemas.microsoft.com/office/drawing/2014/main" id="{6934C061-3A39-1D64-D16C-82C5C42E1E47}"/>
               </a:ext>
             </a:extLst>
           </p:cNvPr>
@@ -14021,7 +14316,7 @@
         </p:nvSpPr>
         <p:spPr>
           <a:xfrm>
-            <a:off x="3621457" y="2411604"/>
+            <a:off x="3553767" y="2411768"/>
             <a:ext cx="2414252" cy="1017396"/>
           </a:xfrm>
           <a:prstGeom prst="cloud">
@@ -14050,28 +14345,21 @@
           <a:p>
             <a:pPr algn="ctr"/>
             <a:r>
-              <a:rPr lang="en-US" sz="1600" b="1" dirty="0" err="1">
-                <a:latin typeface="Arial" panose="020B0604020202020204" pitchFamily="34" charset="0"/>
-                <a:cs typeface="Arial" panose="020B0604020202020204" pitchFamily="34" charset="0"/>
-              </a:rPr>
-              <a:t>Unmarshal</a:t>
-            </a:r>
-            <a:r>
               <a:rPr lang="en-US" sz="1600" b="1" dirty="0">
                 <a:latin typeface="Arial" panose="020B0604020202020204" pitchFamily="34" charset="0"/>
                 <a:cs typeface="Arial" panose="020B0604020202020204" pitchFamily="34" charset="0"/>
               </a:rPr>
-              <a:t> JSON into structs</a:t>
+              <a:t>Marshal structs into JSON data</a:t>
             </a:r>
           </a:p>
         </p:txBody>
       </p:sp>
       <p:cxnSp>
         <p:nvCxnSpPr>
-          <p:cNvPr id="12" name="Straight Arrow Connector 11">
-            <a:extLst>
-              <a:ext uri="{FF2B5EF4-FFF2-40B4-BE49-F238E27FC236}">
-                <a16:creationId xmlns:a16="http://schemas.microsoft.com/office/drawing/2014/main" id="{E9322FB6-874B-25BF-3FD3-B7569529EDEF}"/>
+          <p:cNvPr id="17" name="Straight Arrow Connector 16">
+            <a:extLst>
+              <a:ext uri="{FF2B5EF4-FFF2-40B4-BE49-F238E27FC236}">
+                <a16:creationId xmlns:a16="http://schemas.microsoft.com/office/drawing/2014/main" id="{6ED39D99-FC03-E4E4-CEDD-8B13025705E1}"/>
               </a:ext>
             </a:extLst>
           </p:cNvPr>
@@ -14082,155 +14370,7 @@
         </p:nvCxnSpPr>
         <p:spPr>
           <a:xfrm>
-            <a:off x="2594513" y="2920302"/>
-            <a:ext cx="966656" cy="0"/>
-          </a:xfrm>
-          <a:prstGeom prst="straightConnector1">
-            <a:avLst/>
-          </a:prstGeom>
-          <a:ln w="38100">
-            <a:solidFill>
-              <a:srgbClr val="FF0000"/>
-            </a:solidFill>
-            <a:tailEnd type="triangle"/>
-          </a:ln>
-        </p:spPr>
-        <p:style>
-          <a:lnRef idx="2">
-            <a:schemeClr val="accent1"/>
-          </a:lnRef>
-          <a:fillRef idx="0">
-            <a:schemeClr val="accent1"/>
-          </a:fillRef>
-          <a:effectRef idx="1">
-            <a:schemeClr val="accent1"/>
-          </a:effectRef>
-          <a:fontRef idx="minor">
-            <a:schemeClr val="tx1"/>
-          </a:fontRef>
-        </p:style>
-      </p:cxnSp>
-      <p:sp>
-        <p:nvSpPr>
-          <p:cNvPr id="15" name="Cloud 14">
-            <a:extLst>
-              <a:ext uri="{FF2B5EF4-FFF2-40B4-BE49-F238E27FC236}">
-                <a16:creationId xmlns:a16="http://schemas.microsoft.com/office/drawing/2014/main" id="{23CE8FBF-8216-7F4D-47D7-37B6AC68EDCF}"/>
-              </a:ext>
-            </a:extLst>
-          </p:cNvPr>
-          <p:cNvSpPr/>
-          <p:nvPr/>
-        </p:nvSpPr>
-        <p:spPr>
-          <a:xfrm>
-            <a:off x="6156292" y="2424657"/>
-            <a:ext cx="2414252" cy="1017396"/>
-          </a:xfrm>
-          <a:prstGeom prst="cloud">
-            <a:avLst/>
-          </a:prstGeom>
-        </p:spPr>
-        <p:style>
-          <a:lnRef idx="2">
-            <a:schemeClr val="accent1">
-              <a:shade val="15000"/>
-            </a:schemeClr>
-          </a:lnRef>
-          <a:fillRef idx="1">
-            <a:schemeClr val="accent1"/>
-          </a:fillRef>
-          <a:effectRef idx="0">
-            <a:schemeClr val="accent1"/>
-          </a:effectRef>
-          <a:fontRef idx="minor">
-            <a:schemeClr val="lt1"/>
-          </a:fontRef>
-        </p:style>
-        <p:txBody>
-          <a:bodyPr rtlCol="0" anchor="ctr"/>
-          <a:lstStyle/>
-          <a:p>
-            <a:pPr algn="ctr"/>
-            <a:r>
-              <a:rPr lang="en-US" sz="1600" b="1" dirty="0">
-                <a:latin typeface="Arial" panose="020B0604020202020204" pitchFamily="34" charset="0"/>
-                <a:cs typeface="Arial" panose="020B0604020202020204" pitchFamily="34" charset="0"/>
-              </a:rPr>
-              <a:t>Create structs and populate with data</a:t>
-            </a:r>
-          </a:p>
-        </p:txBody>
-      </p:sp>
-      <p:sp>
-        <p:nvSpPr>
-          <p:cNvPr id="16" name="Cloud 15">
-            <a:extLst>
-              <a:ext uri="{FF2B5EF4-FFF2-40B4-BE49-F238E27FC236}">
-                <a16:creationId xmlns:a16="http://schemas.microsoft.com/office/drawing/2014/main" id="{6934C061-3A39-1D64-D16C-82C5C42E1E47}"/>
-              </a:ext>
-            </a:extLst>
-          </p:cNvPr>
-          <p:cNvSpPr/>
-          <p:nvPr/>
-        </p:nvSpPr>
-        <p:spPr>
-          <a:xfrm>
-            <a:off x="9679915" y="2424657"/>
-            <a:ext cx="2414252" cy="1017396"/>
-          </a:xfrm>
-          <a:prstGeom prst="cloud">
-            <a:avLst/>
-          </a:prstGeom>
-        </p:spPr>
-        <p:style>
-          <a:lnRef idx="2">
-            <a:schemeClr val="accent1">
-              <a:shade val="15000"/>
-            </a:schemeClr>
-          </a:lnRef>
-          <a:fillRef idx="1">
-            <a:schemeClr val="accent1"/>
-          </a:fillRef>
-          <a:effectRef idx="0">
-            <a:schemeClr val="accent1"/>
-          </a:effectRef>
-          <a:fontRef idx="minor">
-            <a:schemeClr val="lt1"/>
-          </a:fontRef>
-        </p:style>
-        <p:txBody>
-          <a:bodyPr rtlCol="0" anchor="ctr"/>
-          <a:lstStyle/>
-          <a:p>
-            <a:pPr algn="ctr"/>
-            <a:r>
-              <a:rPr lang="en-US" sz="1600" b="1" dirty="0">
-                <a:latin typeface="Arial" panose="020B0604020202020204" pitchFamily="34" charset="0"/>
-                <a:cs typeface="Arial" panose="020B0604020202020204" pitchFamily="34" charset="0"/>
-              </a:rPr>
-              <a:t>Marshal structs into JSON data</a:t>
-            </a:r>
-          </a:p>
-        </p:txBody>
-      </p:sp>
-      <p:cxnSp>
-        <p:nvCxnSpPr>
-          <p:cNvPr id="17" name="Straight Arrow Connector 16">
-            <a:extLst>
-              <a:ext uri="{FF2B5EF4-FFF2-40B4-BE49-F238E27FC236}">
-                <a16:creationId xmlns:a16="http://schemas.microsoft.com/office/drawing/2014/main" id="{6ED39D99-FC03-E4E4-CEDD-8B13025705E1}"/>
-              </a:ext>
-            </a:extLst>
-          </p:cNvPr>
-          <p:cNvCxnSpPr>
-            <a:cxnSpLocks/>
-          </p:cNvCxnSpPr>
-          <p:nvPr/>
-        </p:nvCxnSpPr>
-        <p:spPr>
-          <a:xfrm>
-            <a:off x="8652971" y="2933355"/>
+            <a:off x="2526823" y="2920466"/>
             <a:ext cx="966656" cy="0"/>
           </a:xfrm>
           <a:prstGeom prst="straightConnector1">
@@ -14482,6 +14622,219 @@
           </a:prstGeom>
         </p:spPr>
       </p:pic>
+      <p:sp>
+        <p:nvSpPr>
+          <p:cNvPr id="3" name="Rectangle 2">
+            <a:extLst>
+              <a:ext uri="{FF2B5EF4-FFF2-40B4-BE49-F238E27FC236}">
+                <a16:creationId xmlns:a16="http://schemas.microsoft.com/office/drawing/2014/main" id="{5807B7A5-8327-2762-4A3D-365FF890A579}"/>
+              </a:ext>
+            </a:extLst>
+          </p:cNvPr>
+          <p:cNvSpPr/>
+          <p:nvPr/>
+        </p:nvSpPr>
+        <p:spPr>
+          <a:xfrm>
+            <a:off x="7987737" y="1171739"/>
+            <a:ext cx="2100105" cy="597368"/>
+          </a:xfrm>
+          <a:prstGeom prst="rect">
+            <a:avLst/>
+          </a:prstGeom>
+          <a:ln>
+            <a:noFill/>
+          </a:ln>
+        </p:spPr>
+        <p:style>
+          <a:lnRef idx="2">
+            <a:schemeClr val="accent1">
+              <a:shade val="15000"/>
+            </a:schemeClr>
+          </a:lnRef>
+          <a:fillRef idx="1">
+            <a:schemeClr val="accent1"/>
+          </a:fillRef>
+          <a:effectRef idx="0">
+            <a:schemeClr val="accent1"/>
+          </a:effectRef>
+          <a:fontRef idx="minor">
+            <a:schemeClr val="lt1"/>
+          </a:fontRef>
+        </p:style>
+        <p:txBody>
+          <a:bodyPr rtlCol="0" anchor="ctr"/>
+          <a:lstStyle/>
+          <a:p>
+            <a:pPr algn="ctr"/>
+            <a:r>
+              <a:rPr lang="en-US" sz="2000" b="1" dirty="0">
+                <a:solidFill>
+                  <a:schemeClr val="bg1"/>
+                </a:solidFill>
+                <a:latin typeface="Arial" panose="020B0604020202020204" pitchFamily="34" charset="0"/>
+                <a:cs typeface="Arial" panose="020B0604020202020204" pitchFamily="34" charset="0"/>
+              </a:rPr>
+              <a:t>Parsing JSON</a:t>
+            </a:r>
+          </a:p>
+        </p:txBody>
+      </p:sp>
+      <p:sp>
+        <p:nvSpPr>
+          <p:cNvPr id="10" name="Cloud 9">
+            <a:extLst>
+              <a:ext uri="{FF2B5EF4-FFF2-40B4-BE49-F238E27FC236}">
+                <a16:creationId xmlns:a16="http://schemas.microsoft.com/office/drawing/2014/main" id="{6096C827-8757-0B92-0D67-C7BD9CDAA94A}"/>
+              </a:ext>
+            </a:extLst>
+          </p:cNvPr>
+          <p:cNvSpPr/>
+          <p:nvPr/>
+        </p:nvSpPr>
+        <p:spPr>
+          <a:xfrm>
+            <a:off x="6216577" y="2257780"/>
+            <a:ext cx="2414252" cy="1017396"/>
+          </a:xfrm>
+          <a:prstGeom prst="cloud">
+            <a:avLst/>
+          </a:prstGeom>
+        </p:spPr>
+        <p:style>
+          <a:lnRef idx="2">
+            <a:schemeClr val="accent1">
+              <a:shade val="15000"/>
+            </a:schemeClr>
+          </a:lnRef>
+          <a:fillRef idx="1">
+            <a:schemeClr val="accent1"/>
+          </a:fillRef>
+          <a:effectRef idx="0">
+            <a:schemeClr val="accent1"/>
+          </a:effectRef>
+          <a:fontRef idx="minor">
+            <a:schemeClr val="lt1"/>
+          </a:fontRef>
+        </p:style>
+        <p:txBody>
+          <a:bodyPr rtlCol="0" anchor="ctr"/>
+          <a:lstStyle/>
+          <a:p>
+            <a:pPr algn="ctr"/>
+            <a:r>
+              <a:rPr lang="en-US" sz="1600" b="1" dirty="0">
+                <a:latin typeface="Arial" panose="020B0604020202020204" pitchFamily="34" charset="0"/>
+                <a:cs typeface="Arial" panose="020B0604020202020204" pitchFamily="34" charset="0"/>
+              </a:rPr>
+              <a:t>Create structs to store JSON data</a:t>
+            </a:r>
+          </a:p>
+        </p:txBody>
+      </p:sp>
+      <p:sp>
+        <p:nvSpPr>
+          <p:cNvPr id="13" name="Cloud 12">
+            <a:extLst>
+              <a:ext uri="{FF2B5EF4-FFF2-40B4-BE49-F238E27FC236}">
+                <a16:creationId xmlns:a16="http://schemas.microsoft.com/office/drawing/2014/main" id="{ACBAFA94-62FB-9CF0-A50D-FB7C98B10BA6}"/>
+              </a:ext>
+            </a:extLst>
+          </p:cNvPr>
+          <p:cNvSpPr/>
+          <p:nvPr/>
+        </p:nvSpPr>
+        <p:spPr>
+          <a:xfrm>
+            <a:off x="9740200" y="2257780"/>
+            <a:ext cx="2414252" cy="1017396"/>
+          </a:xfrm>
+          <a:prstGeom prst="cloud">
+            <a:avLst/>
+          </a:prstGeom>
+        </p:spPr>
+        <p:style>
+          <a:lnRef idx="2">
+            <a:schemeClr val="accent1">
+              <a:shade val="15000"/>
+            </a:schemeClr>
+          </a:lnRef>
+          <a:fillRef idx="1">
+            <a:schemeClr val="accent1"/>
+          </a:fillRef>
+          <a:effectRef idx="0">
+            <a:schemeClr val="accent1"/>
+          </a:effectRef>
+          <a:fontRef idx="minor">
+            <a:schemeClr val="lt1"/>
+          </a:fontRef>
+        </p:style>
+        <p:txBody>
+          <a:bodyPr rtlCol="0" anchor="ctr"/>
+          <a:lstStyle/>
+          <a:p>
+            <a:pPr algn="ctr"/>
+            <a:r>
+              <a:rPr lang="en-US" sz="1600" b="1" dirty="0" err="1">
+                <a:latin typeface="Arial" panose="020B0604020202020204" pitchFamily="34" charset="0"/>
+                <a:cs typeface="Arial" panose="020B0604020202020204" pitchFamily="34" charset="0"/>
+              </a:rPr>
+              <a:t>Unmarshal</a:t>
+            </a:r>
+            <a:r>
+              <a:rPr lang="en-US" sz="1600" b="1" dirty="0">
+                <a:latin typeface="Arial" panose="020B0604020202020204" pitchFamily="34" charset="0"/>
+                <a:cs typeface="Arial" panose="020B0604020202020204" pitchFamily="34" charset="0"/>
+              </a:rPr>
+              <a:t> JSON into structs</a:t>
+            </a:r>
+          </a:p>
+        </p:txBody>
+      </p:sp>
+      <p:cxnSp>
+        <p:nvCxnSpPr>
+          <p:cNvPr id="14" name="Straight Arrow Connector 13">
+            <a:extLst>
+              <a:ext uri="{FF2B5EF4-FFF2-40B4-BE49-F238E27FC236}">
+                <a16:creationId xmlns:a16="http://schemas.microsoft.com/office/drawing/2014/main" id="{E9322FB6-874B-25BF-3FD3-B7569529EDEF}"/>
+              </a:ext>
+            </a:extLst>
+          </p:cNvPr>
+          <p:cNvCxnSpPr>
+            <a:cxnSpLocks/>
+          </p:cNvCxnSpPr>
+          <p:nvPr/>
+        </p:nvCxnSpPr>
+        <p:spPr>
+          <a:xfrm>
+            <a:off x="8713256" y="2766478"/>
+            <a:ext cx="966656" cy="0"/>
+          </a:xfrm>
+          <a:prstGeom prst="straightConnector1">
+            <a:avLst/>
+          </a:prstGeom>
+          <a:ln w="38100">
+            <a:solidFill>
+              <a:srgbClr val="FF0000"/>
+            </a:solidFill>
+            <a:tailEnd type="triangle"/>
+          </a:ln>
+        </p:spPr>
+        <p:style>
+          <a:lnRef idx="2">
+            <a:schemeClr val="accent1"/>
+          </a:lnRef>
+          <a:fillRef idx="0">
+            <a:schemeClr val="accent1"/>
+          </a:fillRef>
+          <a:effectRef idx="1">
+            <a:schemeClr val="accent1"/>
+          </a:effectRef>
+          <a:fontRef idx="minor">
+            <a:schemeClr val="tx1"/>
+          </a:fontRef>
+        </p:style>
+      </p:cxnSp>
     </p:spTree>
     <p:custDataLst>
       <p:tags r:id="rId1"/>
@@ -14549,6 +14902,12 @@
 </file>
 
 <file path=ppt/tags/tag16.xml><?xml version="1.0" encoding="utf-8"?>
+<p:tagLst xmlns:a="http://schemas.openxmlformats.org/drawingml/2006/main" xmlns:r="http://schemas.openxmlformats.org/officeDocument/2006/relationships" xmlns:p="http://schemas.openxmlformats.org/presentationml/2006/main">
+  <p:tag name="TIMING" val="|5.6|40.3|25.2|40.6|10.1"/>
+</p:tagLst>
+</file>
+
+<file path=ppt/tags/tag17.xml><?xml version="1.0" encoding="utf-8"?>
 <p:tagLst xmlns:a="http://schemas.openxmlformats.org/drawingml/2006/main" xmlns:r="http://schemas.openxmlformats.org/officeDocument/2006/relationships" xmlns:p="http://schemas.openxmlformats.org/presentationml/2006/main">
   <p:tag name="TIMING" val="|5.6|40.3|25.2|40.6|10.1"/>
 </p:tagLst>
